--- a/Apresentação.pptx
+++ b/Apresentação.pptx
@@ -5,7 +5,7 @@
     <p:sldMasterId id="2147483648" r:id="rId1"/>
   </p:sldMasterIdLst>
   <p:notesMasterIdLst>
-    <p:notesMasterId r:id="rId13"/>
+    <p:notesMasterId r:id="rId25"/>
   </p:notesMasterIdLst>
   <p:sldIdLst>
     <p:sldId id="256" r:id="rId2"/>
@@ -16,9 +16,21 @@
     <p:sldId id="259" r:id="rId7"/>
     <p:sldId id="260" r:id="rId8"/>
     <p:sldId id="280" r:id="rId9"/>
-    <p:sldId id="261" r:id="rId10"/>
-    <p:sldId id="262" r:id="rId11"/>
-    <p:sldId id="278" r:id="rId12"/>
+    <p:sldId id="283" r:id="rId10"/>
+    <p:sldId id="284" r:id="rId11"/>
+    <p:sldId id="285" r:id="rId12"/>
+    <p:sldId id="286" r:id="rId13"/>
+    <p:sldId id="287" r:id="rId14"/>
+    <p:sldId id="288" r:id="rId15"/>
+    <p:sldId id="289" r:id="rId16"/>
+    <p:sldId id="290" r:id="rId17"/>
+    <p:sldId id="291" r:id="rId18"/>
+    <p:sldId id="261" r:id="rId19"/>
+    <p:sldId id="262" r:id="rId20"/>
+    <p:sldId id="292" r:id="rId21"/>
+    <p:sldId id="293" r:id="rId22"/>
+    <p:sldId id="294" r:id="rId23"/>
+    <p:sldId id="295" r:id="rId24"/>
   </p:sldIdLst>
   <p:sldSz cx="12192000" cy="6858000"/>
   <p:notesSz cx="6858000" cy="9144000"/>
@@ -256,7 +268,7 @@
       <p15:sldGuideLst xmlns:p15="http://schemas.microsoft.com/office/powerpoint/2012/main"/>
     </p:ext>
     <p:ext uri="GoogleSlidesCustomDataVersion2">
-      <go:slidesCustomData xmlns:go="http://customooxmlschemas.google.com/" xmlns:ahyp="http://schemas.microsoft.com/office/drawing/2018/hyperlinkcolor" xmlns:p15="http://schemas.microsoft.com/office/powerpoint/2012/main" xmlns:p14="http://schemas.microsoft.com/office/powerpoint/2010/main" xmlns:com="http://schemas.openxmlformats.org/drawingml/2006/compatibility" xmlns:pvml="urn:schemas-microsoft-com:office:powerpoint" xmlns:v="urn:schemas-microsoft-com:vml" xmlns:o="urn:schemas-microsoft-com:office:office" xmlns:dgm="http://schemas.openxmlformats.org/drawingml/2006/diagram" xmlns:c="http://schemas.openxmlformats.org/drawingml/2006/chart" xmlns:mv="urn:schemas-microsoft-com:mac:vml" xmlns:mc="http://schemas.openxmlformats.org/markup-compatibility/2006" xmlns="" r:id="rId32" roundtripDataSignature="AMtx7mjMnhkxMwBxEZm/FGvuU7QH/chp5A=="/>
+      <go:slidesCustomData xmlns="" xmlns:mc="http://schemas.openxmlformats.org/markup-compatibility/2006" xmlns:mv="urn:schemas-microsoft-com:mac:vml" xmlns:c="http://schemas.openxmlformats.org/drawingml/2006/chart" xmlns:dgm="http://schemas.openxmlformats.org/drawingml/2006/diagram" xmlns:o="urn:schemas-microsoft-com:office:office" xmlns:v="urn:schemas-microsoft-com:vml" xmlns:pvml="urn:schemas-microsoft-com:office:powerpoint" xmlns:com="http://schemas.openxmlformats.org/drawingml/2006/compatibility" xmlns:p14="http://schemas.microsoft.com/office/powerpoint/2010/main" xmlns:p15="http://schemas.microsoft.com/office/powerpoint/2012/main" xmlns:ahyp="http://schemas.microsoft.com/office/drawing/2018/hyperlinkcolor" xmlns:go="http://customooxmlschemas.google.com/" r:id="rId32" roundtripDataSignature="AMtx7mjMnhkxMwBxEZm/FGvuU7QH/chp5A=="/>
     </p:ext>
   </p:extLst>
 </p:presentation>
@@ -1206,7 +1218,7 @@
                 <a:cs typeface="Calibri"/>
                 <a:sym typeface="Calibri"/>
               </a:rPr>
-              <a:t>‹nº›</a:t>
+              <a:t>‹#›</a:t>
             </a:fld>
             <a:endParaRPr sz="1200" b="0" i="0" u="none" strike="noStrike" cap="none">
               <a:solidFill>
@@ -1567,6 +1579,1149 @@
         <p:cNvPr id="1" name="Shape 92">
           <a:extLst>
             <a:ext uri="{FF2B5EF4-FFF2-40B4-BE49-F238E27FC236}">
+              <a16:creationId xmlns:a16="http://schemas.microsoft.com/office/drawing/2014/main" id="{2204791B-951B-1680-89A2-E405BF319B81}"/>
+            </a:ext>
+          </a:extLst>
+        </p:cNvPr>
+        <p:cNvGrpSpPr/>
+        <p:nvPr/>
+      </p:nvGrpSpPr>
+      <p:grpSpPr>
+        <a:xfrm>
+          <a:off x="0" y="0"/>
+          <a:ext cx="0" cy="0"/>
+          <a:chOff x="0" y="0"/>
+          <a:chExt cx="0" cy="0"/>
+        </a:xfrm>
+      </p:grpSpPr>
+      <p:sp>
+        <p:nvSpPr>
+          <p:cNvPr id="93" name="Google Shape;93;p2:notes">
+            <a:extLst>
+              <a:ext uri="{FF2B5EF4-FFF2-40B4-BE49-F238E27FC236}">
+                <a16:creationId xmlns:a16="http://schemas.microsoft.com/office/drawing/2014/main" id="{84E09A8F-D9BF-877F-22AA-67B6C87434DE}"/>
+              </a:ext>
+            </a:extLst>
+          </p:cNvPr>
+          <p:cNvSpPr txBox="1">
+            <a:spLocks noGrp="1"/>
+          </p:cNvSpPr>
+          <p:nvPr>
+            <p:ph type="body" idx="1"/>
+          </p:nvPr>
+        </p:nvSpPr>
+        <p:spPr>
+          <a:xfrm>
+            <a:off x="685800" y="4400550"/>
+            <a:ext cx="5486400" cy="3600450"/>
+          </a:xfrm>
+          <a:prstGeom prst="rect">
+            <a:avLst/>
+          </a:prstGeom>
+        </p:spPr>
+        <p:txBody>
+          <a:bodyPr spcFirstLastPara="1" wrap="square" lIns="91425" tIns="45700" rIns="91425" bIns="45700" anchor="t" anchorCtr="0">
+            <a:noAutofit/>
+          </a:bodyPr>
+          <a:lstStyle/>
+          <a:p>
+            <a:pPr marL="0" lvl="0" indent="0" algn="l" rtl="0">
+              <a:spcBef>
+                <a:spcPts val="0"/>
+              </a:spcBef>
+              <a:spcAft>
+                <a:spcPts val="0"/>
+              </a:spcAft>
+              <a:buNone/>
+            </a:pPr>
+            <a:endParaRPr/>
+          </a:p>
+        </p:txBody>
+      </p:sp>
+      <p:sp>
+        <p:nvSpPr>
+          <p:cNvPr id="94" name="Google Shape;94;p2:notes">
+            <a:extLst>
+              <a:ext uri="{FF2B5EF4-FFF2-40B4-BE49-F238E27FC236}">
+                <a16:creationId xmlns:a16="http://schemas.microsoft.com/office/drawing/2014/main" id="{F2F3CF92-F772-B2F8-A759-E912D7E684FC}"/>
+              </a:ext>
+            </a:extLst>
+          </p:cNvPr>
+          <p:cNvSpPr>
+            <a:spLocks noGrp="1" noRot="1" noChangeAspect="1"/>
+          </p:cNvSpPr>
+          <p:nvPr>
+            <p:ph type="sldImg" idx="2"/>
+          </p:nvPr>
+        </p:nvSpPr>
+        <p:spPr>
+          <a:xfrm>
+            <a:off x="685800" y="1143000"/>
+            <a:ext cx="5486400" cy="3086100"/>
+          </a:xfrm>
+          <a:custGeom>
+            <a:avLst/>
+            <a:gdLst/>
+            <a:ahLst/>
+            <a:cxnLst/>
+            <a:rect l="l" t="t" r="r" b="b"/>
+            <a:pathLst>
+              <a:path w="120000" h="120000" extrusionOk="0">
+                <a:moveTo>
+                  <a:pt x="0" y="0"/>
+                </a:moveTo>
+                <a:lnTo>
+                  <a:pt x="120000" y="0"/>
+                </a:lnTo>
+                <a:lnTo>
+                  <a:pt x="120000" y="120000"/>
+                </a:lnTo>
+                <a:lnTo>
+                  <a:pt x="0" y="120000"/>
+                </a:lnTo>
+                <a:close/>
+              </a:path>
+            </a:pathLst>
+          </a:custGeom>
+        </p:spPr>
+      </p:sp>
+    </p:spTree>
+    <p:extLst>
+      <p:ext uri="{BB962C8B-B14F-4D97-AF65-F5344CB8AC3E}">
+        <p14:creationId xmlns:p14="http://schemas.microsoft.com/office/powerpoint/2010/main" val="3083478548"/>
+      </p:ext>
+    </p:extLst>
+  </p:cSld>
+  <p:clrMapOvr>
+    <a:masterClrMapping/>
+  </p:clrMapOvr>
+</p:notes>
+</file>
+
+<file path=ppt/notesSlides/notesSlide11.xml><?xml version="1.0" encoding="utf-8"?>
+<p:notes xmlns:a="http://schemas.openxmlformats.org/drawingml/2006/main" xmlns:r="http://schemas.openxmlformats.org/officeDocument/2006/relationships" xmlns:p="http://schemas.openxmlformats.org/presentationml/2006/main" showMasterSp="0" showMasterPhAnim="0">
+  <p:cSld>
+    <p:spTree>
+      <p:nvGrpSpPr>
+        <p:cNvPr id="1" name="Shape 92">
+          <a:extLst>
+            <a:ext uri="{FF2B5EF4-FFF2-40B4-BE49-F238E27FC236}">
+              <a16:creationId xmlns:a16="http://schemas.microsoft.com/office/drawing/2014/main" id="{0E764D8A-3014-194C-E2D4-407F4B0D412F}"/>
+            </a:ext>
+          </a:extLst>
+        </p:cNvPr>
+        <p:cNvGrpSpPr/>
+        <p:nvPr/>
+      </p:nvGrpSpPr>
+      <p:grpSpPr>
+        <a:xfrm>
+          <a:off x="0" y="0"/>
+          <a:ext cx="0" cy="0"/>
+          <a:chOff x="0" y="0"/>
+          <a:chExt cx="0" cy="0"/>
+        </a:xfrm>
+      </p:grpSpPr>
+      <p:sp>
+        <p:nvSpPr>
+          <p:cNvPr id="93" name="Google Shape;93;p2:notes">
+            <a:extLst>
+              <a:ext uri="{FF2B5EF4-FFF2-40B4-BE49-F238E27FC236}">
+                <a16:creationId xmlns:a16="http://schemas.microsoft.com/office/drawing/2014/main" id="{D3AD6170-1AFE-F71B-9702-AFF694A53468}"/>
+              </a:ext>
+            </a:extLst>
+          </p:cNvPr>
+          <p:cNvSpPr txBox="1">
+            <a:spLocks noGrp="1"/>
+          </p:cNvSpPr>
+          <p:nvPr>
+            <p:ph type="body" idx="1"/>
+          </p:nvPr>
+        </p:nvSpPr>
+        <p:spPr>
+          <a:xfrm>
+            <a:off x="685800" y="4400550"/>
+            <a:ext cx="5486400" cy="3600450"/>
+          </a:xfrm>
+          <a:prstGeom prst="rect">
+            <a:avLst/>
+          </a:prstGeom>
+        </p:spPr>
+        <p:txBody>
+          <a:bodyPr spcFirstLastPara="1" wrap="square" lIns="91425" tIns="45700" rIns="91425" bIns="45700" anchor="t" anchorCtr="0">
+            <a:noAutofit/>
+          </a:bodyPr>
+          <a:lstStyle/>
+          <a:p>
+            <a:pPr marL="0" lvl="0" indent="0" algn="l" rtl="0">
+              <a:spcBef>
+                <a:spcPts val="0"/>
+              </a:spcBef>
+              <a:spcAft>
+                <a:spcPts val="0"/>
+              </a:spcAft>
+              <a:buNone/>
+            </a:pPr>
+            <a:endParaRPr/>
+          </a:p>
+        </p:txBody>
+      </p:sp>
+      <p:sp>
+        <p:nvSpPr>
+          <p:cNvPr id="94" name="Google Shape;94;p2:notes">
+            <a:extLst>
+              <a:ext uri="{FF2B5EF4-FFF2-40B4-BE49-F238E27FC236}">
+                <a16:creationId xmlns:a16="http://schemas.microsoft.com/office/drawing/2014/main" id="{13B6ECC3-8787-7086-BC99-4EB8591A6455}"/>
+              </a:ext>
+            </a:extLst>
+          </p:cNvPr>
+          <p:cNvSpPr>
+            <a:spLocks noGrp="1" noRot="1" noChangeAspect="1"/>
+          </p:cNvSpPr>
+          <p:nvPr>
+            <p:ph type="sldImg" idx="2"/>
+          </p:nvPr>
+        </p:nvSpPr>
+        <p:spPr>
+          <a:xfrm>
+            <a:off x="685800" y="1143000"/>
+            <a:ext cx="5486400" cy="3086100"/>
+          </a:xfrm>
+          <a:custGeom>
+            <a:avLst/>
+            <a:gdLst/>
+            <a:ahLst/>
+            <a:cxnLst/>
+            <a:rect l="l" t="t" r="r" b="b"/>
+            <a:pathLst>
+              <a:path w="120000" h="120000" extrusionOk="0">
+                <a:moveTo>
+                  <a:pt x="0" y="0"/>
+                </a:moveTo>
+                <a:lnTo>
+                  <a:pt x="120000" y="0"/>
+                </a:lnTo>
+                <a:lnTo>
+                  <a:pt x="120000" y="120000"/>
+                </a:lnTo>
+                <a:lnTo>
+                  <a:pt x="0" y="120000"/>
+                </a:lnTo>
+                <a:close/>
+              </a:path>
+            </a:pathLst>
+          </a:custGeom>
+        </p:spPr>
+      </p:sp>
+    </p:spTree>
+    <p:extLst>
+      <p:ext uri="{BB962C8B-B14F-4D97-AF65-F5344CB8AC3E}">
+        <p14:creationId xmlns:p14="http://schemas.microsoft.com/office/powerpoint/2010/main" val="2207879569"/>
+      </p:ext>
+    </p:extLst>
+  </p:cSld>
+  <p:clrMapOvr>
+    <a:masterClrMapping/>
+  </p:clrMapOvr>
+</p:notes>
+</file>
+
+<file path=ppt/notesSlides/notesSlide12.xml><?xml version="1.0" encoding="utf-8"?>
+<p:notes xmlns:a="http://schemas.openxmlformats.org/drawingml/2006/main" xmlns:r="http://schemas.openxmlformats.org/officeDocument/2006/relationships" xmlns:p="http://schemas.openxmlformats.org/presentationml/2006/main" showMasterSp="0" showMasterPhAnim="0">
+  <p:cSld>
+    <p:spTree>
+      <p:nvGrpSpPr>
+        <p:cNvPr id="1" name="Shape 92">
+          <a:extLst>
+            <a:ext uri="{FF2B5EF4-FFF2-40B4-BE49-F238E27FC236}">
+              <a16:creationId xmlns:a16="http://schemas.microsoft.com/office/drawing/2014/main" id="{9AEA10CE-7009-6D2C-6BAE-D9C58BEC7854}"/>
+            </a:ext>
+          </a:extLst>
+        </p:cNvPr>
+        <p:cNvGrpSpPr/>
+        <p:nvPr/>
+      </p:nvGrpSpPr>
+      <p:grpSpPr>
+        <a:xfrm>
+          <a:off x="0" y="0"/>
+          <a:ext cx="0" cy="0"/>
+          <a:chOff x="0" y="0"/>
+          <a:chExt cx="0" cy="0"/>
+        </a:xfrm>
+      </p:grpSpPr>
+      <p:sp>
+        <p:nvSpPr>
+          <p:cNvPr id="93" name="Google Shape;93;p2:notes">
+            <a:extLst>
+              <a:ext uri="{FF2B5EF4-FFF2-40B4-BE49-F238E27FC236}">
+                <a16:creationId xmlns:a16="http://schemas.microsoft.com/office/drawing/2014/main" id="{B141E349-AE3F-5A7D-ACCB-1C7D401DE7A0}"/>
+              </a:ext>
+            </a:extLst>
+          </p:cNvPr>
+          <p:cNvSpPr txBox="1">
+            <a:spLocks noGrp="1"/>
+          </p:cNvSpPr>
+          <p:nvPr>
+            <p:ph type="body" idx="1"/>
+          </p:nvPr>
+        </p:nvSpPr>
+        <p:spPr>
+          <a:xfrm>
+            <a:off x="685800" y="4400550"/>
+            <a:ext cx="5486400" cy="3600450"/>
+          </a:xfrm>
+          <a:prstGeom prst="rect">
+            <a:avLst/>
+          </a:prstGeom>
+        </p:spPr>
+        <p:txBody>
+          <a:bodyPr spcFirstLastPara="1" wrap="square" lIns="91425" tIns="45700" rIns="91425" bIns="45700" anchor="t" anchorCtr="0">
+            <a:noAutofit/>
+          </a:bodyPr>
+          <a:lstStyle/>
+          <a:p>
+            <a:pPr marL="0" lvl="0" indent="0" algn="l" rtl="0">
+              <a:spcBef>
+                <a:spcPts val="0"/>
+              </a:spcBef>
+              <a:spcAft>
+                <a:spcPts val="0"/>
+              </a:spcAft>
+              <a:buNone/>
+            </a:pPr>
+            <a:endParaRPr/>
+          </a:p>
+        </p:txBody>
+      </p:sp>
+      <p:sp>
+        <p:nvSpPr>
+          <p:cNvPr id="94" name="Google Shape;94;p2:notes">
+            <a:extLst>
+              <a:ext uri="{FF2B5EF4-FFF2-40B4-BE49-F238E27FC236}">
+                <a16:creationId xmlns:a16="http://schemas.microsoft.com/office/drawing/2014/main" id="{BB0598D3-A80A-4AF4-A1C8-C43DC730A3D7}"/>
+              </a:ext>
+            </a:extLst>
+          </p:cNvPr>
+          <p:cNvSpPr>
+            <a:spLocks noGrp="1" noRot="1" noChangeAspect="1"/>
+          </p:cNvSpPr>
+          <p:nvPr>
+            <p:ph type="sldImg" idx="2"/>
+          </p:nvPr>
+        </p:nvSpPr>
+        <p:spPr>
+          <a:xfrm>
+            <a:off x="685800" y="1143000"/>
+            <a:ext cx="5486400" cy="3086100"/>
+          </a:xfrm>
+          <a:custGeom>
+            <a:avLst/>
+            <a:gdLst/>
+            <a:ahLst/>
+            <a:cxnLst/>
+            <a:rect l="l" t="t" r="r" b="b"/>
+            <a:pathLst>
+              <a:path w="120000" h="120000" extrusionOk="0">
+                <a:moveTo>
+                  <a:pt x="0" y="0"/>
+                </a:moveTo>
+                <a:lnTo>
+                  <a:pt x="120000" y="0"/>
+                </a:lnTo>
+                <a:lnTo>
+                  <a:pt x="120000" y="120000"/>
+                </a:lnTo>
+                <a:lnTo>
+                  <a:pt x="0" y="120000"/>
+                </a:lnTo>
+                <a:close/>
+              </a:path>
+            </a:pathLst>
+          </a:custGeom>
+        </p:spPr>
+      </p:sp>
+    </p:spTree>
+    <p:extLst>
+      <p:ext uri="{BB962C8B-B14F-4D97-AF65-F5344CB8AC3E}">
+        <p14:creationId xmlns:p14="http://schemas.microsoft.com/office/powerpoint/2010/main" val="3191125766"/>
+      </p:ext>
+    </p:extLst>
+  </p:cSld>
+  <p:clrMapOvr>
+    <a:masterClrMapping/>
+  </p:clrMapOvr>
+</p:notes>
+</file>
+
+<file path=ppt/notesSlides/notesSlide13.xml><?xml version="1.0" encoding="utf-8"?>
+<p:notes xmlns:a="http://schemas.openxmlformats.org/drawingml/2006/main" xmlns:r="http://schemas.openxmlformats.org/officeDocument/2006/relationships" xmlns:p="http://schemas.openxmlformats.org/presentationml/2006/main" showMasterSp="0" showMasterPhAnim="0">
+  <p:cSld>
+    <p:spTree>
+      <p:nvGrpSpPr>
+        <p:cNvPr id="1" name="Shape 92">
+          <a:extLst>
+            <a:ext uri="{FF2B5EF4-FFF2-40B4-BE49-F238E27FC236}">
+              <a16:creationId xmlns:a16="http://schemas.microsoft.com/office/drawing/2014/main" id="{8F342EA3-F275-D41B-CBB8-4C3F16A1D916}"/>
+            </a:ext>
+          </a:extLst>
+        </p:cNvPr>
+        <p:cNvGrpSpPr/>
+        <p:nvPr/>
+      </p:nvGrpSpPr>
+      <p:grpSpPr>
+        <a:xfrm>
+          <a:off x="0" y="0"/>
+          <a:ext cx="0" cy="0"/>
+          <a:chOff x="0" y="0"/>
+          <a:chExt cx="0" cy="0"/>
+        </a:xfrm>
+      </p:grpSpPr>
+      <p:sp>
+        <p:nvSpPr>
+          <p:cNvPr id="93" name="Google Shape;93;p2:notes">
+            <a:extLst>
+              <a:ext uri="{FF2B5EF4-FFF2-40B4-BE49-F238E27FC236}">
+                <a16:creationId xmlns:a16="http://schemas.microsoft.com/office/drawing/2014/main" id="{729DB088-0832-3CD0-AF31-02D38F7EEE0C}"/>
+              </a:ext>
+            </a:extLst>
+          </p:cNvPr>
+          <p:cNvSpPr txBox="1">
+            <a:spLocks noGrp="1"/>
+          </p:cNvSpPr>
+          <p:nvPr>
+            <p:ph type="body" idx="1"/>
+          </p:nvPr>
+        </p:nvSpPr>
+        <p:spPr>
+          <a:xfrm>
+            <a:off x="685800" y="4400550"/>
+            <a:ext cx="5486400" cy="3600450"/>
+          </a:xfrm>
+          <a:prstGeom prst="rect">
+            <a:avLst/>
+          </a:prstGeom>
+        </p:spPr>
+        <p:txBody>
+          <a:bodyPr spcFirstLastPara="1" wrap="square" lIns="91425" tIns="45700" rIns="91425" bIns="45700" anchor="t" anchorCtr="0">
+            <a:noAutofit/>
+          </a:bodyPr>
+          <a:lstStyle/>
+          <a:p>
+            <a:pPr marL="0" lvl="0" indent="0" algn="l" rtl="0">
+              <a:spcBef>
+                <a:spcPts val="0"/>
+              </a:spcBef>
+              <a:spcAft>
+                <a:spcPts val="0"/>
+              </a:spcAft>
+              <a:buNone/>
+            </a:pPr>
+            <a:endParaRPr/>
+          </a:p>
+        </p:txBody>
+      </p:sp>
+      <p:sp>
+        <p:nvSpPr>
+          <p:cNvPr id="94" name="Google Shape;94;p2:notes">
+            <a:extLst>
+              <a:ext uri="{FF2B5EF4-FFF2-40B4-BE49-F238E27FC236}">
+                <a16:creationId xmlns:a16="http://schemas.microsoft.com/office/drawing/2014/main" id="{13F72BC7-1DF7-8224-1871-65DF0DBD664F}"/>
+              </a:ext>
+            </a:extLst>
+          </p:cNvPr>
+          <p:cNvSpPr>
+            <a:spLocks noGrp="1" noRot="1" noChangeAspect="1"/>
+          </p:cNvSpPr>
+          <p:nvPr>
+            <p:ph type="sldImg" idx="2"/>
+          </p:nvPr>
+        </p:nvSpPr>
+        <p:spPr>
+          <a:xfrm>
+            <a:off x="685800" y="1143000"/>
+            <a:ext cx="5486400" cy="3086100"/>
+          </a:xfrm>
+          <a:custGeom>
+            <a:avLst/>
+            <a:gdLst/>
+            <a:ahLst/>
+            <a:cxnLst/>
+            <a:rect l="l" t="t" r="r" b="b"/>
+            <a:pathLst>
+              <a:path w="120000" h="120000" extrusionOk="0">
+                <a:moveTo>
+                  <a:pt x="0" y="0"/>
+                </a:moveTo>
+                <a:lnTo>
+                  <a:pt x="120000" y="0"/>
+                </a:lnTo>
+                <a:lnTo>
+                  <a:pt x="120000" y="120000"/>
+                </a:lnTo>
+                <a:lnTo>
+                  <a:pt x="0" y="120000"/>
+                </a:lnTo>
+                <a:close/>
+              </a:path>
+            </a:pathLst>
+          </a:custGeom>
+        </p:spPr>
+      </p:sp>
+    </p:spTree>
+    <p:extLst>
+      <p:ext uri="{BB962C8B-B14F-4D97-AF65-F5344CB8AC3E}">
+        <p14:creationId xmlns:p14="http://schemas.microsoft.com/office/powerpoint/2010/main" val="3570315821"/>
+      </p:ext>
+    </p:extLst>
+  </p:cSld>
+  <p:clrMapOvr>
+    <a:masterClrMapping/>
+  </p:clrMapOvr>
+</p:notes>
+</file>
+
+<file path=ppt/notesSlides/notesSlide14.xml><?xml version="1.0" encoding="utf-8"?>
+<p:notes xmlns:a="http://schemas.openxmlformats.org/drawingml/2006/main" xmlns:r="http://schemas.openxmlformats.org/officeDocument/2006/relationships" xmlns:p="http://schemas.openxmlformats.org/presentationml/2006/main" showMasterSp="0" showMasterPhAnim="0">
+  <p:cSld>
+    <p:spTree>
+      <p:nvGrpSpPr>
+        <p:cNvPr id="1" name="Shape 92">
+          <a:extLst>
+            <a:ext uri="{FF2B5EF4-FFF2-40B4-BE49-F238E27FC236}">
+              <a16:creationId xmlns:a16="http://schemas.microsoft.com/office/drawing/2014/main" id="{263BE423-D064-CD1C-DAB7-EBF93709F447}"/>
+            </a:ext>
+          </a:extLst>
+        </p:cNvPr>
+        <p:cNvGrpSpPr/>
+        <p:nvPr/>
+      </p:nvGrpSpPr>
+      <p:grpSpPr>
+        <a:xfrm>
+          <a:off x="0" y="0"/>
+          <a:ext cx="0" cy="0"/>
+          <a:chOff x="0" y="0"/>
+          <a:chExt cx="0" cy="0"/>
+        </a:xfrm>
+      </p:grpSpPr>
+      <p:sp>
+        <p:nvSpPr>
+          <p:cNvPr id="93" name="Google Shape;93;p2:notes">
+            <a:extLst>
+              <a:ext uri="{FF2B5EF4-FFF2-40B4-BE49-F238E27FC236}">
+                <a16:creationId xmlns:a16="http://schemas.microsoft.com/office/drawing/2014/main" id="{805EEFDB-D426-FF54-A2E7-71490FB9EB00}"/>
+              </a:ext>
+            </a:extLst>
+          </p:cNvPr>
+          <p:cNvSpPr txBox="1">
+            <a:spLocks noGrp="1"/>
+          </p:cNvSpPr>
+          <p:nvPr>
+            <p:ph type="body" idx="1"/>
+          </p:nvPr>
+        </p:nvSpPr>
+        <p:spPr>
+          <a:xfrm>
+            <a:off x="685800" y="4400550"/>
+            <a:ext cx="5486400" cy="3600450"/>
+          </a:xfrm>
+          <a:prstGeom prst="rect">
+            <a:avLst/>
+          </a:prstGeom>
+        </p:spPr>
+        <p:txBody>
+          <a:bodyPr spcFirstLastPara="1" wrap="square" lIns="91425" tIns="45700" rIns="91425" bIns="45700" anchor="t" anchorCtr="0">
+            <a:noAutofit/>
+          </a:bodyPr>
+          <a:lstStyle/>
+          <a:p>
+            <a:pPr marL="0" lvl="0" indent="0" algn="l" rtl="0">
+              <a:spcBef>
+                <a:spcPts val="0"/>
+              </a:spcBef>
+              <a:spcAft>
+                <a:spcPts val="0"/>
+              </a:spcAft>
+              <a:buNone/>
+            </a:pPr>
+            <a:endParaRPr/>
+          </a:p>
+        </p:txBody>
+      </p:sp>
+      <p:sp>
+        <p:nvSpPr>
+          <p:cNvPr id="94" name="Google Shape;94;p2:notes">
+            <a:extLst>
+              <a:ext uri="{FF2B5EF4-FFF2-40B4-BE49-F238E27FC236}">
+                <a16:creationId xmlns:a16="http://schemas.microsoft.com/office/drawing/2014/main" id="{D2E69F62-B42C-0222-C0B8-4445DEED17E8}"/>
+              </a:ext>
+            </a:extLst>
+          </p:cNvPr>
+          <p:cNvSpPr>
+            <a:spLocks noGrp="1" noRot="1" noChangeAspect="1"/>
+          </p:cNvSpPr>
+          <p:nvPr>
+            <p:ph type="sldImg" idx="2"/>
+          </p:nvPr>
+        </p:nvSpPr>
+        <p:spPr>
+          <a:xfrm>
+            <a:off x="685800" y="1143000"/>
+            <a:ext cx="5486400" cy="3086100"/>
+          </a:xfrm>
+          <a:custGeom>
+            <a:avLst/>
+            <a:gdLst/>
+            <a:ahLst/>
+            <a:cxnLst/>
+            <a:rect l="l" t="t" r="r" b="b"/>
+            <a:pathLst>
+              <a:path w="120000" h="120000" extrusionOk="0">
+                <a:moveTo>
+                  <a:pt x="0" y="0"/>
+                </a:moveTo>
+                <a:lnTo>
+                  <a:pt x="120000" y="0"/>
+                </a:lnTo>
+                <a:lnTo>
+                  <a:pt x="120000" y="120000"/>
+                </a:lnTo>
+                <a:lnTo>
+                  <a:pt x="0" y="120000"/>
+                </a:lnTo>
+                <a:close/>
+              </a:path>
+            </a:pathLst>
+          </a:custGeom>
+        </p:spPr>
+      </p:sp>
+    </p:spTree>
+    <p:extLst>
+      <p:ext uri="{BB962C8B-B14F-4D97-AF65-F5344CB8AC3E}">
+        <p14:creationId xmlns:p14="http://schemas.microsoft.com/office/powerpoint/2010/main" val="1349966736"/>
+      </p:ext>
+    </p:extLst>
+  </p:cSld>
+  <p:clrMapOvr>
+    <a:masterClrMapping/>
+  </p:clrMapOvr>
+</p:notes>
+</file>
+
+<file path=ppt/notesSlides/notesSlide15.xml><?xml version="1.0" encoding="utf-8"?>
+<p:notes xmlns:a="http://schemas.openxmlformats.org/drawingml/2006/main" xmlns:r="http://schemas.openxmlformats.org/officeDocument/2006/relationships" xmlns:p="http://schemas.openxmlformats.org/presentationml/2006/main" showMasterSp="0" showMasterPhAnim="0">
+  <p:cSld>
+    <p:spTree>
+      <p:nvGrpSpPr>
+        <p:cNvPr id="1" name="Shape 92">
+          <a:extLst>
+            <a:ext uri="{FF2B5EF4-FFF2-40B4-BE49-F238E27FC236}">
+              <a16:creationId xmlns:a16="http://schemas.microsoft.com/office/drawing/2014/main" id="{116DBED6-E304-588E-D017-85C02DF18378}"/>
+            </a:ext>
+          </a:extLst>
+        </p:cNvPr>
+        <p:cNvGrpSpPr/>
+        <p:nvPr/>
+      </p:nvGrpSpPr>
+      <p:grpSpPr>
+        <a:xfrm>
+          <a:off x="0" y="0"/>
+          <a:ext cx="0" cy="0"/>
+          <a:chOff x="0" y="0"/>
+          <a:chExt cx="0" cy="0"/>
+        </a:xfrm>
+      </p:grpSpPr>
+      <p:sp>
+        <p:nvSpPr>
+          <p:cNvPr id="93" name="Google Shape;93;p2:notes">
+            <a:extLst>
+              <a:ext uri="{FF2B5EF4-FFF2-40B4-BE49-F238E27FC236}">
+                <a16:creationId xmlns:a16="http://schemas.microsoft.com/office/drawing/2014/main" id="{F981EFF7-D8EC-8A3E-B1BE-C368FD477BCE}"/>
+              </a:ext>
+            </a:extLst>
+          </p:cNvPr>
+          <p:cNvSpPr txBox="1">
+            <a:spLocks noGrp="1"/>
+          </p:cNvSpPr>
+          <p:nvPr>
+            <p:ph type="body" idx="1"/>
+          </p:nvPr>
+        </p:nvSpPr>
+        <p:spPr>
+          <a:xfrm>
+            <a:off x="685800" y="4400550"/>
+            <a:ext cx="5486400" cy="3600450"/>
+          </a:xfrm>
+          <a:prstGeom prst="rect">
+            <a:avLst/>
+          </a:prstGeom>
+        </p:spPr>
+        <p:txBody>
+          <a:bodyPr spcFirstLastPara="1" wrap="square" lIns="91425" tIns="45700" rIns="91425" bIns="45700" anchor="t" anchorCtr="0">
+            <a:noAutofit/>
+          </a:bodyPr>
+          <a:lstStyle/>
+          <a:p>
+            <a:pPr marL="0" lvl="0" indent="0" algn="l" rtl="0">
+              <a:spcBef>
+                <a:spcPts val="0"/>
+              </a:spcBef>
+              <a:spcAft>
+                <a:spcPts val="0"/>
+              </a:spcAft>
+              <a:buNone/>
+            </a:pPr>
+            <a:endParaRPr/>
+          </a:p>
+        </p:txBody>
+      </p:sp>
+      <p:sp>
+        <p:nvSpPr>
+          <p:cNvPr id="94" name="Google Shape;94;p2:notes">
+            <a:extLst>
+              <a:ext uri="{FF2B5EF4-FFF2-40B4-BE49-F238E27FC236}">
+                <a16:creationId xmlns:a16="http://schemas.microsoft.com/office/drawing/2014/main" id="{75A93120-D114-6D70-9D4E-0EF7B2920C7F}"/>
+              </a:ext>
+            </a:extLst>
+          </p:cNvPr>
+          <p:cNvSpPr>
+            <a:spLocks noGrp="1" noRot="1" noChangeAspect="1"/>
+          </p:cNvSpPr>
+          <p:nvPr>
+            <p:ph type="sldImg" idx="2"/>
+          </p:nvPr>
+        </p:nvSpPr>
+        <p:spPr>
+          <a:xfrm>
+            <a:off x="685800" y="1143000"/>
+            <a:ext cx="5486400" cy="3086100"/>
+          </a:xfrm>
+          <a:custGeom>
+            <a:avLst/>
+            <a:gdLst/>
+            <a:ahLst/>
+            <a:cxnLst/>
+            <a:rect l="l" t="t" r="r" b="b"/>
+            <a:pathLst>
+              <a:path w="120000" h="120000" extrusionOk="0">
+                <a:moveTo>
+                  <a:pt x="0" y="0"/>
+                </a:moveTo>
+                <a:lnTo>
+                  <a:pt x="120000" y="0"/>
+                </a:lnTo>
+                <a:lnTo>
+                  <a:pt x="120000" y="120000"/>
+                </a:lnTo>
+                <a:lnTo>
+                  <a:pt x="0" y="120000"/>
+                </a:lnTo>
+                <a:close/>
+              </a:path>
+            </a:pathLst>
+          </a:custGeom>
+        </p:spPr>
+      </p:sp>
+    </p:spTree>
+    <p:extLst>
+      <p:ext uri="{BB962C8B-B14F-4D97-AF65-F5344CB8AC3E}">
+        <p14:creationId xmlns:p14="http://schemas.microsoft.com/office/powerpoint/2010/main" val="559346822"/>
+      </p:ext>
+    </p:extLst>
+  </p:cSld>
+  <p:clrMapOvr>
+    <a:masterClrMapping/>
+  </p:clrMapOvr>
+</p:notes>
+</file>
+
+<file path=ppt/notesSlides/notesSlide16.xml><?xml version="1.0" encoding="utf-8"?>
+<p:notes xmlns:a="http://schemas.openxmlformats.org/drawingml/2006/main" xmlns:r="http://schemas.openxmlformats.org/officeDocument/2006/relationships" xmlns:p="http://schemas.openxmlformats.org/presentationml/2006/main" showMasterSp="0" showMasterPhAnim="0">
+  <p:cSld>
+    <p:spTree>
+      <p:nvGrpSpPr>
+        <p:cNvPr id="1" name="Shape 92">
+          <a:extLst>
+            <a:ext uri="{FF2B5EF4-FFF2-40B4-BE49-F238E27FC236}">
+              <a16:creationId xmlns:a16="http://schemas.microsoft.com/office/drawing/2014/main" id="{0D1A983F-BF74-3E82-0905-5070D1C3FCE3}"/>
+            </a:ext>
+          </a:extLst>
+        </p:cNvPr>
+        <p:cNvGrpSpPr/>
+        <p:nvPr/>
+      </p:nvGrpSpPr>
+      <p:grpSpPr>
+        <a:xfrm>
+          <a:off x="0" y="0"/>
+          <a:ext cx="0" cy="0"/>
+          <a:chOff x="0" y="0"/>
+          <a:chExt cx="0" cy="0"/>
+        </a:xfrm>
+      </p:grpSpPr>
+      <p:sp>
+        <p:nvSpPr>
+          <p:cNvPr id="93" name="Google Shape;93;p2:notes">
+            <a:extLst>
+              <a:ext uri="{FF2B5EF4-FFF2-40B4-BE49-F238E27FC236}">
+                <a16:creationId xmlns:a16="http://schemas.microsoft.com/office/drawing/2014/main" id="{472A4107-5D6C-2B47-44EA-29361EB7F829}"/>
+              </a:ext>
+            </a:extLst>
+          </p:cNvPr>
+          <p:cNvSpPr txBox="1">
+            <a:spLocks noGrp="1"/>
+          </p:cNvSpPr>
+          <p:nvPr>
+            <p:ph type="body" idx="1"/>
+          </p:nvPr>
+        </p:nvSpPr>
+        <p:spPr>
+          <a:xfrm>
+            <a:off x="685800" y="4400550"/>
+            <a:ext cx="5486400" cy="3600450"/>
+          </a:xfrm>
+          <a:prstGeom prst="rect">
+            <a:avLst/>
+          </a:prstGeom>
+        </p:spPr>
+        <p:txBody>
+          <a:bodyPr spcFirstLastPara="1" wrap="square" lIns="91425" tIns="45700" rIns="91425" bIns="45700" anchor="t" anchorCtr="0">
+            <a:noAutofit/>
+          </a:bodyPr>
+          <a:lstStyle/>
+          <a:p>
+            <a:pPr marL="0" lvl="0" indent="0" algn="l" rtl="0">
+              <a:spcBef>
+                <a:spcPts val="0"/>
+              </a:spcBef>
+              <a:spcAft>
+                <a:spcPts val="0"/>
+              </a:spcAft>
+              <a:buNone/>
+            </a:pPr>
+            <a:endParaRPr/>
+          </a:p>
+        </p:txBody>
+      </p:sp>
+      <p:sp>
+        <p:nvSpPr>
+          <p:cNvPr id="94" name="Google Shape;94;p2:notes">
+            <a:extLst>
+              <a:ext uri="{FF2B5EF4-FFF2-40B4-BE49-F238E27FC236}">
+                <a16:creationId xmlns:a16="http://schemas.microsoft.com/office/drawing/2014/main" id="{34BD9152-608C-0E52-65DA-DC024E8BD0B6}"/>
+              </a:ext>
+            </a:extLst>
+          </p:cNvPr>
+          <p:cNvSpPr>
+            <a:spLocks noGrp="1" noRot="1" noChangeAspect="1"/>
+          </p:cNvSpPr>
+          <p:nvPr>
+            <p:ph type="sldImg" idx="2"/>
+          </p:nvPr>
+        </p:nvSpPr>
+        <p:spPr>
+          <a:xfrm>
+            <a:off x="685800" y="1143000"/>
+            <a:ext cx="5486400" cy="3086100"/>
+          </a:xfrm>
+          <a:custGeom>
+            <a:avLst/>
+            <a:gdLst/>
+            <a:ahLst/>
+            <a:cxnLst/>
+            <a:rect l="l" t="t" r="r" b="b"/>
+            <a:pathLst>
+              <a:path w="120000" h="120000" extrusionOk="0">
+                <a:moveTo>
+                  <a:pt x="0" y="0"/>
+                </a:moveTo>
+                <a:lnTo>
+                  <a:pt x="120000" y="0"/>
+                </a:lnTo>
+                <a:lnTo>
+                  <a:pt x="120000" y="120000"/>
+                </a:lnTo>
+                <a:lnTo>
+                  <a:pt x="0" y="120000"/>
+                </a:lnTo>
+                <a:close/>
+              </a:path>
+            </a:pathLst>
+          </a:custGeom>
+        </p:spPr>
+      </p:sp>
+    </p:spTree>
+    <p:extLst>
+      <p:ext uri="{BB962C8B-B14F-4D97-AF65-F5344CB8AC3E}">
+        <p14:creationId xmlns:p14="http://schemas.microsoft.com/office/powerpoint/2010/main" val="869649643"/>
+      </p:ext>
+    </p:extLst>
+  </p:cSld>
+  <p:clrMapOvr>
+    <a:masterClrMapping/>
+  </p:clrMapOvr>
+</p:notes>
+</file>
+
+<file path=ppt/notesSlides/notesSlide17.xml><?xml version="1.0" encoding="utf-8"?>
+<p:notes xmlns:a="http://schemas.openxmlformats.org/drawingml/2006/main" xmlns:r="http://schemas.openxmlformats.org/officeDocument/2006/relationships" xmlns:p="http://schemas.openxmlformats.org/presentationml/2006/main" showMasterSp="0" showMasterPhAnim="0">
+  <p:cSld>
+    <p:spTree>
+      <p:nvGrpSpPr>
+        <p:cNvPr id="1" name="Shape 92">
+          <a:extLst>
+            <a:ext uri="{FF2B5EF4-FFF2-40B4-BE49-F238E27FC236}">
+              <a16:creationId xmlns:a16="http://schemas.microsoft.com/office/drawing/2014/main" id="{6C7120A6-AED2-0D21-A180-D46FC1856396}"/>
+            </a:ext>
+          </a:extLst>
+        </p:cNvPr>
+        <p:cNvGrpSpPr/>
+        <p:nvPr/>
+      </p:nvGrpSpPr>
+      <p:grpSpPr>
+        <a:xfrm>
+          <a:off x="0" y="0"/>
+          <a:ext cx="0" cy="0"/>
+          <a:chOff x="0" y="0"/>
+          <a:chExt cx="0" cy="0"/>
+        </a:xfrm>
+      </p:grpSpPr>
+      <p:sp>
+        <p:nvSpPr>
+          <p:cNvPr id="93" name="Google Shape;93;p2:notes">
+            <a:extLst>
+              <a:ext uri="{FF2B5EF4-FFF2-40B4-BE49-F238E27FC236}">
+                <a16:creationId xmlns:a16="http://schemas.microsoft.com/office/drawing/2014/main" id="{35268674-40D0-7860-5279-3F055052E2CC}"/>
+              </a:ext>
+            </a:extLst>
+          </p:cNvPr>
+          <p:cNvSpPr txBox="1">
+            <a:spLocks noGrp="1"/>
+          </p:cNvSpPr>
+          <p:nvPr>
+            <p:ph type="body" idx="1"/>
+          </p:nvPr>
+        </p:nvSpPr>
+        <p:spPr>
+          <a:xfrm>
+            <a:off x="685800" y="4400550"/>
+            <a:ext cx="5486400" cy="3600450"/>
+          </a:xfrm>
+          <a:prstGeom prst="rect">
+            <a:avLst/>
+          </a:prstGeom>
+        </p:spPr>
+        <p:txBody>
+          <a:bodyPr spcFirstLastPara="1" wrap="square" lIns="91425" tIns="45700" rIns="91425" bIns="45700" anchor="t" anchorCtr="0">
+            <a:noAutofit/>
+          </a:bodyPr>
+          <a:lstStyle/>
+          <a:p>
+            <a:pPr marL="0" lvl="0" indent="0" algn="l" rtl="0">
+              <a:spcBef>
+                <a:spcPts val="0"/>
+              </a:spcBef>
+              <a:spcAft>
+                <a:spcPts val="0"/>
+              </a:spcAft>
+              <a:buNone/>
+            </a:pPr>
+            <a:endParaRPr/>
+          </a:p>
+        </p:txBody>
+      </p:sp>
+      <p:sp>
+        <p:nvSpPr>
+          <p:cNvPr id="94" name="Google Shape;94;p2:notes">
+            <a:extLst>
+              <a:ext uri="{FF2B5EF4-FFF2-40B4-BE49-F238E27FC236}">
+                <a16:creationId xmlns:a16="http://schemas.microsoft.com/office/drawing/2014/main" id="{89048D9B-8C46-3CF0-A2C1-027E33B37A71}"/>
+              </a:ext>
+            </a:extLst>
+          </p:cNvPr>
+          <p:cNvSpPr>
+            <a:spLocks noGrp="1" noRot="1" noChangeAspect="1"/>
+          </p:cNvSpPr>
+          <p:nvPr>
+            <p:ph type="sldImg" idx="2"/>
+          </p:nvPr>
+        </p:nvSpPr>
+        <p:spPr>
+          <a:xfrm>
+            <a:off x="685800" y="1143000"/>
+            <a:ext cx="5486400" cy="3086100"/>
+          </a:xfrm>
+          <a:custGeom>
+            <a:avLst/>
+            <a:gdLst/>
+            <a:ahLst/>
+            <a:cxnLst/>
+            <a:rect l="l" t="t" r="r" b="b"/>
+            <a:pathLst>
+              <a:path w="120000" h="120000" extrusionOk="0">
+                <a:moveTo>
+                  <a:pt x="0" y="0"/>
+                </a:moveTo>
+                <a:lnTo>
+                  <a:pt x="120000" y="0"/>
+                </a:lnTo>
+                <a:lnTo>
+                  <a:pt x="120000" y="120000"/>
+                </a:lnTo>
+                <a:lnTo>
+                  <a:pt x="0" y="120000"/>
+                </a:lnTo>
+                <a:close/>
+              </a:path>
+            </a:pathLst>
+          </a:custGeom>
+        </p:spPr>
+      </p:sp>
+    </p:spTree>
+    <p:extLst>
+      <p:ext uri="{BB962C8B-B14F-4D97-AF65-F5344CB8AC3E}">
+        <p14:creationId xmlns:p14="http://schemas.microsoft.com/office/powerpoint/2010/main" val="2793664703"/>
+      </p:ext>
+    </p:extLst>
+  </p:cSld>
+  <p:clrMapOvr>
+    <a:masterClrMapping/>
+  </p:clrMapOvr>
+</p:notes>
+</file>
+
+<file path=ppt/notesSlides/notesSlide18.xml><?xml version="1.0" encoding="utf-8"?>
+<p:notes xmlns:a="http://schemas.openxmlformats.org/drawingml/2006/main" xmlns:r="http://schemas.openxmlformats.org/officeDocument/2006/relationships" xmlns:p="http://schemas.openxmlformats.org/presentationml/2006/main" showMasterSp="0" showMasterPhAnim="0">
+  <p:cSld>
+    <p:spTree>
+      <p:nvGrpSpPr>
+        <p:cNvPr id="1" name="Shape 92">
+          <a:extLst>
+            <a:ext uri="{FF2B5EF4-FFF2-40B4-BE49-F238E27FC236}">
+              <a16:creationId xmlns:a16="http://schemas.microsoft.com/office/drawing/2014/main" id="{C777774B-D0CD-DC9D-EF74-B04AF4976A1E}"/>
+            </a:ext>
+          </a:extLst>
+        </p:cNvPr>
+        <p:cNvGrpSpPr/>
+        <p:nvPr/>
+      </p:nvGrpSpPr>
+      <p:grpSpPr>
+        <a:xfrm>
+          <a:off x="0" y="0"/>
+          <a:ext cx="0" cy="0"/>
+          <a:chOff x="0" y="0"/>
+          <a:chExt cx="0" cy="0"/>
+        </a:xfrm>
+      </p:grpSpPr>
+      <p:sp>
+        <p:nvSpPr>
+          <p:cNvPr id="93" name="Google Shape;93;p2:notes">
+            <a:extLst>
+              <a:ext uri="{FF2B5EF4-FFF2-40B4-BE49-F238E27FC236}">
+                <a16:creationId xmlns:a16="http://schemas.microsoft.com/office/drawing/2014/main" id="{0EF2A94E-9220-1403-8174-584611B5F760}"/>
+              </a:ext>
+            </a:extLst>
+          </p:cNvPr>
+          <p:cNvSpPr txBox="1">
+            <a:spLocks noGrp="1"/>
+          </p:cNvSpPr>
+          <p:nvPr>
+            <p:ph type="body" idx="1"/>
+          </p:nvPr>
+        </p:nvSpPr>
+        <p:spPr>
+          <a:xfrm>
+            <a:off x="685800" y="4400550"/>
+            <a:ext cx="5486400" cy="3600450"/>
+          </a:xfrm>
+          <a:prstGeom prst="rect">
+            <a:avLst/>
+          </a:prstGeom>
+        </p:spPr>
+        <p:txBody>
+          <a:bodyPr spcFirstLastPara="1" wrap="square" lIns="91425" tIns="45700" rIns="91425" bIns="45700" anchor="t" anchorCtr="0">
+            <a:noAutofit/>
+          </a:bodyPr>
+          <a:lstStyle/>
+          <a:p>
+            <a:pPr marL="0" lvl="0" indent="0" algn="l" rtl="0">
+              <a:spcBef>
+                <a:spcPts val="0"/>
+              </a:spcBef>
+              <a:spcAft>
+                <a:spcPts val="0"/>
+              </a:spcAft>
+              <a:buNone/>
+            </a:pPr>
+            <a:endParaRPr/>
+          </a:p>
+        </p:txBody>
+      </p:sp>
+      <p:sp>
+        <p:nvSpPr>
+          <p:cNvPr id="94" name="Google Shape;94;p2:notes">
+            <a:extLst>
+              <a:ext uri="{FF2B5EF4-FFF2-40B4-BE49-F238E27FC236}">
+                <a16:creationId xmlns:a16="http://schemas.microsoft.com/office/drawing/2014/main" id="{C61DD690-9033-1340-FA4B-3FB47329305B}"/>
+              </a:ext>
+            </a:extLst>
+          </p:cNvPr>
+          <p:cNvSpPr>
+            <a:spLocks noGrp="1" noRot="1" noChangeAspect="1"/>
+          </p:cNvSpPr>
+          <p:nvPr>
+            <p:ph type="sldImg" idx="2"/>
+          </p:nvPr>
+        </p:nvSpPr>
+        <p:spPr>
+          <a:xfrm>
+            <a:off x="685800" y="1143000"/>
+            <a:ext cx="5486400" cy="3086100"/>
+          </a:xfrm>
+          <a:custGeom>
+            <a:avLst/>
+            <a:gdLst/>
+            <a:ahLst/>
+            <a:cxnLst/>
+            <a:rect l="l" t="t" r="r" b="b"/>
+            <a:pathLst>
+              <a:path w="120000" h="120000" extrusionOk="0">
+                <a:moveTo>
+                  <a:pt x="0" y="0"/>
+                </a:moveTo>
+                <a:lnTo>
+                  <a:pt x="120000" y="0"/>
+                </a:lnTo>
+                <a:lnTo>
+                  <a:pt x="120000" y="120000"/>
+                </a:lnTo>
+                <a:lnTo>
+                  <a:pt x="0" y="120000"/>
+                </a:lnTo>
+                <a:close/>
+              </a:path>
+            </a:pathLst>
+          </a:custGeom>
+        </p:spPr>
+      </p:sp>
+    </p:spTree>
+    <p:extLst>
+      <p:ext uri="{BB962C8B-B14F-4D97-AF65-F5344CB8AC3E}">
+        <p14:creationId xmlns:p14="http://schemas.microsoft.com/office/powerpoint/2010/main" val="3636424047"/>
+      </p:ext>
+    </p:extLst>
+  </p:cSld>
+  <p:clrMapOvr>
+    <a:masterClrMapping/>
+  </p:clrMapOvr>
+</p:notes>
+</file>
+
+<file path=ppt/notesSlides/notesSlide19.xml><?xml version="1.0" encoding="utf-8"?>
+<p:notes xmlns:a="http://schemas.openxmlformats.org/drawingml/2006/main" xmlns:r="http://schemas.openxmlformats.org/officeDocument/2006/relationships" xmlns:p="http://schemas.openxmlformats.org/presentationml/2006/main" showMasterSp="0" showMasterPhAnim="0">
+  <p:cSld>
+    <p:spTree>
+      <p:nvGrpSpPr>
+        <p:cNvPr id="1" name="Shape 92">
+          <a:extLst>
+            <a:ext uri="{FF2B5EF4-FFF2-40B4-BE49-F238E27FC236}">
               <a16:creationId xmlns:a16="http://schemas.microsoft.com/office/drawing/2014/main" id="{4CEAF695-F5F7-5EC9-7300-19E6C0A73AEB}"/>
             </a:ext>
           </a:extLst>
@@ -1686,7 +2841,111 @@
 </p:notes>
 </file>
 
-<file path=ppt/notesSlides/notesSlide11.xml><?xml version="1.0" encoding="utf-8"?>
+<file path=ppt/notesSlides/notesSlide2.xml><?xml version="1.0" encoding="utf-8"?>
+<p:notes xmlns:a="http://schemas.openxmlformats.org/drawingml/2006/main" xmlns:r="http://schemas.openxmlformats.org/officeDocument/2006/relationships" xmlns:p="http://schemas.openxmlformats.org/presentationml/2006/main" showMasterSp="0" showMasterPhAnim="0">
+  <p:cSld>
+    <p:spTree>
+      <p:nvGrpSpPr>
+        <p:cNvPr id="1" name="Shape 92"/>
+        <p:cNvGrpSpPr/>
+        <p:nvPr/>
+      </p:nvGrpSpPr>
+      <p:grpSpPr>
+        <a:xfrm>
+          <a:off x="0" y="0"/>
+          <a:ext cx="0" cy="0"/>
+          <a:chOff x="0" y="0"/>
+          <a:chExt cx="0" cy="0"/>
+        </a:xfrm>
+      </p:grpSpPr>
+      <p:sp>
+        <p:nvSpPr>
+          <p:cNvPr id="93" name="Google Shape;93;p2:notes"/>
+          <p:cNvSpPr txBox="1">
+            <a:spLocks noGrp="1"/>
+          </p:cNvSpPr>
+          <p:nvPr>
+            <p:ph type="body" idx="1"/>
+          </p:nvPr>
+        </p:nvSpPr>
+        <p:spPr>
+          <a:xfrm>
+            <a:off x="685800" y="4400550"/>
+            <a:ext cx="5486400" cy="3600450"/>
+          </a:xfrm>
+          <a:prstGeom prst="rect">
+            <a:avLst/>
+          </a:prstGeom>
+        </p:spPr>
+        <p:txBody>
+          <a:bodyPr spcFirstLastPara="1" wrap="square" lIns="91425" tIns="45700" rIns="91425" bIns="45700" anchor="t" anchorCtr="0">
+            <a:noAutofit/>
+          </a:bodyPr>
+          <a:lstStyle/>
+          <a:p>
+            <a:pPr marL="0" lvl="0" indent="0" algn="l" rtl="0">
+              <a:spcBef>
+                <a:spcPts val="0"/>
+              </a:spcBef>
+              <a:spcAft>
+                <a:spcPts val="0"/>
+              </a:spcAft>
+              <a:buNone/>
+            </a:pPr>
+            <a:endParaRPr/>
+          </a:p>
+        </p:txBody>
+      </p:sp>
+      <p:sp>
+        <p:nvSpPr>
+          <p:cNvPr id="94" name="Google Shape;94;p2:notes"/>
+          <p:cNvSpPr>
+            <a:spLocks noGrp="1" noRot="1" noChangeAspect="1"/>
+          </p:cNvSpPr>
+          <p:nvPr>
+            <p:ph type="sldImg" idx="2"/>
+          </p:nvPr>
+        </p:nvSpPr>
+        <p:spPr>
+          <a:xfrm>
+            <a:off x="685800" y="1143000"/>
+            <a:ext cx="5486400" cy="3086100"/>
+          </a:xfrm>
+          <a:custGeom>
+            <a:avLst/>
+            <a:gdLst/>
+            <a:ahLst/>
+            <a:cxnLst/>
+            <a:rect l="l" t="t" r="r" b="b"/>
+            <a:pathLst>
+              <a:path w="120000" h="120000" extrusionOk="0">
+                <a:moveTo>
+                  <a:pt x="0" y="0"/>
+                </a:moveTo>
+                <a:lnTo>
+                  <a:pt x="120000" y="0"/>
+                </a:lnTo>
+                <a:lnTo>
+                  <a:pt x="120000" y="120000"/>
+                </a:lnTo>
+                <a:lnTo>
+                  <a:pt x="0" y="120000"/>
+                </a:lnTo>
+                <a:close/>
+              </a:path>
+            </a:pathLst>
+          </a:custGeom>
+        </p:spPr>
+      </p:sp>
+    </p:spTree>
+  </p:cSld>
+  <p:clrMapOvr>
+    <a:masterClrMapping/>
+  </p:clrMapOvr>
+</p:notes>
+</file>
+
+<file path=ppt/notesSlides/notesSlide20.xml><?xml version="1.0" encoding="utf-8"?>
 <p:notes xmlns:a="http://schemas.openxmlformats.org/drawingml/2006/main" xmlns:r="http://schemas.openxmlformats.org/officeDocument/2006/relationships" xmlns:p="http://schemas.openxmlformats.org/presentationml/2006/main" showMasterSp="0" showMasterPhAnim="0">
   <p:cSld>
     <p:spTree>
@@ -1694,7 +2953,7 @@
         <p:cNvPr id="1" name="Shape 92">
           <a:extLst>
             <a:ext uri="{FF2B5EF4-FFF2-40B4-BE49-F238E27FC236}">
-              <a16:creationId xmlns:a16="http://schemas.microsoft.com/office/drawing/2014/main" id="{2470D780-169E-BFDD-9C0F-A87A54C633CD}"/>
+              <a16:creationId xmlns:a16="http://schemas.microsoft.com/office/drawing/2014/main" id="{92BFDCC0-C41B-1179-AF50-899A3BE7437D}"/>
             </a:ext>
           </a:extLst>
         </p:cNvPr>
@@ -1714,7 +2973,7 @@
           <p:cNvPr id="93" name="Google Shape;93;p2:notes">
             <a:extLst>
               <a:ext uri="{FF2B5EF4-FFF2-40B4-BE49-F238E27FC236}">
-                <a16:creationId xmlns:a16="http://schemas.microsoft.com/office/drawing/2014/main" id="{CBC0F284-DC10-6EAC-7476-A5765F927DA6}"/>
+                <a16:creationId xmlns:a16="http://schemas.microsoft.com/office/drawing/2014/main" id="{AE4A334B-C0C7-6CCC-CE29-AB101EA3F963}"/>
               </a:ext>
             </a:extLst>
           </p:cNvPr>
@@ -1758,7 +3017,7 @@
           <p:cNvPr id="94" name="Google Shape;94;p2:notes">
             <a:extLst>
               <a:ext uri="{FF2B5EF4-FFF2-40B4-BE49-F238E27FC236}">
-                <a16:creationId xmlns:a16="http://schemas.microsoft.com/office/drawing/2014/main" id="{509CD5CE-4AFF-857C-2CDE-7F0F031E951E}"/>
+                <a16:creationId xmlns:a16="http://schemas.microsoft.com/office/drawing/2014/main" id="{71590041-C623-E851-2907-142906D5FC8C}"/>
               </a:ext>
             </a:extLst>
           </p:cNvPr>
@@ -1803,7 +3062,7 @@
     </p:spTree>
     <p:extLst>
       <p:ext uri="{BB962C8B-B14F-4D97-AF65-F5344CB8AC3E}">
-        <p14:creationId xmlns:p14="http://schemas.microsoft.com/office/powerpoint/2010/main" val="1829916922"/>
+        <p14:creationId xmlns:p14="http://schemas.microsoft.com/office/powerpoint/2010/main" val="170699096"/>
       </p:ext>
     </p:extLst>
   </p:cSld>
@@ -1813,12 +3072,18 @@
 </p:notes>
 </file>
 
-<file path=ppt/notesSlides/notesSlide2.xml><?xml version="1.0" encoding="utf-8"?>
+<file path=ppt/notesSlides/notesSlide21.xml><?xml version="1.0" encoding="utf-8"?>
 <p:notes xmlns:a="http://schemas.openxmlformats.org/drawingml/2006/main" xmlns:r="http://schemas.openxmlformats.org/officeDocument/2006/relationships" xmlns:p="http://schemas.openxmlformats.org/presentationml/2006/main" showMasterSp="0" showMasterPhAnim="0">
   <p:cSld>
     <p:spTree>
       <p:nvGrpSpPr>
-        <p:cNvPr id="1" name="Shape 92"/>
+        <p:cNvPr id="1" name="Shape 92">
+          <a:extLst>
+            <a:ext uri="{FF2B5EF4-FFF2-40B4-BE49-F238E27FC236}">
+              <a16:creationId xmlns:a16="http://schemas.microsoft.com/office/drawing/2014/main" id="{D09FBDBF-A24E-CB25-9824-832A9552549B}"/>
+            </a:ext>
+          </a:extLst>
+        </p:cNvPr>
         <p:cNvGrpSpPr/>
         <p:nvPr/>
       </p:nvGrpSpPr>
@@ -1832,7 +3097,13 @@
       </p:grpSpPr>
       <p:sp>
         <p:nvSpPr>
-          <p:cNvPr id="93" name="Google Shape;93;p2:notes"/>
+          <p:cNvPr id="93" name="Google Shape;93;p2:notes">
+            <a:extLst>
+              <a:ext uri="{FF2B5EF4-FFF2-40B4-BE49-F238E27FC236}">
+                <a16:creationId xmlns:a16="http://schemas.microsoft.com/office/drawing/2014/main" id="{4889175A-054C-B1DF-61D3-99AF2F810B1E}"/>
+              </a:ext>
+            </a:extLst>
+          </p:cNvPr>
           <p:cNvSpPr txBox="1">
             <a:spLocks noGrp="1"/>
           </p:cNvSpPr>
@@ -1870,7 +3141,13 @@
       </p:sp>
       <p:sp>
         <p:nvSpPr>
-          <p:cNvPr id="94" name="Google Shape;94;p2:notes"/>
+          <p:cNvPr id="94" name="Google Shape;94;p2:notes">
+            <a:extLst>
+              <a:ext uri="{FF2B5EF4-FFF2-40B4-BE49-F238E27FC236}">
+                <a16:creationId xmlns:a16="http://schemas.microsoft.com/office/drawing/2014/main" id="{4538896D-0522-36E1-ECB3-452461070329}"/>
+              </a:ext>
+            </a:extLst>
+          </p:cNvPr>
           <p:cNvSpPr>
             <a:spLocks noGrp="1" noRot="1" noChangeAspect="1"/>
           </p:cNvSpPr>
@@ -1910,6 +3187,265 @@
         </p:spPr>
       </p:sp>
     </p:spTree>
+    <p:extLst>
+      <p:ext uri="{BB962C8B-B14F-4D97-AF65-F5344CB8AC3E}">
+        <p14:creationId xmlns:p14="http://schemas.microsoft.com/office/powerpoint/2010/main" val="32716098"/>
+      </p:ext>
+    </p:extLst>
+  </p:cSld>
+  <p:clrMapOvr>
+    <a:masterClrMapping/>
+  </p:clrMapOvr>
+</p:notes>
+</file>
+
+<file path=ppt/notesSlides/notesSlide22.xml><?xml version="1.0" encoding="utf-8"?>
+<p:notes xmlns:a="http://schemas.openxmlformats.org/drawingml/2006/main" xmlns:r="http://schemas.openxmlformats.org/officeDocument/2006/relationships" xmlns:p="http://schemas.openxmlformats.org/presentationml/2006/main" showMasterSp="0" showMasterPhAnim="0">
+  <p:cSld>
+    <p:spTree>
+      <p:nvGrpSpPr>
+        <p:cNvPr id="1" name="Shape 92">
+          <a:extLst>
+            <a:ext uri="{FF2B5EF4-FFF2-40B4-BE49-F238E27FC236}">
+              <a16:creationId xmlns:a16="http://schemas.microsoft.com/office/drawing/2014/main" id="{AEEE6856-4558-02F0-1A21-C1ADB0DE5F32}"/>
+            </a:ext>
+          </a:extLst>
+        </p:cNvPr>
+        <p:cNvGrpSpPr/>
+        <p:nvPr/>
+      </p:nvGrpSpPr>
+      <p:grpSpPr>
+        <a:xfrm>
+          <a:off x="0" y="0"/>
+          <a:ext cx="0" cy="0"/>
+          <a:chOff x="0" y="0"/>
+          <a:chExt cx="0" cy="0"/>
+        </a:xfrm>
+      </p:grpSpPr>
+      <p:sp>
+        <p:nvSpPr>
+          <p:cNvPr id="93" name="Google Shape;93;p2:notes">
+            <a:extLst>
+              <a:ext uri="{FF2B5EF4-FFF2-40B4-BE49-F238E27FC236}">
+                <a16:creationId xmlns:a16="http://schemas.microsoft.com/office/drawing/2014/main" id="{C7E1BF08-F39D-613D-F720-45F01A2CFDE9}"/>
+              </a:ext>
+            </a:extLst>
+          </p:cNvPr>
+          <p:cNvSpPr txBox="1">
+            <a:spLocks noGrp="1"/>
+          </p:cNvSpPr>
+          <p:nvPr>
+            <p:ph type="body" idx="1"/>
+          </p:nvPr>
+        </p:nvSpPr>
+        <p:spPr>
+          <a:xfrm>
+            <a:off x="685800" y="4400550"/>
+            <a:ext cx="5486400" cy="3600450"/>
+          </a:xfrm>
+          <a:prstGeom prst="rect">
+            <a:avLst/>
+          </a:prstGeom>
+        </p:spPr>
+        <p:txBody>
+          <a:bodyPr spcFirstLastPara="1" wrap="square" lIns="91425" tIns="45700" rIns="91425" bIns="45700" anchor="t" anchorCtr="0">
+            <a:noAutofit/>
+          </a:bodyPr>
+          <a:lstStyle/>
+          <a:p>
+            <a:pPr marL="0" lvl="0" indent="0" algn="l" rtl="0">
+              <a:spcBef>
+                <a:spcPts val="0"/>
+              </a:spcBef>
+              <a:spcAft>
+                <a:spcPts val="0"/>
+              </a:spcAft>
+              <a:buNone/>
+            </a:pPr>
+            <a:endParaRPr/>
+          </a:p>
+        </p:txBody>
+      </p:sp>
+      <p:sp>
+        <p:nvSpPr>
+          <p:cNvPr id="94" name="Google Shape;94;p2:notes">
+            <a:extLst>
+              <a:ext uri="{FF2B5EF4-FFF2-40B4-BE49-F238E27FC236}">
+                <a16:creationId xmlns:a16="http://schemas.microsoft.com/office/drawing/2014/main" id="{8783F509-73CF-AAE6-2453-E920AE17270B}"/>
+              </a:ext>
+            </a:extLst>
+          </p:cNvPr>
+          <p:cNvSpPr>
+            <a:spLocks noGrp="1" noRot="1" noChangeAspect="1"/>
+          </p:cNvSpPr>
+          <p:nvPr>
+            <p:ph type="sldImg" idx="2"/>
+          </p:nvPr>
+        </p:nvSpPr>
+        <p:spPr>
+          <a:xfrm>
+            <a:off x="685800" y="1143000"/>
+            <a:ext cx="5486400" cy="3086100"/>
+          </a:xfrm>
+          <a:custGeom>
+            <a:avLst/>
+            <a:gdLst/>
+            <a:ahLst/>
+            <a:cxnLst/>
+            <a:rect l="l" t="t" r="r" b="b"/>
+            <a:pathLst>
+              <a:path w="120000" h="120000" extrusionOk="0">
+                <a:moveTo>
+                  <a:pt x="0" y="0"/>
+                </a:moveTo>
+                <a:lnTo>
+                  <a:pt x="120000" y="0"/>
+                </a:lnTo>
+                <a:lnTo>
+                  <a:pt x="120000" y="120000"/>
+                </a:lnTo>
+                <a:lnTo>
+                  <a:pt x="0" y="120000"/>
+                </a:lnTo>
+                <a:close/>
+              </a:path>
+            </a:pathLst>
+          </a:custGeom>
+        </p:spPr>
+      </p:sp>
+    </p:spTree>
+    <p:extLst>
+      <p:ext uri="{BB962C8B-B14F-4D97-AF65-F5344CB8AC3E}">
+        <p14:creationId xmlns:p14="http://schemas.microsoft.com/office/powerpoint/2010/main" val="2258798514"/>
+      </p:ext>
+    </p:extLst>
+  </p:cSld>
+  <p:clrMapOvr>
+    <a:masterClrMapping/>
+  </p:clrMapOvr>
+</p:notes>
+</file>
+
+<file path=ppt/notesSlides/notesSlide23.xml><?xml version="1.0" encoding="utf-8"?>
+<p:notes xmlns:a="http://schemas.openxmlformats.org/drawingml/2006/main" xmlns:r="http://schemas.openxmlformats.org/officeDocument/2006/relationships" xmlns:p="http://schemas.openxmlformats.org/presentationml/2006/main" showMasterSp="0" showMasterPhAnim="0">
+  <p:cSld>
+    <p:spTree>
+      <p:nvGrpSpPr>
+        <p:cNvPr id="1" name="Shape 92">
+          <a:extLst>
+            <a:ext uri="{FF2B5EF4-FFF2-40B4-BE49-F238E27FC236}">
+              <a16:creationId xmlns:a16="http://schemas.microsoft.com/office/drawing/2014/main" id="{53DEC3DD-6537-0C79-534A-B7DB75683AF7}"/>
+            </a:ext>
+          </a:extLst>
+        </p:cNvPr>
+        <p:cNvGrpSpPr/>
+        <p:nvPr/>
+      </p:nvGrpSpPr>
+      <p:grpSpPr>
+        <a:xfrm>
+          <a:off x="0" y="0"/>
+          <a:ext cx="0" cy="0"/>
+          <a:chOff x="0" y="0"/>
+          <a:chExt cx="0" cy="0"/>
+        </a:xfrm>
+      </p:grpSpPr>
+      <p:sp>
+        <p:nvSpPr>
+          <p:cNvPr id="93" name="Google Shape;93;p2:notes">
+            <a:extLst>
+              <a:ext uri="{FF2B5EF4-FFF2-40B4-BE49-F238E27FC236}">
+                <a16:creationId xmlns:a16="http://schemas.microsoft.com/office/drawing/2014/main" id="{914A647C-0DB7-79C6-DAB1-22CCB6DB67A4}"/>
+              </a:ext>
+            </a:extLst>
+          </p:cNvPr>
+          <p:cNvSpPr txBox="1">
+            <a:spLocks noGrp="1"/>
+          </p:cNvSpPr>
+          <p:nvPr>
+            <p:ph type="body" idx="1"/>
+          </p:nvPr>
+        </p:nvSpPr>
+        <p:spPr>
+          <a:xfrm>
+            <a:off x="685800" y="4400550"/>
+            <a:ext cx="5486400" cy="3600450"/>
+          </a:xfrm>
+          <a:prstGeom prst="rect">
+            <a:avLst/>
+          </a:prstGeom>
+        </p:spPr>
+        <p:txBody>
+          <a:bodyPr spcFirstLastPara="1" wrap="square" lIns="91425" tIns="45700" rIns="91425" bIns="45700" anchor="t" anchorCtr="0">
+            <a:noAutofit/>
+          </a:bodyPr>
+          <a:lstStyle/>
+          <a:p>
+            <a:pPr marL="0" lvl="0" indent="0" algn="l" rtl="0">
+              <a:spcBef>
+                <a:spcPts val="0"/>
+              </a:spcBef>
+              <a:spcAft>
+                <a:spcPts val="0"/>
+              </a:spcAft>
+              <a:buNone/>
+            </a:pPr>
+            <a:endParaRPr/>
+          </a:p>
+        </p:txBody>
+      </p:sp>
+      <p:sp>
+        <p:nvSpPr>
+          <p:cNvPr id="94" name="Google Shape;94;p2:notes">
+            <a:extLst>
+              <a:ext uri="{FF2B5EF4-FFF2-40B4-BE49-F238E27FC236}">
+                <a16:creationId xmlns:a16="http://schemas.microsoft.com/office/drawing/2014/main" id="{011DB4D6-B24E-242B-C378-4E9F70A6FFA0}"/>
+              </a:ext>
+            </a:extLst>
+          </p:cNvPr>
+          <p:cNvSpPr>
+            <a:spLocks noGrp="1" noRot="1" noChangeAspect="1"/>
+          </p:cNvSpPr>
+          <p:nvPr>
+            <p:ph type="sldImg" idx="2"/>
+          </p:nvPr>
+        </p:nvSpPr>
+        <p:spPr>
+          <a:xfrm>
+            <a:off x="685800" y="1143000"/>
+            <a:ext cx="5486400" cy="3086100"/>
+          </a:xfrm>
+          <a:custGeom>
+            <a:avLst/>
+            <a:gdLst/>
+            <a:ahLst/>
+            <a:cxnLst/>
+            <a:rect l="l" t="t" r="r" b="b"/>
+            <a:pathLst>
+              <a:path w="120000" h="120000" extrusionOk="0">
+                <a:moveTo>
+                  <a:pt x="0" y="0"/>
+                </a:moveTo>
+                <a:lnTo>
+                  <a:pt x="120000" y="0"/>
+                </a:lnTo>
+                <a:lnTo>
+                  <a:pt x="120000" y="120000"/>
+                </a:lnTo>
+                <a:lnTo>
+                  <a:pt x="0" y="120000"/>
+                </a:lnTo>
+                <a:close/>
+              </a:path>
+            </a:pathLst>
+          </a:custGeom>
+        </p:spPr>
+      </p:sp>
+    </p:spTree>
+    <p:extLst>
+      <p:ext uri="{BB962C8B-B14F-4D97-AF65-F5344CB8AC3E}">
+        <p14:creationId xmlns:p14="http://schemas.microsoft.com/office/powerpoint/2010/main" val="164257852"/>
+      </p:ext>
+    </p:extLst>
   </p:cSld>
   <p:clrMapOvr>
     <a:masterClrMapping/>
@@ -2663,7 +4199,7 @@
         <p:cNvPr id="1" name="Shape 92">
           <a:extLst>
             <a:ext uri="{FF2B5EF4-FFF2-40B4-BE49-F238E27FC236}">
-              <a16:creationId xmlns:a16="http://schemas.microsoft.com/office/drawing/2014/main" id="{C777774B-D0CD-DC9D-EF74-B04AF4976A1E}"/>
+              <a16:creationId xmlns:a16="http://schemas.microsoft.com/office/drawing/2014/main" id="{41DF199C-A62B-3ACE-4582-B2898ACD379C}"/>
             </a:ext>
           </a:extLst>
         </p:cNvPr>
@@ -2683,7 +4219,7 @@
           <p:cNvPr id="93" name="Google Shape;93;p2:notes">
             <a:extLst>
               <a:ext uri="{FF2B5EF4-FFF2-40B4-BE49-F238E27FC236}">
-                <a16:creationId xmlns:a16="http://schemas.microsoft.com/office/drawing/2014/main" id="{0EF2A94E-9220-1403-8174-584611B5F760}"/>
+                <a16:creationId xmlns:a16="http://schemas.microsoft.com/office/drawing/2014/main" id="{68F9C28F-B082-5F05-7158-310D711B88CA}"/>
               </a:ext>
             </a:extLst>
           </p:cNvPr>
@@ -2727,7 +4263,7 @@
           <p:cNvPr id="94" name="Google Shape;94;p2:notes">
             <a:extLst>
               <a:ext uri="{FF2B5EF4-FFF2-40B4-BE49-F238E27FC236}">
-                <a16:creationId xmlns:a16="http://schemas.microsoft.com/office/drawing/2014/main" id="{C61DD690-9033-1340-FA4B-3FB47329305B}"/>
+                <a16:creationId xmlns:a16="http://schemas.microsoft.com/office/drawing/2014/main" id="{D7EBE74C-4528-E933-9960-2B8B76FB75C8}"/>
               </a:ext>
             </a:extLst>
           </p:cNvPr>
@@ -2772,7 +4308,7 @@
     </p:spTree>
     <p:extLst>
       <p:ext uri="{BB962C8B-B14F-4D97-AF65-F5344CB8AC3E}">
-        <p14:creationId xmlns:p14="http://schemas.microsoft.com/office/powerpoint/2010/main" val="3636424047"/>
+        <p14:creationId xmlns:p14="http://schemas.microsoft.com/office/powerpoint/2010/main" val="1761360145"/>
       </p:ext>
     </p:extLst>
   </p:cSld>
@@ -3496,7 +5032,7 @@
             </a:pPr>
             <a:fld id="{00000000-1234-1234-1234-123412341234}" type="slidenum">
               <a:rPr lang="pt-BR"/>
-              <a:t>‹nº›</a:t>
+              <a:t>‹#›</a:t>
             </a:fld>
             <a:endParaRPr/>
           </a:p>
@@ -4223,7 +5759,7 @@
             </a:pPr>
             <a:fld id="{00000000-1234-1234-1234-123412341234}" type="slidenum">
               <a:rPr lang="pt-BR"/>
-              <a:t>‹nº›</a:t>
+              <a:t>‹#›</a:t>
             </a:fld>
             <a:endParaRPr/>
           </a:p>
@@ -4950,7 +6486,7 @@
             </a:pPr>
             <a:fld id="{00000000-1234-1234-1234-123412341234}" type="slidenum">
               <a:rPr lang="pt-BR"/>
-              <a:t>‹nº›</a:t>
+              <a:t>‹#›</a:t>
             </a:fld>
             <a:endParaRPr/>
           </a:p>
@@ -5677,7 +7213,7 @@
             </a:pPr>
             <a:fld id="{00000000-1234-1234-1234-123412341234}" type="slidenum">
               <a:rPr lang="pt-BR"/>
-              <a:t>‹nº›</a:t>
+              <a:t>‹#›</a:t>
             </a:fld>
             <a:endParaRPr/>
           </a:p>
@@ -6441,7 +7977,7 @@
             </a:pPr>
             <a:fld id="{00000000-1234-1234-1234-123412341234}" type="slidenum">
               <a:rPr lang="pt-BR"/>
-              <a:t>‹nº›</a:t>
+              <a:t>‹#›</a:t>
             </a:fld>
             <a:endParaRPr/>
           </a:p>
@@ -7355,7 +8891,7 @@
             </a:pPr>
             <a:fld id="{00000000-1234-1234-1234-123412341234}" type="slidenum">
               <a:rPr lang="pt-BR"/>
-              <a:t>‹nº›</a:t>
+              <a:t>‹#›</a:t>
             </a:fld>
             <a:endParaRPr/>
           </a:p>
@@ -8643,7 +10179,7 @@
             </a:pPr>
             <a:fld id="{00000000-1234-1234-1234-123412341234}" type="slidenum">
               <a:rPr lang="pt-BR"/>
-              <a:t>‹nº›</a:t>
+              <a:t>‹#›</a:t>
             </a:fld>
             <a:endParaRPr/>
           </a:p>
@@ -9183,7 +10719,7 @@
             </a:pPr>
             <a:fld id="{00000000-1234-1234-1234-123412341234}" type="slidenum">
               <a:rPr lang="pt-BR"/>
-              <a:t>‹nº›</a:t>
+              <a:t>‹#›</a:t>
             </a:fld>
             <a:endParaRPr/>
           </a:p>
@@ -9584,7 +11120,7 @@
             </a:pPr>
             <a:fld id="{00000000-1234-1234-1234-123412341234}" type="slidenum">
               <a:rPr lang="pt-BR"/>
-              <a:t>‹nº›</a:t>
+              <a:t>‹#›</a:t>
             </a:fld>
             <a:endParaRPr/>
           </a:p>
@@ -10499,7 +12035,7 @@
             </a:pPr>
             <a:fld id="{00000000-1234-1234-1234-123412341234}" type="slidenum">
               <a:rPr lang="pt-BR"/>
-              <a:t>‹nº›</a:t>
+              <a:t>‹#›</a:t>
             </a:fld>
             <a:endParaRPr/>
           </a:p>
@@ -11251,7 +12787,7 @@
             </a:pPr>
             <a:fld id="{00000000-1234-1234-1234-123412341234}" type="slidenum">
               <a:rPr lang="pt-BR"/>
-              <a:t>‹nº›</a:t>
+              <a:t>‹#›</a:t>
             </a:fld>
             <a:endParaRPr/>
           </a:p>
@@ -12292,7 +13828,7 @@
             </a:pPr>
             <a:fld id="{00000000-1234-1234-1234-123412341234}" type="slidenum">
               <a:rPr lang="pt-BR"/>
-              <a:t>‹nº›</a:t>
+              <a:t>‹#›</a:t>
             </a:fld>
             <a:endParaRPr/>
           </a:p>
@@ -13259,6 +14795,4090 @@
         <p:cNvPr id="1" name="Shape 95">
           <a:extLst>
             <a:ext uri="{FF2B5EF4-FFF2-40B4-BE49-F238E27FC236}">
+              <a16:creationId xmlns:a16="http://schemas.microsoft.com/office/drawing/2014/main" id="{260B01C5-8FEE-6F48-07B2-E436F12A4FF5}"/>
+            </a:ext>
+          </a:extLst>
+        </p:cNvPr>
+        <p:cNvGrpSpPr/>
+        <p:nvPr/>
+      </p:nvGrpSpPr>
+      <p:grpSpPr>
+        <a:xfrm>
+          <a:off x="0" y="0"/>
+          <a:ext cx="0" cy="0"/>
+          <a:chOff x="0" y="0"/>
+          <a:chExt cx="0" cy="0"/>
+        </a:xfrm>
+      </p:grpSpPr>
+      <p:sp>
+        <p:nvSpPr>
+          <p:cNvPr id="96" name="Google Shape;96;p2">
+            <a:extLst>
+              <a:ext uri="{FF2B5EF4-FFF2-40B4-BE49-F238E27FC236}">
+                <a16:creationId xmlns:a16="http://schemas.microsoft.com/office/drawing/2014/main" id="{DC7CB748-DA1A-6DB8-D411-E9E2AEE026FA}"/>
+              </a:ext>
+            </a:extLst>
+          </p:cNvPr>
+          <p:cNvSpPr txBox="1">
+            <a:spLocks noGrp="1"/>
+          </p:cNvSpPr>
+          <p:nvPr>
+            <p:ph type="title"/>
+          </p:nvPr>
+        </p:nvSpPr>
+        <p:spPr>
+          <a:xfrm>
+            <a:off x="170268" y="190105"/>
+            <a:ext cx="10329566" cy="768438"/>
+          </a:xfrm>
+          <a:prstGeom prst="rect">
+            <a:avLst/>
+          </a:prstGeom>
+          <a:noFill/>
+          <a:ln>
+            <a:noFill/>
+          </a:ln>
+        </p:spPr>
+        <p:txBody>
+          <a:bodyPr spcFirstLastPara="1" wrap="square" lIns="91425" tIns="45700" rIns="91425" bIns="45700" anchor="ctr" anchorCtr="0">
+            <a:noAutofit/>
+          </a:bodyPr>
+          <a:lstStyle/>
+          <a:p>
+            <a:pPr lvl="0">
+              <a:buSzPts val="4400"/>
+            </a:pPr>
+            <a:r>
+              <a:rPr lang="pt-BR" sz="3200" b="1" dirty="0">
+                <a:latin typeface="+mj-lt"/>
+              </a:rPr>
+              <a:t>Revisão</a:t>
+            </a:r>
+            <a:r>
+              <a:rPr lang="pt-BR" sz="3200" dirty="0"/>
+              <a:t> </a:t>
+            </a:r>
+            <a:r>
+              <a:rPr lang="pt-BR" sz="3200" b="1" dirty="0">
+                <a:latin typeface="+mj-lt"/>
+              </a:rPr>
+              <a:t>de literatura</a:t>
+            </a:r>
+            <a:endParaRPr sz="3200" b="1" dirty="0">
+              <a:latin typeface="+mj-lt"/>
+            </a:endParaRPr>
+          </a:p>
+        </p:txBody>
+      </p:sp>
+      <p:sp>
+        <p:nvSpPr>
+          <p:cNvPr id="97" name="Google Shape;97;p2">
+            <a:extLst>
+              <a:ext uri="{FF2B5EF4-FFF2-40B4-BE49-F238E27FC236}">
+                <a16:creationId xmlns:a16="http://schemas.microsoft.com/office/drawing/2014/main" id="{E924DE75-AFE9-AB3E-201C-EA3B8A1EB927}"/>
+              </a:ext>
+            </a:extLst>
+          </p:cNvPr>
+          <p:cNvSpPr txBox="1">
+            <a:spLocks noGrp="1"/>
+          </p:cNvSpPr>
+          <p:nvPr>
+            <p:ph type="body" idx="1"/>
+          </p:nvPr>
+        </p:nvSpPr>
+        <p:spPr>
+          <a:xfrm>
+            <a:off x="170268" y="1125342"/>
+            <a:ext cx="11855669" cy="5732658"/>
+          </a:xfrm>
+          <a:prstGeom prst="rect">
+            <a:avLst/>
+          </a:prstGeom>
+          <a:noFill/>
+          <a:ln>
+            <a:noFill/>
+          </a:ln>
+        </p:spPr>
+        <p:txBody>
+          <a:bodyPr spcFirstLastPara="1" wrap="square" lIns="91425" tIns="45700" rIns="91425" bIns="45700" anchor="t" anchorCtr="0">
+            <a:noAutofit/>
+          </a:bodyPr>
+          <a:lstStyle/>
+          <a:p>
+            <a:pPr>
+              <a:buFont typeface="Arial" panose="020B0604020202020204" pitchFamily="34" charset="0"/>
+              <a:buChar char="•"/>
+            </a:pPr>
+            <a:endParaRPr lang="pt-BR" sz="2200" dirty="0">
+              <a:latin typeface="+mn-lt"/>
+            </a:endParaRPr>
+          </a:p>
+          <a:p>
+            <a:pPr>
+              <a:buFont typeface="Arial" panose="020B0604020202020204" pitchFamily="34" charset="0"/>
+              <a:buChar char="•"/>
+            </a:pPr>
+            <a:r>
+              <a:rPr lang="pt-BR" sz="2200" dirty="0">
+                <a:latin typeface="+mn-lt"/>
+              </a:rPr>
+              <a:t>Predição econômica: O PIB – Frisch (1929); </a:t>
+            </a:r>
+            <a:r>
+              <a:rPr lang="it-IT" sz="2200" dirty="0">
+                <a:latin typeface="+mn-lt"/>
+              </a:rPr>
+              <a:t>Laudon e Laudon (2022)  e</a:t>
+            </a:r>
+            <a:r>
+              <a:rPr lang="pt-BR" sz="2200" dirty="0">
+                <a:latin typeface="+mn-lt"/>
+              </a:rPr>
+              <a:t> IBGE (2026).</a:t>
+            </a:r>
+          </a:p>
+          <a:p>
+            <a:pPr>
+              <a:buFont typeface="Arial" panose="020B0604020202020204" pitchFamily="34" charset="0"/>
+              <a:buChar char="•"/>
+            </a:pPr>
+            <a:r>
+              <a:rPr lang="pt-BR" sz="2200" b="1" dirty="0">
+                <a:latin typeface="+mn-lt"/>
+              </a:rPr>
+              <a:t>Modelos tradicionais: Braga (2025); Rebelo (2022).</a:t>
+            </a:r>
+          </a:p>
+          <a:p>
+            <a:pPr>
+              <a:buFont typeface="Arial" panose="020B0604020202020204" pitchFamily="34" charset="0"/>
+              <a:buChar char="•"/>
+            </a:pPr>
+            <a:r>
+              <a:rPr lang="pt-BR" sz="2200" dirty="0">
+                <a:latin typeface="+mn-lt"/>
+              </a:rPr>
+              <a:t>ARIMA: Box e Jenkins (1970); Silva </a:t>
+            </a:r>
+            <a:r>
+              <a:rPr lang="pt-BR" sz="2200" i="1" dirty="0">
+                <a:latin typeface="+mn-lt"/>
+              </a:rPr>
+              <a:t>et al </a:t>
+            </a:r>
+            <a:r>
+              <a:rPr lang="pt-BR" sz="2200" dirty="0">
+                <a:latin typeface="+mn-lt"/>
+              </a:rPr>
+              <a:t>(2025); Li (2024).</a:t>
+            </a:r>
+          </a:p>
+          <a:p>
+            <a:pPr>
+              <a:buFont typeface="Arial" panose="020B0604020202020204" pitchFamily="34" charset="0"/>
+              <a:buChar char="•"/>
+            </a:pPr>
+            <a:r>
+              <a:rPr lang="pt-BR" sz="2200" dirty="0">
+                <a:latin typeface="+mn-lt"/>
+              </a:rPr>
+              <a:t>VAR: Sims (1980); Fialho </a:t>
+            </a:r>
+            <a:r>
+              <a:rPr lang="pt-BR" sz="2200" i="1" dirty="0">
+                <a:latin typeface="+mn-lt"/>
+              </a:rPr>
+              <a:t>et al</a:t>
+            </a:r>
+            <a:r>
+              <a:rPr lang="pt-BR" sz="2200" dirty="0">
+                <a:latin typeface="+mn-lt"/>
+              </a:rPr>
+              <a:t>. (2024); Oliveira e Junior (2024); Koop </a:t>
+            </a:r>
+            <a:r>
+              <a:rPr lang="pt-BR" sz="2200" i="1" dirty="0">
+                <a:latin typeface="+mn-lt"/>
+              </a:rPr>
+              <a:t>et al</a:t>
+            </a:r>
+            <a:r>
+              <a:rPr lang="pt-BR" sz="2200" dirty="0">
+                <a:latin typeface="+mn-lt"/>
+              </a:rPr>
+              <a:t>. (2025).</a:t>
+            </a:r>
+          </a:p>
+          <a:p>
+            <a:pPr>
+              <a:buFont typeface="Arial" panose="020B0604020202020204" pitchFamily="34" charset="0"/>
+              <a:buChar char="•"/>
+            </a:pPr>
+            <a:r>
+              <a:rPr lang="pt-BR" sz="2200" dirty="0">
+                <a:latin typeface="+mn-lt"/>
+              </a:rPr>
+              <a:t>MIDAS: Ghysels et al. (2004); Castelli (2022); Micheletti (2024).</a:t>
+            </a:r>
+          </a:p>
+          <a:p>
+            <a:pPr>
+              <a:buFont typeface="Arial" panose="020B0604020202020204" pitchFamily="34" charset="0"/>
+              <a:buChar char="•"/>
+            </a:pPr>
+            <a:r>
+              <a:rPr lang="pt-BR" sz="2200" dirty="0">
+                <a:latin typeface="+mn-lt"/>
+              </a:rPr>
+              <a:t>DFM: Geweke (1977); Doz e Fuleky (2019); Alves (2009); Moura et al. (2020).</a:t>
+            </a:r>
+          </a:p>
+          <a:p>
+            <a:pPr>
+              <a:buFont typeface="Arial" panose="020B0604020202020204" pitchFamily="34" charset="0"/>
+              <a:buChar char="•"/>
+            </a:pPr>
+            <a:r>
+              <a:rPr lang="pt-BR" sz="2200" dirty="0">
+                <a:latin typeface="+mn-lt"/>
+              </a:rPr>
+              <a:t>Modelos de IA: </a:t>
+            </a:r>
+            <a:r>
+              <a:rPr lang="pt-BR" sz="2200" dirty="0">
+                <a:solidFill>
+                  <a:schemeClr val="tx1"/>
+                </a:solidFill>
+                <a:latin typeface="+mn-lt"/>
+              </a:rPr>
+              <a:t>Carmo e Lopacinski (2023); Vasconcelos (2017) </a:t>
+            </a:r>
+          </a:p>
+          <a:p>
+            <a:pPr>
+              <a:buFont typeface="Arial" panose="020B0604020202020204" pitchFamily="34" charset="0"/>
+              <a:buChar char="•"/>
+            </a:pPr>
+            <a:r>
+              <a:rPr lang="pt-BR" sz="2200" dirty="0">
+                <a:latin typeface="+mn-lt"/>
+              </a:rPr>
+              <a:t>Redes Neurais: Rosenblatt (1958); Rumelhart et al. (1986); Ghosh e Ranjan (2023); Kava (2022); Ekman (2021); Carmo e Lopacinski (2023); Amaral et al. (2023).</a:t>
+            </a:r>
+          </a:p>
+          <a:p>
+            <a:pPr>
+              <a:buFont typeface="Arial" panose="020B0604020202020204" pitchFamily="34" charset="0"/>
+              <a:buChar char="•"/>
+            </a:pPr>
+            <a:r>
+              <a:rPr lang="pt-BR" sz="2200" dirty="0">
+                <a:latin typeface="+mn-lt"/>
+              </a:rPr>
+              <a:t>Florestas Aleatórias: Breiman (2001); Landowska et al. (2025); Lemos e Souza (2025).</a:t>
+            </a:r>
+          </a:p>
+        </p:txBody>
+      </p:sp>
+      <p:pic>
+        <p:nvPicPr>
+          <p:cNvPr id="98" name="Google Shape;98;p2" descr="Universidade Federal da Fronteira Sul – Wikipédia, a enciclopédia livre">
+            <a:extLst>
+              <a:ext uri="{FF2B5EF4-FFF2-40B4-BE49-F238E27FC236}">
+                <a16:creationId xmlns:a16="http://schemas.microsoft.com/office/drawing/2014/main" id="{2B9CFFB4-8948-B4ED-85D9-D80CBC3B6C88}"/>
+              </a:ext>
+            </a:extLst>
+          </p:cNvPr>
+          <p:cNvPicPr preferRelativeResize="0"/>
+          <p:nvPr/>
+        </p:nvPicPr>
+        <p:blipFill rotWithShape="1">
+          <a:blip r:embed="rId3">
+            <a:alphaModFix/>
+          </a:blip>
+          <a:srcRect/>
+          <a:stretch/>
+        </p:blipFill>
+        <p:spPr>
+          <a:xfrm>
+            <a:off x="10978329" y="18255"/>
+            <a:ext cx="975614" cy="1325563"/>
+          </a:xfrm>
+          <a:prstGeom prst="rect">
+            <a:avLst/>
+          </a:prstGeom>
+          <a:noFill/>
+          <a:ln>
+            <a:noFill/>
+          </a:ln>
+        </p:spPr>
+      </p:pic>
+      <p:sp>
+        <p:nvSpPr>
+          <p:cNvPr id="99" name="Google Shape;99;p2">
+            <a:extLst>
+              <a:ext uri="{FF2B5EF4-FFF2-40B4-BE49-F238E27FC236}">
+                <a16:creationId xmlns:a16="http://schemas.microsoft.com/office/drawing/2014/main" id="{F6D9AD49-9869-9CD2-DB15-3E17858BDB7F}"/>
+              </a:ext>
+            </a:extLst>
+          </p:cNvPr>
+          <p:cNvSpPr/>
+          <p:nvPr/>
+        </p:nvSpPr>
+        <p:spPr>
+          <a:xfrm>
+            <a:off x="170268" y="958543"/>
+            <a:ext cx="10515600" cy="63062"/>
+          </a:xfrm>
+          <a:prstGeom prst="rect">
+            <a:avLst/>
+          </a:prstGeom>
+          <a:solidFill>
+            <a:srgbClr val="548135"/>
+          </a:solidFill>
+          <a:ln w="12700" cap="flat" cmpd="sng">
+            <a:solidFill>
+              <a:srgbClr val="1C3052"/>
+            </a:solidFill>
+            <a:prstDash val="solid"/>
+            <a:miter lim="800000"/>
+            <a:headEnd type="none" w="sm" len="sm"/>
+            <a:tailEnd type="none" w="sm" len="sm"/>
+          </a:ln>
+        </p:spPr>
+        <p:txBody>
+          <a:bodyPr spcFirstLastPara="1" wrap="square" lIns="91425" tIns="45700" rIns="91425" bIns="45700" anchor="ctr" anchorCtr="0">
+            <a:noAutofit/>
+          </a:bodyPr>
+          <a:lstStyle/>
+          <a:p>
+            <a:pPr marL="0" marR="0" lvl="0" indent="0" algn="ctr" rtl="0">
+              <a:spcBef>
+                <a:spcPts val="0"/>
+              </a:spcBef>
+              <a:spcAft>
+                <a:spcPts val="0"/>
+              </a:spcAft>
+              <a:buNone/>
+            </a:pPr>
+            <a:endParaRPr sz="1800">
+              <a:solidFill>
+                <a:schemeClr val="lt1"/>
+              </a:solidFill>
+              <a:latin typeface="Calibri"/>
+              <a:ea typeface="Calibri"/>
+              <a:cs typeface="Calibri"/>
+              <a:sym typeface="Calibri"/>
+            </a:endParaRPr>
+          </a:p>
+        </p:txBody>
+      </p:sp>
+      <p:sp>
+        <p:nvSpPr>
+          <p:cNvPr id="100" name="Google Shape;100;p2">
+            <a:extLst>
+              <a:ext uri="{FF2B5EF4-FFF2-40B4-BE49-F238E27FC236}">
+                <a16:creationId xmlns:a16="http://schemas.microsoft.com/office/drawing/2014/main" id="{53B1E86B-7B07-1CA8-F5A8-BB787E9038BF}"/>
+              </a:ext>
+            </a:extLst>
+          </p:cNvPr>
+          <p:cNvSpPr txBox="1">
+            <a:spLocks noGrp="1"/>
+          </p:cNvSpPr>
+          <p:nvPr>
+            <p:ph type="sldNum" idx="12"/>
+          </p:nvPr>
+        </p:nvSpPr>
+        <p:spPr>
+          <a:xfrm>
+            <a:off x="9440152" y="6492875"/>
+            <a:ext cx="2743200" cy="365125"/>
+          </a:xfrm>
+          <a:prstGeom prst="rect">
+            <a:avLst/>
+          </a:prstGeom>
+          <a:noFill/>
+          <a:ln>
+            <a:noFill/>
+          </a:ln>
+        </p:spPr>
+        <p:txBody>
+          <a:bodyPr spcFirstLastPara="1" wrap="square" lIns="91425" tIns="45700" rIns="91425" bIns="45700" anchor="ctr" anchorCtr="0">
+            <a:noAutofit/>
+          </a:bodyPr>
+          <a:lstStyle/>
+          <a:p>
+            <a:pPr marL="0" lvl="0" indent="0" algn="r" rtl="0">
+              <a:spcBef>
+                <a:spcPts val="0"/>
+              </a:spcBef>
+              <a:spcAft>
+                <a:spcPts val="0"/>
+              </a:spcAft>
+              <a:buNone/>
+            </a:pPr>
+            <a:fld id="{00000000-1234-1234-1234-123412341234}" type="slidenum">
+              <a:rPr lang="pt-BR" sz="1800"/>
+              <a:t>10</a:t>
+            </a:fld>
+            <a:endParaRPr sz="1800" dirty="0"/>
+          </a:p>
+        </p:txBody>
+      </p:sp>
+    </p:spTree>
+    <p:extLst>
+      <p:ext uri="{BB962C8B-B14F-4D97-AF65-F5344CB8AC3E}">
+        <p14:creationId xmlns:p14="http://schemas.microsoft.com/office/powerpoint/2010/main" val="1543968211"/>
+      </p:ext>
+    </p:extLst>
+  </p:cSld>
+  <p:clrMapOvr>
+    <a:masterClrMapping/>
+  </p:clrMapOvr>
+</p:sld>
+</file>
+
+<file path=ppt/slides/slide11.xml><?xml version="1.0" encoding="utf-8"?>
+<p:sld xmlns:a="http://schemas.openxmlformats.org/drawingml/2006/main" xmlns:r="http://schemas.openxmlformats.org/officeDocument/2006/relationships" xmlns:p="http://schemas.openxmlformats.org/presentationml/2006/main">
+  <p:cSld>
+    <p:spTree>
+      <p:nvGrpSpPr>
+        <p:cNvPr id="1" name="Shape 95">
+          <a:extLst>
+            <a:ext uri="{FF2B5EF4-FFF2-40B4-BE49-F238E27FC236}">
+              <a16:creationId xmlns:a16="http://schemas.microsoft.com/office/drawing/2014/main" id="{B566F343-055F-5FAB-8169-75D17DED3B6D}"/>
+            </a:ext>
+          </a:extLst>
+        </p:cNvPr>
+        <p:cNvGrpSpPr/>
+        <p:nvPr/>
+      </p:nvGrpSpPr>
+      <p:grpSpPr>
+        <a:xfrm>
+          <a:off x="0" y="0"/>
+          <a:ext cx="0" cy="0"/>
+          <a:chOff x="0" y="0"/>
+          <a:chExt cx="0" cy="0"/>
+        </a:xfrm>
+      </p:grpSpPr>
+      <p:sp>
+        <p:nvSpPr>
+          <p:cNvPr id="96" name="Google Shape;96;p2">
+            <a:extLst>
+              <a:ext uri="{FF2B5EF4-FFF2-40B4-BE49-F238E27FC236}">
+                <a16:creationId xmlns:a16="http://schemas.microsoft.com/office/drawing/2014/main" id="{EEC339BD-09A9-EC85-32A5-A12D59A51F8A}"/>
+              </a:ext>
+            </a:extLst>
+          </p:cNvPr>
+          <p:cNvSpPr txBox="1">
+            <a:spLocks noGrp="1"/>
+          </p:cNvSpPr>
+          <p:nvPr>
+            <p:ph type="title"/>
+          </p:nvPr>
+        </p:nvSpPr>
+        <p:spPr>
+          <a:xfrm>
+            <a:off x="170268" y="190105"/>
+            <a:ext cx="10329566" cy="768438"/>
+          </a:xfrm>
+          <a:prstGeom prst="rect">
+            <a:avLst/>
+          </a:prstGeom>
+          <a:noFill/>
+          <a:ln>
+            <a:noFill/>
+          </a:ln>
+        </p:spPr>
+        <p:txBody>
+          <a:bodyPr spcFirstLastPara="1" wrap="square" lIns="91425" tIns="45700" rIns="91425" bIns="45700" anchor="ctr" anchorCtr="0">
+            <a:noAutofit/>
+          </a:bodyPr>
+          <a:lstStyle/>
+          <a:p>
+            <a:pPr lvl="0">
+              <a:buSzPts val="4400"/>
+            </a:pPr>
+            <a:r>
+              <a:rPr lang="pt-BR" sz="3200" b="1" dirty="0">
+                <a:latin typeface="+mj-lt"/>
+              </a:rPr>
+              <a:t>Revisão</a:t>
+            </a:r>
+            <a:r>
+              <a:rPr lang="pt-BR" sz="3200" dirty="0"/>
+              <a:t> </a:t>
+            </a:r>
+            <a:r>
+              <a:rPr lang="pt-BR" sz="3200" b="1" dirty="0">
+                <a:latin typeface="+mj-lt"/>
+              </a:rPr>
+              <a:t>de literatura</a:t>
+            </a:r>
+            <a:endParaRPr sz="3200" b="1" dirty="0">
+              <a:latin typeface="+mj-lt"/>
+            </a:endParaRPr>
+          </a:p>
+        </p:txBody>
+      </p:sp>
+      <p:sp>
+        <p:nvSpPr>
+          <p:cNvPr id="97" name="Google Shape;97;p2">
+            <a:extLst>
+              <a:ext uri="{FF2B5EF4-FFF2-40B4-BE49-F238E27FC236}">
+                <a16:creationId xmlns:a16="http://schemas.microsoft.com/office/drawing/2014/main" id="{254F87FF-7D39-3447-77B7-2A20F6F71F0B}"/>
+              </a:ext>
+            </a:extLst>
+          </p:cNvPr>
+          <p:cNvSpPr txBox="1">
+            <a:spLocks noGrp="1"/>
+          </p:cNvSpPr>
+          <p:nvPr>
+            <p:ph type="body" idx="1"/>
+          </p:nvPr>
+        </p:nvSpPr>
+        <p:spPr>
+          <a:xfrm>
+            <a:off x="170268" y="1125342"/>
+            <a:ext cx="11855669" cy="5732658"/>
+          </a:xfrm>
+          <a:prstGeom prst="rect">
+            <a:avLst/>
+          </a:prstGeom>
+          <a:noFill/>
+          <a:ln>
+            <a:noFill/>
+          </a:ln>
+        </p:spPr>
+        <p:txBody>
+          <a:bodyPr spcFirstLastPara="1" wrap="square" lIns="91425" tIns="45700" rIns="91425" bIns="45700" anchor="t" anchorCtr="0">
+            <a:noAutofit/>
+          </a:bodyPr>
+          <a:lstStyle/>
+          <a:p>
+            <a:pPr>
+              <a:buFont typeface="Arial" panose="020B0604020202020204" pitchFamily="34" charset="0"/>
+              <a:buChar char="•"/>
+            </a:pPr>
+            <a:endParaRPr lang="pt-BR" sz="2200" dirty="0">
+              <a:latin typeface="+mn-lt"/>
+            </a:endParaRPr>
+          </a:p>
+          <a:p>
+            <a:pPr>
+              <a:buFont typeface="Arial" panose="020B0604020202020204" pitchFamily="34" charset="0"/>
+              <a:buChar char="•"/>
+            </a:pPr>
+            <a:r>
+              <a:rPr lang="pt-BR" sz="2200" dirty="0">
+                <a:latin typeface="+mn-lt"/>
+              </a:rPr>
+              <a:t>Predição econômica: O PIB – Frisch (1929); </a:t>
+            </a:r>
+            <a:r>
+              <a:rPr lang="it-IT" sz="2200" dirty="0">
+                <a:latin typeface="+mn-lt"/>
+              </a:rPr>
+              <a:t>Laudon e Laudon (2022)  e</a:t>
+            </a:r>
+            <a:r>
+              <a:rPr lang="pt-BR" sz="2200" dirty="0">
+                <a:latin typeface="+mn-lt"/>
+              </a:rPr>
+              <a:t> IBGE (2026).</a:t>
+            </a:r>
+          </a:p>
+          <a:p>
+            <a:pPr>
+              <a:buFont typeface="Arial" panose="020B0604020202020204" pitchFamily="34" charset="0"/>
+              <a:buChar char="•"/>
+            </a:pPr>
+            <a:r>
+              <a:rPr lang="pt-BR" sz="2200" dirty="0">
+                <a:latin typeface="+mn-lt"/>
+              </a:rPr>
+              <a:t>Modelos tradicionais: Braga (2025); Rebelo (2022).</a:t>
+            </a:r>
+          </a:p>
+          <a:p>
+            <a:pPr>
+              <a:buFont typeface="Arial" panose="020B0604020202020204" pitchFamily="34" charset="0"/>
+              <a:buChar char="•"/>
+            </a:pPr>
+            <a:r>
+              <a:rPr lang="pt-BR" sz="2200" b="1" dirty="0">
+                <a:latin typeface="+mn-lt"/>
+              </a:rPr>
+              <a:t>ARIMA: Box e Jenkins (1970); Silva </a:t>
+            </a:r>
+            <a:r>
+              <a:rPr lang="pt-BR" sz="2200" b="1" i="1" dirty="0">
+                <a:latin typeface="+mn-lt"/>
+              </a:rPr>
+              <a:t>et al </a:t>
+            </a:r>
+            <a:r>
+              <a:rPr lang="pt-BR" sz="2200" b="1" dirty="0">
+                <a:latin typeface="+mn-lt"/>
+              </a:rPr>
+              <a:t>(2025); Li (2024).</a:t>
+            </a:r>
+          </a:p>
+          <a:p>
+            <a:pPr>
+              <a:buFont typeface="Arial" panose="020B0604020202020204" pitchFamily="34" charset="0"/>
+              <a:buChar char="•"/>
+            </a:pPr>
+            <a:r>
+              <a:rPr lang="pt-BR" sz="2200" dirty="0">
+                <a:latin typeface="+mn-lt"/>
+              </a:rPr>
+              <a:t>VAR: </a:t>
+            </a:r>
+            <a:r>
+              <a:rPr lang="pt-BR" sz="2200" dirty="0" err="1">
+                <a:latin typeface="+mn-lt"/>
+              </a:rPr>
+              <a:t>Sims</a:t>
+            </a:r>
+            <a:r>
+              <a:rPr lang="pt-BR" sz="2200" dirty="0">
+                <a:latin typeface="+mn-lt"/>
+              </a:rPr>
+              <a:t> (1980); Fialho </a:t>
+            </a:r>
+            <a:r>
+              <a:rPr lang="pt-BR" sz="2200" i="1" dirty="0">
+                <a:latin typeface="+mn-lt"/>
+              </a:rPr>
+              <a:t>et al</a:t>
+            </a:r>
+            <a:r>
+              <a:rPr lang="pt-BR" sz="2200" dirty="0">
+                <a:latin typeface="+mn-lt"/>
+              </a:rPr>
+              <a:t>. (2024); Oliveira e Junior (2024); </a:t>
+            </a:r>
+            <a:r>
+              <a:rPr lang="pt-BR" sz="2200" dirty="0" err="1">
+                <a:latin typeface="+mn-lt"/>
+              </a:rPr>
+              <a:t>Koop</a:t>
+            </a:r>
+            <a:r>
+              <a:rPr lang="pt-BR" sz="2200" dirty="0">
+                <a:latin typeface="+mn-lt"/>
+              </a:rPr>
+              <a:t> </a:t>
+            </a:r>
+            <a:r>
+              <a:rPr lang="pt-BR" sz="2200" i="1" dirty="0">
+                <a:latin typeface="+mn-lt"/>
+              </a:rPr>
+              <a:t>et al</a:t>
+            </a:r>
+            <a:r>
+              <a:rPr lang="pt-BR" sz="2200" dirty="0">
+                <a:latin typeface="+mn-lt"/>
+              </a:rPr>
+              <a:t>. (2025).</a:t>
+            </a:r>
+          </a:p>
+          <a:p>
+            <a:pPr>
+              <a:buFont typeface="Arial" panose="020B0604020202020204" pitchFamily="34" charset="0"/>
+              <a:buChar char="•"/>
+            </a:pPr>
+            <a:r>
+              <a:rPr lang="pt-BR" sz="2200" dirty="0">
+                <a:latin typeface="+mn-lt"/>
+              </a:rPr>
+              <a:t>MIDAS: Ghysels et al. (2004); Castelli (2022); Micheletti (2024).</a:t>
+            </a:r>
+          </a:p>
+          <a:p>
+            <a:pPr>
+              <a:buFont typeface="Arial" panose="020B0604020202020204" pitchFamily="34" charset="0"/>
+              <a:buChar char="•"/>
+            </a:pPr>
+            <a:r>
+              <a:rPr lang="pt-BR" sz="2200" dirty="0">
+                <a:latin typeface="+mn-lt"/>
+              </a:rPr>
+              <a:t>DFM: Geweke (1977); Doz e Fuleky (2019); Alves (2009); Moura et al. (2020).</a:t>
+            </a:r>
+          </a:p>
+          <a:p>
+            <a:pPr>
+              <a:buFont typeface="Arial" panose="020B0604020202020204" pitchFamily="34" charset="0"/>
+              <a:buChar char="•"/>
+            </a:pPr>
+            <a:r>
+              <a:rPr lang="pt-BR" sz="2200" dirty="0">
+                <a:latin typeface="+mn-lt"/>
+              </a:rPr>
+              <a:t>Modelos de IA: </a:t>
+            </a:r>
+            <a:r>
+              <a:rPr lang="pt-BR" sz="2200" dirty="0">
+                <a:solidFill>
+                  <a:schemeClr val="tx1"/>
+                </a:solidFill>
+                <a:latin typeface="+mn-lt"/>
+              </a:rPr>
+              <a:t>Carmo e Lopacinski (2023); Vasconcelos (2017) </a:t>
+            </a:r>
+          </a:p>
+          <a:p>
+            <a:pPr>
+              <a:buFont typeface="Arial" panose="020B0604020202020204" pitchFamily="34" charset="0"/>
+              <a:buChar char="•"/>
+            </a:pPr>
+            <a:r>
+              <a:rPr lang="pt-BR" sz="2200" dirty="0">
+                <a:latin typeface="+mn-lt"/>
+              </a:rPr>
+              <a:t>Redes Neurais: Rosenblatt (1958); Rumelhart et al. (1986); Ghosh e Ranjan (2023); Kava (2022); Ekman (2021); Carmo e Lopacinski (2023); Amaral et al. (2023).</a:t>
+            </a:r>
+          </a:p>
+          <a:p>
+            <a:pPr>
+              <a:buFont typeface="Arial" panose="020B0604020202020204" pitchFamily="34" charset="0"/>
+              <a:buChar char="•"/>
+            </a:pPr>
+            <a:r>
+              <a:rPr lang="pt-BR" sz="2200" dirty="0">
+                <a:latin typeface="+mn-lt"/>
+              </a:rPr>
+              <a:t>Florestas Aleatórias: Breiman (2001); Landowska et al. (2025); Lemos e Souza (2025).</a:t>
+            </a:r>
+          </a:p>
+        </p:txBody>
+      </p:sp>
+      <p:pic>
+        <p:nvPicPr>
+          <p:cNvPr id="98" name="Google Shape;98;p2" descr="Universidade Federal da Fronteira Sul – Wikipédia, a enciclopédia livre">
+            <a:extLst>
+              <a:ext uri="{FF2B5EF4-FFF2-40B4-BE49-F238E27FC236}">
+                <a16:creationId xmlns:a16="http://schemas.microsoft.com/office/drawing/2014/main" id="{44C0284A-B45E-8460-C22C-C1DC6674E2FA}"/>
+              </a:ext>
+            </a:extLst>
+          </p:cNvPr>
+          <p:cNvPicPr preferRelativeResize="0"/>
+          <p:nvPr/>
+        </p:nvPicPr>
+        <p:blipFill rotWithShape="1">
+          <a:blip r:embed="rId3">
+            <a:alphaModFix/>
+          </a:blip>
+          <a:srcRect/>
+          <a:stretch/>
+        </p:blipFill>
+        <p:spPr>
+          <a:xfrm>
+            <a:off x="10978329" y="18255"/>
+            <a:ext cx="975614" cy="1325563"/>
+          </a:xfrm>
+          <a:prstGeom prst="rect">
+            <a:avLst/>
+          </a:prstGeom>
+          <a:noFill/>
+          <a:ln>
+            <a:noFill/>
+          </a:ln>
+        </p:spPr>
+      </p:pic>
+      <p:sp>
+        <p:nvSpPr>
+          <p:cNvPr id="99" name="Google Shape;99;p2">
+            <a:extLst>
+              <a:ext uri="{FF2B5EF4-FFF2-40B4-BE49-F238E27FC236}">
+                <a16:creationId xmlns:a16="http://schemas.microsoft.com/office/drawing/2014/main" id="{4AB01632-80E3-25F5-1573-7BAC8CBA545E}"/>
+              </a:ext>
+            </a:extLst>
+          </p:cNvPr>
+          <p:cNvSpPr/>
+          <p:nvPr/>
+        </p:nvSpPr>
+        <p:spPr>
+          <a:xfrm>
+            <a:off x="170268" y="958543"/>
+            <a:ext cx="10515600" cy="63062"/>
+          </a:xfrm>
+          <a:prstGeom prst="rect">
+            <a:avLst/>
+          </a:prstGeom>
+          <a:solidFill>
+            <a:srgbClr val="548135"/>
+          </a:solidFill>
+          <a:ln w="12700" cap="flat" cmpd="sng">
+            <a:solidFill>
+              <a:srgbClr val="1C3052"/>
+            </a:solidFill>
+            <a:prstDash val="solid"/>
+            <a:miter lim="800000"/>
+            <a:headEnd type="none" w="sm" len="sm"/>
+            <a:tailEnd type="none" w="sm" len="sm"/>
+          </a:ln>
+        </p:spPr>
+        <p:txBody>
+          <a:bodyPr spcFirstLastPara="1" wrap="square" lIns="91425" tIns="45700" rIns="91425" bIns="45700" anchor="ctr" anchorCtr="0">
+            <a:noAutofit/>
+          </a:bodyPr>
+          <a:lstStyle/>
+          <a:p>
+            <a:pPr marL="0" marR="0" lvl="0" indent="0" algn="ctr" rtl="0">
+              <a:spcBef>
+                <a:spcPts val="0"/>
+              </a:spcBef>
+              <a:spcAft>
+                <a:spcPts val="0"/>
+              </a:spcAft>
+              <a:buNone/>
+            </a:pPr>
+            <a:endParaRPr sz="1800">
+              <a:solidFill>
+                <a:schemeClr val="lt1"/>
+              </a:solidFill>
+              <a:latin typeface="Calibri"/>
+              <a:ea typeface="Calibri"/>
+              <a:cs typeface="Calibri"/>
+              <a:sym typeface="Calibri"/>
+            </a:endParaRPr>
+          </a:p>
+        </p:txBody>
+      </p:sp>
+      <p:sp>
+        <p:nvSpPr>
+          <p:cNvPr id="100" name="Google Shape;100;p2">
+            <a:extLst>
+              <a:ext uri="{FF2B5EF4-FFF2-40B4-BE49-F238E27FC236}">
+                <a16:creationId xmlns:a16="http://schemas.microsoft.com/office/drawing/2014/main" id="{1EFAB09D-17A2-0754-2EFF-3C32D80C5D4E}"/>
+              </a:ext>
+            </a:extLst>
+          </p:cNvPr>
+          <p:cNvSpPr txBox="1">
+            <a:spLocks noGrp="1"/>
+          </p:cNvSpPr>
+          <p:nvPr>
+            <p:ph type="sldNum" idx="12"/>
+          </p:nvPr>
+        </p:nvSpPr>
+        <p:spPr>
+          <a:xfrm>
+            <a:off x="9440152" y="6492875"/>
+            <a:ext cx="2743200" cy="365125"/>
+          </a:xfrm>
+          <a:prstGeom prst="rect">
+            <a:avLst/>
+          </a:prstGeom>
+          <a:noFill/>
+          <a:ln>
+            <a:noFill/>
+          </a:ln>
+        </p:spPr>
+        <p:txBody>
+          <a:bodyPr spcFirstLastPara="1" wrap="square" lIns="91425" tIns="45700" rIns="91425" bIns="45700" anchor="ctr" anchorCtr="0">
+            <a:noAutofit/>
+          </a:bodyPr>
+          <a:lstStyle/>
+          <a:p>
+            <a:pPr marL="0" lvl="0" indent="0" algn="r" rtl="0">
+              <a:spcBef>
+                <a:spcPts val="0"/>
+              </a:spcBef>
+              <a:spcAft>
+                <a:spcPts val="0"/>
+              </a:spcAft>
+              <a:buNone/>
+            </a:pPr>
+            <a:fld id="{00000000-1234-1234-1234-123412341234}" type="slidenum">
+              <a:rPr lang="pt-BR" sz="1800"/>
+              <a:t>11</a:t>
+            </a:fld>
+            <a:endParaRPr sz="1800" dirty="0"/>
+          </a:p>
+        </p:txBody>
+      </p:sp>
+    </p:spTree>
+    <p:extLst>
+      <p:ext uri="{BB962C8B-B14F-4D97-AF65-F5344CB8AC3E}">
+        <p14:creationId xmlns:p14="http://schemas.microsoft.com/office/powerpoint/2010/main" val="4263461998"/>
+      </p:ext>
+    </p:extLst>
+  </p:cSld>
+  <p:clrMapOvr>
+    <a:masterClrMapping/>
+  </p:clrMapOvr>
+</p:sld>
+</file>
+
+<file path=ppt/slides/slide12.xml><?xml version="1.0" encoding="utf-8"?>
+<p:sld xmlns:a="http://schemas.openxmlformats.org/drawingml/2006/main" xmlns:r="http://schemas.openxmlformats.org/officeDocument/2006/relationships" xmlns:p="http://schemas.openxmlformats.org/presentationml/2006/main">
+  <p:cSld>
+    <p:spTree>
+      <p:nvGrpSpPr>
+        <p:cNvPr id="1" name="Shape 95">
+          <a:extLst>
+            <a:ext uri="{FF2B5EF4-FFF2-40B4-BE49-F238E27FC236}">
+              <a16:creationId xmlns:a16="http://schemas.microsoft.com/office/drawing/2014/main" id="{22DED526-854A-9948-642F-9266CE316FCB}"/>
+            </a:ext>
+          </a:extLst>
+        </p:cNvPr>
+        <p:cNvGrpSpPr/>
+        <p:nvPr/>
+      </p:nvGrpSpPr>
+      <p:grpSpPr>
+        <a:xfrm>
+          <a:off x="0" y="0"/>
+          <a:ext cx="0" cy="0"/>
+          <a:chOff x="0" y="0"/>
+          <a:chExt cx="0" cy="0"/>
+        </a:xfrm>
+      </p:grpSpPr>
+      <p:sp>
+        <p:nvSpPr>
+          <p:cNvPr id="96" name="Google Shape;96;p2">
+            <a:extLst>
+              <a:ext uri="{FF2B5EF4-FFF2-40B4-BE49-F238E27FC236}">
+                <a16:creationId xmlns:a16="http://schemas.microsoft.com/office/drawing/2014/main" id="{E5DD0DCE-7A8D-F789-7325-D1074C5887E7}"/>
+              </a:ext>
+            </a:extLst>
+          </p:cNvPr>
+          <p:cNvSpPr txBox="1">
+            <a:spLocks noGrp="1"/>
+          </p:cNvSpPr>
+          <p:nvPr>
+            <p:ph type="title"/>
+          </p:nvPr>
+        </p:nvSpPr>
+        <p:spPr>
+          <a:xfrm>
+            <a:off x="170268" y="190105"/>
+            <a:ext cx="10329566" cy="768438"/>
+          </a:xfrm>
+          <a:prstGeom prst="rect">
+            <a:avLst/>
+          </a:prstGeom>
+          <a:noFill/>
+          <a:ln>
+            <a:noFill/>
+          </a:ln>
+        </p:spPr>
+        <p:txBody>
+          <a:bodyPr spcFirstLastPara="1" wrap="square" lIns="91425" tIns="45700" rIns="91425" bIns="45700" anchor="ctr" anchorCtr="0">
+            <a:noAutofit/>
+          </a:bodyPr>
+          <a:lstStyle/>
+          <a:p>
+            <a:pPr lvl="0">
+              <a:buSzPts val="4400"/>
+            </a:pPr>
+            <a:r>
+              <a:rPr lang="pt-BR" sz="3200" b="1" dirty="0">
+                <a:latin typeface="+mj-lt"/>
+              </a:rPr>
+              <a:t>Revisão</a:t>
+            </a:r>
+            <a:r>
+              <a:rPr lang="pt-BR" sz="3200" dirty="0"/>
+              <a:t> </a:t>
+            </a:r>
+            <a:r>
+              <a:rPr lang="pt-BR" sz="3200" b="1" dirty="0">
+                <a:latin typeface="+mj-lt"/>
+              </a:rPr>
+              <a:t>de literatura</a:t>
+            </a:r>
+            <a:endParaRPr sz="3200" b="1" dirty="0">
+              <a:latin typeface="+mj-lt"/>
+            </a:endParaRPr>
+          </a:p>
+        </p:txBody>
+      </p:sp>
+      <p:sp>
+        <p:nvSpPr>
+          <p:cNvPr id="97" name="Google Shape;97;p2">
+            <a:extLst>
+              <a:ext uri="{FF2B5EF4-FFF2-40B4-BE49-F238E27FC236}">
+                <a16:creationId xmlns:a16="http://schemas.microsoft.com/office/drawing/2014/main" id="{4D3CB55C-93C6-6127-AE9B-DB199B67B7B2}"/>
+              </a:ext>
+            </a:extLst>
+          </p:cNvPr>
+          <p:cNvSpPr txBox="1">
+            <a:spLocks noGrp="1"/>
+          </p:cNvSpPr>
+          <p:nvPr>
+            <p:ph type="body" idx="1"/>
+          </p:nvPr>
+        </p:nvSpPr>
+        <p:spPr>
+          <a:xfrm>
+            <a:off x="170268" y="1125342"/>
+            <a:ext cx="11855669" cy="5732658"/>
+          </a:xfrm>
+          <a:prstGeom prst="rect">
+            <a:avLst/>
+          </a:prstGeom>
+          <a:noFill/>
+          <a:ln>
+            <a:noFill/>
+          </a:ln>
+        </p:spPr>
+        <p:txBody>
+          <a:bodyPr spcFirstLastPara="1" wrap="square" lIns="91425" tIns="45700" rIns="91425" bIns="45700" anchor="t" anchorCtr="0">
+            <a:noAutofit/>
+          </a:bodyPr>
+          <a:lstStyle/>
+          <a:p>
+            <a:pPr>
+              <a:buFont typeface="Arial" panose="020B0604020202020204" pitchFamily="34" charset="0"/>
+              <a:buChar char="•"/>
+            </a:pPr>
+            <a:endParaRPr lang="pt-BR" sz="2200" dirty="0">
+              <a:latin typeface="+mn-lt"/>
+            </a:endParaRPr>
+          </a:p>
+          <a:p>
+            <a:pPr>
+              <a:buFont typeface="Arial" panose="020B0604020202020204" pitchFamily="34" charset="0"/>
+              <a:buChar char="•"/>
+            </a:pPr>
+            <a:r>
+              <a:rPr lang="pt-BR" sz="2200" dirty="0">
+                <a:latin typeface="+mn-lt"/>
+              </a:rPr>
+              <a:t>Predição econômica: O PIB – Frisch (1929); </a:t>
+            </a:r>
+            <a:r>
+              <a:rPr lang="it-IT" sz="2200" dirty="0">
+                <a:latin typeface="+mn-lt"/>
+              </a:rPr>
+              <a:t>Laudon e Laudon (2022)  e</a:t>
+            </a:r>
+            <a:r>
+              <a:rPr lang="pt-BR" sz="2200" dirty="0">
+                <a:latin typeface="+mn-lt"/>
+              </a:rPr>
+              <a:t> IBGE (2026).</a:t>
+            </a:r>
+          </a:p>
+          <a:p>
+            <a:pPr>
+              <a:buFont typeface="Arial" panose="020B0604020202020204" pitchFamily="34" charset="0"/>
+              <a:buChar char="•"/>
+            </a:pPr>
+            <a:r>
+              <a:rPr lang="pt-BR" sz="2200" dirty="0">
+                <a:latin typeface="+mn-lt"/>
+              </a:rPr>
+              <a:t>Modelos tradicionais: Braga (2025); Rebelo (2022).</a:t>
+            </a:r>
+          </a:p>
+          <a:p>
+            <a:pPr>
+              <a:buFont typeface="Arial" panose="020B0604020202020204" pitchFamily="34" charset="0"/>
+              <a:buChar char="•"/>
+            </a:pPr>
+            <a:r>
+              <a:rPr lang="pt-BR" sz="2200" dirty="0">
+                <a:latin typeface="+mn-lt"/>
+              </a:rPr>
+              <a:t>ARIMA: Box e Jenkins (1970); Silva </a:t>
+            </a:r>
+            <a:r>
+              <a:rPr lang="pt-BR" sz="2200" i="1" dirty="0">
+                <a:latin typeface="+mn-lt"/>
+              </a:rPr>
+              <a:t>et al </a:t>
+            </a:r>
+            <a:r>
+              <a:rPr lang="pt-BR" sz="2200" dirty="0">
+                <a:latin typeface="+mn-lt"/>
+              </a:rPr>
+              <a:t>(2025); Li (2024).</a:t>
+            </a:r>
+          </a:p>
+          <a:p>
+            <a:pPr>
+              <a:buFont typeface="Arial" panose="020B0604020202020204" pitchFamily="34" charset="0"/>
+              <a:buChar char="•"/>
+            </a:pPr>
+            <a:r>
+              <a:rPr lang="pt-BR" sz="2200" b="1" dirty="0">
+                <a:latin typeface="+mn-lt"/>
+              </a:rPr>
+              <a:t>VAR: </a:t>
+            </a:r>
+            <a:r>
+              <a:rPr lang="pt-BR" sz="2200" b="1" dirty="0" err="1">
+                <a:latin typeface="+mn-lt"/>
+              </a:rPr>
+              <a:t>Sims</a:t>
+            </a:r>
+            <a:r>
+              <a:rPr lang="pt-BR" sz="2200" b="1" dirty="0">
+                <a:latin typeface="+mn-lt"/>
+              </a:rPr>
+              <a:t> (1980); Fialho </a:t>
+            </a:r>
+            <a:r>
+              <a:rPr lang="pt-BR" sz="2200" b="1" i="1" dirty="0">
+                <a:latin typeface="+mn-lt"/>
+              </a:rPr>
+              <a:t>et al</a:t>
+            </a:r>
+            <a:r>
+              <a:rPr lang="pt-BR" sz="2200" b="1" dirty="0">
+                <a:latin typeface="+mn-lt"/>
+              </a:rPr>
+              <a:t>. (2024); Oliveira e Junior (2024); </a:t>
+            </a:r>
+            <a:r>
+              <a:rPr lang="pt-BR" sz="2200" b="1" dirty="0" err="1">
+                <a:latin typeface="+mn-lt"/>
+              </a:rPr>
+              <a:t>Koop</a:t>
+            </a:r>
+            <a:r>
+              <a:rPr lang="pt-BR" sz="2200" b="1" dirty="0">
+                <a:latin typeface="+mn-lt"/>
+              </a:rPr>
+              <a:t> </a:t>
+            </a:r>
+            <a:r>
+              <a:rPr lang="pt-BR" sz="2200" b="1" i="1" dirty="0">
+                <a:latin typeface="+mn-lt"/>
+              </a:rPr>
+              <a:t>et al</a:t>
+            </a:r>
+            <a:r>
+              <a:rPr lang="pt-BR" sz="2200" b="1" dirty="0">
+                <a:latin typeface="+mn-lt"/>
+              </a:rPr>
+              <a:t>. (2025).</a:t>
+            </a:r>
+          </a:p>
+          <a:p>
+            <a:pPr>
+              <a:buFont typeface="Arial" panose="020B0604020202020204" pitchFamily="34" charset="0"/>
+              <a:buChar char="•"/>
+            </a:pPr>
+            <a:r>
+              <a:rPr lang="pt-BR" sz="2200" dirty="0">
+                <a:latin typeface="+mn-lt"/>
+              </a:rPr>
+              <a:t>MIDAS: Ghysels et al. (2004); Castelli (2022); Micheletti (2024).</a:t>
+            </a:r>
+          </a:p>
+          <a:p>
+            <a:pPr>
+              <a:buFont typeface="Arial" panose="020B0604020202020204" pitchFamily="34" charset="0"/>
+              <a:buChar char="•"/>
+            </a:pPr>
+            <a:r>
+              <a:rPr lang="pt-BR" sz="2200" dirty="0">
+                <a:latin typeface="+mn-lt"/>
+              </a:rPr>
+              <a:t>DFM: Geweke (1977); Doz e Fuleky (2019); Alves (2009); Moura et al. (2020).</a:t>
+            </a:r>
+          </a:p>
+          <a:p>
+            <a:pPr>
+              <a:buFont typeface="Arial" panose="020B0604020202020204" pitchFamily="34" charset="0"/>
+              <a:buChar char="•"/>
+            </a:pPr>
+            <a:r>
+              <a:rPr lang="pt-BR" sz="2200" dirty="0">
+                <a:latin typeface="+mn-lt"/>
+              </a:rPr>
+              <a:t>Modelos de IA: </a:t>
+            </a:r>
+            <a:r>
+              <a:rPr lang="pt-BR" sz="2200" dirty="0">
+                <a:solidFill>
+                  <a:schemeClr val="tx1"/>
+                </a:solidFill>
+                <a:latin typeface="+mn-lt"/>
+              </a:rPr>
+              <a:t>Carmo e Lopacinski (2023); Vasconcelos (2017) </a:t>
+            </a:r>
+          </a:p>
+          <a:p>
+            <a:pPr>
+              <a:buFont typeface="Arial" panose="020B0604020202020204" pitchFamily="34" charset="0"/>
+              <a:buChar char="•"/>
+            </a:pPr>
+            <a:r>
+              <a:rPr lang="pt-BR" sz="2200" dirty="0">
+                <a:latin typeface="+mn-lt"/>
+              </a:rPr>
+              <a:t>Redes Neurais: Rosenblatt (1958); Rumelhart et al. (1986); Ghosh e Ranjan (2023); Kava (2022); Ekman (2021); Carmo e Lopacinski (2023); Amaral et al. (2023).</a:t>
+            </a:r>
+          </a:p>
+          <a:p>
+            <a:pPr>
+              <a:buFont typeface="Arial" panose="020B0604020202020204" pitchFamily="34" charset="0"/>
+              <a:buChar char="•"/>
+            </a:pPr>
+            <a:r>
+              <a:rPr lang="pt-BR" sz="2200" dirty="0">
+                <a:latin typeface="+mn-lt"/>
+              </a:rPr>
+              <a:t>Florestas Aleatórias: Breiman (2001); Landowska et al. (2025); Lemos e Souza (2025).</a:t>
+            </a:r>
+          </a:p>
+        </p:txBody>
+      </p:sp>
+      <p:pic>
+        <p:nvPicPr>
+          <p:cNvPr id="98" name="Google Shape;98;p2" descr="Universidade Federal da Fronteira Sul – Wikipédia, a enciclopédia livre">
+            <a:extLst>
+              <a:ext uri="{FF2B5EF4-FFF2-40B4-BE49-F238E27FC236}">
+                <a16:creationId xmlns:a16="http://schemas.microsoft.com/office/drawing/2014/main" id="{722B9BA5-FCDA-79C1-47C4-8029C6C4ABEA}"/>
+              </a:ext>
+            </a:extLst>
+          </p:cNvPr>
+          <p:cNvPicPr preferRelativeResize="0"/>
+          <p:nvPr/>
+        </p:nvPicPr>
+        <p:blipFill rotWithShape="1">
+          <a:blip r:embed="rId3">
+            <a:alphaModFix/>
+          </a:blip>
+          <a:srcRect/>
+          <a:stretch/>
+        </p:blipFill>
+        <p:spPr>
+          <a:xfrm>
+            <a:off x="10978329" y="18255"/>
+            <a:ext cx="975614" cy="1325563"/>
+          </a:xfrm>
+          <a:prstGeom prst="rect">
+            <a:avLst/>
+          </a:prstGeom>
+          <a:noFill/>
+          <a:ln>
+            <a:noFill/>
+          </a:ln>
+        </p:spPr>
+      </p:pic>
+      <p:sp>
+        <p:nvSpPr>
+          <p:cNvPr id="99" name="Google Shape;99;p2">
+            <a:extLst>
+              <a:ext uri="{FF2B5EF4-FFF2-40B4-BE49-F238E27FC236}">
+                <a16:creationId xmlns:a16="http://schemas.microsoft.com/office/drawing/2014/main" id="{DFC27075-31A5-8C48-9224-09E425CAD80B}"/>
+              </a:ext>
+            </a:extLst>
+          </p:cNvPr>
+          <p:cNvSpPr/>
+          <p:nvPr/>
+        </p:nvSpPr>
+        <p:spPr>
+          <a:xfrm>
+            <a:off x="170268" y="958543"/>
+            <a:ext cx="10515600" cy="63062"/>
+          </a:xfrm>
+          <a:prstGeom prst="rect">
+            <a:avLst/>
+          </a:prstGeom>
+          <a:solidFill>
+            <a:srgbClr val="548135"/>
+          </a:solidFill>
+          <a:ln w="12700" cap="flat" cmpd="sng">
+            <a:solidFill>
+              <a:srgbClr val="1C3052"/>
+            </a:solidFill>
+            <a:prstDash val="solid"/>
+            <a:miter lim="800000"/>
+            <a:headEnd type="none" w="sm" len="sm"/>
+            <a:tailEnd type="none" w="sm" len="sm"/>
+          </a:ln>
+        </p:spPr>
+        <p:txBody>
+          <a:bodyPr spcFirstLastPara="1" wrap="square" lIns="91425" tIns="45700" rIns="91425" bIns="45700" anchor="ctr" anchorCtr="0">
+            <a:noAutofit/>
+          </a:bodyPr>
+          <a:lstStyle/>
+          <a:p>
+            <a:pPr marL="0" marR="0" lvl="0" indent="0" algn="ctr" rtl="0">
+              <a:spcBef>
+                <a:spcPts val="0"/>
+              </a:spcBef>
+              <a:spcAft>
+                <a:spcPts val="0"/>
+              </a:spcAft>
+              <a:buNone/>
+            </a:pPr>
+            <a:endParaRPr sz="1800">
+              <a:solidFill>
+                <a:schemeClr val="lt1"/>
+              </a:solidFill>
+              <a:latin typeface="Calibri"/>
+              <a:ea typeface="Calibri"/>
+              <a:cs typeface="Calibri"/>
+              <a:sym typeface="Calibri"/>
+            </a:endParaRPr>
+          </a:p>
+        </p:txBody>
+      </p:sp>
+      <p:sp>
+        <p:nvSpPr>
+          <p:cNvPr id="100" name="Google Shape;100;p2">
+            <a:extLst>
+              <a:ext uri="{FF2B5EF4-FFF2-40B4-BE49-F238E27FC236}">
+                <a16:creationId xmlns:a16="http://schemas.microsoft.com/office/drawing/2014/main" id="{310E81C3-7168-1BFF-D7B3-4890A6F6A7E7}"/>
+              </a:ext>
+            </a:extLst>
+          </p:cNvPr>
+          <p:cNvSpPr txBox="1">
+            <a:spLocks noGrp="1"/>
+          </p:cNvSpPr>
+          <p:nvPr>
+            <p:ph type="sldNum" idx="12"/>
+          </p:nvPr>
+        </p:nvSpPr>
+        <p:spPr>
+          <a:xfrm>
+            <a:off x="9440152" y="6492875"/>
+            <a:ext cx="2743200" cy="365125"/>
+          </a:xfrm>
+          <a:prstGeom prst="rect">
+            <a:avLst/>
+          </a:prstGeom>
+          <a:noFill/>
+          <a:ln>
+            <a:noFill/>
+          </a:ln>
+        </p:spPr>
+        <p:txBody>
+          <a:bodyPr spcFirstLastPara="1" wrap="square" lIns="91425" tIns="45700" rIns="91425" bIns="45700" anchor="ctr" anchorCtr="0">
+            <a:noAutofit/>
+          </a:bodyPr>
+          <a:lstStyle/>
+          <a:p>
+            <a:pPr marL="0" lvl="0" indent="0" algn="r" rtl="0">
+              <a:spcBef>
+                <a:spcPts val="0"/>
+              </a:spcBef>
+              <a:spcAft>
+                <a:spcPts val="0"/>
+              </a:spcAft>
+              <a:buNone/>
+            </a:pPr>
+            <a:fld id="{00000000-1234-1234-1234-123412341234}" type="slidenum">
+              <a:rPr lang="pt-BR" sz="1800"/>
+              <a:t>12</a:t>
+            </a:fld>
+            <a:endParaRPr sz="1800" dirty="0"/>
+          </a:p>
+        </p:txBody>
+      </p:sp>
+    </p:spTree>
+    <p:extLst>
+      <p:ext uri="{BB962C8B-B14F-4D97-AF65-F5344CB8AC3E}">
+        <p14:creationId xmlns:p14="http://schemas.microsoft.com/office/powerpoint/2010/main" val="521958115"/>
+      </p:ext>
+    </p:extLst>
+  </p:cSld>
+  <p:clrMapOvr>
+    <a:masterClrMapping/>
+  </p:clrMapOvr>
+</p:sld>
+</file>
+
+<file path=ppt/slides/slide13.xml><?xml version="1.0" encoding="utf-8"?>
+<p:sld xmlns:a="http://schemas.openxmlformats.org/drawingml/2006/main" xmlns:r="http://schemas.openxmlformats.org/officeDocument/2006/relationships" xmlns:p="http://schemas.openxmlformats.org/presentationml/2006/main">
+  <p:cSld>
+    <p:spTree>
+      <p:nvGrpSpPr>
+        <p:cNvPr id="1" name="Shape 95">
+          <a:extLst>
+            <a:ext uri="{FF2B5EF4-FFF2-40B4-BE49-F238E27FC236}">
+              <a16:creationId xmlns:a16="http://schemas.microsoft.com/office/drawing/2014/main" id="{AFC58360-86CA-DD21-12B6-648B6D7651F8}"/>
+            </a:ext>
+          </a:extLst>
+        </p:cNvPr>
+        <p:cNvGrpSpPr/>
+        <p:nvPr/>
+      </p:nvGrpSpPr>
+      <p:grpSpPr>
+        <a:xfrm>
+          <a:off x="0" y="0"/>
+          <a:ext cx="0" cy="0"/>
+          <a:chOff x="0" y="0"/>
+          <a:chExt cx="0" cy="0"/>
+        </a:xfrm>
+      </p:grpSpPr>
+      <p:sp>
+        <p:nvSpPr>
+          <p:cNvPr id="96" name="Google Shape;96;p2">
+            <a:extLst>
+              <a:ext uri="{FF2B5EF4-FFF2-40B4-BE49-F238E27FC236}">
+                <a16:creationId xmlns:a16="http://schemas.microsoft.com/office/drawing/2014/main" id="{552A8662-B841-1779-8A96-A38FC13D1767}"/>
+              </a:ext>
+            </a:extLst>
+          </p:cNvPr>
+          <p:cNvSpPr txBox="1">
+            <a:spLocks noGrp="1"/>
+          </p:cNvSpPr>
+          <p:nvPr>
+            <p:ph type="title"/>
+          </p:nvPr>
+        </p:nvSpPr>
+        <p:spPr>
+          <a:xfrm>
+            <a:off x="170268" y="190105"/>
+            <a:ext cx="10329566" cy="768438"/>
+          </a:xfrm>
+          <a:prstGeom prst="rect">
+            <a:avLst/>
+          </a:prstGeom>
+          <a:noFill/>
+          <a:ln>
+            <a:noFill/>
+          </a:ln>
+        </p:spPr>
+        <p:txBody>
+          <a:bodyPr spcFirstLastPara="1" wrap="square" lIns="91425" tIns="45700" rIns="91425" bIns="45700" anchor="ctr" anchorCtr="0">
+            <a:noAutofit/>
+          </a:bodyPr>
+          <a:lstStyle/>
+          <a:p>
+            <a:pPr lvl="0">
+              <a:buSzPts val="4400"/>
+            </a:pPr>
+            <a:r>
+              <a:rPr lang="pt-BR" sz="3200" b="1" dirty="0">
+                <a:latin typeface="+mj-lt"/>
+              </a:rPr>
+              <a:t>Revisão</a:t>
+            </a:r>
+            <a:r>
+              <a:rPr lang="pt-BR" sz="3200" dirty="0"/>
+              <a:t> </a:t>
+            </a:r>
+            <a:r>
+              <a:rPr lang="pt-BR" sz="3200" b="1" dirty="0">
+                <a:latin typeface="+mj-lt"/>
+              </a:rPr>
+              <a:t>de literatura</a:t>
+            </a:r>
+            <a:endParaRPr sz="3200" b="1" dirty="0">
+              <a:latin typeface="+mj-lt"/>
+            </a:endParaRPr>
+          </a:p>
+        </p:txBody>
+      </p:sp>
+      <p:sp>
+        <p:nvSpPr>
+          <p:cNvPr id="97" name="Google Shape;97;p2">
+            <a:extLst>
+              <a:ext uri="{FF2B5EF4-FFF2-40B4-BE49-F238E27FC236}">
+                <a16:creationId xmlns:a16="http://schemas.microsoft.com/office/drawing/2014/main" id="{BF5B64CB-B14D-E789-A0FF-4F59C439D724}"/>
+              </a:ext>
+            </a:extLst>
+          </p:cNvPr>
+          <p:cNvSpPr txBox="1">
+            <a:spLocks noGrp="1"/>
+          </p:cNvSpPr>
+          <p:nvPr>
+            <p:ph type="body" idx="1"/>
+          </p:nvPr>
+        </p:nvSpPr>
+        <p:spPr>
+          <a:xfrm>
+            <a:off x="170268" y="1125342"/>
+            <a:ext cx="11855669" cy="5732658"/>
+          </a:xfrm>
+          <a:prstGeom prst="rect">
+            <a:avLst/>
+          </a:prstGeom>
+          <a:noFill/>
+          <a:ln>
+            <a:noFill/>
+          </a:ln>
+        </p:spPr>
+        <p:txBody>
+          <a:bodyPr spcFirstLastPara="1" wrap="square" lIns="91425" tIns="45700" rIns="91425" bIns="45700" anchor="t" anchorCtr="0">
+            <a:noAutofit/>
+          </a:bodyPr>
+          <a:lstStyle/>
+          <a:p>
+            <a:pPr>
+              <a:buFont typeface="Arial" panose="020B0604020202020204" pitchFamily="34" charset="0"/>
+              <a:buChar char="•"/>
+            </a:pPr>
+            <a:endParaRPr lang="pt-BR" sz="2200" dirty="0">
+              <a:latin typeface="+mn-lt"/>
+            </a:endParaRPr>
+          </a:p>
+          <a:p>
+            <a:pPr>
+              <a:buFont typeface="Arial" panose="020B0604020202020204" pitchFamily="34" charset="0"/>
+              <a:buChar char="•"/>
+            </a:pPr>
+            <a:r>
+              <a:rPr lang="pt-BR" sz="2200" dirty="0">
+                <a:latin typeface="+mn-lt"/>
+              </a:rPr>
+              <a:t>Predição econômica: O PIB – Frisch (1929); </a:t>
+            </a:r>
+            <a:r>
+              <a:rPr lang="it-IT" sz="2200" dirty="0">
+                <a:latin typeface="+mn-lt"/>
+              </a:rPr>
+              <a:t>Laudon e Laudon (2022)  e</a:t>
+            </a:r>
+            <a:r>
+              <a:rPr lang="pt-BR" sz="2200" dirty="0">
+                <a:latin typeface="+mn-lt"/>
+              </a:rPr>
+              <a:t> IBGE (2026).</a:t>
+            </a:r>
+          </a:p>
+          <a:p>
+            <a:pPr>
+              <a:buFont typeface="Arial" panose="020B0604020202020204" pitchFamily="34" charset="0"/>
+              <a:buChar char="•"/>
+            </a:pPr>
+            <a:r>
+              <a:rPr lang="pt-BR" sz="2200" dirty="0">
+                <a:latin typeface="+mn-lt"/>
+              </a:rPr>
+              <a:t>Modelos tradicionais: Braga (2025); Rebelo (2022).</a:t>
+            </a:r>
+          </a:p>
+          <a:p>
+            <a:pPr>
+              <a:buFont typeface="Arial" panose="020B0604020202020204" pitchFamily="34" charset="0"/>
+              <a:buChar char="•"/>
+            </a:pPr>
+            <a:r>
+              <a:rPr lang="pt-BR" sz="2200" dirty="0">
+                <a:latin typeface="+mn-lt"/>
+              </a:rPr>
+              <a:t>ARIMA: Box e Jenkins (1970); Silva </a:t>
+            </a:r>
+            <a:r>
+              <a:rPr lang="pt-BR" sz="2200" i="1" dirty="0">
+                <a:latin typeface="+mn-lt"/>
+              </a:rPr>
+              <a:t>et al </a:t>
+            </a:r>
+            <a:r>
+              <a:rPr lang="pt-BR" sz="2200" dirty="0">
+                <a:latin typeface="+mn-lt"/>
+              </a:rPr>
+              <a:t>(2025); Li (2024).</a:t>
+            </a:r>
+          </a:p>
+          <a:p>
+            <a:pPr>
+              <a:buFont typeface="Arial" panose="020B0604020202020204" pitchFamily="34" charset="0"/>
+              <a:buChar char="•"/>
+            </a:pPr>
+            <a:r>
+              <a:rPr lang="pt-BR" sz="2200" dirty="0">
+                <a:latin typeface="+mn-lt"/>
+              </a:rPr>
+              <a:t>VAR: </a:t>
+            </a:r>
+            <a:r>
+              <a:rPr lang="pt-BR" sz="2200" dirty="0" err="1">
+                <a:latin typeface="+mn-lt"/>
+              </a:rPr>
+              <a:t>Sims</a:t>
+            </a:r>
+            <a:r>
+              <a:rPr lang="pt-BR" sz="2200" dirty="0">
+                <a:latin typeface="+mn-lt"/>
+              </a:rPr>
+              <a:t> (1980); Fialho </a:t>
+            </a:r>
+            <a:r>
+              <a:rPr lang="pt-BR" sz="2200" i="1" dirty="0">
+                <a:latin typeface="+mn-lt"/>
+              </a:rPr>
+              <a:t>et al</a:t>
+            </a:r>
+            <a:r>
+              <a:rPr lang="pt-BR" sz="2200" dirty="0">
+                <a:latin typeface="+mn-lt"/>
+              </a:rPr>
+              <a:t>. (2024); Oliveira e Junior (2024); </a:t>
+            </a:r>
+            <a:r>
+              <a:rPr lang="pt-BR" sz="2200" dirty="0" err="1">
+                <a:latin typeface="+mn-lt"/>
+              </a:rPr>
+              <a:t>Koop</a:t>
+            </a:r>
+            <a:r>
+              <a:rPr lang="pt-BR" sz="2200" dirty="0">
+                <a:latin typeface="+mn-lt"/>
+              </a:rPr>
+              <a:t> </a:t>
+            </a:r>
+            <a:r>
+              <a:rPr lang="pt-BR" sz="2200" i="1" dirty="0">
+                <a:latin typeface="+mn-lt"/>
+              </a:rPr>
+              <a:t>et al</a:t>
+            </a:r>
+            <a:r>
+              <a:rPr lang="pt-BR" sz="2200" dirty="0">
+                <a:latin typeface="+mn-lt"/>
+              </a:rPr>
+              <a:t>. (2025).</a:t>
+            </a:r>
+          </a:p>
+          <a:p>
+            <a:pPr>
+              <a:buFont typeface="Arial" panose="020B0604020202020204" pitchFamily="34" charset="0"/>
+              <a:buChar char="•"/>
+            </a:pPr>
+            <a:r>
+              <a:rPr lang="pt-BR" sz="2200" b="1" dirty="0">
+                <a:latin typeface="+mn-lt"/>
+              </a:rPr>
+              <a:t>MIDAS: Ghysels et al. (2004); Castelli (2022); Micheletti (2024).</a:t>
+            </a:r>
+          </a:p>
+          <a:p>
+            <a:pPr>
+              <a:buFont typeface="Arial" panose="020B0604020202020204" pitchFamily="34" charset="0"/>
+              <a:buChar char="•"/>
+            </a:pPr>
+            <a:r>
+              <a:rPr lang="pt-BR" sz="2200" dirty="0">
+                <a:latin typeface="+mn-lt"/>
+              </a:rPr>
+              <a:t>DFM: Geweke (1977); Doz e Fuleky (2019); Alves (2009); Moura et al. (2020).</a:t>
+            </a:r>
+          </a:p>
+          <a:p>
+            <a:pPr>
+              <a:buFont typeface="Arial" panose="020B0604020202020204" pitchFamily="34" charset="0"/>
+              <a:buChar char="•"/>
+            </a:pPr>
+            <a:r>
+              <a:rPr lang="pt-BR" sz="2200" dirty="0">
+                <a:latin typeface="+mn-lt"/>
+              </a:rPr>
+              <a:t>Modelos de IA: </a:t>
+            </a:r>
+            <a:r>
+              <a:rPr lang="pt-BR" sz="2200" dirty="0">
+                <a:solidFill>
+                  <a:schemeClr val="tx1"/>
+                </a:solidFill>
+                <a:latin typeface="+mn-lt"/>
+              </a:rPr>
+              <a:t>Carmo e Lopacinski (2023); Vasconcelos (2017) </a:t>
+            </a:r>
+          </a:p>
+          <a:p>
+            <a:pPr>
+              <a:buFont typeface="Arial" panose="020B0604020202020204" pitchFamily="34" charset="0"/>
+              <a:buChar char="•"/>
+            </a:pPr>
+            <a:r>
+              <a:rPr lang="pt-BR" sz="2200" dirty="0">
+                <a:latin typeface="+mn-lt"/>
+              </a:rPr>
+              <a:t>Redes Neurais: Rosenblatt (1958); Rumelhart et al. (1986); Ghosh e Ranjan (2023); Kava (2022); Ekman (2021); Carmo e Lopacinski (2023); Amaral et al. (2023).</a:t>
+            </a:r>
+          </a:p>
+          <a:p>
+            <a:pPr>
+              <a:buFont typeface="Arial" panose="020B0604020202020204" pitchFamily="34" charset="0"/>
+              <a:buChar char="•"/>
+            </a:pPr>
+            <a:r>
+              <a:rPr lang="pt-BR" sz="2200" dirty="0">
+                <a:latin typeface="+mn-lt"/>
+              </a:rPr>
+              <a:t>Florestas Aleatórias: Breiman (2001); Landowska et al. (2025); Lemos e Souza (2025).</a:t>
+            </a:r>
+          </a:p>
+        </p:txBody>
+      </p:sp>
+      <p:pic>
+        <p:nvPicPr>
+          <p:cNvPr id="98" name="Google Shape;98;p2" descr="Universidade Federal da Fronteira Sul – Wikipédia, a enciclopédia livre">
+            <a:extLst>
+              <a:ext uri="{FF2B5EF4-FFF2-40B4-BE49-F238E27FC236}">
+                <a16:creationId xmlns:a16="http://schemas.microsoft.com/office/drawing/2014/main" id="{E7165E79-A991-8C92-44AC-B9123934E37C}"/>
+              </a:ext>
+            </a:extLst>
+          </p:cNvPr>
+          <p:cNvPicPr preferRelativeResize="0"/>
+          <p:nvPr/>
+        </p:nvPicPr>
+        <p:blipFill rotWithShape="1">
+          <a:blip r:embed="rId3">
+            <a:alphaModFix/>
+          </a:blip>
+          <a:srcRect/>
+          <a:stretch/>
+        </p:blipFill>
+        <p:spPr>
+          <a:xfrm>
+            <a:off x="10978329" y="18255"/>
+            <a:ext cx="975614" cy="1325563"/>
+          </a:xfrm>
+          <a:prstGeom prst="rect">
+            <a:avLst/>
+          </a:prstGeom>
+          <a:noFill/>
+          <a:ln>
+            <a:noFill/>
+          </a:ln>
+        </p:spPr>
+      </p:pic>
+      <p:sp>
+        <p:nvSpPr>
+          <p:cNvPr id="99" name="Google Shape;99;p2">
+            <a:extLst>
+              <a:ext uri="{FF2B5EF4-FFF2-40B4-BE49-F238E27FC236}">
+                <a16:creationId xmlns:a16="http://schemas.microsoft.com/office/drawing/2014/main" id="{BDE0712D-40EB-9C64-6E57-97CEF6440DF3}"/>
+              </a:ext>
+            </a:extLst>
+          </p:cNvPr>
+          <p:cNvSpPr/>
+          <p:nvPr/>
+        </p:nvSpPr>
+        <p:spPr>
+          <a:xfrm>
+            <a:off x="170268" y="958543"/>
+            <a:ext cx="10515600" cy="63062"/>
+          </a:xfrm>
+          <a:prstGeom prst="rect">
+            <a:avLst/>
+          </a:prstGeom>
+          <a:solidFill>
+            <a:srgbClr val="548135"/>
+          </a:solidFill>
+          <a:ln w="12700" cap="flat" cmpd="sng">
+            <a:solidFill>
+              <a:srgbClr val="1C3052"/>
+            </a:solidFill>
+            <a:prstDash val="solid"/>
+            <a:miter lim="800000"/>
+            <a:headEnd type="none" w="sm" len="sm"/>
+            <a:tailEnd type="none" w="sm" len="sm"/>
+          </a:ln>
+        </p:spPr>
+        <p:txBody>
+          <a:bodyPr spcFirstLastPara="1" wrap="square" lIns="91425" tIns="45700" rIns="91425" bIns="45700" anchor="ctr" anchorCtr="0">
+            <a:noAutofit/>
+          </a:bodyPr>
+          <a:lstStyle/>
+          <a:p>
+            <a:pPr marL="0" marR="0" lvl="0" indent="0" algn="ctr" rtl="0">
+              <a:spcBef>
+                <a:spcPts val="0"/>
+              </a:spcBef>
+              <a:spcAft>
+                <a:spcPts val="0"/>
+              </a:spcAft>
+              <a:buNone/>
+            </a:pPr>
+            <a:endParaRPr sz="1800">
+              <a:solidFill>
+                <a:schemeClr val="lt1"/>
+              </a:solidFill>
+              <a:latin typeface="Calibri"/>
+              <a:ea typeface="Calibri"/>
+              <a:cs typeface="Calibri"/>
+              <a:sym typeface="Calibri"/>
+            </a:endParaRPr>
+          </a:p>
+        </p:txBody>
+      </p:sp>
+      <p:sp>
+        <p:nvSpPr>
+          <p:cNvPr id="100" name="Google Shape;100;p2">
+            <a:extLst>
+              <a:ext uri="{FF2B5EF4-FFF2-40B4-BE49-F238E27FC236}">
+                <a16:creationId xmlns:a16="http://schemas.microsoft.com/office/drawing/2014/main" id="{4E1C1D1B-29FF-CACF-C733-0FA9E787367F}"/>
+              </a:ext>
+            </a:extLst>
+          </p:cNvPr>
+          <p:cNvSpPr txBox="1">
+            <a:spLocks noGrp="1"/>
+          </p:cNvSpPr>
+          <p:nvPr>
+            <p:ph type="sldNum" idx="12"/>
+          </p:nvPr>
+        </p:nvSpPr>
+        <p:spPr>
+          <a:xfrm>
+            <a:off x="9440152" y="6492875"/>
+            <a:ext cx="2743200" cy="365125"/>
+          </a:xfrm>
+          <a:prstGeom prst="rect">
+            <a:avLst/>
+          </a:prstGeom>
+          <a:noFill/>
+          <a:ln>
+            <a:noFill/>
+          </a:ln>
+        </p:spPr>
+        <p:txBody>
+          <a:bodyPr spcFirstLastPara="1" wrap="square" lIns="91425" tIns="45700" rIns="91425" bIns="45700" anchor="ctr" anchorCtr="0">
+            <a:noAutofit/>
+          </a:bodyPr>
+          <a:lstStyle/>
+          <a:p>
+            <a:pPr marL="0" lvl="0" indent="0" algn="r" rtl="0">
+              <a:spcBef>
+                <a:spcPts val="0"/>
+              </a:spcBef>
+              <a:spcAft>
+                <a:spcPts val="0"/>
+              </a:spcAft>
+              <a:buNone/>
+            </a:pPr>
+            <a:fld id="{00000000-1234-1234-1234-123412341234}" type="slidenum">
+              <a:rPr lang="pt-BR" sz="1800"/>
+              <a:t>13</a:t>
+            </a:fld>
+            <a:endParaRPr sz="1800" dirty="0"/>
+          </a:p>
+        </p:txBody>
+      </p:sp>
+    </p:spTree>
+    <p:extLst>
+      <p:ext uri="{BB962C8B-B14F-4D97-AF65-F5344CB8AC3E}">
+        <p14:creationId xmlns:p14="http://schemas.microsoft.com/office/powerpoint/2010/main" val="1515411219"/>
+      </p:ext>
+    </p:extLst>
+  </p:cSld>
+  <p:clrMapOvr>
+    <a:masterClrMapping/>
+  </p:clrMapOvr>
+</p:sld>
+</file>
+
+<file path=ppt/slides/slide14.xml><?xml version="1.0" encoding="utf-8"?>
+<p:sld xmlns:a="http://schemas.openxmlformats.org/drawingml/2006/main" xmlns:r="http://schemas.openxmlformats.org/officeDocument/2006/relationships" xmlns:p="http://schemas.openxmlformats.org/presentationml/2006/main">
+  <p:cSld>
+    <p:spTree>
+      <p:nvGrpSpPr>
+        <p:cNvPr id="1" name="Shape 95">
+          <a:extLst>
+            <a:ext uri="{FF2B5EF4-FFF2-40B4-BE49-F238E27FC236}">
+              <a16:creationId xmlns:a16="http://schemas.microsoft.com/office/drawing/2014/main" id="{482D31C7-B5A1-1515-E015-A4A846243F2E}"/>
+            </a:ext>
+          </a:extLst>
+        </p:cNvPr>
+        <p:cNvGrpSpPr/>
+        <p:nvPr/>
+      </p:nvGrpSpPr>
+      <p:grpSpPr>
+        <a:xfrm>
+          <a:off x="0" y="0"/>
+          <a:ext cx="0" cy="0"/>
+          <a:chOff x="0" y="0"/>
+          <a:chExt cx="0" cy="0"/>
+        </a:xfrm>
+      </p:grpSpPr>
+      <p:sp>
+        <p:nvSpPr>
+          <p:cNvPr id="96" name="Google Shape;96;p2">
+            <a:extLst>
+              <a:ext uri="{FF2B5EF4-FFF2-40B4-BE49-F238E27FC236}">
+                <a16:creationId xmlns:a16="http://schemas.microsoft.com/office/drawing/2014/main" id="{D304F6A2-15C1-5DD8-3B85-6BB8DA1A0E02}"/>
+              </a:ext>
+            </a:extLst>
+          </p:cNvPr>
+          <p:cNvSpPr txBox="1">
+            <a:spLocks noGrp="1"/>
+          </p:cNvSpPr>
+          <p:nvPr>
+            <p:ph type="title"/>
+          </p:nvPr>
+        </p:nvSpPr>
+        <p:spPr>
+          <a:xfrm>
+            <a:off x="170268" y="190105"/>
+            <a:ext cx="10329566" cy="768438"/>
+          </a:xfrm>
+          <a:prstGeom prst="rect">
+            <a:avLst/>
+          </a:prstGeom>
+          <a:noFill/>
+          <a:ln>
+            <a:noFill/>
+          </a:ln>
+        </p:spPr>
+        <p:txBody>
+          <a:bodyPr spcFirstLastPara="1" wrap="square" lIns="91425" tIns="45700" rIns="91425" bIns="45700" anchor="ctr" anchorCtr="0">
+            <a:noAutofit/>
+          </a:bodyPr>
+          <a:lstStyle/>
+          <a:p>
+            <a:pPr lvl="0">
+              <a:buSzPts val="4400"/>
+            </a:pPr>
+            <a:r>
+              <a:rPr lang="pt-BR" sz="3200" b="1" dirty="0">
+                <a:latin typeface="+mj-lt"/>
+              </a:rPr>
+              <a:t>Revisão</a:t>
+            </a:r>
+            <a:r>
+              <a:rPr lang="pt-BR" sz="3200" dirty="0"/>
+              <a:t> </a:t>
+            </a:r>
+            <a:r>
+              <a:rPr lang="pt-BR" sz="3200" b="1" dirty="0">
+                <a:latin typeface="+mj-lt"/>
+              </a:rPr>
+              <a:t>de literatura</a:t>
+            </a:r>
+            <a:endParaRPr sz="3200" b="1" dirty="0">
+              <a:latin typeface="+mj-lt"/>
+            </a:endParaRPr>
+          </a:p>
+        </p:txBody>
+      </p:sp>
+      <p:sp>
+        <p:nvSpPr>
+          <p:cNvPr id="97" name="Google Shape;97;p2">
+            <a:extLst>
+              <a:ext uri="{FF2B5EF4-FFF2-40B4-BE49-F238E27FC236}">
+                <a16:creationId xmlns:a16="http://schemas.microsoft.com/office/drawing/2014/main" id="{8F2DB888-DBF8-3949-46EC-D61327FCD8C5}"/>
+              </a:ext>
+            </a:extLst>
+          </p:cNvPr>
+          <p:cNvSpPr txBox="1">
+            <a:spLocks noGrp="1"/>
+          </p:cNvSpPr>
+          <p:nvPr>
+            <p:ph type="body" idx="1"/>
+          </p:nvPr>
+        </p:nvSpPr>
+        <p:spPr>
+          <a:xfrm>
+            <a:off x="170268" y="1125342"/>
+            <a:ext cx="11855669" cy="5732658"/>
+          </a:xfrm>
+          <a:prstGeom prst="rect">
+            <a:avLst/>
+          </a:prstGeom>
+          <a:noFill/>
+          <a:ln>
+            <a:noFill/>
+          </a:ln>
+        </p:spPr>
+        <p:txBody>
+          <a:bodyPr spcFirstLastPara="1" wrap="square" lIns="91425" tIns="45700" rIns="91425" bIns="45700" anchor="t" anchorCtr="0">
+            <a:noAutofit/>
+          </a:bodyPr>
+          <a:lstStyle/>
+          <a:p>
+            <a:pPr>
+              <a:buFont typeface="Arial" panose="020B0604020202020204" pitchFamily="34" charset="0"/>
+              <a:buChar char="•"/>
+            </a:pPr>
+            <a:endParaRPr lang="pt-BR" sz="2200" dirty="0">
+              <a:latin typeface="+mn-lt"/>
+            </a:endParaRPr>
+          </a:p>
+          <a:p>
+            <a:pPr>
+              <a:buFont typeface="Arial" panose="020B0604020202020204" pitchFamily="34" charset="0"/>
+              <a:buChar char="•"/>
+            </a:pPr>
+            <a:r>
+              <a:rPr lang="pt-BR" sz="2200" dirty="0">
+                <a:latin typeface="+mn-lt"/>
+              </a:rPr>
+              <a:t>Predição econômica: O PIB – Frisch (1929); </a:t>
+            </a:r>
+            <a:r>
+              <a:rPr lang="it-IT" sz="2200" dirty="0">
+                <a:latin typeface="+mn-lt"/>
+              </a:rPr>
+              <a:t>Laudon e Laudon (2022)  e</a:t>
+            </a:r>
+            <a:r>
+              <a:rPr lang="pt-BR" sz="2200" dirty="0">
+                <a:latin typeface="+mn-lt"/>
+              </a:rPr>
+              <a:t> IBGE (2026).</a:t>
+            </a:r>
+          </a:p>
+          <a:p>
+            <a:pPr>
+              <a:buFont typeface="Arial" panose="020B0604020202020204" pitchFamily="34" charset="0"/>
+              <a:buChar char="•"/>
+            </a:pPr>
+            <a:r>
+              <a:rPr lang="pt-BR" sz="2200" dirty="0">
+                <a:latin typeface="+mn-lt"/>
+              </a:rPr>
+              <a:t>Modelos tradicionais: Braga (2025); Rebelo (2022).</a:t>
+            </a:r>
+          </a:p>
+          <a:p>
+            <a:pPr>
+              <a:buFont typeface="Arial" panose="020B0604020202020204" pitchFamily="34" charset="0"/>
+              <a:buChar char="•"/>
+            </a:pPr>
+            <a:r>
+              <a:rPr lang="pt-BR" sz="2200" dirty="0">
+                <a:latin typeface="+mn-lt"/>
+              </a:rPr>
+              <a:t>ARIMA: Box e Jenkins (1970); Silva </a:t>
+            </a:r>
+            <a:r>
+              <a:rPr lang="pt-BR" sz="2200" i="1" dirty="0">
+                <a:latin typeface="+mn-lt"/>
+              </a:rPr>
+              <a:t>et al </a:t>
+            </a:r>
+            <a:r>
+              <a:rPr lang="pt-BR" sz="2200" dirty="0">
+                <a:latin typeface="+mn-lt"/>
+              </a:rPr>
+              <a:t>(2025); Li (2024).</a:t>
+            </a:r>
+          </a:p>
+          <a:p>
+            <a:pPr>
+              <a:buFont typeface="Arial" panose="020B0604020202020204" pitchFamily="34" charset="0"/>
+              <a:buChar char="•"/>
+            </a:pPr>
+            <a:r>
+              <a:rPr lang="pt-BR" sz="2200" dirty="0">
+                <a:latin typeface="+mn-lt"/>
+              </a:rPr>
+              <a:t>VAR: </a:t>
+            </a:r>
+            <a:r>
+              <a:rPr lang="pt-BR" sz="2200" dirty="0" err="1">
+                <a:latin typeface="+mn-lt"/>
+              </a:rPr>
+              <a:t>Sims</a:t>
+            </a:r>
+            <a:r>
+              <a:rPr lang="pt-BR" sz="2200" dirty="0">
+                <a:latin typeface="+mn-lt"/>
+              </a:rPr>
+              <a:t> (1980); Fialho </a:t>
+            </a:r>
+            <a:r>
+              <a:rPr lang="pt-BR" sz="2200" i="1" dirty="0">
+                <a:latin typeface="+mn-lt"/>
+              </a:rPr>
+              <a:t>et al</a:t>
+            </a:r>
+            <a:r>
+              <a:rPr lang="pt-BR" sz="2200" dirty="0">
+                <a:latin typeface="+mn-lt"/>
+              </a:rPr>
+              <a:t>. (2024); Oliveira e Junior (2024); </a:t>
+            </a:r>
+            <a:r>
+              <a:rPr lang="pt-BR" sz="2200" dirty="0" err="1">
+                <a:latin typeface="+mn-lt"/>
+              </a:rPr>
+              <a:t>Koop</a:t>
+            </a:r>
+            <a:r>
+              <a:rPr lang="pt-BR" sz="2200" dirty="0">
+                <a:latin typeface="+mn-lt"/>
+              </a:rPr>
+              <a:t> </a:t>
+            </a:r>
+            <a:r>
+              <a:rPr lang="pt-BR" sz="2200" i="1" dirty="0">
+                <a:latin typeface="+mn-lt"/>
+              </a:rPr>
+              <a:t>et al</a:t>
+            </a:r>
+            <a:r>
+              <a:rPr lang="pt-BR" sz="2200" dirty="0">
+                <a:latin typeface="+mn-lt"/>
+              </a:rPr>
+              <a:t>. (2025).</a:t>
+            </a:r>
+          </a:p>
+          <a:p>
+            <a:pPr>
+              <a:buFont typeface="Arial" panose="020B0604020202020204" pitchFamily="34" charset="0"/>
+              <a:buChar char="•"/>
+            </a:pPr>
+            <a:r>
+              <a:rPr lang="pt-BR" sz="2200" dirty="0">
+                <a:latin typeface="+mn-lt"/>
+              </a:rPr>
+              <a:t>MIDAS: Ghysels et al. (2004); Castelli (2022); Micheletti (2024).</a:t>
+            </a:r>
+          </a:p>
+          <a:p>
+            <a:pPr>
+              <a:buFont typeface="Arial" panose="020B0604020202020204" pitchFamily="34" charset="0"/>
+              <a:buChar char="•"/>
+            </a:pPr>
+            <a:r>
+              <a:rPr lang="pt-BR" sz="2200" b="1" dirty="0">
+                <a:latin typeface="+mn-lt"/>
+              </a:rPr>
+              <a:t>DFM: Geweke (1977); Doz e Fuleky (2019); Alves (2009); Moura et al. (2020).</a:t>
+            </a:r>
+          </a:p>
+          <a:p>
+            <a:pPr>
+              <a:buFont typeface="Arial" panose="020B0604020202020204" pitchFamily="34" charset="0"/>
+              <a:buChar char="•"/>
+            </a:pPr>
+            <a:r>
+              <a:rPr lang="pt-BR" sz="2200" dirty="0">
+                <a:latin typeface="+mn-lt"/>
+              </a:rPr>
+              <a:t>Modelos de IA: </a:t>
+            </a:r>
+            <a:r>
+              <a:rPr lang="pt-BR" sz="2200" dirty="0">
+                <a:solidFill>
+                  <a:schemeClr val="tx1"/>
+                </a:solidFill>
+                <a:latin typeface="+mn-lt"/>
+              </a:rPr>
+              <a:t>Carmo e Lopacinski (2023); Vasconcelos (2017) </a:t>
+            </a:r>
+          </a:p>
+          <a:p>
+            <a:pPr>
+              <a:buFont typeface="Arial" panose="020B0604020202020204" pitchFamily="34" charset="0"/>
+              <a:buChar char="•"/>
+            </a:pPr>
+            <a:r>
+              <a:rPr lang="pt-BR" sz="2200" dirty="0">
+                <a:latin typeface="+mn-lt"/>
+              </a:rPr>
+              <a:t>Redes Neurais: Rosenblatt (1958); Rumelhart et al. (1986); Ghosh e Ranjan (2023); Kava (2022); Ekman (2021); Carmo e Lopacinski (2023); Amaral et al. (2023).</a:t>
+            </a:r>
+          </a:p>
+          <a:p>
+            <a:pPr>
+              <a:buFont typeface="Arial" panose="020B0604020202020204" pitchFamily="34" charset="0"/>
+              <a:buChar char="•"/>
+            </a:pPr>
+            <a:r>
+              <a:rPr lang="pt-BR" sz="2200" dirty="0">
+                <a:latin typeface="+mn-lt"/>
+              </a:rPr>
+              <a:t>Florestas Aleatórias: Breiman (2001); Landowska et al. (2025); Lemos e Souza (2025).</a:t>
+            </a:r>
+          </a:p>
+        </p:txBody>
+      </p:sp>
+      <p:pic>
+        <p:nvPicPr>
+          <p:cNvPr id="98" name="Google Shape;98;p2" descr="Universidade Federal da Fronteira Sul – Wikipédia, a enciclopédia livre">
+            <a:extLst>
+              <a:ext uri="{FF2B5EF4-FFF2-40B4-BE49-F238E27FC236}">
+                <a16:creationId xmlns:a16="http://schemas.microsoft.com/office/drawing/2014/main" id="{CB4492C1-635A-9A07-31CD-406E96F5D9FE}"/>
+              </a:ext>
+            </a:extLst>
+          </p:cNvPr>
+          <p:cNvPicPr preferRelativeResize="0"/>
+          <p:nvPr/>
+        </p:nvPicPr>
+        <p:blipFill rotWithShape="1">
+          <a:blip r:embed="rId3">
+            <a:alphaModFix/>
+          </a:blip>
+          <a:srcRect/>
+          <a:stretch/>
+        </p:blipFill>
+        <p:spPr>
+          <a:xfrm>
+            <a:off x="10978329" y="18255"/>
+            <a:ext cx="975614" cy="1325563"/>
+          </a:xfrm>
+          <a:prstGeom prst="rect">
+            <a:avLst/>
+          </a:prstGeom>
+          <a:noFill/>
+          <a:ln>
+            <a:noFill/>
+          </a:ln>
+        </p:spPr>
+      </p:pic>
+      <p:sp>
+        <p:nvSpPr>
+          <p:cNvPr id="99" name="Google Shape;99;p2">
+            <a:extLst>
+              <a:ext uri="{FF2B5EF4-FFF2-40B4-BE49-F238E27FC236}">
+                <a16:creationId xmlns:a16="http://schemas.microsoft.com/office/drawing/2014/main" id="{E5AA9E94-F733-DA7C-5FCC-AF88F32C3021}"/>
+              </a:ext>
+            </a:extLst>
+          </p:cNvPr>
+          <p:cNvSpPr/>
+          <p:nvPr/>
+        </p:nvSpPr>
+        <p:spPr>
+          <a:xfrm>
+            <a:off x="170268" y="958543"/>
+            <a:ext cx="10515600" cy="63062"/>
+          </a:xfrm>
+          <a:prstGeom prst="rect">
+            <a:avLst/>
+          </a:prstGeom>
+          <a:solidFill>
+            <a:srgbClr val="548135"/>
+          </a:solidFill>
+          <a:ln w="12700" cap="flat" cmpd="sng">
+            <a:solidFill>
+              <a:srgbClr val="1C3052"/>
+            </a:solidFill>
+            <a:prstDash val="solid"/>
+            <a:miter lim="800000"/>
+            <a:headEnd type="none" w="sm" len="sm"/>
+            <a:tailEnd type="none" w="sm" len="sm"/>
+          </a:ln>
+        </p:spPr>
+        <p:txBody>
+          <a:bodyPr spcFirstLastPara="1" wrap="square" lIns="91425" tIns="45700" rIns="91425" bIns="45700" anchor="ctr" anchorCtr="0">
+            <a:noAutofit/>
+          </a:bodyPr>
+          <a:lstStyle/>
+          <a:p>
+            <a:pPr marL="0" marR="0" lvl="0" indent="0" algn="ctr" rtl="0">
+              <a:spcBef>
+                <a:spcPts val="0"/>
+              </a:spcBef>
+              <a:spcAft>
+                <a:spcPts val="0"/>
+              </a:spcAft>
+              <a:buNone/>
+            </a:pPr>
+            <a:endParaRPr sz="1800">
+              <a:solidFill>
+                <a:schemeClr val="lt1"/>
+              </a:solidFill>
+              <a:latin typeface="Calibri"/>
+              <a:ea typeface="Calibri"/>
+              <a:cs typeface="Calibri"/>
+              <a:sym typeface="Calibri"/>
+            </a:endParaRPr>
+          </a:p>
+        </p:txBody>
+      </p:sp>
+      <p:sp>
+        <p:nvSpPr>
+          <p:cNvPr id="100" name="Google Shape;100;p2">
+            <a:extLst>
+              <a:ext uri="{FF2B5EF4-FFF2-40B4-BE49-F238E27FC236}">
+                <a16:creationId xmlns:a16="http://schemas.microsoft.com/office/drawing/2014/main" id="{29C0E70E-155B-516A-E5A4-B0CCD0B14F92}"/>
+              </a:ext>
+            </a:extLst>
+          </p:cNvPr>
+          <p:cNvSpPr txBox="1">
+            <a:spLocks noGrp="1"/>
+          </p:cNvSpPr>
+          <p:nvPr>
+            <p:ph type="sldNum" idx="12"/>
+          </p:nvPr>
+        </p:nvSpPr>
+        <p:spPr>
+          <a:xfrm>
+            <a:off x="9440152" y="6492875"/>
+            <a:ext cx="2743200" cy="365125"/>
+          </a:xfrm>
+          <a:prstGeom prst="rect">
+            <a:avLst/>
+          </a:prstGeom>
+          <a:noFill/>
+          <a:ln>
+            <a:noFill/>
+          </a:ln>
+        </p:spPr>
+        <p:txBody>
+          <a:bodyPr spcFirstLastPara="1" wrap="square" lIns="91425" tIns="45700" rIns="91425" bIns="45700" anchor="ctr" anchorCtr="0">
+            <a:noAutofit/>
+          </a:bodyPr>
+          <a:lstStyle/>
+          <a:p>
+            <a:pPr marL="0" lvl="0" indent="0" algn="r" rtl="0">
+              <a:spcBef>
+                <a:spcPts val="0"/>
+              </a:spcBef>
+              <a:spcAft>
+                <a:spcPts val="0"/>
+              </a:spcAft>
+              <a:buNone/>
+            </a:pPr>
+            <a:fld id="{00000000-1234-1234-1234-123412341234}" type="slidenum">
+              <a:rPr lang="pt-BR" sz="1800"/>
+              <a:t>14</a:t>
+            </a:fld>
+            <a:endParaRPr sz="1800" dirty="0"/>
+          </a:p>
+        </p:txBody>
+      </p:sp>
+    </p:spTree>
+    <p:extLst>
+      <p:ext uri="{BB962C8B-B14F-4D97-AF65-F5344CB8AC3E}">
+        <p14:creationId xmlns:p14="http://schemas.microsoft.com/office/powerpoint/2010/main" val="1658723209"/>
+      </p:ext>
+    </p:extLst>
+  </p:cSld>
+  <p:clrMapOvr>
+    <a:masterClrMapping/>
+  </p:clrMapOvr>
+</p:sld>
+</file>
+
+<file path=ppt/slides/slide15.xml><?xml version="1.0" encoding="utf-8"?>
+<p:sld xmlns:a="http://schemas.openxmlformats.org/drawingml/2006/main" xmlns:r="http://schemas.openxmlformats.org/officeDocument/2006/relationships" xmlns:p="http://schemas.openxmlformats.org/presentationml/2006/main">
+  <p:cSld>
+    <p:spTree>
+      <p:nvGrpSpPr>
+        <p:cNvPr id="1" name="Shape 95">
+          <a:extLst>
+            <a:ext uri="{FF2B5EF4-FFF2-40B4-BE49-F238E27FC236}">
+              <a16:creationId xmlns:a16="http://schemas.microsoft.com/office/drawing/2014/main" id="{00B4ED39-91D5-11E9-4859-F945A387E9CE}"/>
+            </a:ext>
+          </a:extLst>
+        </p:cNvPr>
+        <p:cNvGrpSpPr/>
+        <p:nvPr/>
+      </p:nvGrpSpPr>
+      <p:grpSpPr>
+        <a:xfrm>
+          <a:off x="0" y="0"/>
+          <a:ext cx="0" cy="0"/>
+          <a:chOff x="0" y="0"/>
+          <a:chExt cx="0" cy="0"/>
+        </a:xfrm>
+      </p:grpSpPr>
+      <p:sp>
+        <p:nvSpPr>
+          <p:cNvPr id="96" name="Google Shape;96;p2">
+            <a:extLst>
+              <a:ext uri="{FF2B5EF4-FFF2-40B4-BE49-F238E27FC236}">
+                <a16:creationId xmlns:a16="http://schemas.microsoft.com/office/drawing/2014/main" id="{2344CC15-7814-9B7A-2855-74F8886ED56B}"/>
+              </a:ext>
+            </a:extLst>
+          </p:cNvPr>
+          <p:cNvSpPr txBox="1">
+            <a:spLocks noGrp="1"/>
+          </p:cNvSpPr>
+          <p:nvPr>
+            <p:ph type="title"/>
+          </p:nvPr>
+        </p:nvSpPr>
+        <p:spPr>
+          <a:xfrm>
+            <a:off x="170268" y="190105"/>
+            <a:ext cx="10329566" cy="768438"/>
+          </a:xfrm>
+          <a:prstGeom prst="rect">
+            <a:avLst/>
+          </a:prstGeom>
+          <a:noFill/>
+          <a:ln>
+            <a:noFill/>
+          </a:ln>
+        </p:spPr>
+        <p:txBody>
+          <a:bodyPr spcFirstLastPara="1" wrap="square" lIns="91425" tIns="45700" rIns="91425" bIns="45700" anchor="ctr" anchorCtr="0">
+            <a:noAutofit/>
+          </a:bodyPr>
+          <a:lstStyle/>
+          <a:p>
+            <a:pPr lvl="0">
+              <a:buSzPts val="4400"/>
+            </a:pPr>
+            <a:r>
+              <a:rPr lang="pt-BR" sz="3200" b="1" dirty="0">
+                <a:latin typeface="+mj-lt"/>
+              </a:rPr>
+              <a:t>Revisão</a:t>
+            </a:r>
+            <a:r>
+              <a:rPr lang="pt-BR" sz="3200" dirty="0"/>
+              <a:t> </a:t>
+            </a:r>
+            <a:r>
+              <a:rPr lang="pt-BR" sz="3200" b="1" dirty="0">
+                <a:latin typeface="+mj-lt"/>
+              </a:rPr>
+              <a:t>de literatura</a:t>
+            </a:r>
+            <a:endParaRPr sz="3200" b="1" dirty="0">
+              <a:latin typeface="+mj-lt"/>
+            </a:endParaRPr>
+          </a:p>
+        </p:txBody>
+      </p:sp>
+      <p:sp>
+        <p:nvSpPr>
+          <p:cNvPr id="97" name="Google Shape;97;p2">
+            <a:extLst>
+              <a:ext uri="{FF2B5EF4-FFF2-40B4-BE49-F238E27FC236}">
+                <a16:creationId xmlns:a16="http://schemas.microsoft.com/office/drawing/2014/main" id="{0D0E9EF5-7BCC-2204-6213-61CC7D8E4FE9}"/>
+              </a:ext>
+            </a:extLst>
+          </p:cNvPr>
+          <p:cNvSpPr txBox="1">
+            <a:spLocks noGrp="1"/>
+          </p:cNvSpPr>
+          <p:nvPr>
+            <p:ph type="body" idx="1"/>
+          </p:nvPr>
+        </p:nvSpPr>
+        <p:spPr>
+          <a:xfrm>
+            <a:off x="170268" y="1125342"/>
+            <a:ext cx="11855669" cy="5732658"/>
+          </a:xfrm>
+          <a:prstGeom prst="rect">
+            <a:avLst/>
+          </a:prstGeom>
+          <a:noFill/>
+          <a:ln>
+            <a:noFill/>
+          </a:ln>
+        </p:spPr>
+        <p:txBody>
+          <a:bodyPr spcFirstLastPara="1" wrap="square" lIns="91425" tIns="45700" rIns="91425" bIns="45700" anchor="t" anchorCtr="0">
+            <a:noAutofit/>
+          </a:bodyPr>
+          <a:lstStyle/>
+          <a:p>
+            <a:pPr>
+              <a:buFont typeface="Arial" panose="020B0604020202020204" pitchFamily="34" charset="0"/>
+              <a:buChar char="•"/>
+            </a:pPr>
+            <a:endParaRPr lang="pt-BR" sz="2200" dirty="0">
+              <a:latin typeface="+mn-lt"/>
+            </a:endParaRPr>
+          </a:p>
+          <a:p>
+            <a:pPr>
+              <a:buFont typeface="Arial" panose="020B0604020202020204" pitchFamily="34" charset="0"/>
+              <a:buChar char="•"/>
+            </a:pPr>
+            <a:r>
+              <a:rPr lang="pt-BR" sz="2200" dirty="0">
+                <a:latin typeface="+mn-lt"/>
+              </a:rPr>
+              <a:t>Predição econômica: O PIB – Frisch (1929); </a:t>
+            </a:r>
+            <a:r>
+              <a:rPr lang="it-IT" sz="2200" dirty="0">
+                <a:latin typeface="+mn-lt"/>
+              </a:rPr>
+              <a:t>Laudon e Laudon (2022)  e</a:t>
+            </a:r>
+            <a:r>
+              <a:rPr lang="pt-BR" sz="2200" dirty="0">
+                <a:latin typeface="+mn-lt"/>
+              </a:rPr>
+              <a:t> IBGE (2026).</a:t>
+            </a:r>
+          </a:p>
+          <a:p>
+            <a:pPr>
+              <a:buFont typeface="Arial" panose="020B0604020202020204" pitchFamily="34" charset="0"/>
+              <a:buChar char="•"/>
+            </a:pPr>
+            <a:r>
+              <a:rPr lang="pt-BR" sz="2200" dirty="0">
+                <a:latin typeface="+mn-lt"/>
+              </a:rPr>
+              <a:t>Modelos tradicionais: Braga (2025); Rebelo (2022).</a:t>
+            </a:r>
+          </a:p>
+          <a:p>
+            <a:pPr>
+              <a:buFont typeface="Arial" panose="020B0604020202020204" pitchFamily="34" charset="0"/>
+              <a:buChar char="•"/>
+            </a:pPr>
+            <a:r>
+              <a:rPr lang="pt-BR" sz="2200" dirty="0">
+                <a:latin typeface="+mn-lt"/>
+              </a:rPr>
+              <a:t>ARIMA: Box e Jenkins (1970); Silva </a:t>
+            </a:r>
+            <a:r>
+              <a:rPr lang="pt-BR" sz="2200" i="1" dirty="0">
+                <a:latin typeface="+mn-lt"/>
+              </a:rPr>
+              <a:t>et al </a:t>
+            </a:r>
+            <a:r>
+              <a:rPr lang="pt-BR" sz="2200" dirty="0">
+                <a:latin typeface="+mn-lt"/>
+              </a:rPr>
+              <a:t>(2025); Li (2024).</a:t>
+            </a:r>
+          </a:p>
+          <a:p>
+            <a:pPr>
+              <a:buFont typeface="Arial" panose="020B0604020202020204" pitchFamily="34" charset="0"/>
+              <a:buChar char="•"/>
+            </a:pPr>
+            <a:r>
+              <a:rPr lang="pt-BR" sz="2200" dirty="0">
+                <a:latin typeface="+mn-lt"/>
+              </a:rPr>
+              <a:t>VAR: </a:t>
+            </a:r>
+            <a:r>
+              <a:rPr lang="pt-BR" sz="2200" dirty="0" err="1">
+                <a:latin typeface="+mn-lt"/>
+              </a:rPr>
+              <a:t>Sims</a:t>
+            </a:r>
+            <a:r>
+              <a:rPr lang="pt-BR" sz="2200" dirty="0">
+                <a:latin typeface="+mn-lt"/>
+              </a:rPr>
+              <a:t> (1980); Fialho </a:t>
+            </a:r>
+            <a:r>
+              <a:rPr lang="pt-BR" sz="2200" i="1" dirty="0">
+                <a:latin typeface="+mn-lt"/>
+              </a:rPr>
+              <a:t>et al</a:t>
+            </a:r>
+            <a:r>
+              <a:rPr lang="pt-BR" sz="2200" dirty="0">
+                <a:latin typeface="+mn-lt"/>
+              </a:rPr>
+              <a:t>. (2024); Oliveira e Junior (2024); </a:t>
+            </a:r>
+            <a:r>
+              <a:rPr lang="pt-BR" sz="2200" dirty="0" err="1">
+                <a:latin typeface="+mn-lt"/>
+              </a:rPr>
+              <a:t>Koop</a:t>
+            </a:r>
+            <a:r>
+              <a:rPr lang="pt-BR" sz="2200" dirty="0">
+                <a:latin typeface="+mn-lt"/>
+              </a:rPr>
+              <a:t> </a:t>
+            </a:r>
+            <a:r>
+              <a:rPr lang="pt-BR" sz="2200" i="1" dirty="0">
+                <a:latin typeface="+mn-lt"/>
+              </a:rPr>
+              <a:t>et al</a:t>
+            </a:r>
+            <a:r>
+              <a:rPr lang="pt-BR" sz="2200" dirty="0">
+                <a:latin typeface="+mn-lt"/>
+              </a:rPr>
+              <a:t>. (2025).</a:t>
+            </a:r>
+          </a:p>
+          <a:p>
+            <a:pPr>
+              <a:buFont typeface="Arial" panose="020B0604020202020204" pitchFamily="34" charset="0"/>
+              <a:buChar char="•"/>
+            </a:pPr>
+            <a:r>
+              <a:rPr lang="pt-BR" sz="2200" dirty="0">
+                <a:latin typeface="+mn-lt"/>
+              </a:rPr>
+              <a:t>MIDAS: Ghysels et al. (2004); Castelli (2022); Micheletti (2024).</a:t>
+            </a:r>
+          </a:p>
+          <a:p>
+            <a:pPr>
+              <a:buFont typeface="Arial" panose="020B0604020202020204" pitchFamily="34" charset="0"/>
+              <a:buChar char="•"/>
+            </a:pPr>
+            <a:r>
+              <a:rPr lang="pt-BR" sz="2200" dirty="0">
+                <a:latin typeface="+mn-lt"/>
+              </a:rPr>
+              <a:t>DFM: Geweke (1977); Doz e Fuleky (2019); Alves (2009); Moura et al. (2020).</a:t>
+            </a:r>
+          </a:p>
+          <a:p>
+            <a:pPr>
+              <a:buFont typeface="Arial" panose="020B0604020202020204" pitchFamily="34" charset="0"/>
+              <a:buChar char="•"/>
+            </a:pPr>
+            <a:r>
+              <a:rPr lang="pt-BR" sz="2200" b="1" dirty="0">
+                <a:latin typeface="+mn-lt"/>
+              </a:rPr>
+              <a:t>Modelos de IA: </a:t>
+            </a:r>
+            <a:r>
+              <a:rPr lang="pt-BR" sz="2200" b="1" dirty="0">
+                <a:solidFill>
+                  <a:schemeClr val="tx1"/>
+                </a:solidFill>
+                <a:latin typeface="+mn-lt"/>
+              </a:rPr>
+              <a:t>Carmo e Lopacinski (2023); Vasconcelos (2017) </a:t>
+            </a:r>
+          </a:p>
+          <a:p>
+            <a:pPr>
+              <a:buFont typeface="Arial" panose="020B0604020202020204" pitchFamily="34" charset="0"/>
+              <a:buChar char="•"/>
+            </a:pPr>
+            <a:r>
+              <a:rPr lang="pt-BR" sz="2200" dirty="0">
+                <a:latin typeface="+mn-lt"/>
+              </a:rPr>
+              <a:t>Redes Neurais: Rosenblatt (1958); Rumelhart et al. (1986); Ghosh e Ranjan (2023); Kava (2022); Ekman (2021); Carmo e Lopacinski (2023); Amaral et al. (2023).</a:t>
+            </a:r>
+          </a:p>
+          <a:p>
+            <a:pPr>
+              <a:buFont typeface="Arial" panose="020B0604020202020204" pitchFamily="34" charset="0"/>
+              <a:buChar char="•"/>
+            </a:pPr>
+            <a:r>
+              <a:rPr lang="pt-BR" sz="2200" dirty="0">
+                <a:latin typeface="+mn-lt"/>
+              </a:rPr>
+              <a:t>Florestas Aleatórias: Breiman (2001); Landowska et al. (2025); Lemos e Souza (2025).</a:t>
+            </a:r>
+          </a:p>
+        </p:txBody>
+      </p:sp>
+      <p:pic>
+        <p:nvPicPr>
+          <p:cNvPr id="98" name="Google Shape;98;p2" descr="Universidade Federal da Fronteira Sul – Wikipédia, a enciclopédia livre">
+            <a:extLst>
+              <a:ext uri="{FF2B5EF4-FFF2-40B4-BE49-F238E27FC236}">
+                <a16:creationId xmlns:a16="http://schemas.microsoft.com/office/drawing/2014/main" id="{E80EF5C1-A5F0-D096-4ACE-96A3F0AC3097}"/>
+              </a:ext>
+            </a:extLst>
+          </p:cNvPr>
+          <p:cNvPicPr preferRelativeResize="0"/>
+          <p:nvPr/>
+        </p:nvPicPr>
+        <p:blipFill rotWithShape="1">
+          <a:blip r:embed="rId3">
+            <a:alphaModFix/>
+          </a:blip>
+          <a:srcRect/>
+          <a:stretch/>
+        </p:blipFill>
+        <p:spPr>
+          <a:xfrm>
+            <a:off x="10978329" y="18255"/>
+            <a:ext cx="975614" cy="1325563"/>
+          </a:xfrm>
+          <a:prstGeom prst="rect">
+            <a:avLst/>
+          </a:prstGeom>
+          <a:noFill/>
+          <a:ln>
+            <a:noFill/>
+          </a:ln>
+        </p:spPr>
+      </p:pic>
+      <p:sp>
+        <p:nvSpPr>
+          <p:cNvPr id="99" name="Google Shape;99;p2">
+            <a:extLst>
+              <a:ext uri="{FF2B5EF4-FFF2-40B4-BE49-F238E27FC236}">
+                <a16:creationId xmlns:a16="http://schemas.microsoft.com/office/drawing/2014/main" id="{024228DC-FAE5-FEC1-D1C6-033E26803133}"/>
+              </a:ext>
+            </a:extLst>
+          </p:cNvPr>
+          <p:cNvSpPr/>
+          <p:nvPr/>
+        </p:nvSpPr>
+        <p:spPr>
+          <a:xfrm>
+            <a:off x="170268" y="958543"/>
+            <a:ext cx="10515600" cy="63062"/>
+          </a:xfrm>
+          <a:prstGeom prst="rect">
+            <a:avLst/>
+          </a:prstGeom>
+          <a:solidFill>
+            <a:srgbClr val="548135"/>
+          </a:solidFill>
+          <a:ln w="12700" cap="flat" cmpd="sng">
+            <a:solidFill>
+              <a:srgbClr val="1C3052"/>
+            </a:solidFill>
+            <a:prstDash val="solid"/>
+            <a:miter lim="800000"/>
+            <a:headEnd type="none" w="sm" len="sm"/>
+            <a:tailEnd type="none" w="sm" len="sm"/>
+          </a:ln>
+        </p:spPr>
+        <p:txBody>
+          <a:bodyPr spcFirstLastPara="1" wrap="square" lIns="91425" tIns="45700" rIns="91425" bIns="45700" anchor="ctr" anchorCtr="0">
+            <a:noAutofit/>
+          </a:bodyPr>
+          <a:lstStyle/>
+          <a:p>
+            <a:pPr marL="0" marR="0" lvl="0" indent="0" algn="ctr" rtl="0">
+              <a:spcBef>
+                <a:spcPts val="0"/>
+              </a:spcBef>
+              <a:spcAft>
+                <a:spcPts val="0"/>
+              </a:spcAft>
+              <a:buNone/>
+            </a:pPr>
+            <a:endParaRPr sz="1800">
+              <a:solidFill>
+                <a:schemeClr val="lt1"/>
+              </a:solidFill>
+              <a:latin typeface="Calibri"/>
+              <a:ea typeface="Calibri"/>
+              <a:cs typeface="Calibri"/>
+              <a:sym typeface="Calibri"/>
+            </a:endParaRPr>
+          </a:p>
+        </p:txBody>
+      </p:sp>
+      <p:sp>
+        <p:nvSpPr>
+          <p:cNvPr id="100" name="Google Shape;100;p2">
+            <a:extLst>
+              <a:ext uri="{FF2B5EF4-FFF2-40B4-BE49-F238E27FC236}">
+                <a16:creationId xmlns:a16="http://schemas.microsoft.com/office/drawing/2014/main" id="{7A01BD98-8141-02CE-6A92-834CA6939F66}"/>
+              </a:ext>
+            </a:extLst>
+          </p:cNvPr>
+          <p:cNvSpPr txBox="1">
+            <a:spLocks noGrp="1"/>
+          </p:cNvSpPr>
+          <p:nvPr>
+            <p:ph type="sldNum" idx="12"/>
+          </p:nvPr>
+        </p:nvSpPr>
+        <p:spPr>
+          <a:xfrm>
+            <a:off x="9440152" y="6492875"/>
+            <a:ext cx="2743200" cy="365125"/>
+          </a:xfrm>
+          <a:prstGeom prst="rect">
+            <a:avLst/>
+          </a:prstGeom>
+          <a:noFill/>
+          <a:ln>
+            <a:noFill/>
+          </a:ln>
+        </p:spPr>
+        <p:txBody>
+          <a:bodyPr spcFirstLastPara="1" wrap="square" lIns="91425" tIns="45700" rIns="91425" bIns="45700" anchor="ctr" anchorCtr="0">
+            <a:noAutofit/>
+          </a:bodyPr>
+          <a:lstStyle/>
+          <a:p>
+            <a:pPr marL="0" lvl="0" indent="0" algn="r" rtl="0">
+              <a:spcBef>
+                <a:spcPts val="0"/>
+              </a:spcBef>
+              <a:spcAft>
+                <a:spcPts val="0"/>
+              </a:spcAft>
+              <a:buNone/>
+            </a:pPr>
+            <a:fld id="{00000000-1234-1234-1234-123412341234}" type="slidenum">
+              <a:rPr lang="pt-BR" sz="1800"/>
+              <a:t>15</a:t>
+            </a:fld>
+            <a:endParaRPr sz="1800" dirty="0"/>
+          </a:p>
+        </p:txBody>
+      </p:sp>
+    </p:spTree>
+    <p:extLst>
+      <p:ext uri="{BB962C8B-B14F-4D97-AF65-F5344CB8AC3E}">
+        <p14:creationId xmlns:p14="http://schemas.microsoft.com/office/powerpoint/2010/main" val="250619828"/>
+      </p:ext>
+    </p:extLst>
+  </p:cSld>
+  <p:clrMapOvr>
+    <a:masterClrMapping/>
+  </p:clrMapOvr>
+</p:sld>
+</file>
+
+<file path=ppt/slides/slide16.xml><?xml version="1.0" encoding="utf-8"?>
+<p:sld xmlns:a="http://schemas.openxmlformats.org/drawingml/2006/main" xmlns:r="http://schemas.openxmlformats.org/officeDocument/2006/relationships" xmlns:p="http://schemas.openxmlformats.org/presentationml/2006/main">
+  <p:cSld>
+    <p:spTree>
+      <p:nvGrpSpPr>
+        <p:cNvPr id="1" name="Shape 95">
+          <a:extLst>
+            <a:ext uri="{FF2B5EF4-FFF2-40B4-BE49-F238E27FC236}">
+              <a16:creationId xmlns:a16="http://schemas.microsoft.com/office/drawing/2014/main" id="{D6FA4DD3-CC2E-D4D8-9A49-10B98487B1C6}"/>
+            </a:ext>
+          </a:extLst>
+        </p:cNvPr>
+        <p:cNvGrpSpPr/>
+        <p:nvPr/>
+      </p:nvGrpSpPr>
+      <p:grpSpPr>
+        <a:xfrm>
+          <a:off x="0" y="0"/>
+          <a:ext cx="0" cy="0"/>
+          <a:chOff x="0" y="0"/>
+          <a:chExt cx="0" cy="0"/>
+        </a:xfrm>
+      </p:grpSpPr>
+      <p:sp>
+        <p:nvSpPr>
+          <p:cNvPr id="96" name="Google Shape;96;p2">
+            <a:extLst>
+              <a:ext uri="{FF2B5EF4-FFF2-40B4-BE49-F238E27FC236}">
+                <a16:creationId xmlns:a16="http://schemas.microsoft.com/office/drawing/2014/main" id="{F3B5CDFA-6204-7074-39A3-D7AACD104D67}"/>
+              </a:ext>
+            </a:extLst>
+          </p:cNvPr>
+          <p:cNvSpPr txBox="1">
+            <a:spLocks noGrp="1"/>
+          </p:cNvSpPr>
+          <p:nvPr>
+            <p:ph type="title"/>
+          </p:nvPr>
+        </p:nvSpPr>
+        <p:spPr>
+          <a:xfrm>
+            <a:off x="170268" y="190105"/>
+            <a:ext cx="10329566" cy="768438"/>
+          </a:xfrm>
+          <a:prstGeom prst="rect">
+            <a:avLst/>
+          </a:prstGeom>
+          <a:noFill/>
+          <a:ln>
+            <a:noFill/>
+          </a:ln>
+        </p:spPr>
+        <p:txBody>
+          <a:bodyPr spcFirstLastPara="1" wrap="square" lIns="91425" tIns="45700" rIns="91425" bIns="45700" anchor="ctr" anchorCtr="0">
+            <a:noAutofit/>
+          </a:bodyPr>
+          <a:lstStyle/>
+          <a:p>
+            <a:pPr lvl="0">
+              <a:buSzPts val="4400"/>
+            </a:pPr>
+            <a:r>
+              <a:rPr lang="pt-BR" sz="3200" b="1" dirty="0">
+                <a:latin typeface="+mj-lt"/>
+              </a:rPr>
+              <a:t>Revisão</a:t>
+            </a:r>
+            <a:r>
+              <a:rPr lang="pt-BR" sz="3200" dirty="0"/>
+              <a:t> </a:t>
+            </a:r>
+            <a:r>
+              <a:rPr lang="pt-BR" sz="3200" b="1" dirty="0">
+                <a:latin typeface="+mj-lt"/>
+              </a:rPr>
+              <a:t>de literatura</a:t>
+            </a:r>
+            <a:endParaRPr sz="3200" b="1" dirty="0">
+              <a:latin typeface="+mj-lt"/>
+            </a:endParaRPr>
+          </a:p>
+        </p:txBody>
+      </p:sp>
+      <p:sp>
+        <p:nvSpPr>
+          <p:cNvPr id="97" name="Google Shape;97;p2">
+            <a:extLst>
+              <a:ext uri="{FF2B5EF4-FFF2-40B4-BE49-F238E27FC236}">
+                <a16:creationId xmlns:a16="http://schemas.microsoft.com/office/drawing/2014/main" id="{BF6BEEED-C5BC-CB27-3161-761AA4F142E7}"/>
+              </a:ext>
+            </a:extLst>
+          </p:cNvPr>
+          <p:cNvSpPr txBox="1">
+            <a:spLocks noGrp="1"/>
+          </p:cNvSpPr>
+          <p:nvPr>
+            <p:ph type="body" idx="1"/>
+          </p:nvPr>
+        </p:nvSpPr>
+        <p:spPr>
+          <a:xfrm>
+            <a:off x="170268" y="1125342"/>
+            <a:ext cx="11855669" cy="5732658"/>
+          </a:xfrm>
+          <a:prstGeom prst="rect">
+            <a:avLst/>
+          </a:prstGeom>
+          <a:noFill/>
+          <a:ln>
+            <a:noFill/>
+          </a:ln>
+        </p:spPr>
+        <p:txBody>
+          <a:bodyPr spcFirstLastPara="1" wrap="square" lIns="91425" tIns="45700" rIns="91425" bIns="45700" anchor="t" anchorCtr="0">
+            <a:noAutofit/>
+          </a:bodyPr>
+          <a:lstStyle/>
+          <a:p>
+            <a:pPr>
+              <a:buFont typeface="Arial" panose="020B0604020202020204" pitchFamily="34" charset="0"/>
+              <a:buChar char="•"/>
+            </a:pPr>
+            <a:endParaRPr lang="pt-BR" sz="2200" dirty="0">
+              <a:latin typeface="+mn-lt"/>
+            </a:endParaRPr>
+          </a:p>
+          <a:p>
+            <a:pPr>
+              <a:buFont typeface="Arial" panose="020B0604020202020204" pitchFamily="34" charset="0"/>
+              <a:buChar char="•"/>
+            </a:pPr>
+            <a:r>
+              <a:rPr lang="pt-BR" sz="2200" dirty="0">
+                <a:latin typeface="+mn-lt"/>
+              </a:rPr>
+              <a:t>Predição econômica: O PIB – Frisch (1929); </a:t>
+            </a:r>
+            <a:r>
+              <a:rPr lang="it-IT" sz="2200" dirty="0">
+                <a:latin typeface="+mn-lt"/>
+              </a:rPr>
+              <a:t>Laudon e Laudon (2022)  e</a:t>
+            </a:r>
+            <a:r>
+              <a:rPr lang="pt-BR" sz="2200" dirty="0">
+                <a:latin typeface="+mn-lt"/>
+              </a:rPr>
+              <a:t> IBGE (2026).</a:t>
+            </a:r>
+          </a:p>
+          <a:p>
+            <a:pPr>
+              <a:buFont typeface="Arial" panose="020B0604020202020204" pitchFamily="34" charset="0"/>
+              <a:buChar char="•"/>
+            </a:pPr>
+            <a:r>
+              <a:rPr lang="pt-BR" sz="2200" dirty="0">
+                <a:latin typeface="+mn-lt"/>
+              </a:rPr>
+              <a:t>Modelos tradicionais: Braga (2025); Rebelo (2022).</a:t>
+            </a:r>
+          </a:p>
+          <a:p>
+            <a:pPr>
+              <a:buFont typeface="Arial" panose="020B0604020202020204" pitchFamily="34" charset="0"/>
+              <a:buChar char="•"/>
+            </a:pPr>
+            <a:r>
+              <a:rPr lang="pt-BR" sz="2200" dirty="0">
+                <a:latin typeface="+mn-lt"/>
+              </a:rPr>
+              <a:t>ARIMA: Box e Jenkins (1970); Silva </a:t>
+            </a:r>
+            <a:r>
+              <a:rPr lang="pt-BR" sz="2200" i="1" dirty="0">
+                <a:latin typeface="+mn-lt"/>
+              </a:rPr>
+              <a:t>et al </a:t>
+            </a:r>
+            <a:r>
+              <a:rPr lang="pt-BR" sz="2200" dirty="0">
+                <a:latin typeface="+mn-lt"/>
+              </a:rPr>
+              <a:t>(2025); Li (2024).</a:t>
+            </a:r>
+          </a:p>
+          <a:p>
+            <a:pPr>
+              <a:buFont typeface="Arial" panose="020B0604020202020204" pitchFamily="34" charset="0"/>
+              <a:buChar char="•"/>
+            </a:pPr>
+            <a:r>
+              <a:rPr lang="pt-BR" sz="2200" dirty="0">
+                <a:latin typeface="+mn-lt"/>
+              </a:rPr>
+              <a:t>VAR: </a:t>
+            </a:r>
+            <a:r>
+              <a:rPr lang="pt-BR" sz="2200" dirty="0" err="1">
+                <a:latin typeface="+mn-lt"/>
+              </a:rPr>
+              <a:t>Sims</a:t>
+            </a:r>
+            <a:r>
+              <a:rPr lang="pt-BR" sz="2200" dirty="0">
+                <a:latin typeface="+mn-lt"/>
+              </a:rPr>
+              <a:t> (1980); Fialho </a:t>
+            </a:r>
+            <a:r>
+              <a:rPr lang="pt-BR" sz="2200" i="1" dirty="0">
+                <a:latin typeface="+mn-lt"/>
+              </a:rPr>
+              <a:t>et al</a:t>
+            </a:r>
+            <a:r>
+              <a:rPr lang="pt-BR" sz="2200" dirty="0">
+                <a:latin typeface="+mn-lt"/>
+              </a:rPr>
+              <a:t>. (2024); Oliveira e Junior (2024); </a:t>
+            </a:r>
+            <a:r>
+              <a:rPr lang="pt-BR" sz="2200" dirty="0" err="1">
+                <a:latin typeface="+mn-lt"/>
+              </a:rPr>
+              <a:t>Koop</a:t>
+            </a:r>
+            <a:r>
+              <a:rPr lang="pt-BR" sz="2200" dirty="0">
+                <a:latin typeface="+mn-lt"/>
+              </a:rPr>
+              <a:t> </a:t>
+            </a:r>
+            <a:r>
+              <a:rPr lang="pt-BR" sz="2200" i="1" dirty="0">
+                <a:latin typeface="+mn-lt"/>
+              </a:rPr>
+              <a:t>et al</a:t>
+            </a:r>
+            <a:r>
+              <a:rPr lang="pt-BR" sz="2200" dirty="0">
+                <a:latin typeface="+mn-lt"/>
+              </a:rPr>
+              <a:t>. (2025).</a:t>
+            </a:r>
+          </a:p>
+          <a:p>
+            <a:pPr>
+              <a:buFont typeface="Arial" panose="020B0604020202020204" pitchFamily="34" charset="0"/>
+              <a:buChar char="•"/>
+            </a:pPr>
+            <a:r>
+              <a:rPr lang="pt-BR" sz="2200" dirty="0">
+                <a:latin typeface="+mn-lt"/>
+              </a:rPr>
+              <a:t>MIDAS: Ghysels et al. (2004); Castelli (2022); Micheletti (2024).</a:t>
+            </a:r>
+          </a:p>
+          <a:p>
+            <a:pPr>
+              <a:buFont typeface="Arial" panose="020B0604020202020204" pitchFamily="34" charset="0"/>
+              <a:buChar char="•"/>
+            </a:pPr>
+            <a:r>
+              <a:rPr lang="pt-BR" sz="2200" dirty="0">
+                <a:latin typeface="+mn-lt"/>
+              </a:rPr>
+              <a:t>DFM: Geweke (1977); Doz e Fuleky (2019); Alves (2009); Moura et al. (2020).</a:t>
+            </a:r>
+          </a:p>
+          <a:p>
+            <a:pPr>
+              <a:buFont typeface="Arial" panose="020B0604020202020204" pitchFamily="34" charset="0"/>
+              <a:buChar char="•"/>
+            </a:pPr>
+            <a:r>
+              <a:rPr lang="pt-BR" sz="2200" dirty="0">
+                <a:latin typeface="+mn-lt"/>
+              </a:rPr>
+              <a:t>Modelos de IA: </a:t>
+            </a:r>
+            <a:r>
+              <a:rPr lang="pt-BR" sz="2200" dirty="0">
+                <a:solidFill>
+                  <a:schemeClr val="tx1"/>
+                </a:solidFill>
+                <a:latin typeface="+mn-lt"/>
+              </a:rPr>
+              <a:t>Carmo e Lopacinski (2023); Vasconcelos (2017) </a:t>
+            </a:r>
+          </a:p>
+          <a:p>
+            <a:pPr>
+              <a:buFont typeface="Arial" panose="020B0604020202020204" pitchFamily="34" charset="0"/>
+              <a:buChar char="•"/>
+            </a:pPr>
+            <a:r>
+              <a:rPr lang="pt-BR" sz="2200" b="1" dirty="0">
+                <a:latin typeface="+mn-lt"/>
+              </a:rPr>
+              <a:t>Redes Neurais: Rosenblatt (1958); Rumelhart et al. (1986); Ghosh e Ranjan (2023); Kava (2022); Ekman (2021); Carmo e Lopacinski (2023); Amaral et al. (2023).</a:t>
+            </a:r>
+          </a:p>
+          <a:p>
+            <a:pPr>
+              <a:buFont typeface="Arial" panose="020B0604020202020204" pitchFamily="34" charset="0"/>
+              <a:buChar char="•"/>
+            </a:pPr>
+            <a:r>
+              <a:rPr lang="pt-BR" sz="2200" dirty="0">
+                <a:latin typeface="+mn-lt"/>
+              </a:rPr>
+              <a:t>Florestas Aleatórias: Breiman (2001); Landowska et al. (2025); Lemos e Souza (2025).</a:t>
+            </a:r>
+          </a:p>
+        </p:txBody>
+      </p:sp>
+      <p:pic>
+        <p:nvPicPr>
+          <p:cNvPr id="98" name="Google Shape;98;p2" descr="Universidade Federal da Fronteira Sul – Wikipédia, a enciclopédia livre">
+            <a:extLst>
+              <a:ext uri="{FF2B5EF4-FFF2-40B4-BE49-F238E27FC236}">
+                <a16:creationId xmlns:a16="http://schemas.microsoft.com/office/drawing/2014/main" id="{5D235F74-02D8-A8AD-B182-395AAC363A23}"/>
+              </a:ext>
+            </a:extLst>
+          </p:cNvPr>
+          <p:cNvPicPr preferRelativeResize="0"/>
+          <p:nvPr/>
+        </p:nvPicPr>
+        <p:blipFill rotWithShape="1">
+          <a:blip r:embed="rId3">
+            <a:alphaModFix/>
+          </a:blip>
+          <a:srcRect/>
+          <a:stretch/>
+        </p:blipFill>
+        <p:spPr>
+          <a:xfrm>
+            <a:off x="10978329" y="18255"/>
+            <a:ext cx="975614" cy="1325563"/>
+          </a:xfrm>
+          <a:prstGeom prst="rect">
+            <a:avLst/>
+          </a:prstGeom>
+          <a:noFill/>
+          <a:ln>
+            <a:noFill/>
+          </a:ln>
+        </p:spPr>
+      </p:pic>
+      <p:sp>
+        <p:nvSpPr>
+          <p:cNvPr id="99" name="Google Shape;99;p2">
+            <a:extLst>
+              <a:ext uri="{FF2B5EF4-FFF2-40B4-BE49-F238E27FC236}">
+                <a16:creationId xmlns:a16="http://schemas.microsoft.com/office/drawing/2014/main" id="{5FCAC372-2454-B30D-F6EC-2D9FA5D2CA3D}"/>
+              </a:ext>
+            </a:extLst>
+          </p:cNvPr>
+          <p:cNvSpPr/>
+          <p:nvPr/>
+        </p:nvSpPr>
+        <p:spPr>
+          <a:xfrm>
+            <a:off x="170268" y="958543"/>
+            <a:ext cx="10515600" cy="63062"/>
+          </a:xfrm>
+          <a:prstGeom prst="rect">
+            <a:avLst/>
+          </a:prstGeom>
+          <a:solidFill>
+            <a:srgbClr val="548135"/>
+          </a:solidFill>
+          <a:ln w="12700" cap="flat" cmpd="sng">
+            <a:solidFill>
+              <a:srgbClr val="1C3052"/>
+            </a:solidFill>
+            <a:prstDash val="solid"/>
+            <a:miter lim="800000"/>
+            <a:headEnd type="none" w="sm" len="sm"/>
+            <a:tailEnd type="none" w="sm" len="sm"/>
+          </a:ln>
+        </p:spPr>
+        <p:txBody>
+          <a:bodyPr spcFirstLastPara="1" wrap="square" lIns="91425" tIns="45700" rIns="91425" bIns="45700" anchor="ctr" anchorCtr="0">
+            <a:noAutofit/>
+          </a:bodyPr>
+          <a:lstStyle/>
+          <a:p>
+            <a:pPr marL="0" marR="0" lvl="0" indent="0" algn="ctr" rtl="0">
+              <a:spcBef>
+                <a:spcPts val="0"/>
+              </a:spcBef>
+              <a:spcAft>
+                <a:spcPts val="0"/>
+              </a:spcAft>
+              <a:buNone/>
+            </a:pPr>
+            <a:endParaRPr sz="1800">
+              <a:solidFill>
+                <a:schemeClr val="lt1"/>
+              </a:solidFill>
+              <a:latin typeface="Calibri"/>
+              <a:ea typeface="Calibri"/>
+              <a:cs typeface="Calibri"/>
+              <a:sym typeface="Calibri"/>
+            </a:endParaRPr>
+          </a:p>
+        </p:txBody>
+      </p:sp>
+      <p:sp>
+        <p:nvSpPr>
+          <p:cNvPr id="100" name="Google Shape;100;p2">
+            <a:extLst>
+              <a:ext uri="{FF2B5EF4-FFF2-40B4-BE49-F238E27FC236}">
+                <a16:creationId xmlns:a16="http://schemas.microsoft.com/office/drawing/2014/main" id="{CCC83299-F6AE-7EB2-04AD-988C055F4616}"/>
+              </a:ext>
+            </a:extLst>
+          </p:cNvPr>
+          <p:cNvSpPr txBox="1">
+            <a:spLocks noGrp="1"/>
+          </p:cNvSpPr>
+          <p:nvPr>
+            <p:ph type="sldNum" idx="12"/>
+          </p:nvPr>
+        </p:nvSpPr>
+        <p:spPr>
+          <a:xfrm>
+            <a:off x="9440152" y="6492875"/>
+            <a:ext cx="2743200" cy="365125"/>
+          </a:xfrm>
+          <a:prstGeom prst="rect">
+            <a:avLst/>
+          </a:prstGeom>
+          <a:noFill/>
+          <a:ln>
+            <a:noFill/>
+          </a:ln>
+        </p:spPr>
+        <p:txBody>
+          <a:bodyPr spcFirstLastPara="1" wrap="square" lIns="91425" tIns="45700" rIns="91425" bIns="45700" anchor="ctr" anchorCtr="0">
+            <a:noAutofit/>
+          </a:bodyPr>
+          <a:lstStyle/>
+          <a:p>
+            <a:pPr marL="0" lvl="0" indent="0" algn="r" rtl="0">
+              <a:spcBef>
+                <a:spcPts val="0"/>
+              </a:spcBef>
+              <a:spcAft>
+                <a:spcPts val="0"/>
+              </a:spcAft>
+              <a:buNone/>
+            </a:pPr>
+            <a:fld id="{00000000-1234-1234-1234-123412341234}" type="slidenum">
+              <a:rPr lang="pt-BR" sz="1800"/>
+              <a:t>16</a:t>
+            </a:fld>
+            <a:endParaRPr sz="1800" dirty="0"/>
+          </a:p>
+        </p:txBody>
+      </p:sp>
+    </p:spTree>
+    <p:extLst>
+      <p:ext uri="{BB962C8B-B14F-4D97-AF65-F5344CB8AC3E}">
+        <p14:creationId xmlns:p14="http://schemas.microsoft.com/office/powerpoint/2010/main" val="891273468"/>
+      </p:ext>
+    </p:extLst>
+  </p:cSld>
+  <p:clrMapOvr>
+    <a:masterClrMapping/>
+  </p:clrMapOvr>
+</p:sld>
+</file>
+
+<file path=ppt/slides/slide17.xml><?xml version="1.0" encoding="utf-8"?>
+<p:sld xmlns:a="http://schemas.openxmlformats.org/drawingml/2006/main" xmlns:r="http://schemas.openxmlformats.org/officeDocument/2006/relationships" xmlns:p="http://schemas.openxmlformats.org/presentationml/2006/main">
+  <p:cSld>
+    <p:spTree>
+      <p:nvGrpSpPr>
+        <p:cNvPr id="1" name="Shape 95">
+          <a:extLst>
+            <a:ext uri="{FF2B5EF4-FFF2-40B4-BE49-F238E27FC236}">
+              <a16:creationId xmlns:a16="http://schemas.microsoft.com/office/drawing/2014/main" id="{FB4A82C9-DE8E-830C-3447-9BD647FABCF5}"/>
+            </a:ext>
+          </a:extLst>
+        </p:cNvPr>
+        <p:cNvGrpSpPr/>
+        <p:nvPr/>
+      </p:nvGrpSpPr>
+      <p:grpSpPr>
+        <a:xfrm>
+          <a:off x="0" y="0"/>
+          <a:ext cx="0" cy="0"/>
+          <a:chOff x="0" y="0"/>
+          <a:chExt cx="0" cy="0"/>
+        </a:xfrm>
+      </p:grpSpPr>
+      <p:sp>
+        <p:nvSpPr>
+          <p:cNvPr id="96" name="Google Shape;96;p2">
+            <a:extLst>
+              <a:ext uri="{FF2B5EF4-FFF2-40B4-BE49-F238E27FC236}">
+                <a16:creationId xmlns:a16="http://schemas.microsoft.com/office/drawing/2014/main" id="{7634B631-6536-4148-1F5F-6A8EDD41E076}"/>
+              </a:ext>
+            </a:extLst>
+          </p:cNvPr>
+          <p:cNvSpPr txBox="1">
+            <a:spLocks noGrp="1"/>
+          </p:cNvSpPr>
+          <p:nvPr>
+            <p:ph type="title"/>
+          </p:nvPr>
+        </p:nvSpPr>
+        <p:spPr>
+          <a:xfrm>
+            <a:off x="170268" y="190105"/>
+            <a:ext cx="10329566" cy="768438"/>
+          </a:xfrm>
+          <a:prstGeom prst="rect">
+            <a:avLst/>
+          </a:prstGeom>
+          <a:noFill/>
+          <a:ln>
+            <a:noFill/>
+          </a:ln>
+        </p:spPr>
+        <p:txBody>
+          <a:bodyPr spcFirstLastPara="1" wrap="square" lIns="91425" tIns="45700" rIns="91425" bIns="45700" anchor="ctr" anchorCtr="0">
+            <a:noAutofit/>
+          </a:bodyPr>
+          <a:lstStyle/>
+          <a:p>
+            <a:pPr lvl="0">
+              <a:buSzPts val="4400"/>
+            </a:pPr>
+            <a:r>
+              <a:rPr lang="pt-BR" sz="3200" b="1" dirty="0">
+                <a:latin typeface="+mj-lt"/>
+              </a:rPr>
+              <a:t>Revisão</a:t>
+            </a:r>
+            <a:r>
+              <a:rPr lang="pt-BR" sz="3200" dirty="0"/>
+              <a:t> </a:t>
+            </a:r>
+            <a:r>
+              <a:rPr lang="pt-BR" sz="3200" b="1" dirty="0">
+                <a:latin typeface="+mj-lt"/>
+              </a:rPr>
+              <a:t>de literatura</a:t>
+            </a:r>
+            <a:endParaRPr sz="3200" b="1" dirty="0">
+              <a:latin typeface="+mj-lt"/>
+            </a:endParaRPr>
+          </a:p>
+        </p:txBody>
+      </p:sp>
+      <p:sp>
+        <p:nvSpPr>
+          <p:cNvPr id="97" name="Google Shape;97;p2">
+            <a:extLst>
+              <a:ext uri="{FF2B5EF4-FFF2-40B4-BE49-F238E27FC236}">
+                <a16:creationId xmlns:a16="http://schemas.microsoft.com/office/drawing/2014/main" id="{6124EC39-3F86-B8F9-3949-2DB2CDC1B2E3}"/>
+              </a:ext>
+            </a:extLst>
+          </p:cNvPr>
+          <p:cNvSpPr txBox="1">
+            <a:spLocks noGrp="1"/>
+          </p:cNvSpPr>
+          <p:nvPr>
+            <p:ph type="body" idx="1"/>
+          </p:nvPr>
+        </p:nvSpPr>
+        <p:spPr>
+          <a:xfrm>
+            <a:off x="170268" y="1125342"/>
+            <a:ext cx="11855669" cy="5732658"/>
+          </a:xfrm>
+          <a:prstGeom prst="rect">
+            <a:avLst/>
+          </a:prstGeom>
+          <a:noFill/>
+          <a:ln>
+            <a:noFill/>
+          </a:ln>
+        </p:spPr>
+        <p:txBody>
+          <a:bodyPr spcFirstLastPara="1" wrap="square" lIns="91425" tIns="45700" rIns="91425" bIns="45700" anchor="t" anchorCtr="0">
+            <a:noAutofit/>
+          </a:bodyPr>
+          <a:lstStyle/>
+          <a:p>
+            <a:pPr>
+              <a:buFont typeface="Arial" panose="020B0604020202020204" pitchFamily="34" charset="0"/>
+              <a:buChar char="•"/>
+            </a:pPr>
+            <a:endParaRPr lang="pt-BR" sz="2200" dirty="0">
+              <a:latin typeface="+mn-lt"/>
+            </a:endParaRPr>
+          </a:p>
+          <a:p>
+            <a:pPr>
+              <a:buFont typeface="Arial" panose="020B0604020202020204" pitchFamily="34" charset="0"/>
+              <a:buChar char="•"/>
+            </a:pPr>
+            <a:r>
+              <a:rPr lang="pt-BR" sz="2200" dirty="0">
+                <a:latin typeface="+mn-lt"/>
+              </a:rPr>
+              <a:t>Predição econômica: O PIB – Frisch (1929); </a:t>
+            </a:r>
+            <a:r>
+              <a:rPr lang="it-IT" sz="2200" dirty="0">
+                <a:latin typeface="+mn-lt"/>
+              </a:rPr>
+              <a:t>Laudon e Laudon (2022)  e</a:t>
+            </a:r>
+            <a:r>
+              <a:rPr lang="pt-BR" sz="2200" dirty="0">
+                <a:latin typeface="+mn-lt"/>
+              </a:rPr>
+              <a:t> IBGE (2026).</a:t>
+            </a:r>
+          </a:p>
+          <a:p>
+            <a:pPr>
+              <a:buFont typeface="Arial" panose="020B0604020202020204" pitchFamily="34" charset="0"/>
+              <a:buChar char="•"/>
+            </a:pPr>
+            <a:r>
+              <a:rPr lang="pt-BR" sz="2200" dirty="0">
+                <a:latin typeface="+mn-lt"/>
+              </a:rPr>
+              <a:t>Modelos tradicionais: Braga (2025); Rebelo (2022).</a:t>
+            </a:r>
+          </a:p>
+          <a:p>
+            <a:pPr>
+              <a:buFont typeface="Arial" panose="020B0604020202020204" pitchFamily="34" charset="0"/>
+              <a:buChar char="•"/>
+            </a:pPr>
+            <a:r>
+              <a:rPr lang="pt-BR" sz="2200" dirty="0">
+                <a:latin typeface="+mn-lt"/>
+              </a:rPr>
+              <a:t>ARIMA: Box e Jenkins (1970); Silva </a:t>
+            </a:r>
+            <a:r>
+              <a:rPr lang="pt-BR" sz="2200" i="1" dirty="0">
+                <a:latin typeface="+mn-lt"/>
+              </a:rPr>
+              <a:t>et al </a:t>
+            </a:r>
+            <a:r>
+              <a:rPr lang="pt-BR" sz="2200" dirty="0">
+                <a:latin typeface="+mn-lt"/>
+              </a:rPr>
+              <a:t>(2025); Li (2024).</a:t>
+            </a:r>
+          </a:p>
+          <a:p>
+            <a:pPr>
+              <a:buFont typeface="Arial" panose="020B0604020202020204" pitchFamily="34" charset="0"/>
+              <a:buChar char="•"/>
+            </a:pPr>
+            <a:r>
+              <a:rPr lang="pt-BR" sz="2200" dirty="0">
+                <a:latin typeface="+mn-lt"/>
+              </a:rPr>
+              <a:t>VAR: </a:t>
+            </a:r>
+            <a:r>
+              <a:rPr lang="pt-BR" sz="2200" dirty="0" err="1">
+                <a:latin typeface="+mn-lt"/>
+              </a:rPr>
+              <a:t>Sims</a:t>
+            </a:r>
+            <a:r>
+              <a:rPr lang="pt-BR" sz="2200" dirty="0">
+                <a:latin typeface="+mn-lt"/>
+              </a:rPr>
+              <a:t> (1980); Fialho </a:t>
+            </a:r>
+            <a:r>
+              <a:rPr lang="pt-BR" sz="2200" i="1" dirty="0">
+                <a:latin typeface="+mn-lt"/>
+              </a:rPr>
+              <a:t>et al</a:t>
+            </a:r>
+            <a:r>
+              <a:rPr lang="pt-BR" sz="2200" dirty="0">
+                <a:latin typeface="+mn-lt"/>
+              </a:rPr>
+              <a:t>. (2024); Oliveira e Junior (2024); </a:t>
+            </a:r>
+            <a:r>
+              <a:rPr lang="pt-BR" sz="2200" dirty="0" err="1">
+                <a:latin typeface="+mn-lt"/>
+              </a:rPr>
+              <a:t>Koop</a:t>
+            </a:r>
+            <a:r>
+              <a:rPr lang="pt-BR" sz="2200" dirty="0">
+                <a:latin typeface="+mn-lt"/>
+              </a:rPr>
+              <a:t> </a:t>
+            </a:r>
+            <a:r>
+              <a:rPr lang="pt-BR" sz="2200" i="1" dirty="0">
+                <a:latin typeface="+mn-lt"/>
+              </a:rPr>
+              <a:t>et al</a:t>
+            </a:r>
+            <a:r>
+              <a:rPr lang="pt-BR" sz="2200" dirty="0">
+                <a:latin typeface="+mn-lt"/>
+              </a:rPr>
+              <a:t>. (2025).</a:t>
+            </a:r>
+          </a:p>
+          <a:p>
+            <a:pPr>
+              <a:buFont typeface="Arial" panose="020B0604020202020204" pitchFamily="34" charset="0"/>
+              <a:buChar char="•"/>
+            </a:pPr>
+            <a:r>
+              <a:rPr lang="pt-BR" sz="2200" dirty="0">
+                <a:latin typeface="+mn-lt"/>
+              </a:rPr>
+              <a:t>MIDAS: Ghysels et al. (2004); Castelli (2022); Micheletti (2024).</a:t>
+            </a:r>
+          </a:p>
+          <a:p>
+            <a:pPr>
+              <a:buFont typeface="Arial" panose="020B0604020202020204" pitchFamily="34" charset="0"/>
+              <a:buChar char="•"/>
+            </a:pPr>
+            <a:r>
+              <a:rPr lang="pt-BR" sz="2200" dirty="0">
+                <a:latin typeface="+mn-lt"/>
+              </a:rPr>
+              <a:t>DFM: Geweke (1977); Doz e Fuleky (2019); Alves (2009); Moura et al. (2020).</a:t>
+            </a:r>
+          </a:p>
+          <a:p>
+            <a:pPr>
+              <a:buFont typeface="Arial" panose="020B0604020202020204" pitchFamily="34" charset="0"/>
+              <a:buChar char="•"/>
+            </a:pPr>
+            <a:r>
+              <a:rPr lang="pt-BR" sz="2200" dirty="0">
+                <a:latin typeface="+mn-lt"/>
+              </a:rPr>
+              <a:t>Modelos de IA: </a:t>
+            </a:r>
+            <a:r>
+              <a:rPr lang="pt-BR" sz="2200" dirty="0">
+                <a:solidFill>
+                  <a:schemeClr val="tx1"/>
+                </a:solidFill>
+                <a:latin typeface="+mn-lt"/>
+              </a:rPr>
+              <a:t>Carmo e Lopacinski (2023); Vasconcelos (2017) </a:t>
+            </a:r>
+          </a:p>
+          <a:p>
+            <a:pPr>
+              <a:buFont typeface="Arial" panose="020B0604020202020204" pitchFamily="34" charset="0"/>
+              <a:buChar char="•"/>
+            </a:pPr>
+            <a:r>
+              <a:rPr lang="pt-BR" sz="2200" dirty="0">
+                <a:latin typeface="+mn-lt"/>
+              </a:rPr>
+              <a:t>Redes Neurais: Rosenblatt (1958); Rumelhart et al. (1986); Ghosh e Ranjan (2023); Kava (2022); Ekman (2021); Carmo e Lopacinski (2023); Amaral et al. (2023).</a:t>
+            </a:r>
+          </a:p>
+          <a:p>
+            <a:pPr>
+              <a:buFont typeface="Arial" panose="020B0604020202020204" pitchFamily="34" charset="0"/>
+              <a:buChar char="•"/>
+            </a:pPr>
+            <a:r>
+              <a:rPr lang="pt-BR" sz="2200" b="1" dirty="0">
+                <a:latin typeface="+mn-lt"/>
+              </a:rPr>
+              <a:t>Florestas Aleatórias: Breiman (2001); Landowska et al. (2025); Lemos e Souza (2025).</a:t>
+            </a:r>
+          </a:p>
+        </p:txBody>
+      </p:sp>
+      <p:pic>
+        <p:nvPicPr>
+          <p:cNvPr id="98" name="Google Shape;98;p2" descr="Universidade Federal da Fronteira Sul – Wikipédia, a enciclopédia livre">
+            <a:extLst>
+              <a:ext uri="{FF2B5EF4-FFF2-40B4-BE49-F238E27FC236}">
+                <a16:creationId xmlns:a16="http://schemas.microsoft.com/office/drawing/2014/main" id="{22BBDBEF-8DD4-ADEA-EFA2-E5E836AED39E}"/>
+              </a:ext>
+            </a:extLst>
+          </p:cNvPr>
+          <p:cNvPicPr preferRelativeResize="0"/>
+          <p:nvPr/>
+        </p:nvPicPr>
+        <p:blipFill rotWithShape="1">
+          <a:blip r:embed="rId3">
+            <a:alphaModFix/>
+          </a:blip>
+          <a:srcRect/>
+          <a:stretch/>
+        </p:blipFill>
+        <p:spPr>
+          <a:xfrm>
+            <a:off x="10978329" y="18255"/>
+            <a:ext cx="975614" cy="1325563"/>
+          </a:xfrm>
+          <a:prstGeom prst="rect">
+            <a:avLst/>
+          </a:prstGeom>
+          <a:noFill/>
+          <a:ln>
+            <a:noFill/>
+          </a:ln>
+        </p:spPr>
+      </p:pic>
+      <p:sp>
+        <p:nvSpPr>
+          <p:cNvPr id="99" name="Google Shape;99;p2">
+            <a:extLst>
+              <a:ext uri="{FF2B5EF4-FFF2-40B4-BE49-F238E27FC236}">
+                <a16:creationId xmlns:a16="http://schemas.microsoft.com/office/drawing/2014/main" id="{FCDE39DB-2238-CD21-5D6B-F0F0BF74840A}"/>
+              </a:ext>
+            </a:extLst>
+          </p:cNvPr>
+          <p:cNvSpPr/>
+          <p:nvPr/>
+        </p:nvSpPr>
+        <p:spPr>
+          <a:xfrm>
+            <a:off x="170268" y="958543"/>
+            <a:ext cx="10515600" cy="63062"/>
+          </a:xfrm>
+          <a:prstGeom prst="rect">
+            <a:avLst/>
+          </a:prstGeom>
+          <a:solidFill>
+            <a:srgbClr val="548135"/>
+          </a:solidFill>
+          <a:ln w="12700" cap="flat" cmpd="sng">
+            <a:solidFill>
+              <a:srgbClr val="1C3052"/>
+            </a:solidFill>
+            <a:prstDash val="solid"/>
+            <a:miter lim="800000"/>
+            <a:headEnd type="none" w="sm" len="sm"/>
+            <a:tailEnd type="none" w="sm" len="sm"/>
+          </a:ln>
+        </p:spPr>
+        <p:txBody>
+          <a:bodyPr spcFirstLastPara="1" wrap="square" lIns="91425" tIns="45700" rIns="91425" bIns="45700" anchor="ctr" anchorCtr="0">
+            <a:noAutofit/>
+          </a:bodyPr>
+          <a:lstStyle/>
+          <a:p>
+            <a:pPr marL="0" marR="0" lvl="0" indent="0" algn="ctr" rtl="0">
+              <a:spcBef>
+                <a:spcPts val="0"/>
+              </a:spcBef>
+              <a:spcAft>
+                <a:spcPts val="0"/>
+              </a:spcAft>
+              <a:buNone/>
+            </a:pPr>
+            <a:endParaRPr sz="1800">
+              <a:solidFill>
+                <a:schemeClr val="lt1"/>
+              </a:solidFill>
+              <a:latin typeface="Calibri"/>
+              <a:ea typeface="Calibri"/>
+              <a:cs typeface="Calibri"/>
+              <a:sym typeface="Calibri"/>
+            </a:endParaRPr>
+          </a:p>
+        </p:txBody>
+      </p:sp>
+      <p:sp>
+        <p:nvSpPr>
+          <p:cNvPr id="100" name="Google Shape;100;p2">
+            <a:extLst>
+              <a:ext uri="{FF2B5EF4-FFF2-40B4-BE49-F238E27FC236}">
+                <a16:creationId xmlns:a16="http://schemas.microsoft.com/office/drawing/2014/main" id="{BF272574-76A1-6054-4412-95DF186C5612}"/>
+              </a:ext>
+            </a:extLst>
+          </p:cNvPr>
+          <p:cNvSpPr txBox="1">
+            <a:spLocks noGrp="1"/>
+          </p:cNvSpPr>
+          <p:nvPr>
+            <p:ph type="sldNum" idx="12"/>
+          </p:nvPr>
+        </p:nvSpPr>
+        <p:spPr>
+          <a:xfrm>
+            <a:off x="9440152" y="6492875"/>
+            <a:ext cx="2743200" cy="365125"/>
+          </a:xfrm>
+          <a:prstGeom prst="rect">
+            <a:avLst/>
+          </a:prstGeom>
+          <a:noFill/>
+          <a:ln>
+            <a:noFill/>
+          </a:ln>
+        </p:spPr>
+        <p:txBody>
+          <a:bodyPr spcFirstLastPara="1" wrap="square" lIns="91425" tIns="45700" rIns="91425" bIns="45700" anchor="ctr" anchorCtr="0">
+            <a:noAutofit/>
+          </a:bodyPr>
+          <a:lstStyle/>
+          <a:p>
+            <a:pPr marL="0" lvl="0" indent="0" algn="r" rtl="0">
+              <a:spcBef>
+                <a:spcPts val="0"/>
+              </a:spcBef>
+              <a:spcAft>
+                <a:spcPts val="0"/>
+              </a:spcAft>
+              <a:buNone/>
+            </a:pPr>
+            <a:fld id="{00000000-1234-1234-1234-123412341234}" type="slidenum">
+              <a:rPr lang="pt-BR" sz="1800"/>
+              <a:t>17</a:t>
+            </a:fld>
+            <a:endParaRPr sz="1800" dirty="0"/>
+          </a:p>
+        </p:txBody>
+      </p:sp>
+    </p:spTree>
+    <p:extLst>
+      <p:ext uri="{BB962C8B-B14F-4D97-AF65-F5344CB8AC3E}">
+        <p14:creationId xmlns:p14="http://schemas.microsoft.com/office/powerpoint/2010/main" val="1970987361"/>
+      </p:ext>
+    </p:extLst>
+  </p:cSld>
+  <p:clrMapOvr>
+    <a:masterClrMapping/>
+  </p:clrMapOvr>
+</p:sld>
+</file>
+
+<file path=ppt/slides/slide18.xml><?xml version="1.0" encoding="utf-8"?>
+<p:sld xmlns:a="http://schemas.openxmlformats.org/drawingml/2006/main" xmlns:r="http://schemas.openxmlformats.org/officeDocument/2006/relationships" xmlns:p="http://schemas.openxmlformats.org/presentationml/2006/main">
+  <p:cSld>
+    <p:spTree>
+      <p:nvGrpSpPr>
+        <p:cNvPr id="1" name="Shape 95">
+          <a:extLst>
+            <a:ext uri="{FF2B5EF4-FFF2-40B4-BE49-F238E27FC236}">
+              <a16:creationId xmlns:a16="http://schemas.microsoft.com/office/drawing/2014/main" id="{831B1A78-1ABC-F342-EDA6-AFE1EC65AD38}"/>
+            </a:ext>
+          </a:extLst>
+        </p:cNvPr>
+        <p:cNvGrpSpPr/>
+        <p:nvPr/>
+      </p:nvGrpSpPr>
+      <p:grpSpPr>
+        <a:xfrm>
+          <a:off x="0" y="0"/>
+          <a:ext cx="0" cy="0"/>
+          <a:chOff x="0" y="0"/>
+          <a:chExt cx="0" cy="0"/>
+        </a:xfrm>
+      </p:grpSpPr>
+      <p:sp>
+        <p:nvSpPr>
+          <p:cNvPr id="96" name="Google Shape;96;p2">
+            <a:extLst>
+              <a:ext uri="{FF2B5EF4-FFF2-40B4-BE49-F238E27FC236}">
+                <a16:creationId xmlns:a16="http://schemas.microsoft.com/office/drawing/2014/main" id="{B83C26C9-EA22-BCD5-E445-35737ED45C44}"/>
+              </a:ext>
+            </a:extLst>
+          </p:cNvPr>
+          <p:cNvSpPr txBox="1">
+            <a:spLocks noGrp="1"/>
+          </p:cNvSpPr>
+          <p:nvPr>
+            <p:ph type="title"/>
+          </p:nvPr>
+        </p:nvSpPr>
+        <p:spPr>
+          <a:xfrm>
+            <a:off x="170268" y="190105"/>
+            <a:ext cx="10329566" cy="768438"/>
+          </a:xfrm>
+          <a:prstGeom prst="rect">
+            <a:avLst/>
+          </a:prstGeom>
+          <a:noFill/>
+          <a:ln>
+            <a:noFill/>
+          </a:ln>
+        </p:spPr>
+        <p:txBody>
+          <a:bodyPr spcFirstLastPara="1" wrap="square" lIns="91425" tIns="45700" rIns="91425" bIns="45700" anchor="ctr" anchorCtr="0">
+            <a:noAutofit/>
+          </a:bodyPr>
+          <a:lstStyle/>
+          <a:p>
+            <a:pPr lvl="0">
+              <a:buSzPts val="4400"/>
+            </a:pPr>
+            <a:r>
+              <a:rPr lang="pt-BR" sz="3200" b="1" dirty="0">
+                <a:latin typeface="+mj-lt"/>
+              </a:rPr>
+              <a:t>Metodologia</a:t>
+            </a:r>
+            <a:endParaRPr sz="3200" b="1" dirty="0">
+              <a:latin typeface="+mj-lt"/>
+            </a:endParaRPr>
+          </a:p>
+        </p:txBody>
+      </p:sp>
+      <p:pic>
+        <p:nvPicPr>
+          <p:cNvPr id="98" name="Google Shape;98;p2" descr="Universidade Federal da Fronteira Sul – Wikipédia, a enciclopédia livre">
+            <a:extLst>
+              <a:ext uri="{FF2B5EF4-FFF2-40B4-BE49-F238E27FC236}">
+                <a16:creationId xmlns:a16="http://schemas.microsoft.com/office/drawing/2014/main" id="{DECB0394-41DE-FEB0-693A-900E53FBD800}"/>
+              </a:ext>
+            </a:extLst>
+          </p:cNvPr>
+          <p:cNvPicPr preferRelativeResize="0"/>
+          <p:nvPr/>
+        </p:nvPicPr>
+        <p:blipFill rotWithShape="1">
+          <a:blip r:embed="rId3">
+            <a:alphaModFix/>
+          </a:blip>
+          <a:srcRect/>
+          <a:stretch/>
+        </p:blipFill>
+        <p:spPr>
+          <a:xfrm>
+            <a:off x="10978329" y="18255"/>
+            <a:ext cx="975614" cy="1325563"/>
+          </a:xfrm>
+          <a:prstGeom prst="rect">
+            <a:avLst/>
+          </a:prstGeom>
+          <a:noFill/>
+          <a:ln>
+            <a:noFill/>
+          </a:ln>
+        </p:spPr>
+      </p:pic>
+      <p:sp>
+        <p:nvSpPr>
+          <p:cNvPr id="99" name="Google Shape;99;p2">
+            <a:extLst>
+              <a:ext uri="{FF2B5EF4-FFF2-40B4-BE49-F238E27FC236}">
+                <a16:creationId xmlns:a16="http://schemas.microsoft.com/office/drawing/2014/main" id="{69B1ED4B-0635-F42A-A86E-C08A222F9900}"/>
+              </a:ext>
+            </a:extLst>
+          </p:cNvPr>
+          <p:cNvSpPr/>
+          <p:nvPr/>
+        </p:nvSpPr>
+        <p:spPr>
+          <a:xfrm>
+            <a:off x="170268" y="958543"/>
+            <a:ext cx="10515600" cy="63062"/>
+          </a:xfrm>
+          <a:prstGeom prst="rect">
+            <a:avLst/>
+          </a:prstGeom>
+          <a:solidFill>
+            <a:srgbClr val="548135"/>
+          </a:solidFill>
+          <a:ln w="12700" cap="flat" cmpd="sng">
+            <a:solidFill>
+              <a:srgbClr val="1C3052"/>
+            </a:solidFill>
+            <a:prstDash val="solid"/>
+            <a:miter lim="800000"/>
+            <a:headEnd type="none" w="sm" len="sm"/>
+            <a:tailEnd type="none" w="sm" len="sm"/>
+          </a:ln>
+        </p:spPr>
+        <p:txBody>
+          <a:bodyPr spcFirstLastPara="1" wrap="square" lIns="91425" tIns="45700" rIns="91425" bIns="45700" anchor="ctr" anchorCtr="0">
+            <a:noAutofit/>
+          </a:bodyPr>
+          <a:lstStyle/>
+          <a:p>
+            <a:pPr marL="0" marR="0" lvl="0" indent="0" algn="ctr" rtl="0">
+              <a:spcBef>
+                <a:spcPts val="0"/>
+              </a:spcBef>
+              <a:spcAft>
+                <a:spcPts val="0"/>
+              </a:spcAft>
+              <a:buNone/>
+            </a:pPr>
+            <a:endParaRPr sz="1800">
+              <a:solidFill>
+                <a:schemeClr val="lt1"/>
+              </a:solidFill>
+              <a:latin typeface="Calibri"/>
+              <a:ea typeface="Calibri"/>
+              <a:cs typeface="Calibri"/>
+              <a:sym typeface="Calibri"/>
+            </a:endParaRPr>
+          </a:p>
+        </p:txBody>
+      </p:sp>
+      <p:sp>
+        <p:nvSpPr>
+          <p:cNvPr id="100" name="Google Shape;100;p2">
+            <a:extLst>
+              <a:ext uri="{FF2B5EF4-FFF2-40B4-BE49-F238E27FC236}">
+                <a16:creationId xmlns:a16="http://schemas.microsoft.com/office/drawing/2014/main" id="{ECEBEDFF-90B6-71CC-164E-FF31B6A06AD5}"/>
+              </a:ext>
+            </a:extLst>
+          </p:cNvPr>
+          <p:cNvSpPr txBox="1">
+            <a:spLocks noGrp="1"/>
+          </p:cNvSpPr>
+          <p:nvPr>
+            <p:ph type="sldNum" idx="12"/>
+          </p:nvPr>
+        </p:nvSpPr>
+        <p:spPr>
+          <a:xfrm>
+            <a:off x="9440152" y="6492875"/>
+            <a:ext cx="2743200" cy="365125"/>
+          </a:xfrm>
+          <a:prstGeom prst="rect">
+            <a:avLst/>
+          </a:prstGeom>
+          <a:noFill/>
+          <a:ln>
+            <a:noFill/>
+          </a:ln>
+        </p:spPr>
+        <p:txBody>
+          <a:bodyPr spcFirstLastPara="1" wrap="square" lIns="91425" tIns="45700" rIns="91425" bIns="45700" anchor="ctr" anchorCtr="0">
+            <a:noAutofit/>
+          </a:bodyPr>
+          <a:lstStyle/>
+          <a:p>
+            <a:pPr marL="0" lvl="0" indent="0" algn="r" rtl="0">
+              <a:spcBef>
+                <a:spcPts val="0"/>
+              </a:spcBef>
+              <a:spcAft>
+                <a:spcPts val="0"/>
+              </a:spcAft>
+              <a:buNone/>
+            </a:pPr>
+            <a:fld id="{00000000-1234-1234-1234-123412341234}" type="slidenum">
+              <a:rPr lang="pt-BR" sz="1800"/>
+              <a:t>18</a:t>
+            </a:fld>
+            <a:endParaRPr sz="1800" dirty="0"/>
+          </a:p>
+        </p:txBody>
+      </p:sp>
+      <p:sp>
+        <p:nvSpPr>
+          <p:cNvPr id="9" name="Google Shape;97;p2">
+            <a:extLst>
+              <a:ext uri="{FF2B5EF4-FFF2-40B4-BE49-F238E27FC236}">
+                <a16:creationId xmlns:a16="http://schemas.microsoft.com/office/drawing/2014/main" id="{7B5CC5E3-01C0-451C-80DD-E8813F8132AD}"/>
+              </a:ext>
+            </a:extLst>
+          </p:cNvPr>
+          <p:cNvSpPr txBox="1">
+            <a:spLocks noGrp="1"/>
+          </p:cNvSpPr>
+          <p:nvPr>
+            <p:ph type="body" idx="1"/>
+          </p:nvPr>
+        </p:nvSpPr>
+        <p:spPr>
+          <a:xfrm>
+            <a:off x="170268" y="1092372"/>
+            <a:ext cx="11855669" cy="5732658"/>
+          </a:xfrm>
+          <a:prstGeom prst="rect">
+            <a:avLst/>
+          </a:prstGeom>
+          <a:noFill/>
+          <a:ln>
+            <a:noFill/>
+          </a:ln>
+        </p:spPr>
+        <p:txBody>
+          <a:bodyPr spcFirstLastPara="1" wrap="square" lIns="91425" tIns="45700" rIns="91425" bIns="45700" anchor="t" anchorCtr="0">
+            <a:noAutofit/>
+          </a:bodyPr>
+          <a:lstStyle/>
+          <a:p>
+            <a:pPr marL="0" indent="-457200">
+              <a:buNone/>
+            </a:pPr>
+            <a:r>
+              <a:rPr lang="pt-BR" sz="2300" dirty="0">
+                <a:latin typeface="+mn-lt"/>
+              </a:rPr>
+              <a:t>Com base nos objetivos da presente pesquisa, a mesma se classifica como explicativa. Esse tipo de pesquisa "têm como preocupação central identificar os fatores que determinam ou que contribuem para a ocorrência dos fenômenos."(Gil, 2002, p. 87).</a:t>
+            </a:r>
+          </a:p>
+          <a:p>
+            <a:pPr marL="0" indent="-457200">
+              <a:buNone/>
+            </a:pPr>
+            <a:r>
+              <a:rPr lang="pt-BR" sz="2300" dirty="0">
+                <a:latin typeface="+mn-lt"/>
+              </a:rPr>
+              <a:t>Sobre os procedimentos de coleta de dados, a presente pesquisa se enquadra como documental, por utilizar-se de dados que não receberam um tratamento e estão dispostos em repositórios digitais de dados. Segundo Gil (2002) a pesquisa documental apropria-se de diversas fontes, não somente material impresso em bibliotecas, onde os documentos utilizados podem ter um tratamento analítico ou não.</a:t>
+            </a:r>
+          </a:p>
+          <a:p>
+            <a:pPr marL="0" indent="-457200">
+              <a:buNone/>
+            </a:pPr>
+            <a:r>
+              <a:rPr lang="pt-BR" sz="2300" dirty="0">
+                <a:latin typeface="+mn-lt"/>
+              </a:rPr>
+              <a:t>Por fim, ao se tratar de uma pesquisa que compara diferentes modelos econométricos, assim como avalia o desempenho dos mesmos, seguindo o rigor matemático e estatístico, ela se enquadra como uma pesquisa predominantemente quantitativa onde apropria-se do método comparativo e estatístico. Para Lakatos e Marconi (2003) o método estatístico trata-se da redução dos fenômenos a termos quantitativos e a manipulação estatística, onde possibilita a generalizações sobre sua natureza, ocorrência ou significado. Já "o método comparativo é usado tanto para comparações de grupos."(Lakatos e Marconi, 2003, p. 107, 108).</a:t>
+            </a:r>
+          </a:p>
+          <a:p>
+            <a:pPr marL="0" indent="-457200">
+              <a:buNone/>
+            </a:pPr>
+            <a:endParaRPr lang="pt-BR" sz="2400" dirty="0">
+              <a:latin typeface="+mn-lt"/>
+            </a:endParaRPr>
+          </a:p>
+        </p:txBody>
+      </p:sp>
+    </p:spTree>
+    <p:extLst>
+      <p:ext uri="{BB962C8B-B14F-4D97-AF65-F5344CB8AC3E}">
+        <p14:creationId xmlns:p14="http://schemas.microsoft.com/office/powerpoint/2010/main" val="4018365337"/>
+      </p:ext>
+    </p:extLst>
+  </p:cSld>
+  <p:clrMapOvr>
+    <a:masterClrMapping/>
+  </p:clrMapOvr>
+</p:sld>
+</file>
+
+<file path=ppt/slides/slide19.xml><?xml version="1.0" encoding="utf-8"?>
+<p:sld xmlns:a="http://schemas.openxmlformats.org/drawingml/2006/main" xmlns:r="http://schemas.openxmlformats.org/officeDocument/2006/relationships" xmlns:p="http://schemas.openxmlformats.org/presentationml/2006/main">
+  <p:cSld>
+    <p:spTree>
+      <p:nvGrpSpPr>
+        <p:cNvPr id="1" name="Shape 95">
+          <a:extLst>
+            <a:ext uri="{FF2B5EF4-FFF2-40B4-BE49-F238E27FC236}">
               <a16:creationId xmlns:a16="http://schemas.microsoft.com/office/drawing/2014/main" id="{D07958DF-359A-82CE-4BFC-378F4E54060C}"/>
             </a:ext>
           </a:extLst>
@@ -13463,7 +19083,7 @@
             </a:pPr>
             <a:fld id="{00000000-1234-1234-1234-123412341234}" type="slidenum">
               <a:rPr lang="pt-BR" sz="1800"/>
-              <a:t>10</a:t>
+              <a:t>19</a:t>
             </a:fld>
             <a:endParaRPr sz="1800" dirty="0"/>
           </a:p>
@@ -13626,861 +19246,6 @@
 </p:sld>
 </file>
 
-<file path=ppt/slides/slide11.xml><?xml version="1.0" encoding="utf-8"?>
-<p:sld xmlns:a="http://schemas.openxmlformats.org/drawingml/2006/main" xmlns:r="http://schemas.openxmlformats.org/officeDocument/2006/relationships" xmlns:p="http://schemas.openxmlformats.org/presentationml/2006/main">
-  <p:cSld>
-    <p:spTree>
-      <p:nvGrpSpPr>
-        <p:cNvPr id="1" name="Shape 95">
-          <a:extLst>
-            <a:ext uri="{FF2B5EF4-FFF2-40B4-BE49-F238E27FC236}">
-              <a16:creationId xmlns:a16="http://schemas.microsoft.com/office/drawing/2014/main" id="{CB30D101-1D53-E6B5-D240-DA46FCBBA2CB}"/>
-            </a:ext>
-          </a:extLst>
-        </p:cNvPr>
-        <p:cNvGrpSpPr/>
-        <p:nvPr/>
-      </p:nvGrpSpPr>
-      <p:grpSpPr>
-        <a:xfrm>
-          <a:off x="0" y="0"/>
-          <a:ext cx="0" cy="0"/>
-          <a:chOff x="0" y="0"/>
-          <a:chExt cx="0" cy="0"/>
-        </a:xfrm>
-      </p:grpSpPr>
-      <p:sp>
-        <p:nvSpPr>
-          <p:cNvPr id="96" name="Google Shape;96;p2">
-            <a:extLst>
-              <a:ext uri="{FF2B5EF4-FFF2-40B4-BE49-F238E27FC236}">
-                <a16:creationId xmlns:a16="http://schemas.microsoft.com/office/drawing/2014/main" id="{A25282EE-AF03-51FE-1729-6FD00A1B2E39}"/>
-              </a:ext>
-            </a:extLst>
-          </p:cNvPr>
-          <p:cNvSpPr txBox="1">
-            <a:spLocks noGrp="1"/>
-          </p:cNvSpPr>
-          <p:nvPr>
-            <p:ph type="title"/>
-          </p:nvPr>
-        </p:nvSpPr>
-        <p:spPr>
-          <a:xfrm>
-            <a:off x="170268" y="190105"/>
-            <a:ext cx="10329566" cy="768438"/>
-          </a:xfrm>
-          <a:prstGeom prst="rect">
-            <a:avLst/>
-          </a:prstGeom>
-          <a:noFill/>
-          <a:ln>
-            <a:noFill/>
-          </a:ln>
-        </p:spPr>
-        <p:txBody>
-          <a:bodyPr spcFirstLastPara="1" wrap="square" lIns="91425" tIns="45700" rIns="91425" bIns="45700" anchor="ctr" anchorCtr="0">
-            <a:noAutofit/>
-          </a:bodyPr>
-          <a:lstStyle/>
-          <a:p>
-            <a:pPr lvl="0">
-              <a:buSzPts val="4400"/>
-            </a:pPr>
-            <a:r>
-              <a:rPr lang="pt-BR" sz="2800" b="1" dirty="0">
-                <a:latin typeface="+mj-lt"/>
-              </a:rPr>
-              <a:t>Referências</a:t>
-            </a:r>
-            <a:endParaRPr sz="2800" b="1" dirty="0">
-              <a:latin typeface="+mj-lt"/>
-            </a:endParaRPr>
-          </a:p>
-        </p:txBody>
-      </p:sp>
-      <p:pic>
-        <p:nvPicPr>
-          <p:cNvPr id="98" name="Google Shape;98;p2" descr="Universidade Federal da Fronteira Sul – Wikipédia, a enciclopédia livre">
-            <a:extLst>
-              <a:ext uri="{FF2B5EF4-FFF2-40B4-BE49-F238E27FC236}">
-                <a16:creationId xmlns:a16="http://schemas.microsoft.com/office/drawing/2014/main" id="{C02E861D-F257-0BF6-5A7A-D92D10B16AB0}"/>
-              </a:ext>
-            </a:extLst>
-          </p:cNvPr>
-          <p:cNvPicPr preferRelativeResize="0"/>
-          <p:nvPr/>
-        </p:nvPicPr>
-        <p:blipFill rotWithShape="1">
-          <a:blip r:embed="rId3">
-            <a:alphaModFix/>
-          </a:blip>
-          <a:srcRect/>
-          <a:stretch/>
-        </p:blipFill>
-        <p:spPr>
-          <a:xfrm>
-            <a:off x="10978329" y="18255"/>
-            <a:ext cx="975614" cy="1325563"/>
-          </a:xfrm>
-          <a:prstGeom prst="rect">
-            <a:avLst/>
-          </a:prstGeom>
-          <a:noFill/>
-          <a:ln>
-            <a:noFill/>
-          </a:ln>
-        </p:spPr>
-      </p:pic>
-      <p:sp>
-        <p:nvSpPr>
-          <p:cNvPr id="99" name="Google Shape;99;p2">
-            <a:extLst>
-              <a:ext uri="{FF2B5EF4-FFF2-40B4-BE49-F238E27FC236}">
-                <a16:creationId xmlns:a16="http://schemas.microsoft.com/office/drawing/2014/main" id="{13D04C47-3399-FA91-FB44-0AA2D0BE4CF2}"/>
-              </a:ext>
-            </a:extLst>
-          </p:cNvPr>
-          <p:cNvSpPr/>
-          <p:nvPr/>
-        </p:nvSpPr>
-        <p:spPr>
-          <a:xfrm>
-            <a:off x="170268" y="958543"/>
-            <a:ext cx="10515600" cy="63062"/>
-          </a:xfrm>
-          <a:prstGeom prst="rect">
-            <a:avLst/>
-          </a:prstGeom>
-          <a:solidFill>
-            <a:srgbClr val="548135"/>
-          </a:solidFill>
-          <a:ln w="12700" cap="flat" cmpd="sng">
-            <a:solidFill>
-              <a:srgbClr val="1C3052"/>
-            </a:solidFill>
-            <a:prstDash val="solid"/>
-            <a:miter lim="800000"/>
-            <a:headEnd type="none" w="sm" len="sm"/>
-            <a:tailEnd type="none" w="sm" len="sm"/>
-          </a:ln>
-        </p:spPr>
-        <p:txBody>
-          <a:bodyPr spcFirstLastPara="1" wrap="square" lIns="91425" tIns="45700" rIns="91425" bIns="45700" anchor="ctr" anchorCtr="0">
-            <a:noAutofit/>
-          </a:bodyPr>
-          <a:lstStyle/>
-          <a:p>
-            <a:pPr marL="0" marR="0" lvl="0" indent="0" algn="ctr" rtl="0">
-              <a:spcBef>
-                <a:spcPts val="0"/>
-              </a:spcBef>
-              <a:spcAft>
-                <a:spcPts val="0"/>
-              </a:spcAft>
-              <a:buNone/>
-            </a:pPr>
-            <a:endParaRPr sz="1800">
-              <a:solidFill>
-                <a:schemeClr val="lt1"/>
-              </a:solidFill>
-              <a:latin typeface="Calibri"/>
-              <a:ea typeface="Calibri"/>
-              <a:cs typeface="Calibri"/>
-              <a:sym typeface="Calibri"/>
-            </a:endParaRPr>
-          </a:p>
-        </p:txBody>
-      </p:sp>
-      <p:sp>
-        <p:nvSpPr>
-          <p:cNvPr id="100" name="Google Shape;100;p2">
-            <a:extLst>
-              <a:ext uri="{FF2B5EF4-FFF2-40B4-BE49-F238E27FC236}">
-                <a16:creationId xmlns:a16="http://schemas.microsoft.com/office/drawing/2014/main" id="{545F56A1-E391-8B63-1D0B-91DEB2FE6F15}"/>
-              </a:ext>
-            </a:extLst>
-          </p:cNvPr>
-          <p:cNvSpPr txBox="1">
-            <a:spLocks noGrp="1"/>
-          </p:cNvSpPr>
-          <p:nvPr>
-            <p:ph type="sldNum" idx="12"/>
-          </p:nvPr>
-        </p:nvSpPr>
-        <p:spPr>
-          <a:xfrm>
-            <a:off x="9440152" y="6492875"/>
-            <a:ext cx="2743200" cy="365125"/>
-          </a:xfrm>
-          <a:prstGeom prst="rect">
-            <a:avLst/>
-          </a:prstGeom>
-          <a:noFill/>
-          <a:ln>
-            <a:noFill/>
-          </a:ln>
-        </p:spPr>
-        <p:txBody>
-          <a:bodyPr spcFirstLastPara="1" wrap="square" lIns="91425" tIns="45700" rIns="91425" bIns="45700" anchor="ctr" anchorCtr="0">
-            <a:noAutofit/>
-          </a:bodyPr>
-          <a:lstStyle/>
-          <a:p>
-            <a:pPr marL="0" lvl="0" indent="0" algn="r" rtl="0">
-              <a:spcBef>
-                <a:spcPts val="0"/>
-              </a:spcBef>
-              <a:spcAft>
-                <a:spcPts val="0"/>
-              </a:spcAft>
-              <a:buNone/>
-            </a:pPr>
-            <a:fld id="{00000000-1234-1234-1234-123412341234}" type="slidenum">
-              <a:rPr lang="pt-BR" sz="1800"/>
-              <a:t>11</a:t>
-            </a:fld>
-            <a:endParaRPr sz="1800" dirty="0"/>
-          </a:p>
-        </p:txBody>
-      </p:sp>
-      <p:sp>
-        <p:nvSpPr>
-          <p:cNvPr id="3" name="Rectangle 1">
-            <a:extLst>
-              <a:ext uri="{FF2B5EF4-FFF2-40B4-BE49-F238E27FC236}">
-                <a16:creationId xmlns:a16="http://schemas.microsoft.com/office/drawing/2014/main" id="{93B8C039-0558-B37E-1B5D-FF646675A5C1}"/>
-              </a:ext>
-            </a:extLst>
-          </p:cNvPr>
-          <p:cNvSpPr>
-            <a:spLocks noChangeArrowheads="1"/>
-          </p:cNvSpPr>
-          <p:nvPr/>
-        </p:nvSpPr>
-        <p:spPr bwMode="auto">
-          <a:xfrm>
-            <a:off x="238057" y="1497252"/>
-            <a:ext cx="11715886" cy="4832092"/>
-          </a:xfrm>
-          <a:prstGeom prst="rect">
-            <a:avLst/>
-          </a:prstGeom>
-          <a:noFill/>
-          <a:ln>
-            <a:noFill/>
-          </a:ln>
-          <a:effectLst/>
-          <a:extLst>
-            <a:ext uri="{909E8E84-426E-40DD-AFC4-6F175D3DCCD1}">
-              <a14:hiddenFill xmlns:a14="http://schemas.microsoft.com/office/drawing/2010/main">
-                <a:solidFill>
-                  <a:schemeClr val="accent1"/>
-                </a:solidFill>
-              </a14:hiddenFill>
-            </a:ext>
-            <a:ext uri="{91240B29-F687-4F45-9708-019B960494DF}">
-              <a14:hiddenLine xmlns:a14="http://schemas.microsoft.com/office/drawing/2010/main" w="9525">
-                <a:solidFill>
-                  <a:schemeClr val="tx1"/>
-                </a:solidFill>
-                <a:miter lim="800000"/>
-                <a:headEnd/>
-                <a:tailEnd/>
-              </a14:hiddenLine>
-            </a:ext>
-            <a:ext uri="{AF507438-7753-43E0-B8FC-AC1667EBCBE1}">
-              <a14:hiddenEffects xmlns:a14="http://schemas.microsoft.com/office/drawing/2010/main">
-                <a:effectLst>
-                  <a:outerShdw dist="35921" dir="2700000" algn="ctr" rotWithShape="0">
-                    <a:schemeClr val="bg2"/>
-                  </a:outerShdw>
-                </a:effectLst>
-              </a14:hiddenEffects>
-            </a:ext>
-          </a:extLst>
-        </p:spPr>
-        <p:txBody>
-          <a:bodyPr vert="horz" wrap="square" lIns="91440" tIns="45720" rIns="91440" bIns="45720" numCol="1" anchor="ctr" anchorCtr="0" compatLnSpc="1">
-            <a:prstTxWarp prst="textNoShape">
-              <a:avLst/>
-            </a:prstTxWarp>
-            <a:spAutoFit/>
-          </a:bodyPr>
-          <a:lstStyle/>
-          <a:p>
-            <a:pPr marL="0" marR="0" lvl="0" indent="0" algn="l" defTabSz="914400" rtl="0" eaLnBrk="0" fontAlgn="base" latinLnBrk="0" hangingPunct="0">
-              <a:lnSpc>
-                <a:spcPct val="100000"/>
-              </a:lnSpc>
-              <a:spcBef>
-                <a:spcPct val="0"/>
-              </a:spcBef>
-              <a:spcAft>
-                <a:spcPct val="0"/>
-              </a:spcAft>
-              <a:buClrTx/>
-              <a:buSzTx/>
-              <a:tabLst/>
-            </a:pPr>
-            <a:r>
-              <a:rPr lang="en-US" dirty="0"/>
-              <a:t>BOX, G. E.; JENKINS. Time series analysis: forecasting and control. [S. l.]: Holden Day, </a:t>
-            </a:r>
-            <a:r>
-              <a:rPr lang="en-US" dirty="0" err="1"/>
-              <a:t>inc</a:t>
-            </a:r>
-            <a:r>
-              <a:rPr lang="en-US" dirty="0"/>
-              <a:t>, 1970.</a:t>
-            </a:r>
-          </a:p>
-          <a:p>
-            <a:pPr marL="0" marR="0" lvl="0" indent="0" algn="l" defTabSz="914400" rtl="0" eaLnBrk="0" fontAlgn="base" latinLnBrk="0" hangingPunct="0">
-              <a:lnSpc>
-                <a:spcPct val="100000"/>
-              </a:lnSpc>
-              <a:spcBef>
-                <a:spcPct val="0"/>
-              </a:spcBef>
-              <a:spcAft>
-                <a:spcPct val="0"/>
-              </a:spcAft>
-              <a:buClrTx/>
-              <a:buSzTx/>
-              <a:tabLst/>
-            </a:pPr>
-            <a:r>
-              <a:rPr lang="pt-BR" dirty="0"/>
-              <a:t>FIALHO, T. M. M.; CORDEIRO, L. M. C.; TIMOTIO, J. G. M.; REZENDE, L. P. F. de; BOITRAGO, P. R. P. Incerteza, consumo das famílias no brasil e spread bancário: uma análise com o vetor autorregressivo (var). Universidade Federal de Minas Gerais, 2024.</a:t>
-            </a:r>
-            <a:endParaRPr lang="en-US" dirty="0"/>
-          </a:p>
-          <a:p>
-            <a:pPr marL="0" marR="0" lvl="0" indent="0" algn="l" defTabSz="914400" rtl="0" eaLnBrk="0" fontAlgn="base" latinLnBrk="0" hangingPunct="0">
-              <a:lnSpc>
-                <a:spcPct val="100000"/>
-              </a:lnSpc>
-              <a:spcBef>
-                <a:spcPct val="0"/>
-              </a:spcBef>
-              <a:spcAft>
-                <a:spcPct val="0"/>
-              </a:spcAft>
-              <a:buClrTx/>
-              <a:buSzTx/>
-              <a:tabLst/>
-            </a:pPr>
-            <a:r>
-              <a:rPr lang="pt-BR" dirty="0"/>
-              <a:t>FRISCH, R. </a:t>
-            </a:r>
-            <a:r>
-              <a:rPr lang="pt-BR" dirty="0" err="1"/>
-              <a:t>Statikk</a:t>
-            </a:r>
-            <a:r>
-              <a:rPr lang="pt-BR" dirty="0"/>
-              <a:t> </a:t>
-            </a:r>
-            <a:r>
-              <a:rPr lang="pt-BR" dirty="0" err="1"/>
-              <a:t>og</a:t>
-            </a:r>
-            <a:r>
-              <a:rPr lang="pt-BR" dirty="0"/>
-              <a:t> </a:t>
-            </a:r>
-            <a:r>
-              <a:rPr lang="pt-BR" dirty="0" err="1"/>
-              <a:t>dynamikk</a:t>
-            </a:r>
-            <a:r>
-              <a:rPr lang="pt-BR" dirty="0"/>
-              <a:t> i </a:t>
-            </a:r>
-            <a:r>
-              <a:rPr lang="pt-BR" dirty="0" err="1"/>
-              <a:t>den</a:t>
-            </a:r>
-            <a:r>
-              <a:rPr lang="pt-BR" dirty="0"/>
-              <a:t> </a:t>
-            </a:r>
-            <a:r>
-              <a:rPr lang="pt-BR" dirty="0" err="1"/>
-              <a:t>økonomiske</a:t>
-            </a:r>
-            <a:r>
-              <a:rPr lang="pt-BR" dirty="0"/>
-              <a:t> </a:t>
-            </a:r>
-            <a:r>
-              <a:rPr lang="pt-BR" dirty="0" err="1"/>
-              <a:t>teori</a:t>
-            </a:r>
-            <a:r>
-              <a:rPr lang="pt-BR" dirty="0"/>
-              <a:t>. 1). </a:t>
-            </a:r>
-            <a:r>
-              <a:rPr lang="pt-BR" dirty="0" err="1"/>
-              <a:t>Nationalokonomisk</a:t>
-            </a:r>
-            <a:r>
-              <a:rPr lang="pt-BR" dirty="0"/>
-              <a:t> </a:t>
-            </a:r>
-            <a:r>
-              <a:rPr lang="pt-BR" dirty="0" err="1"/>
-              <a:t>Tidsskrift</a:t>
-            </a:r>
-            <a:r>
-              <a:rPr lang="pt-BR" dirty="0"/>
-              <a:t>, v. 37, 1929. Disponível em: https://tidsskrift.dk/nationaloekonomisktidsskrift/article/download/ 57252/77814.</a:t>
-            </a:r>
-            <a:endParaRPr lang="en-US" dirty="0"/>
-          </a:p>
-          <a:p>
-            <a:pPr marL="0" marR="0" lvl="0" indent="0" algn="l" defTabSz="914400" rtl="0" eaLnBrk="0" fontAlgn="base" latinLnBrk="0" hangingPunct="0">
-              <a:lnSpc>
-                <a:spcPct val="100000"/>
-              </a:lnSpc>
-              <a:spcBef>
-                <a:spcPct val="0"/>
-              </a:spcBef>
-              <a:spcAft>
-                <a:spcPct val="0"/>
-              </a:spcAft>
-              <a:buClrTx/>
-              <a:buSzTx/>
-              <a:tabLst/>
-            </a:pPr>
-            <a:r>
-              <a:rPr lang="pt-BR" dirty="0"/>
-              <a:t>GIL, A. C. Como Elaborar Projetos de Pesquisa. 4. ed. São Paulo: Editora Atlas, 2002.</a:t>
-            </a:r>
-            <a:endParaRPr lang="en-US" dirty="0"/>
-          </a:p>
-          <a:p>
-            <a:pPr marL="0" marR="0" lvl="0" indent="0" algn="l" defTabSz="914400" rtl="0" eaLnBrk="0" fontAlgn="base" latinLnBrk="0" hangingPunct="0">
-              <a:lnSpc>
-                <a:spcPct val="100000"/>
-              </a:lnSpc>
-              <a:spcBef>
-                <a:spcPct val="0"/>
-              </a:spcBef>
-              <a:spcAft>
-                <a:spcPct val="0"/>
-              </a:spcAft>
-              <a:buClrTx/>
-              <a:buSzTx/>
-              <a:tabLst/>
-            </a:pPr>
-            <a:r>
-              <a:rPr kumimoji="0" lang="en-US" altLang="pt-BR" b="0" i="0" u="none" strike="noStrike" cap="none" normalizeH="0" baseline="0" dirty="0">
-                <a:ln>
-                  <a:noFill/>
-                </a:ln>
-                <a:solidFill>
-                  <a:schemeClr val="tx1"/>
-                </a:solidFill>
-                <a:effectLst/>
-                <a:latin typeface="Arial" panose="020B0604020202020204" pitchFamily="34" charset="0"/>
-              </a:rPr>
-              <a:t>I</a:t>
-            </a:r>
-            <a:r>
-              <a:rPr lang="pt-BR" dirty="0"/>
-              <a:t>BGE, I. B. de Geografia e </a:t>
-            </a:r>
-            <a:r>
-              <a:rPr lang="pt-BR" dirty="0" err="1"/>
-              <a:t>E</a:t>
-            </a:r>
-            <a:r>
-              <a:rPr lang="pt-BR" dirty="0"/>
-              <a:t>. O que é o PIB? 2026. Acessado em: 11 abr. 2026. Disponível em: </a:t>
-            </a:r>
-            <a:r>
-              <a:rPr lang="pt-BR" dirty="0">
-                <a:hlinkClick r:id="rId4"/>
-              </a:rPr>
-              <a:t>https://www.ibge.gov.br/explica/</a:t>
-            </a:r>
-            <a:r>
-              <a:rPr lang="pt-BR" dirty="0" err="1">
-                <a:hlinkClick r:id="rId4"/>
-              </a:rPr>
-              <a:t>pib.php</a:t>
-            </a:r>
-            <a:r>
-              <a:rPr lang="pt-BR" dirty="0"/>
-              <a:t>.</a:t>
-            </a:r>
-            <a:endParaRPr lang="en-US" dirty="0"/>
-          </a:p>
-          <a:p>
-            <a:pPr marL="0" marR="0" lvl="0" indent="0" algn="l" defTabSz="914400" rtl="0" eaLnBrk="0" fontAlgn="base" latinLnBrk="0" hangingPunct="0">
-              <a:lnSpc>
-                <a:spcPct val="100000"/>
-              </a:lnSpc>
-              <a:spcBef>
-                <a:spcPct val="0"/>
-              </a:spcBef>
-              <a:spcAft>
-                <a:spcPct val="0"/>
-              </a:spcAft>
-              <a:buClrTx/>
-              <a:buSzTx/>
-              <a:tabLst/>
-            </a:pPr>
-            <a:r>
-              <a:rPr lang="en-US" dirty="0"/>
-              <a:t>KAGERMANN,H.;WAHLSTER,W.;HELBIG, J. et al. Recommendations for implementing the strategic initiative </a:t>
-            </a:r>
-            <a:r>
-              <a:rPr lang="en-US" dirty="0" err="1"/>
-              <a:t>industrie</a:t>
-            </a:r>
-            <a:r>
-              <a:rPr lang="en-US" dirty="0"/>
-              <a:t> 4.0: Final report of the </a:t>
-            </a:r>
-            <a:r>
-              <a:rPr lang="en-US" dirty="0" err="1"/>
-              <a:t>industrie</a:t>
-            </a:r>
-            <a:r>
-              <a:rPr lang="en-US" dirty="0"/>
-              <a:t> 4.0 working group. </a:t>
-            </a:r>
-            <a:r>
-              <a:rPr lang="en-US" dirty="0" err="1"/>
-              <a:t>Forschungsunion</a:t>
-            </a:r>
-            <a:r>
-              <a:rPr lang="en-US" dirty="0"/>
-              <a:t>: Berlin, Germany, p. 12–25, 2013.</a:t>
-            </a:r>
-          </a:p>
-          <a:p>
-            <a:pPr marL="0" marR="0" lvl="0" indent="0" algn="l" defTabSz="914400" rtl="0" eaLnBrk="0" fontAlgn="base" latinLnBrk="0" hangingPunct="0">
-              <a:lnSpc>
-                <a:spcPct val="100000"/>
-              </a:lnSpc>
-              <a:spcBef>
-                <a:spcPct val="0"/>
-              </a:spcBef>
-              <a:spcAft>
-                <a:spcPct val="0"/>
-              </a:spcAft>
-              <a:buClrTx/>
-              <a:buSzTx/>
-              <a:tabLst/>
-            </a:pPr>
-            <a:r>
-              <a:rPr lang="pt-BR" dirty="0"/>
-              <a:t>KEYNES, J. M. A Teoria Geral do Emprego, do Juro e da Moeda. [S. l.]: Atlas, 1936.</a:t>
-            </a:r>
-            <a:endParaRPr lang="en-US" dirty="0"/>
-          </a:p>
-          <a:p>
-            <a:pPr marL="0" marR="0" lvl="0" indent="0" algn="l" defTabSz="914400" rtl="0" eaLnBrk="0" fontAlgn="base" latinLnBrk="0" hangingPunct="0">
-              <a:lnSpc>
-                <a:spcPct val="100000"/>
-              </a:lnSpc>
-              <a:spcBef>
-                <a:spcPct val="0"/>
-              </a:spcBef>
-              <a:spcAft>
-                <a:spcPct val="0"/>
-              </a:spcAft>
-              <a:buClrTx/>
-              <a:buSzTx/>
-              <a:tabLst/>
-            </a:pPr>
-            <a:r>
-              <a:rPr lang="en-US" dirty="0"/>
-              <a:t>KOOP, G.; MCINTYRE, S.; MITCHELL, J.; RAFTAPOSTOLOS, A. Monthly </a:t>
-            </a:r>
-            <a:r>
-              <a:rPr lang="en-US" dirty="0" err="1"/>
-              <a:t>gdp</a:t>
-            </a:r>
-            <a:r>
-              <a:rPr lang="en-US" dirty="0"/>
-              <a:t> growth estimates for the </a:t>
-            </a:r>
-            <a:r>
-              <a:rPr lang="en-US" dirty="0" err="1"/>
-              <a:t>u.s.</a:t>
-            </a:r>
-            <a:r>
-              <a:rPr lang="en-US" dirty="0"/>
-              <a:t> states. 2025. </a:t>
-            </a:r>
-            <a:r>
-              <a:rPr lang="en-US" dirty="0" err="1"/>
-              <a:t>Disponível</a:t>
-            </a:r>
-            <a:r>
-              <a:rPr lang="en-US" dirty="0"/>
-              <a:t> </a:t>
-            </a:r>
-            <a:r>
-              <a:rPr lang="en-US" dirty="0" err="1"/>
-              <a:t>em</a:t>
-            </a:r>
-            <a:r>
-              <a:rPr lang="en-US" dirty="0"/>
-              <a:t>: </a:t>
-            </a:r>
-            <a:r>
-              <a:rPr lang="en-US" dirty="0">
-                <a:hlinkClick r:id="rId5"/>
-              </a:rPr>
-              <a:t>https://arxiv.org/abs/2501.04607</a:t>
-            </a:r>
-            <a:r>
-              <a:rPr lang="en-US" dirty="0"/>
-              <a:t>.</a:t>
-            </a:r>
-          </a:p>
-          <a:p>
-            <a:pPr marL="0" marR="0" lvl="0" indent="0" algn="l" defTabSz="914400" rtl="0" eaLnBrk="0" fontAlgn="base" latinLnBrk="0" hangingPunct="0">
-              <a:lnSpc>
-                <a:spcPct val="100000"/>
-              </a:lnSpc>
-              <a:spcBef>
-                <a:spcPct val="0"/>
-              </a:spcBef>
-              <a:spcAft>
-                <a:spcPct val="0"/>
-              </a:spcAft>
-              <a:buClrTx/>
-              <a:buSzTx/>
-              <a:tabLst/>
-            </a:pPr>
-            <a:r>
-              <a:rPr lang="pt-BR" dirty="0"/>
-              <a:t>LAKATOS, E. M.; MARCONI, M. de A. Fundamentos de metodologia científica. 5. ed. São Paulo: Editora Atlas, 2003. </a:t>
-            </a:r>
-          </a:p>
-          <a:p>
-            <a:pPr marL="0" marR="0" lvl="0" indent="0" algn="l" defTabSz="914400" rtl="0" eaLnBrk="0" fontAlgn="base" latinLnBrk="0" hangingPunct="0">
-              <a:lnSpc>
-                <a:spcPct val="100000"/>
-              </a:lnSpc>
-              <a:spcBef>
-                <a:spcPct val="0"/>
-              </a:spcBef>
-              <a:spcAft>
-                <a:spcPct val="0"/>
-              </a:spcAft>
-              <a:buClrTx/>
-              <a:buSzTx/>
-              <a:tabLst/>
-            </a:pPr>
-            <a:r>
-              <a:rPr lang="pt-BR" dirty="0"/>
-              <a:t>LAUDON, K.; LAUDON, J. Sistemas de Informação Gerenciais: Administrando a Empresa Digital. Bookman, 2022. ISBN 9788582606032. Disponível em: https: //books.google.com.br/</a:t>
-            </a:r>
-            <a:r>
-              <a:rPr lang="pt-BR" dirty="0" err="1"/>
-              <a:t>books?id</a:t>
-            </a:r>
-            <a:r>
-              <a:rPr lang="pt-BR" dirty="0"/>
-              <a:t>=</a:t>
-            </a:r>
-            <a:r>
-              <a:rPr lang="pt-BR" dirty="0" err="1"/>
-              <a:t>NIehEAAAQBAJ</a:t>
-            </a:r>
-            <a:r>
-              <a:rPr lang="pt-BR" dirty="0"/>
-              <a:t>. </a:t>
-            </a:r>
-          </a:p>
-          <a:p>
-            <a:pPr marL="0" marR="0" lvl="0" indent="0" algn="l" defTabSz="914400" rtl="0" eaLnBrk="0" fontAlgn="base" latinLnBrk="0" hangingPunct="0">
-              <a:lnSpc>
-                <a:spcPct val="100000"/>
-              </a:lnSpc>
-              <a:spcBef>
-                <a:spcPct val="0"/>
-              </a:spcBef>
-              <a:spcAft>
-                <a:spcPct val="0"/>
-              </a:spcAft>
-              <a:buClrTx/>
-              <a:buSzTx/>
-              <a:tabLst/>
-            </a:pPr>
-            <a:r>
-              <a:rPr lang="pt-BR" dirty="0"/>
-              <a:t>LI, K. </a:t>
-            </a:r>
-            <a:r>
-              <a:rPr lang="pt-BR" dirty="0" err="1"/>
-              <a:t>Forecasting</a:t>
-            </a:r>
-            <a:r>
-              <a:rPr lang="pt-BR" dirty="0"/>
-              <a:t> US GDP </a:t>
-            </a:r>
-            <a:r>
-              <a:rPr lang="pt-BR" dirty="0" err="1"/>
-              <a:t>from</a:t>
-            </a:r>
-            <a:r>
-              <a:rPr lang="pt-BR" dirty="0"/>
-              <a:t> 1960 </a:t>
-            </a:r>
-            <a:r>
-              <a:rPr lang="pt-BR" dirty="0" err="1"/>
-              <a:t>to</a:t>
-            </a:r>
-            <a:r>
-              <a:rPr lang="pt-BR" dirty="0"/>
-              <a:t> 2023 </a:t>
-            </a:r>
-            <a:r>
-              <a:rPr lang="pt-BR" dirty="0" err="1"/>
-              <a:t>using</a:t>
-            </a:r>
-            <a:r>
-              <a:rPr lang="pt-BR" dirty="0"/>
-              <a:t> PCA. 2024. Disponível em: http://dissertations.umi.com/ucla:23601. </a:t>
-            </a:r>
-          </a:p>
-          <a:p>
-            <a:pPr marL="0" marR="0" lvl="0" indent="0" algn="l" defTabSz="914400" rtl="0" eaLnBrk="0" fontAlgn="base" latinLnBrk="0" hangingPunct="0">
-              <a:lnSpc>
-                <a:spcPct val="100000"/>
-              </a:lnSpc>
-              <a:spcBef>
-                <a:spcPct val="0"/>
-              </a:spcBef>
-              <a:spcAft>
-                <a:spcPct val="0"/>
-              </a:spcAft>
-              <a:buClrTx/>
-              <a:buSzTx/>
-              <a:tabLst/>
-            </a:pPr>
-            <a:r>
-              <a:rPr lang="pt-BR" dirty="0" err="1"/>
-              <a:t>MANKIW,N.G.Introdução</a:t>
-            </a:r>
-            <a:r>
-              <a:rPr lang="pt-BR" dirty="0"/>
-              <a:t> à economia. [S. l.]: Bookman Editora, 2025</a:t>
-            </a:r>
-            <a:r>
-              <a:rPr lang="en-US" dirty="0"/>
-              <a:t>.</a:t>
-            </a:r>
-          </a:p>
-          <a:p>
-            <a:pPr marL="0" marR="0" lvl="0" indent="0" algn="l" defTabSz="914400" rtl="0" eaLnBrk="0" fontAlgn="base" latinLnBrk="0" hangingPunct="0">
-              <a:lnSpc>
-                <a:spcPct val="100000"/>
-              </a:lnSpc>
-              <a:spcBef>
-                <a:spcPct val="0"/>
-              </a:spcBef>
-              <a:spcAft>
-                <a:spcPct val="0"/>
-              </a:spcAft>
-              <a:buClrTx/>
-              <a:buSzTx/>
-              <a:tabLst/>
-            </a:pPr>
-            <a:r>
-              <a:rPr lang="pt-BR" dirty="0"/>
-              <a:t>OLIVEIRA, M. C.; JUNIOR, S. d. S. P. Gastos Públicos com Infraestrutura e Disparidades Regionais: Impactos no PIB per capita das Regiões Sul e Nordeste do Brasil. Natal, RN, 2024.</a:t>
-            </a:r>
-          </a:p>
-          <a:p>
-            <a:pPr marL="0" marR="0" lvl="0" indent="0" algn="l" defTabSz="914400" rtl="0" eaLnBrk="0" fontAlgn="base" latinLnBrk="0" hangingPunct="0">
-              <a:lnSpc>
-                <a:spcPct val="100000"/>
-              </a:lnSpc>
-              <a:spcBef>
-                <a:spcPct val="0"/>
-              </a:spcBef>
-              <a:spcAft>
-                <a:spcPct val="0"/>
-              </a:spcAft>
-              <a:buClrTx/>
-              <a:buSzTx/>
-              <a:tabLst/>
-            </a:pPr>
-            <a:r>
-              <a:rPr lang="pt-BR" dirty="0"/>
-              <a:t>REBELO, M. A. C. </a:t>
-            </a:r>
-            <a:r>
-              <a:rPr lang="pt-BR" dirty="0" err="1"/>
-              <a:t>Interpretabilidade</a:t>
-            </a:r>
-            <a:r>
-              <a:rPr lang="pt-BR" dirty="0"/>
-              <a:t> de modelos </a:t>
-            </a:r>
-            <a:r>
-              <a:rPr lang="pt-BR" dirty="0" err="1"/>
-              <a:t>Machine</a:t>
-            </a:r>
-            <a:r>
-              <a:rPr lang="pt-BR" dirty="0"/>
-              <a:t> Learning para a previsão macroeconómica. Dissertação (Mestrado)– Universidade de Lisboa (Portugal), 2022.</a:t>
-            </a:r>
-          </a:p>
-          <a:p>
-            <a:pPr marL="0" marR="0" lvl="0" indent="0" algn="l" defTabSz="914400" rtl="0" eaLnBrk="0" fontAlgn="base" latinLnBrk="0" hangingPunct="0">
-              <a:lnSpc>
-                <a:spcPct val="100000"/>
-              </a:lnSpc>
-              <a:spcBef>
-                <a:spcPct val="0"/>
-              </a:spcBef>
-              <a:spcAft>
-                <a:spcPct val="0"/>
-              </a:spcAft>
-              <a:buClrTx/>
-              <a:buSzTx/>
-              <a:tabLst/>
-            </a:pPr>
-            <a:endParaRPr kumimoji="0" lang="pt-BR" altLang="pt-BR" b="0" i="0" u="none" strike="noStrike" cap="none" normalizeH="0" baseline="0" dirty="0">
-              <a:ln>
-                <a:noFill/>
-              </a:ln>
-              <a:solidFill>
-                <a:schemeClr val="tx1"/>
-              </a:solidFill>
-              <a:effectLst/>
-              <a:latin typeface="Arial" panose="020B0604020202020204" pitchFamily="34" charset="0"/>
-            </a:endParaRPr>
-          </a:p>
-        </p:txBody>
-      </p:sp>
-    </p:spTree>
-    <p:extLst>
-      <p:ext uri="{BB962C8B-B14F-4D97-AF65-F5344CB8AC3E}">
-        <p14:creationId xmlns:p14="http://schemas.microsoft.com/office/powerpoint/2010/main" val="1583948199"/>
-      </p:ext>
-    </p:extLst>
-  </p:cSld>
-  <p:clrMapOvr>
-    <a:masterClrMapping/>
-  </p:clrMapOvr>
-</p:sld>
-</file>
-
 <file path=ppt/slides/slide2.xml><?xml version="1.0" encoding="utf-8"?>
 <p:sld xmlns:a="http://schemas.openxmlformats.org/drawingml/2006/main" xmlns:r="http://schemas.openxmlformats.org/officeDocument/2006/relationships" xmlns:p="http://schemas.openxmlformats.org/presentationml/2006/main">
   <p:cSld>
@@ -14767,6 +19532,2064 @@
         </p:txBody>
       </p:sp>
     </p:spTree>
+  </p:cSld>
+  <p:clrMapOvr>
+    <a:masterClrMapping/>
+  </p:clrMapOvr>
+</p:sld>
+</file>
+
+<file path=ppt/slides/slide20.xml><?xml version="1.0" encoding="utf-8"?>
+<p:sld xmlns:a="http://schemas.openxmlformats.org/drawingml/2006/main" xmlns:r="http://schemas.openxmlformats.org/officeDocument/2006/relationships" xmlns:p="http://schemas.openxmlformats.org/presentationml/2006/main">
+  <p:cSld>
+    <p:spTree>
+      <p:nvGrpSpPr>
+        <p:cNvPr id="1" name="Shape 95">
+          <a:extLst>
+            <a:ext uri="{FF2B5EF4-FFF2-40B4-BE49-F238E27FC236}">
+              <a16:creationId xmlns:a16="http://schemas.microsoft.com/office/drawing/2014/main" id="{86C25675-4193-B45D-E0D3-1CC99B6F27E7}"/>
+            </a:ext>
+          </a:extLst>
+        </p:cNvPr>
+        <p:cNvGrpSpPr/>
+        <p:nvPr/>
+      </p:nvGrpSpPr>
+      <p:grpSpPr>
+        <a:xfrm>
+          <a:off x="0" y="0"/>
+          <a:ext cx="0" cy="0"/>
+          <a:chOff x="0" y="0"/>
+          <a:chExt cx="0" cy="0"/>
+        </a:xfrm>
+      </p:grpSpPr>
+      <p:sp>
+        <p:nvSpPr>
+          <p:cNvPr id="96" name="Google Shape;96;p2">
+            <a:extLst>
+              <a:ext uri="{FF2B5EF4-FFF2-40B4-BE49-F238E27FC236}">
+                <a16:creationId xmlns:a16="http://schemas.microsoft.com/office/drawing/2014/main" id="{01735158-BF3F-4E1D-229F-F3E5CAC686D4}"/>
+              </a:ext>
+            </a:extLst>
+          </p:cNvPr>
+          <p:cNvSpPr txBox="1">
+            <a:spLocks noGrp="1"/>
+          </p:cNvSpPr>
+          <p:nvPr>
+            <p:ph type="title"/>
+          </p:nvPr>
+        </p:nvSpPr>
+        <p:spPr>
+          <a:xfrm>
+            <a:off x="170268" y="190105"/>
+            <a:ext cx="10329566" cy="768438"/>
+          </a:xfrm>
+          <a:prstGeom prst="rect">
+            <a:avLst/>
+          </a:prstGeom>
+          <a:noFill/>
+          <a:ln>
+            <a:noFill/>
+          </a:ln>
+        </p:spPr>
+        <p:txBody>
+          <a:bodyPr spcFirstLastPara="1" wrap="square" lIns="91425" tIns="45700" rIns="91425" bIns="45700" anchor="ctr" anchorCtr="0">
+            <a:noAutofit/>
+          </a:bodyPr>
+          <a:lstStyle/>
+          <a:p>
+            <a:pPr lvl="0">
+              <a:buSzPts val="4400"/>
+            </a:pPr>
+            <a:r>
+              <a:rPr lang="pt-BR" sz="2800" b="1" dirty="0">
+                <a:latin typeface="+mj-lt"/>
+              </a:rPr>
+              <a:t>Referências</a:t>
+            </a:r>
+            <a:endParaRPr sz="2800" b="1" dirty="0">
+              <a:latin typeface="+mj-lt"/>
+            </a:endParaRPr>
+          </a:p>
+        </p:txBody>
+      </p:sp>
+      <p:pic>
+        <p:nvPicPr>
+          <p:cNvPr id="98" name="Google Shape;98;p2" descr="Universidade Federal da Fronteira Sul – Wikipédia, a enciclopédia livre">
+            <a:extLst>
+              <a:ext uri="{FF2B5EF4-FFF2-40B4-BE49-F238E27FC236}">
+                <a16:creationId xmlns:a16="http://schemas.microsoft.com/office/drawing/2014/main" id="{07E1D863-ACFC-D41C-B779-A356A284E7A8}"/>
+              </a:ext>
+            </a:extLst>
+          </p:cNvPr>
+          <p:cNvPicPr preferRelativeResize="0"/>
+          <p:nvPr/>
+        </p:nvPicPr>
+        <p:blipFill rotWithShape="1">
+          <a:blip r:embed="rId3">
+            <a:alphaModFix/>
+          </a:blip>
+          <a:srcRect/>
+          <a:stretch/>
+        </p:blipFill>
+        <p:spPr>
+          <a:xfrm>
+            <a:off x="10978329" y="18255"/>
+            <a:ext cx="975614" cy="1325563"/>
+          </a:xfrm>
+          <a:prstGeom prst="rect">
+            <a:avLst/>
+          </a:prstGeom>
+          <a:noFill/>
+          <a:ln>
+            <a:noFill/>
+          </a:ln>
+        </p:spPr>
+      </p:pic>
+      <p:sp>
+        <p:nvSpPr>
+          <p:cNvPr id="99" name="Google Shape;99;p2">
+            <a:extLst>
+              <a:ext uri="{FF2B5EF4-FFF2-40B4-BE49-F238E27FC236}">
+                <a16:creationId xmlns:a16="http://schemas.microsoft.com/office/drawing/2014/main" id="{C1B3A47C-E37A-86B1-B6D2-8E58B992DFAA}"/>
+              </a:ext>
+            </a:extLst>
+          </p:cNvPr>
+          <p:cNvSpPr/>
+          <p:nvPr/>
+        </p:nvSpPr>
+        <p:spPr>
+          <a:xfrm>
+            <a:off x="170268" y="958543"/>
+            <a:ext cx="10515600" cy="63062"/>
+          </a:xfrm>
+          <a:prstGeom prst="rect">
+            <a:avLst/>
+          </a:prstGeom>
+          <a:solidFill>
+            <a:srgbClr val="548135"/>
+          </a:solidFill>
+          <a:ln w="12700" cap="flat" cmpd="sng">
+            <a:solidFill>
+              <a:srgbClr val="1C3052"/>
+            </a:solidFill>
+            <a:prstDash val="solid"/>
+            <a:miter lim="800000"/>
+            <a:headEnd type="none" w="sm" len="sm"/>
+            <a:tailEnd type="none" w="sm" len="sm"/>
+          </a:ln>
+        </p:spPr>
+        <p:txBody>
+          <a:bodyPr spcFirstLastPara="1" wrap="square" lIns="91425" tIns="45700" rIns="91425" bIns="45700" anchor="ctr" anchorCtr="0">
+            <a:noAutofit/>
+          </a:bodyPr>
+          <a:lstStyle/>
+          <a:p>
+            <a:pPr marL="0" marR="0" lvl="0" indent="0" algn="ctr" rtl="0">
+              <a:spcBef>
+                <a:spcPts val="0"/>
+              </a:spcBef>
+              <a:spcAft>
+                <a:spcPts val="0"/>
+              </a:spcAft>
+              <a:buNone/>
+            </a:pPr>
+            <a:endParaRPr sz="1800">
+              <a:solidFill>
+                <a:schemeClr val="lt1"/>
+              </a:solidFill>
+              <a:latin typeface="Calibri"/>
+              <a:ea typeface="Calibri"/>
+              <a:cs typeface="Calibri"/>
+              <a:sym typeface="Calibri"/>
+            </a:endParaRPr>
+          </a:p>
+        </p:txBody>
+      </p:sp>
+      <p:sp>
+        <p:nvSpPr>
+          <p:cNvPr id="100" name="Google Shape;100;p2">
+            <a:extLst>
+              <a:ext uri="{FF2B5EF4-FFF2-40B4-BE49-F238E27FC236}">
+                <a16:creationId xmlns:a16="http://schemas.microsoft.com/office/drawing/2014/main" id="{CF7DF50C-ADAB-5B8C-608E-245E5D51BFC0}"/>
+              </a:ext>
+            </a:extLst>
+          </p:cNvPr>
+          <p:cNvSpPr txBox="1">
+            <a:spLocks noGrp="1"/>
+          </p:cNvSpPr>
+          <p:nvPr>
+            <p:ph type="sldNum" idx="12"/>
+          </p:nvPr>
+        </p:nvSpPr>
+        <p:spPr>
+          <a:xfrm>
+            <a:off x="9440152" y="6492875"/>
+            <a:ext cx="2743200" cy="365125"/>
+          </a:xfrm>
+          <a:prstGeom prst="rect">
+            <a:avLst/>
+          </a:prstGeom>
+          <a:noFill/>
+          <a:ln>
+            <a:noFill/>
+          </a:ln>
+        </p:spPr>
+        <p:txBody>
+          <a:bodyPr spcFirstLastPara="1" wrap="square" lIns="91425" tIns="45700" rIns="91425" bIns="45700" anchor="ctr" anchorCtr="0">
+            <a:noAutofit/>
+          </a:bodyPr>
+          <a:lstStyle/>
+          <a:p>
+            <a:pPr marL="0" lvl="0" indent="0" algn="r" rtl="0">
+              <a:spcBef>
+                <a:spcPts val="0"/>
+              </a:spcBef>
+              <a:spcAft>
+                <a:spcPts val="0"/>
+              </a:spcAft>
+              <a:buNone/>
+            </a:pPr>
+            <a:fld id="{00000000-1234-1234-1234-123412341234}" type="slidenum">
+              <a:rPr lang="pt-BR" sz="1800"/>
+              <a:t>20</a:t>
+            </a:fld>
+            <a:endParaRPr sz="1800" dirty="0"/>
+          </a:p>
+        </p:txBody>
+      </p:sp>
+      <p:sp>
+        <p:nvSpPr>
+          <p:cNvPr id="3" name="Rectangle 1">
+            <a:extLst>
+              <a:ext uri="{FF2B5EF4-FFF2-40B4-BE49-F238E27FC236}">
+                <a16:creationId xmlns:a16="http://schemas.microsoft.com/office/drawing/2014/main" id="{3D81B61D-6056-2716-6767-3AD134FCA338}"/>
+              </a:ext>
+            </a:extLst>
+          </p:cNvPr>
+          <p:cNvSpPr>
+            <a:spLocks noChangeArrowheads="1"/>
+          </p:cNvSpPr>
+          <p:nvPr/>
+        </p:nvSpPr>
+        <p:spPr bwMode="auto">
+          <a:xfrm>
+            <a:off x="238057" y="1066365"/>
+            <a:ext cx="11530271" cy="5693866"/>
+          </a:xfrm>
+          <a:prstGeom prst="rect">
+            <a:avLst/>
+          </a:prstGeom>
+          <a:noFill/>
+          <a:ln>
+            <a:noFill/>
+          </a:ln>
+          <a:effectLst/>
+          <a:extLst>
+            <a:ext uri="{909E8E84-426E-40DD-AFC4-6F175D3DCCD1}">
+              <a14:hiddenFill xmlns:a14="http://schemas.microsoft.com/office/drawing/2010/main">
+                <a:solidFill>
+                  <a:schemeClr val="accent1"/>
+                </a:solidFill>
+              </a14:hiddenFill>
+            </a:ext>
+            <a:ext uri="{91240B29-F687-4F45-9708-019B960494DF}">
+              <a14:hiddenLine xmlns:a14="http://schemas.microsoft.com/office/drawing/2010/main" w="9525">
+                <a:solidFill>
+                  <a:schemeClr val="tx1"/>
+                </a:solidFill>
+                <a:miter lim="800000"/>
+                <a:headEnd/>
+                <a:tailEnd/>
+              </a14:hiddenLine>
+            </a:ext>
+            <a:ext uri="{AF507438-7753-43E0-B8FC-AC1667EBCBE1}">
+              <a14:hiddenEffects xmlns:a14="http://schemas.microsoft.com/office/drawing/2010/main">
+                <a:effectLst>
+                  <a:outerShdw dist="35921" dir="2700000" algn="ctr" rotWithShape="0">
+                    <a:schemeClr val="bg2"/>
+                  </a:outerShdw>
+                </a:effectLst>
+              </a14:hiddenEffects>
+            </a:ext>
+          </a:extLst>
+        </p:spPr>
+        <p:txBody>
+          <a:bodyPr vert="horz" wrap="square" lIns="91440" tIns="45720" rIns="91440" bIns="45720" numCol="1" anchor="ctr" anchorCtr="0" compatLnSpc="1">
+            <a:prstTxWarp prst="textNoShape">
+              <a:avLst/>
+            </a:prstTxWarp>
+            <a:spAutoFit/>
+          </a:bodyPr>
+          <a:lstStyle/>
+          <a:p>
+            <a:pPr lvl="0" eaLnBrk="0" fontAlgn="base" hangingPunct="0">
+              <a:spcBef>
+                <a:spcPct val="0"/>
+              </a:spcBef>
+              <a:spcAft>
+                <a:spcPct val="0"/>
+              </a:spcAft>
+              <a:buClrTx/>
+            </a:pPr>
+            <a:r>
+              <a:rPr lang="pt-BR" dirty="0"/>
+              <a:t>ALMEIDA, P. R. d. A economia internacional no século XX: um ensaio de síntese. Revista Brasileira de Política Internacional, Centro de Estudos Globais da Universidade de Brasília, v. 44, n. 1, p. 112–136, jan. 2001. ISSN 0034-7329. Disponível em: https://doi.org/10.1590/S0034-73292001000100008.</a:t>
+            </a:r>
+          </a:p>
+          <a:p>
+            <a:pPr lvl="0" eaLnBrk="0" fontAlgn="base" hangingPunct="0">
+              <a:spcBef>
+                <a:spcPct val="0"/>
+              </a:spcBef>
+              <a:spcAft>
+                <a:spcPct val="0"/>
+              </a:spcAft>
+              <a:buClrTx/>
+            </a:pPr>
+            <a:r>
+              <a:rPr lang="pt-BR" dirty="0"/>
+              <a:t>ALVES, A. P. d. A. Núcleo da inflação como fator comum do IPCA: uma abordagem do modelo de fator dinâmico generalizado. Dissertação (Mestrado) – Universidade de São Paulo, 2009.</a:t>
+            </a:r>
+          </a:p>
+          <a:p>
+            <a:pPr lvl="0" eaLnBrk="0" fontAlgn="base" hangingPunct="0">
+              <a:spcBef>
+                <a:spcPct val="0"/>
+              </a:spcBef>
+              <a:spcAft>
+                <a:spcPct val="0"/>
+              </a:spcAft>
+              <a:buClrTx/>
+            </a:pPr>
+            <a:r>
+              <a:rPr lang="pt-BR" dirty="0"/>
+              <a:t>AMARAL, C. P.; SANTOS, D. R. dos; LIMA, E. R.; BARCELLOS, T. Previsão de variáveis econômicas com aprendizado de máquina: previsão com redes neurais. Observatório de la Economía Latinoamericana, v. 21, n. 9, p. 11279–11299, 2023.</a:t>
+            </a:r>
+          </a:p>
+          <a:p>
+            <a:pPr lvl="0" eaLnBrk="0" fontAlgn="base" hangingPunct="0">
+              <a:spcBef>
+                <a:spcPct val="0"/>
+              </a:spcBef>
+              <a:spcAft>
+                <a:spcPct val="0"/>
+              </a:spcAft>
+              <a:buClrTx/>
+            </a:pPr>
+            <a:r>
+              <a:rPr lang="pt-BR" dirty="0"/>
+              <a:t>ASSUNÇÃO, F. Estratégias para tratamento de variáveis com dados faltantes durante o desenvolvimento de modelos preditivos. 2012.</a:t>
+            </a:r>
+          </a:p>
+          <a:p>
+            <a:pPr lvl="0" eaLnBrk="0" fontAlgn="base" hangingPunct="0">
+              <a:spcBef>
+                <a:spcPct val="0"/>
+              </a:spcBef>
+              <a:spcAft>
+                <a:spcPct val="0"/>
+              </a:spcAft>
+              <a:buClrTx/>
+            </a:pPr>
+            <a:r>
+              <a:rPr lang="pt-BR" dirty="0"/>
+              <a:t>AZEVEDO, S. H. A. de. Modelagem de séries temporais macroeconômicas com vetores autorregressivos aumentados com fator e transição suave sob um enfoque bayesiano. Dissertação (Mestrado) – [s.n.], 2020.</a:t>
+            </a:r>
+          </a:p>
+          <a:p>
+            <a:pPr lvl="0" eaLnBrk="0" fontAlgn="base" hangingPunct="0">
+              <a:spcBef>
+                <a:spcPct val="0"/>
+              </a:spcBef>
+              <a:spcAft>
+                <a:spcPct val="0"/>
+              </a:spcAft>
+              <a:buClrTx/>
+            </a:pPr>
+            <a:r>
+              <a:rPr lang="pt-BR" dirty="0"/>
+              <a:t>BACEN, B. C. do B. Portal de Dados Abertos do Banco Central do Brasil. 2025. https://dadosabertos.bcb.gov.br. Acesso em: 16 out. 2025.</a:t>
+            </a:r>
+          </a:p>
+          <a:p>
+            <a:pPr lvl="0" eaLnBrk="0" fontAlgn="base" hangingPunct="0">
+              <a:spcBef>
+                <a:spcPct val="0"/>
+              </a:spcBef>
+              <a:spcAft>
+                <a:spcPct val="0"/>
+              </a:spcAft>
+              <a:buClrTx/>
+            </a:pPr>
+            <a:r>
+              <a:rPr lang="pt-BR" dirty="0"/>
+              <a:t>Banco Central do Brasil. SGS 1207 – Sistema Gerenciador de Séries Temporais. Banco Central do Brasil, 2026. Disponível em: https://dadosabertos.bcb.gov.br/dataset/1207-sgs.</a:t>
+            </a:r>
+          </a:p>
+          <a:p>
+            <a:pPr lvl="0" eaLnBrk="0" fontAlgn="base" hangingPunct="0">
+              <a:spcBef>
+                <a:spcPct val="0"/>
+              </a:spcBef>
+              <a:spcAft>
+                <a:spcPct val="0"/>
+              </a:spcAft>
+              <a:buClrTx/>
+            </a:pPr>
+            <a:r>
+              <a:rPr lang="pt-BR" dirty="0"/>
+              <a:t>BORGES, B. K. Ensaios sobre previsão de séries macroeconômicas para o Brasil utilizando modelos VAR bayesianos. 2018.</a:t>
+            </a:r>
+          </a:p>
+          <a:p>
+            <a:pPr lvl="0" eaLnBrk="0" fontAlgn="base" hangingPunct="0">
+              <a:spcBef>
+                <a:spcPct val="0"/>
+              </a:spcBef>
+              <a:spcAft>
+                <a:spcPct val="0"/>
+              </a:spcAft>
+              <a:buClrTx/>
+            </a:pPr>
+            <a:r>
+              <a:rPr lang="pt-BR" dirty="0"/>
+              <a:t>BOX, G. E.; JENKINS, G. Time Series Analysis: Forecasting and Control. [S. l.]: Holden-Day, 1970.</a:t>
+            </a:r>
+          </a:p>
+          <a:p>
+            <a:pPr lvl="0" eaLnBrk="0" fontAlgn="base" hangingPunct="0">
+              <a:spcBef>
+                <a:spcPct val="0"/>
+              </a:spcBef>
+              <a:spcAft>
+                <a:spcPct val="0"/>
+              </a:spcAft>
+              <a:buClrTx/>
+            </a:pPr>
+            <a:r>
+              <a:rPr lang="pt-BR" dirty="0"/>
+              <a:t>BRAGA, I. A. D. Forecasting do PIB e da Inflação do Brasil: usando técnicas de machine learning. 2025.</a:t>
+            </a:r>
+          </a:p>
+          <a:p>
+            <a:pPr lvl="0" eaLnBrk="0" fontAlgn="base" hangingPunct="0">
+              <a:spcBef>
+                <a:spcPct val="0"/>
+              </a:spcBef>
+              <a:spcAft>
+                <a:spcPct val="0"/>
+              </a:spcAft>
+              <a:buClrTx/>
+            </a:pPr>
+            <a:r>
+              <a:rPr lang="pt-BR" dirty="0"/>
+              <a:t>BREIMAN, L. Random Forests. Machine Learning, Springer, v. 45, n. 1, p. 5–32, 2001.</a:t>
+            </a:r>
+          </a:p>
+          <a:p>
+            <a:pPr lvl="0" eaLnBrk="0" fontAlgn="base" hangingPunct="0">
+              <a:spcBef>
+                <a:spcPct val="0"/>
+              </a:spcBef>
+              <a:spcAft>
+                <a:spcPct val="0"/>
+              </a:spcAft>
+              <a:buClrTx/>
+            </a:pPr>
+            <a:r>
+              <a:rPr lang="pt-BR" dirty="0"/>
+              <a:t>CARMO, C. R. S.; LOPACINSKI, G. P. Modelagem e previsão de fenômenos socioeconômicos: uma análise comparativa entre métodos clássicos e contemporâneos. Revista GeTeC, v. 13, 2023.</a:t>
+            </a:r>
+          </a:p>
+          <a:p>
+            <a:pPr lvl="0" eaLnBrk="0" fontAlgn="base" hangingPunct="0">
+              <a:spcBef>
+                <a:spcPct val="0"/>
+              </a:spcBef>
+              <a:spcAft>
+                <a:spcPct val="0"/>
+              </a:spcAft>
+              <a:buClrTx/>
+            </a:pPr>
+            <a:r>
+              <a:rPr lang="pt-BR" dirty="0"/>
+              <a:t>CASTELLI, A. d. C. Modelo MIDAS de projeção do PIB brasileiro utilizando a Pesquisa Industrial Mensal. 2022.</a:t>
+            </a:r>
+          </a:p>
+          <a:p>
+            <a:pPr lvl="0" eaLnBrk="0" fontAlgn="base" hangingPunct="0">
+              <a:spcBef>
+                <a:spcPct val="0"/>
+              </a:spcBef>
+              <a:spcAft>
+                <a:spcPct val="0"/>
+              </a:spcAft>
+              <a:buClrTx/>
+            </a:pPr>
+            <a:r>
+              <a:rPr lang="pt-BR" dirty="0"/>
+              <a:t>CIQUINI, O.; BORBA, A. A. de; GODEGUEZ, P. A. Modelo ARIMA para decisões econômicas. Proceeding Series of the Brazilian Society of Computational and Applied Mathematics, v. 10, n. 1, 2023.</a:t>
+            </a:r>
+          </a:p>
+          <a:p>
+            <a:pPr lvl="0" eaLnBrk="0" fontAlgn="base" hangingPunct="0">
+              <a:spcBef>
+                <a:spcPct val="0"/>
+              </a:spcBef>
+              <a:spcAft>
+                <a:spcPct val="0"/>
+              </a:spcAft>
+              <a:buClrTx/>
+            </a:pPr>
+            <a:r>
+              <a:rPr lang="pt-BR" dirty="0"/>
+              <a:t>COSTA, H. C. Vector Autoregression (VAR) Tutorial. s.d. Acesso em: 21 abr. 2026. Disponível em: https://rstudio-pubs-static.s3.amazonaws.com/520691_9092a79ca10245b7bd0d5741d51aa6f8.html.</a:t>
+            </a:r>
+          </a:p>
+          <a:p>
+            <a:pPr lvl="0" eaLnBrk="0" fontAlgn="base" hangingPunct="0">
+              <a:spcBef>
+                <a:spcPct val="0"/>
+              </a:spcBef>
+              <a:spcAft>
+                <a:spcPct val="0"/>
+              </a:spcAft>
+              <a:buClrTx/>
+            </a:pPr>
+            <a:r>
+              <a:rPr lang="pt-BR" dirty="0"/>
+              <a:t>DOZ, C.; FULEKY, P. Dynamic Factor Models. In: Macroeconomic Forecasting in the Era of Big Data: Theory and Practice. Springer, p. 27–64, 2019.</a:t>
+            </a:r>
+          </a:p>
+        </p:txBody>
+      </p:sp>
+    </p:spTree>
+    <p:extLst>
+      <p:ext uri="{BB962C8B-B14F-4D97-AF65-F5344CB8AC3E}">
+        <p14:creationId xmlns:p14="http://schemas.microsoft.com/office/powerpoint/2010/main" val="138188616"/>
+      </p:ext>
+    </p:extLst>
+  </p:cSld>
+  <p:clrMapOvr>
+    <a:masterClrMapping/>
+  </p:clrMapOvr>
+</p:sld>
+</file>
+
+<file path=ppt/slides/slide21.xml><?xml version="1.0" encoding="utf-8"?>
+<p:sld xmlns:a="http://schemas.openxmlformats.org/drawingml/2006/main" xmlns:r="http://schemas.openxmlformats.org/officeDocument/2006/relationships" xmlns:p="http://schemas.openxmlformats.org/presentationml/2006/main">
+  <p:cSld>
+    <p:spTree>
+      <p:nvGrpSpPr>
+        <p:cNvPr id="1" name="Shape 95">
+          <a:extLst>
+            <a:ext uri="{FF2B5EF4-FFF2-40B4-BE49-F238E27FC236}">
+              <a16:creationId xmlns:a16="http://schemas.microsoft.com/office/drawing/2014/main" id="{A247BE5A-81C1-AB80-4E85-ACDE5C379EA2}"/>
+            </a:ext>
+          </a:extLst>
+        </p:cNvPr>
+        <p:cNvGrpSpPr/>
+        <p:nvPr/>
+      </p:nvGrpSpPr>
+      <p:grpSpPr>
+        <a:xfrm>
+          <a:off x="0" y="0"/>
+          <a:ext cx="0" cy="0"/>
+          <a:chOff x="0" y="0"/>
+          <a:chExt cx="0" cy="0"/>
+        </a:xfrm>
+      </p:grpSpPr>
+      <p:sp>
+        <p:nvSpPr>
+          <p:cNvPr id="96" name="Google Shape;96;p2">
+            <a:extLst>
+              <a:ext uri="{FF2B5EF4-FFF2-40B4-BE49-F238E27FC236}">
+                <a16:creationId xmlns:a16="http://schemas.microsoft.com/office/drawing/2014/main" id="{53EF144D-864B-9F5D-10C7-F4D12E644E84}"/>
+              </a:ext>
+            </a:extLst>
+          </p:cNvPr>
+          <p:cNvSpPr txBox="1">
+            <a:spLocks noGrp="1"/>
+          </p:cNvSpPr>
+          <p:nvPr>
+            <p:ph type="title"/>
+          </p:nvPr>
+        </p:nvSpPr>
+        <p:spPr>
+          <a:xfrm>
+            <a:off x="170268" y="190105"/>
+            <a:ext cx="10329566" cy="768438"/>
+          </a:xfrm>
+          <a:prstGeom prst="rect">
+            <a:avLst/>
+          </a:prstGeom>
+          <a:noFill/>
+          <a:ln>
+            <a:noFill/>
+          </a:ln>
+        </p:spPr>
+        <p:txBody>
+          <a:bodyPr spcFirstLastPara="1" wrap="square" lIns="91425" tIns="45700" rIns="91425" bIns="45700" anchor="ctr" anchorCtr="0">
+            <a:noAutofit/>
+          </a:bodyPr>
+          <a:lstStyle/>
+          <a:p>
+            <a:pPr lvl="0">
+              <a:buSzPts val="4400"/>
+            </a:pPr>
+            <a:r>
+              <a:rPr lang="pt-BR" sz="2800" b="1" dirty="0">
+                <a:latin typeface="+mj-lt"/>
+              </a:rPr>
+              <a:t>Referências</a:t>
+            </a:r>
+            <a:endParaRPr sz="2800" b="1" dirty="0">
+              <a:latin typeface="+mj-lt"/>
+            </a:endParaRPr>
+          </a:p>
+        </p:txBody>
+      </p:sp>
+      <p:pic>
+        <p:nvPicPr>
+          <p:cNvPr id="98" name="Google Shape;98;p2" descr="Universidade Federal da Fronteira Sul – Wikipédia, a enciclopédia livre">
+            <a:extLst>
+              <a:ext uri="{FF2B5EF4-FFF2-40B4-BE49-F238E27FC236}">
+                <a16:creationId xmlns:a16="http://schemas.microsoft.com/office/drawing/2014/main" id="{D56AC2D8-1D1F-4AC2-7EF8-ABA92E0350ED}"/>
+              </a:ext>
+            </a:extLst>
+          </p:cNvPr>
+          <p:cNvPicPr preferRelativeResize="0"/>
+          <p:nvPr/>
+        </p:nvPicPr>
+        <p:blipFill rotWithShape="1">
+          <a:blip r:embed="rId3">
+            <a:alphaModFix/>
+          </a:blip>
+          <a:srcRect/>
+          <a:stretch/>
+        </p:blipFill>
+        <p:spPr>
+          <a:xfrm>
+            <a:off x="10978329" y="18255"/>
+            <a:ext cx="975614" cy="1325563"/>
+          </a:xfrm>
+          <a:prstGeom prst="rect">
+            <a:avLst/>
+          </a:prstGeom>
+          <a:noFill/>
+          <a:ln>
+            <a:noFill/>
+          </a:ln>
+        </p:spPr>
+      </p:pic>
+      <p:sp>
+        <p:nvSpPr>
+          <p:cNvPr id="99" name="Google Shape;99;p2">
+            <a:extLst>
+              <a:ext uri="{FF2B5EF4-FFF2-40B4-BE49-F238E27FC236}">
+                <a16:creationId xmlns:a16="http://schemas.microsoft.com/office/drawing/2014/main" id="{27FDA2F2-C4F2-859B-66DF-27F74B69C960}"/>
+              </a:ext>
+            </a:extLst>
+          </p:cNvPr>
+          <p:cNvSpPr/>
+          <p:nvPr/>
+        </p:nvSpPr>
+        <p:spPr>
+          <a:xfrm>
+            <a:off x="170268" y="958543"/>
+            <a:ext cx="10515600" cy="63062"/>
+          </a:xfrm>
+          <a:prstGeom prst="rect">
+            <a:avLst/>
+          </a:prstGeom>
+          <a:solidFill>
+            <a:srgbClr val="548135"/>
+          </a:solidFill>
+          <a:ln w="12700" cap="flat" cmpd="sng">
+            <a:solidFill>
+              <a:srgbClr val="1C3052"/>
+            </a:solidFill>
+            <a:prstDash val="solid"/>
+            <a:miter lim="800000"/>
+            <a:headEnd type="none" w="sm" len="sm"/>
+            <a:tailEnd type="none" w="sm" len="sm"/>
+          </a:ln>
+        </p:spPr>
+        <p:txBody>
+          <a:bodyPr spcFirstLastPara="1" wrap="square" lIns="91425" tIns="45700" rIns="91425" bIns="45700" anchor="ctr" anchorCtr="0">
+            <a:noAutofit/>
+          </a:bodyPr>
+          <a:lstStyle/>
+          <a:p>
+            <a:pPr marL="0" marR="0" lvl="0" indent="0" algn="ctr" rtl="0">
+              <a:spcBef>
+                <a:spcPts val="0"/>
+              </a:spcBef>
+              <a:spcAft>
+                <a:spcPts val="0"/>
+              </a:spcAft>
+              <a:buNone/>
+            </a:pPr>
+            <a:endParaRPr sz="1800">
+              <a:solidFill>
+                <a:schemeClr val="lt1"/>
+              </a:solidFill>
+              <a:latin typeface="Calibri"/>
+              <a:ea typeface="Calibri"/>
+              <a:cs typeface="Calibri"/>
+              <a:sym typeface="Calibri"/>
+            </a:endParaRPr>
+          </a:p>
+        </p:txBody>
+      </p:sp>
+      <p:sp>
+        <p:nvSpPr>
+          <p:cNvPr id="100" name="Google Shape;100;p2">
+            <a:extLst>
+              <a:ext uri="{FF2B5EF4-FFF2-40B4-BE49-F238E27FC236}">
+                <a16:creationId xmlns:a16="http://schemas.microsoft.com/office/drawing/2014/main" id="{2F1742F2-EF34-6CB0-839A-C952898DA507}"/>
+              </a:ext>
+            </a:extLst>
+          </p:cNvPr>
+          <p:cNvSpPr txBox="1">
+            <a:spLocks noGrp="1"/>
+          </p:cNvSpPr>
+          <p:nvPr>
+            <p:ph type="sldNum" idx="12"/>
+          </p:nvPr>
+        </p:nvSpPr>
+        <p:spPr>
+          <a:xfrm>
+            <a:off x="9440152" y="6492875"/>
+            <a:ext cx="2743200" cy="365125"/>
+          </a:xfrm>
+          <a:prstGeom prst="rect">
+            <a:avLst/>
+          </a:prstGeom>
+          <a:noFill/>
+          <a:ln>
+            <a:noFill/>
+          </a:ln>
+        </p:spPr>
+        <p:txBody>
+          <a:bodyPr spcFirstLastPara="1" wrap="square" lIns="91425" tIns="45700" rIns="91425" bIns="45700" anchor="ctr" anchorCtr="0">
+            <a:noAutofit/>
+          </a:bodyPr>
+          <a:lstStyle/>
+          <a:p>
+            <a:pPr marL="0" lvl="0" indent="0" algn="r" rtl="0">
+              <a:spcBef>
+                <a:spcPts val="0"/>
+              </a:spcBef>
+              <a:spcAft>
+                <a:spcPts val="0"/>
+              </a:spcAft>
+              <a:buNone/>
+            </a:pPr>
+            <a:fld id="{00000000-1234-1234-1234-123412341234}" type="slidenum">
+              <a:rPr lang="pt-BR" sz="1800"/>
+              <a:t>21</a:t>
+            </a:fld>
+            <a:endParaRPr sz="1800" dirty="0"/>
+          </a:p>
+        </p:txBody>
+      </p:sp>
+      <p:sp>
+        <p:nvSpPr>
+          <p:cNvPr id="3" name="Rectangle 1">
+            <a:extLst>
+              <a:ext uri="{FF2B5EF4-FFF2-40B4-BE49-F238E27FC236}">
+                <a16:creationId xmlns:a16="http://schemas.microsoft.com/office/drawing/2014/main" id="{BB4579FC-6E51-9D6F-E763-E0114D5017D4}"/>
+              </a:ext>
+            </a:extLst>
+          </p:cNvPr>
+          <p:cNvSpPr>
+            <a:spLocks noChangeArrowheads="1"/>
+          </p:cNvSpPr>
+          <p:nvPr/>
+        </p:nvSpPr>
+        <p:spPr bwMode="auto">
+          <a:xfrm>
+            <a:off x="238057" y="1281809"/>
+            <a:ext cx="11715886" cy="5262979"/>
+          </a:xfrm>
+          <a:prstGeom prst="rect">
+            <a:avLst/>
+          </a:prstGeom>
+          <a:noFill/>
+          <a:ln>
+            <a:noFill/>
+          </a:ln>
+          <a:effectLst/>
+          <a:extLst>
+            <a:ext uri="{909E8E84-426E-40DD-AFC4-6F175D3DCCD1}">
+              <a14:hiddenFill xmlns:a14="http://schemas.microsoft.com/office/drawing/2010/main">
+                <a:solidFill>
+                  <a:schemeClr val="accent1"/>
+                </a:solidFill>
+              </a14:hiddenFill>
+            </a:ext>
+            <a:ext uri="{91240B29-F687-4F45-9708-019B960494DF}">
+              <a14:hiddenLine xmlns:a14="http://schemas.microsoft.com/office/drawing/2010/main" w="9525">
+                <a:solidFill>
+                  <a:schemeClr val="tx1"/>
+                </a:solidFill>
+                <a:miter lim="800000"/>
+                <a:headEnd/>
+                <a:tailEnd/>
+              </a14:hiddenLine>
+            </a:ext>
+            <a:ext uri="{AF507438-7753-43E0-B8FC-AC1667EBCBE1}">
+              <a14:hiddenEffects xmlns:a14="http://schemas.microsoft.com/office/drawing/2010/main">
+                <a:effectLst>
+                  <a:outerShdw dist="35921" dir="2700000" algn="ctr" rotWithShape="0">
+                    <a:schemeClr val="bg2"/>
+                  </a:outerShdw>
+                </a:effectLst>
+              </a14:hiddenEffects>
+            </a:ext>
+          </a:extLst>
+        </p:spPr>
+        <p:txBody>
+          <a:bodyPr vert="horz" wrap="square" lIns="91440" tIns="45720" rIns="91440" bIns="45720" numCol="1" anchor="ctr" anchorCtr="0" compatLnSpc="1">
+            <a:prstTxWarp prst="textNoShape">
+              <a:avLst/>
+            </a:prstTxWarp>
+            <a:spAutoFit/>
+          </a:bodyPr>
+          <a:lstStyle/>
+          <a:p>
+            <a:pPr lvl="0" eaLnBrk="0" fontAlgn="base" hangingPunct="0">
+              <a:spcBef>
+                <a:spcPct val="0"/>
+              </a:spcBef>
+              <a:spcAft>
+                <a:spcPct val="0"/>
+              </a:spcAft>
+              <a:buClrTx/>
+            </a:pPr>
+            <a:r>
+              <a:rPr lang="pt-BR" dirty="0"/>
+              <a:t>EKMAN, M. Learning Deep Learning: Theory and Practice of Neural Networks, Computer Vision, Natural Language Processing, and Transformers Using TensorFlow. [S. l.]: Addison-Wesley Professional, 2021.</a:t>
+            </a:r>
+          </a:p>
+          <a:p>
+            <a:pPr lvl="0" eaLnBrk="0" fontAlgn="base" hangingPunct="0">
+              <a:spcBef>
+                <a:spcPct val="0"/>
+              </a:spcBef>
+              <a:spcAft>
+                <a:spcPct val="0"/>
+              </a:spcAft>
+              <a:buClrTx/>
+            </a:pPr>
+            <a:r>
+              <a:rPr lang="pt-BR" dirty="0"/>
+              <a:t>FIALHO, T. M. M.; CORDEIRO, L. M. C.; TIMOTIO, J. G. M.; REZENDE, L. P. F. de; BOITRAGO, P. R. P. Incerteza, consumo das famílias no Brasil e spread bancário: uma análise com o vetor autorregressivo (VAR). Universidade Federal de Minas Gerais, 2024.</a:t>
+            </a:r>
+          </a:p>
+          <a:p>
+            <a:pPr lvl="0" eaLnBrk="0" fontAlgn="base" hangingPunct="0">
+              <a:spcBef>
+                <a:spcPct val="0"/>
+              </a:spcBef>
+              <a:spcAft>
+                <a:spcPct val="0"/>
+              </a:spcAft>
+              <a:buClrTx/>
+            </a:pPr>
+            <a:r>
+              <a:rPr lang="pt-BR" dirty="0"/>
+              <a:t>FRISCH, R. Statikk og dynamikk i den økonomiske teori. Nationaløkonomisk Tidsskrift, v. 37, 1929. Disponível em: https://tidsskrift.dk/nationaloekonomisktidsskrift/article/download/57252/77814.</a:t>
+            </a:r>
+          </a:p>
+          <a:p>
+            <a:pPr lvl="0" eaLnBrk="0" fontAlgn="base" hangingPunct="0">
+              <a:spcBef>
+                <a:spcPct val="0"/>
+              </a:spcBef>
+              <a:spcAft>
+                <a:spcPct val="0"/>
+              </a:spcAft>
+              <a:buClrTx/>
+            </a:pPr>
+            <a:r>
+              <a:rPr lang="pt-BR" dirty="0"/>
+              <a:t>GEWEKE, J. The Dynamic Factor Analysis of Economic Time Series. In: Latent Variables in Socio-Economic Models. North-Holland, 1977.</a:t>
+            </a:r>
+          </a:p>
+          <a:p>
+            <a:pPr lvl="0" eaLnBrk="0" fontAlgn="base" hangingPunct="0">
+              <a:spcBef>
+                <a:spcPct val="0"/>
+              </a:spcBef>
+              <a:spcAft>
+                <a:spcPct val="0"/>
+              </a:spcAft>
+              <a:buClrTx/>
+            </a:pPr>
+            <a:r>
+              <a:rPr lang="pt-BR" dirty="0"/>
+              <a:t>GHOSH, S.; RANJAN, A. A Machine Learning Approach to GDP Nowcasting: An Emerging Market Experience. Bulletin of Monetary Economics and Banking, v. 26, p. 33–54, 2023.</a:t>
+            </a:r>
+          </a:p>
+          <a:p>
+            <a:pPr lvl="0" eaLnBrk="0" fontAlgn="base" hangingPunct="0">
+              <a:spcBef>
+                <a:spcPct val="0"/>
+              </a:spcBef>
+              <a:spcAft>
+                <a:spcPct val="0"/>
+              </a:spcAft>
+              <a:buClrTx/>
+            </a:pPr>
+            <a:r>
+              <a:rPr lang="pt-BR" dirty="0"/>
+              <a:t>GHYSELS, E.; SANTA-CLARA, P.; VALKANOV, R. The MIDAS Touch: Mixed Data Sampling Regression Models. [S. l.], 2004.</a:t>
+            </a:r>
+          </a:p>
+          <a:p>
+            <a:pPr lvl="0" eaLnBrk="0" fontAlgn="base" hangingPunct="0">
+              <a:spcBef>
+                <a:spcPct val="0"/>
+              </a:spcBef>
+              <a:spcAft>
+                <a:spcPct val="0"/>
+              </a:spcAft>
+              <a:buClrTx/>
+            </a:pPr>
+            <a:r>
+              <a:rPr lang="pt-BR" dirty="0"/>
+              <a:t>GIL, A. C. Como Elaborar Projetos de Pesquisa. 4. ed. São Paulo: Atlas, 2002.</a:t>
+            </a:r>
+          </a:p>
+          <a:p>
+            <a:pPr lvl="0" eaLnBrk="0" fontAlgn="base" hangingPunct="0">
+              <a:spcBef>
+                <a:spcPct val="0"/>
+              </a:spcBef>
+              <a:spcAft>
+                <a:spcPct val="0"/>
+              </a:spcAft>
+              <a:buClrTx/>
+            </a:pPr>
+            <a:r>
+              <a:rPr lang="pt-BR" dirty="0"/>
+              <a:t>IBGE. API de Dados Agregados do IBGE. 2025. https://servicodados.ibge.gov.br/api/v3/agregados. Acesso em: 16 out. 2025.</a:t>
+            </a:r>
+          </a:p>
+          <a:p>
+            <a:pPr lvl="0" eaLnBrk="0" fontAlgn="base" hangingPunct="0">
+              <a:spcBef>
+                <a:spcPct val="0"/>
+              </a:spcBef>
+              <a:spcAft>
+                <a:spcPct val="0"/>
+              </a:spcAft>
+              <a:buClrTx/>
+            </a:pPr>
+            <a:r>
+              <a:rPr lang="pt-BR" dirty="0"/>
+              <a:t>IBGE. Deflator do Produto Interno Bruto – Séries Históricas. 2025. https://seriesestatisticas.ibge.gov.br/series.aspx?t=pib&amp;vcodigo=scn54. Acesso em: 16 out. 2025.</a:t>
+            </a:r>
+          </a:p>
+          <a:p>
+            <a:pPr lvl="0" eaLnBrk="0" fontAlgn="base" hangingPunct="0">
+              <a:spcBef>
+                <a:spcPct val="0"/>
+              </a:spcBef>
+              <a:spcAft>
+                <a:spcPct val="0"/>
+              </a:spcAft>
+              <a:buClrTx/>
+            </a:pPr>
+            <a:r>
+              <a:rPr lang="pt-BR" dirty="0"/>
+              <a:t>IBGE. O que é o PIB? 2026. Disponível em: https://www.ibge.gov.br/explica/pib.php. Acesso em: 11 abr. 2026.</a:t>
+            </a:r>
+          </a:p>
+          <a:p>
+            <a:pPr lvl="0" eaLnBrk="0" fontAlgn="base" hangingPunct="0">
+              <a:spcBef>
+                <a:spcPct val="0"/>
+              </a:spcBef>
+              <a:spcAft>
+                <a:spcPct val="0"/>
+              </a:spcAft>
+              <a:buClrTx/>
+            </a:pPr>
+            <a:r>
+              <a:rPr lang="pt-BR" dirty="0"/>
+              <a:t>JÚNIOR, M. F. F. A terceira revolução industrial e o novo paradigma produtivo: algumas considerações sobre o desenvolvimento industrial brasileiro nos anos 90. Revista da FAE, v. 3, n. 2, fev. 2017. Disponível em: https://revistafae.fae.edu/revistafae/article/view/501.</a:t>
+            </a:r>
+          </a:p>
+          <a:p>
+            <a:pPr lvl="0" eaLnBrk="0" fontAlgn="base" hangingPunct="0">
+              <a:spcBef>
+                <a:spcPct val="0"/>
+              </a:spcBef>
+              <a:spcAft>
+                <a:spcPct val="0"/>
+              </a:spcAft>
+              <a:buClrTx/>
+            </a:pPr>
+            <a:r>
+              <a:rPr lang="pt-BR" dirty="0"/>
+              <a:t>KAGERMANN, H.; WAHLSTER, W.; HELBIG, J. et al. Recommendations for Implementing the Strategic Initiative Industrie 4.0: Final Report of the Industrie 4.0 Working Group. Forschungsunion, Berlin, p. 12–25, 2013.</a:t>
+            </a:r>
+          </a:p>
+          <a:p>
+            <a:pPr lvl="0" eaLnBrk="0" fontAlgn="base" hangingPunct="0">
+              <a:spcBef>
+                <a:spcPct val="0"/>
+              </a:spcBef>
+              <a:spcAft>
+                <a:spcPct val="0"/>
+              </a:spcAft>
+              <a:buClrTx/>
+            </a:pPr>
+            <a:r>
+              <a:rPr lang="pt-BR" dirty="0"/>
+              <a:t>KAVA, L. E. Além da Caixa Preta: aprendizagem de máquina interpretável para previsão de séries temporais macroeconômicas brasileiras. Dissertação (Mestrado) – Universidade Federal de Santa Catarina, 2022.</a:t>
+            </a:r>
+          </a:p>
+          <a:p>
+            <a:pPr lvl="0" eaLnBrk="0" fontAlgn="base" hangingPunct="0">
+              <a:spcBef>
+                <a:spcPct val="0"/>
+              </a:spcBef>
+              <a:spcAft>
+                <a:spcPct val="0"/>
+              </a:spcAft>
+              <a:buClrTx/>
+            </a:pPr>
+            <a:r>
+              <a:rPr lang="pt-BR" dirty="0"/>
+              <a:t>KEYNES, J. M. A Teoria Geral do Emprego, do Juro e da Moeda. [S. l.]: Atlas, 1936.</a:t>
+            </a:r>
+          </a:p>
+          <a:p>
+            <a:pPr lvl="0" eaLnBrk="0" fontAlgn="base" hangingPunct="0">
+              <a:spcBef>
+                <a:spcPct val="0"/>
+              </a:spcBef>
+              <a:spcAft>
+                <a:spcPct val="0"/>
+              </a:spcAft>
+              <a:buClrTx/>
+            </a:pPr>
+            <a:r>
+              <a:rPr lang="pt-BR" dirty="0"/>
+              <a:t>KILKENNY, M. F.; ROBINSON, K. M. Data Quality: "Garbage In – Garbage Out". Health Information Management Journal, v. 47, n. 3, p. 103–105, 2018.</a:t>
+            </a:r>
+          </a:p>
+        </p:txBody>
+      </p:sp>
+    </p:spTree>
+    <p:extLst>
+      <p:ext uri="{BB962C8B-B14F-4D97-AF65-F5344CB8AC3E}">
+        <p14:creationId xmlns:p14="http://schemas.microsoft.com/office/powerpoint/2010/main" val="1880418909"/>
+      </p:ext>
+    </p:extLst>
+  </p:cSld>
+  <p:clrMapOvr>
+    <a:masterClrMapping/>
+  </p:clrMapOvr>
+</p:sld>
+</file>
+
+<file path=ppt/slides/slide22.xml><?xml version="1.0" encoding="utf-8"?>
+<p:sld xmlns:a="http://schemas.openxmlformats.org/drawingml/2006/main" xmlns:r="http://schemas.openxmlformats.org/officeDocument/2006/relationships" xmlns:p="http://schemas.openxmlformats.org/presentationml/2006/main">
+  <p:cSld>
+    <p:spTree>
+      <p:nvGrpSpPr>
+        <p:cNvPr id="1" name="Shape 95">
+          <a:extLst>
+            <a:ext uri="{FF2B5EF4-FFF2-40B4-BE49-F238E27FC236}">
+              <a16:creationId xmlns:a16="http://schemas.microsoft.com/office/drawing/2014/main" id="{E9F28CDD-231C-B24F-1F0E-56BA953A0380}"/>
+            </a:ext>
+          </a:extLst>
+        </p:cNvPr>
+        <p:cNvGrpSpPr/>
+        <p:nvPr/>
+      </p:nvGrpSpPr>
+      <p:grpSpPr>
+        <a:xfrm>
+          <a:off x="0" y="0"/>
+          <a:ext cx="0" cy="0"/>
+          <a:chOff x="0" y="0"/>
+          <a:chExt cx="0" cy="0"/>
+        </a:xfrm>
+      </p:grpSpPr>
+      <p:sp>
+        <p:nvSpPr>
+          <p:cNvPr id="96" name="Google Shape;96;p2">
+            <a:extLst>
+              <a:ext uri="{FF2B5EF4-FFF2-40B4-BE49-F238E27FC236}">
+                <a16:creationId xmlns:a16="http://schemas.microsoft.com/office/drawing/2014/main" id="{A45C4F6D-85DE-B9EB-38A4-21F87667C933}"/>
+              </a:ext>
+            </a:extLst>
+          </p:cNvPr>
+          <p:cNvSpPr txBox="1">
+            <a:spLocks noGrp="1"/>
+          </p:cNvSpPr>
+          <p:nvPr>
+            <p:ph type="title"/>
+          </p:nvPr>
+        </p:nvSpPr>
+        <p:spPr>
+          <a:xfrm>
+            <a:off x="170268" y="190105"/>
+            <a:ext cx="10329566" cy="768438"/>
+          </a:xfrm>
+          <a:prstGeom prst="rect">
+            <a:avLst/>
+          </a:prstGeom>
+          <a:noFill/>
+          <a:ln>
+            <a:noFill/>
+          </a:ln>
+        </p:spPr>
+        <p:txBody>
+          <a:bodyPr spcFirstLastPara="1" wrap="square" lIns="91425" tIns="45700" rIns="91425" bIns="45700" anchor="ctr" anchorCtr="0">
+            <a:noAutofit/>
+          </a:bodyPr>
+          <a:lstStyle/>
+          <a:p>
+            <a:pPr lvl="0">
+              <a:buSzPts val="4400"/>
+            </a:pPr>
+            <a:r>
+              <a:rPr lang="pt-BR" sz="2800" b="1" dirty="0">
+                <a:latin typeface="+mj-lt"/>
+              </a:rPr>
+              <a:t>Referências</a:t>
+            </a:r>
+            <a:endParaRPr sz="2800" b="1" dirty="0">
+              <a:latin typeface="+mj-lt"/>
+            </a:endParaRPr>
+          </a:p>
+        </p:txBody>
+      </p:sp>
+      <p:pic>
+        <p:nvPicPr>
+          <p:cNvPr id="98" name="Google Shape;98;p2" descr="Universidade Federal da Fronteira Sul – Wikipédia, a enciclopédia livre">
+            <a:extLst>
+              <a:ext uri="{FF2B5EF4-FFF2-40B4-BE49-F238E27FC236}">
+                <a16:creationId xmlns:a16="http://schemas.microsoft.com/office/drawing/2014/main" id="{87AD36FC-C23B-7273-B520-D1FC03579954}"/>
+              </a:ext>
+            </a:extLst>
+          </p:cNvPr>
+          <p:cNvPicPr preferRelativeResize="0"/>
+          <p:nvPr/>
+        </p:nvPicPr>
+        <p:blipFill rotWithShape="1">
+          <a:blip r:embed="rId3">
+            <a:alphaModFix/>
+          </a:blip>
+          <a:srcRect/>
+          <a:stretch/>
+        </p:blipFill>
+        <p:spPr>
+          <a:xfrm>
+            <a:off x="10978329" y="18255"/>
+            <a:ext cx="975614" cy="1325563"/>
+          </a:xfrm>
+          <a:prstGeom prst="rect">
+            <a:avLst/>
+          </a:prstGeom>
+          <a:noFill/>
+          <a:ln>
+            <a:noFill/>
+          </a:ln>
+        </p:spPr>
+      </p:pic>
+      <p:sp>
+        <p:nvSpPr>
+          <p:cNvPr id="99" name="Google Shape;99;p2">
+            <a:extLst>
+              <a:ext uri="{FF2B5EF4-FFF2-40B4-BE49-F238E27FC236}">
+                <a16:creationId xmlns:a16="http://schemas.microsoft.com/office/drawing/2014/main" id="{8D22C317-FD30-E65C-4C5A-BFC293E8C187}"/>
+              </a:ext>
+            </a:extLst>
+          </p:cNvPr>
+          <p:cNvSpPr/>
+          <p:nvPr/>
+        </p:nvSpPr>
+        <p:spPr>
+          <a:xfrm>
+            <a:off x="170268" y="958543"/>
+            <a:ext cx="10515600" cy="63062"/>
+          </a:xfrm>
+          <a:prstGeom prst="rect">
+            <a:avLst/>
+          </a:prstGeom>
+          <a:solidFill>
+            <a:srgbClr val="548135"/>
+          </a:solidFill>
+          <a:ln w="12700" cap="flat" cmpd="sng">
+            <a:solidFill>
+              <a:srgbClr val="1C3052"/>
+            </a:solidFill>
+            <a:prstDash val="solid"/>
+            <a:miter lim="800000"/>
+            <a:headEnd type="none" w="sm" len="sm"/>
+            <a:tailEnd type="none" w="sm" len="sm"/>
+          </a:ln>
+        </p:spPr>
+        <p:txBody>
+          <a:bodyPr spcFirstLastPara="1" wrap="square" lIns="91425" tIns="45700" rIns="91425" bIns="45700" anchor="ctr" anchorCtr="0">
+            <a:noAutofit/>
+          </a:bodyPr>
+          <a:lstStyle/>
+          <a:p>
+            <a:pPr marL="0" marR="0" lvl="0" indent="0" algn="ctr" rtl="0">
+              <a:spcBef>
+                <a:spcPts val="0"/>
+              </a:spcBef>
+              <a:spcAft>
+                <a:spcPts val="0"/>
+              </a:spcAft>
+              <a:buNone/>
+            </a:pPr>
+            <a:endParaRPr sz="1800">
+              <a:solidFill>
+                <a:schemeClr val="lt1"/>
+              </a:solidFill>
+              <a:latin typeface="Calibri"/>
+              <a:ea typeface="Calibri"/>
+              <a:cs typeface="Calibri"/>
+              <a:sym typeface="Calibri"/>
+            </a:endParaRPr>
+          </a:p>
+        </p:txBody>
+      </p:sp>
+      <p:sp>
+        <p:nvSpPr>
+          <p:cNvPr id="100" name="Google Shape;100;p2">
+            <a:extLst>
+              <a:ext uri="{FF2B5EF4-FFF2-40B4-BE49-F238E27FC236}">
+                <a16:creationId xmlns:a16="http://schemas.microsoft.com/office/drawing/2014/main" id="{4E8743BA-F846-7028-6C8C-ECE36F1168AF}"/>
+              </a:ext>
+            </a:extLst>
+          </p:cNvPr>
+          <p:cNvSpPr txBox="1">
+            <a:spLocks noGrp="1"/>
+          </p:cNvSpPr>
+          <p:nvPr>
+            <p:ph type="sldNum" idx="12"/>
+          </p:nvPr>
+        </p:nvSpPr>
+        <p:spPr>
+          <a:xfrm>
+            <a:off x="9440152" y="6492875"/>
+            <a:ext cx="2743200" cy="365125"/>
+          </a:xfrm>
+          <a:prstGeom prst="rect">
+            <a:avLst/>
+          </a:prstGeom>
+          <a:noFill/>
+          <a:ln>
+            <a:noFill/>
+          </a:ln>
+        </p:spPr>
+        <p:txBody>
+          <a:bodyPr spcFirstLastPara="1" wrap="square" lIns="91425" tIns="45700" rIns="91425" bIns="45700" anchor="ctr" anchorCtr="0">
+            <a:noAutofit/>
+          </a:bodyPr>
+          <a:lstStyle/>
+          <a:p>
+            <a:pPr marL="0" lvl="0" indent="0" algn="r" rtl="0">
+              <a:spcBef>
+                <a:spcPts val="0"/>
+              </a:spcBef>
+              <a:spcAft>
+                <a:spcPts val="0"/>
+              </a:spcAft>
+              <a:buNone/>
+            </a:pPr>
+            <a:fld id="{00000000-1234-1234-1234-123412341234}" type="slidenum">
+              <a:rPr lang="pt-BR" sz="1800"/>
+              <a:t>22</a:t>
+            </a:fld>
+            <a:endParaRPr sz="1800" dirty="0"/>
+          </a:p>
+        </p:txBody>
+      </p:sp>
+      <p:sp>
+        <p:nvSpPr>
+          <p:cNvPr id="3" name="Rectangle 1">
+            <a:extLst>
+              <a:ext uri="{FF2B5EF4-FFF2-40B4-BE49-F238E27FC236}">
+                <a16:creationId xmlns:a16="http://schemas.microsoft.com/office/drawing/2014/main" id="{D9E77CFB-89BF-1791-3320-C1E37FD35F1E}"/>
+              </a:ext>
+            </a:extLst>
+          </p:cNvPr>
+          <p:cNvSpPr>
+            <a:spLocks noChangeArrowheads="1"/>
+          </p:cNvSpPr>
+          <p:nvPr/>
+        </p:nvSpPr>
+        <p:spPr bwMode="auto">
+          <a:xfrm>
+            <a:off x="238057" y="1174087"/>
+            <a:ext cx="11715886" cy="5478423"/>
+          </a:xfrm>
+          <a:prstGeom prst="rect">
+            <a:avLst/>
+          </a:prstGeom>
+          <a:noFill/>
+          <a:ln>
+            <a:noFill/>
+          </a:ln>
+          <a:effectLst/>
+          <a:extLst>
+            <a:ext uri="{909E8E84-426E-40DD-AFC4-6F175D3DCCD1}">
+              <a14:hiddenFill xmlns:a14="http://schemas.microsoft.com/office/drawing/2010/main">
+                <a:solidFill>
+                  <a:schemeClr val="accent1"/>
+                </a:solidFill>
+              </a14:hiddenFill>
+            </a:ext>
+            <a:ext uri="{91240B29-F687-4F45-9708-019B960494DF}">
+              <a14:hiddenLine xmlns:a14="http://schemas.microsoft.com/office/drawing/2010/main" w="9525">
+                <a:solidFill>
+                  <a:schemeClr val="tx1"/>
+                </a:solidFill>
+                <a:miter lim="800000"/>
+                <a:headEnd/>
+                <a:tailEnd/>
+              </a14:hiddenLine>
+            </a:ext>
+            <a:ext uri="{AF507438-7753-43E0-B8FC-AC1667EBCBE1}">
+              <a14:hiddenEffects xmlns:a14="http://schemas.microsoft.com/office/drawing/2010/main">
+                <a:effectLst>
+                  <a:outerShdw dist="35921" dir="2700000" algn="ctr" rotWithShape="0">
+                    <a:schemeClr val="bg2"/>
+                  </a:outerShdw>
+                </a:effectLst>
+              </a14:hiddenEffects>
+            </a:ext>
+          </a:extLst>
+        </p:spPr>
+        <p:txBody>
+          <a:bodyPr vert="horz" wrap="square" lIns="91440" tIns="45720" rIns="91440" bIns="45720" numCol="1" anchor="ctr" anchorCtr="0" compatLnSpc="1">
+            <a:prstTxWarp prst="textNoShape">
+              <a:avLst/>
+            </a:prstTxWarp>
+            <a:spAutoFit/>
+          </a:bodyPr>
+          <a:lstStyle/>
+          <a:p>
+            <a:pPr lvl="0" eaLnBrk="0" fontAlgn="base" hangingPunct="0">
+              <a:spcBef>
+                <a:spcPct val="0"/>
+              </a:spcBef>
+              <a:spcAft>
+                <a:spcPct val="0"/>
+              </a:spcAft>
+              <a:buClrTx/>
+            </a:pPr>
+            <a:r>
+              <a:rPr lang="pt-BR" dirty="0"/>
+              <a:t>KOOP, G.; MCINTYRE, S.; MITCHELL, J.; RAFTAPOSTOLOS, A. Monthly GDP Growth Estimates for the U.S. States. 2025. Disponível em: https://arxiv.org/abs/2501.04607.</a:t>
+            </a:r>
+          </a:p>
+          <a:p>
+            <a:pPr lvl="0" eaLnBrk="0" fontAlgn="base" hangingPunct="0">
+              <a:spcBef>
+                <a:spcPct val="0"/>
+              </a:spcBef>
+              <a:spcAft>
+                <a:spcPct val="0"/>
+              </a:spcAft>
+              <a:buClrTx/>
+            </a:pPr>
+            <a:r>
+              <a:rPr lang="pt-BR" dirty="0"/>
+              <a:t>LAKATOS, E. M.; MARCONI, M. de A. Fundamentos de Metodologia Científica. 5. ed. São Paulo: Atlas, 2003.</a:t>
+            </a:r>
+          </a:p>
+          <a:p>
+            <a:pPr lvl="0" eaLnBrk="0" fontAlgn="base" hangingPunct="0">
+              <a:spcBef>
+                <a:spcPct val="0"/>
+              </a:spcBef>
+              <a:spcAft>
+                <a:spcPct val="0"/>
+              </a:spcAft>
+              <a:buClrTx/>
+            </a:pPr>
+            <a:r>
+              <a:rPr lang="pt-BR" dirty="0"/>
+              <a:t>LANDOWSKA, A.; KŁOPOTEK, R. A.; FILIP, D.; RACZKOWSKI, K. GDP-GFCF Dynamics Across Global Economies: A Comparative Study of Panel Regressions and Random Forest. 2025. Disponível em: https://arxiv.org/abs/2504.20993.</a:t>
+            </a:r>
+          </a:p>
+          <a:p>
+            <a:pPr lvl="0" eaLnBrk="0" fontAlgn="base" hangingPunct="0">
+              <a:spcBef>
+                <a:spcPct val="0"/>
+              </a:spcBef>
+              <a:spcAft>
+                <a:spcPct val="0"/>
+              </a:spcAft>
+              <a:buClrTx/>
+            </a:pPr>
+            <a:r>
+              <a:rPr lang="pt-BR" dirty="0"/>
+              <a:t>LAUDON, K.; LAUDON, J. Sistemas de Informação Gerenciais: Administrando a Empresa Digital. Bookman, 2022.</a:t>
+            </a:r>
+          </a:p>
+          <a:p>
+            <a:pPr lvl="0" eaLnBrk="0" fontAlgn="base" hangingPunct="0">
+              <a:spcBef>
+                <a:spcPct val="0"/>
+              </a:spcBef>
+              <a:spcAft>
+                <a:spcPct val="0"/>
+              </a:spcAft>
+              <a:buClrTx/>
+            </a:pPr>
+            <a:r>
+              <a:rPr lang="pt-BR" dirty="0"/>
+              <a:t>LEMOS, D. C. d. A.; SOUZA, S. A. d. Atas do COPOM como fonte de previsão do PIB: uma aplicação de processamento de linguagem natural. In: Nome do Evento. Cidade: [S. n.], 2025.</a:t>
+            </a:r>
+          </a:p>
+          <a:p>
+            <a:pPr lvl="0" eaLnBrk="0" fontAlgn="base" hangingPunct="0">
+              <a:spcBef>
+                <a:spcPct val="0"/>
+              </a:spcBef>
+              <a:spcAft>
+                <a:spcPct val="0"/>
+              </a:spcAft>
+              <a:buClrTx/>
+            </a:pPr>
+            <a:r>
+              <a:rPr lang="pt-BR" dirty="0"/>
+              <a:t>LI, K. Forecasting US GDP from 1960 to 2023 Using PCA. 2024. Disponível em: http://dissertations.umi.com/ucla:23601.</a:t>
+            </a:r>
+          </a:p>
+          <a:p>
+            <a:pPr lvl="0" eaLnBrk="0" fontAlgn="base" hangingPunct="0">
+              <a:spcBef>
+                <a:spcPct val="0"/>
+              </a:spcBef>
+              <a:spcAft>
+                <a:spcPct val="0"/>
+              </a:spcAft>
+              <a:buClrTx/>
+            </a:pPr>
+            <a:r>
+              <a:rPr lang="pt-BR" dirty="0"/>
+              <a:t>MANKIW, N. G. Introdução à Economia. [S. l.]: Bookman, 2025.</a:t>
+            </a:r>
+          </a:p>
+          <a:p>
+            <a:pPr lvl="0" eaLnBrk="0" fontAlgn="base" hangingPunct="0">
+              <a:spcBef>
+                <a:spcPct val="0"/>
+              </a:spcBef>
+              <a:spcAft>
+                <a:spcPct val="0"/>
+              </a:spcAft>
+              <a:buClrTx/>
+            </a:pPr>
+            <a:r>
+              <a:rPr lang="pt-BR" dirty="0"/>
+              <a:t>MARTINS, G. S. Indústria 4.0: contribuições tecnológicas para a quarta revolução industrial. [S. l.], 2021.</a:t>
+            </a:r>
+          </a:p>
+          <a:p>
+            <a:pPr lvl="0" eaLnBrk="0" fontAlgn="base" hangingPunct="0">
+              <a:spcBef>
+                <a:spcPct val="0"/>
+              </a:spcBef>
+              <a:spcAft>
+                <a:spcPct val="0"/>
+              </a:spcAft>
+              <a:buClrTx/>
+            </a:pPr>
+            <a:r>
+              <a:rPr lang="pt-BR" dirty="0"/>
+              <a:t>MCKINNEY, W. Data Structures for Statistical Computing in Python. Proceedings of the 9th Python in Science Conference, p. 51–56, 2010. Disponível em: https://doi.org/10.25080/Majora-92bf1922-00a.</a:t>
+            </a:r>
+          </a:p>
+          <a:p>
+            <a:pPr lvl="0" eaLnBrk="0" fontAlgn="base" hangingPunct="0">
+              <a:spcBef>
+                <a:spcPct val="0"/>
+              </a:spcBef>
+              <a:spcAft>
+                <a:spcPct val="0"/>
+              </a:spcAft>
+              <a:buClrTx/>
+            </a:pPr>
+            <a:r>
+              <a:rPr lang="pt-BR" dirty="0"/>
+              <a:t>MICHELETTI, A. D. Avaliação de um modelo ensemble stacking de machine learning para previsão do PIB do Brasil. 2024.</a:t>
+            </a:r>
+          </a:p>
+          <a:p>
+            <a:pPr lvl="0" eaLnBrk="0" fontAlgn="base" hangingPunct="0">
+              <a:spcBef>
+                <a:spcPct val="0"/>
+              </a:spcBef>
+              <a:spcAft>
+                <a:spcPct val="0"/>
+              </a:spcAft>
+              <a:buClrTx/>
+            </a:pPr>
+            <a:r>
+              <a:rPr lang="pt-BR" dirty="0"/>
+              <a:t>MINSKY, M.; PAPERT, S. Perceptrons: An Introduction to Computational Geometry. [S. l.]: MIT Press, 1969.</a:t>
+            </a:r>
+          </a:p>
+          <a:p>
+            <a:pPr lvl="0" eaLnBrk="0" fontAlgn="base" hangingPunct="0">
+              <a:spcBef>
+                <a:spcPct val="0"/>
+              </a:spcBef>
+              <a:spcAft>
+                <a:spcPct val="0"/>
+              </a:spcAft>
+              <a:buClrTx/>
+            </a:pPr>
+            <a:r>
+              <a:rPr lang="pt-BR" dirty="0"/>
+              <a:t>MOURA, B. A.; TIRYAKI, G. F.; TEIXEIRA, D. N. Fragilidade fiscal e os ciclos econômicos no Brasil pós-Plano Real: evidências de um modelo de fator dinâmico associado à análise VAR. Nova Economia, v. 30, n. 2, p. 517–549, 2020.</a:t>
+            </a:r>
+          </a:p>
+          <a:p>
+            <a:pPr lvl="0" eaLnBrk="0" fontAlgn="base" hangingPunct="0">
+              <a:spcBef>
+                <a:spcPct val="0"/>
+              </a:spcBef>
+              <a:spcAft>
+                <a:spcPct val="0"/>
+              </a:spcAft>
+              <a:buClrTx/>
+            </a:pPr>
+            <a:r>
+              <a:rPr lang="pt-BR" dirty="0"/>
+              <a:t>OLIVEIRA, M. C.; JUNIOR, S. d. S. P. Gastos Públicos com Infraestrutura e Disparidades Regionais: impactos no PIB per capita das regiões Sul e Nordeste do Brasil. Natal, RN, 2024.</a:t>
+            </a:r>
+          </a:p>
+          <a:p>
+            <a:pPr lvl="0" eaLnBrk="0" fontAlgn="base" hangingPunct="0">
+              <a:spcBef>
+                <a:spcPct val="0"/>
+              </a:spcBef>
+              <a:spcAft>
+                <a:spcPct val="0"/>
+              </a:spcAft>
+              <a:buClrTx/>
+            </a:pPr>
+            <a:r>
+              <a:rPr lang="pt-BR" dirty="0"/>
+              <a:t>PYTHON. Python Language Reference, version 3.12. [S. l.], 2023. Disponível em: https://www.python.org/doc/. Acesso em: 16 out. 2025.</a:t>
+            </a:r>
+          </a:p>
+          <a:p>
+            <a:pPr lvl="0" eaLnBrk="0" fontAlgn="base" hangingPunct="0">
+              <a:spcBef>
+                <a:spcPct val="0"/>
+              </a:spcBef>
+              <a:spcAft>
+                <a:spcPct val="0"/>
+              </a:spcAft>
+              <a:buClrTx/>
+            </a:pPr>
+            <a:r>
+              <a:rPr lang="pt-BR" dirty="0"/>
+              <a:t>REBELO, M. A. C. Interpretabilidade de Modelos Machine Learning para a Previsão Macroeconómica. Dissertação (Mestrado) – Universidade de Lisboa, 2022.</a:t>
+            </a:r>
+          </a:p>
+          <a:p>
+            <a:pPr lvl="0" eaLnBrk="0" fontAlgn="base" hangingPunct="0">
+              <a:spcBef>
+                <a:spcPct val="0"/>
+              </a:spcBef>
+              <a:spcAft>
+                <a:spcPct val="0"/>
+              </a:spcAft>
+              <a:buClrTx/>
+            </a:pPr>
+            <a:r>
+              <a:rPr lang="pt-BR" dirty="0"/>
+              <a:t>ROSA, Y. C. d. Efeito Dinâmico dos Gastos Tributários sobre a Produtividade Total dos Fatores no Brasil. IDP, 2025.</a:t>
+            </a:r>
+          </a:p>
+          <a:p>
+            <a:pPr lvl="0" eaLnBrk="0" fontAlgn="base" hangingPunct="0">
+              <a:spcBef>
+                <a:spcPct val="0"/>
+              </a:spcBef>
+              <a:spcAft>
+                <a:spcPct val="0"/>
+              </a:spcAft>
+              <a:buClrTx/>
+            </a:pPr>
+            <a:r>
+              <a:rPr lang="pt-BR" dirty="0"/>
+              <a:t>ROSENBLATT, F. The Perceptron: A Probabilistic Model for Information Storage and Organization in the Brain. Psychological Review, v. 65, n. 6, p. 386, 1958.</a:t>
+            </a:r>
+          </a:p>
+        </p:txBody>
+      </p:sp>
+    </p:spTree>
+    <p:extLst>
+      <p:ext uri="{BB962C8B-B14F-4D97-AF65-F5344CB8AC3E}">
+        <p14:creationId xmlns:p14="http://schemas.microsoft.com/office/powerpoint/2010/main" val="3142993385"/>
+      </p:ext>
+    </p:extLst>
+  </p:cSld>
+  <p:clrMapOvr>
+    <a:masterClrMapping/>
+  </p:clrMapOvr>
+</p:sld>
+</file>
+
+<file path=ppt/slides/slide23.xml><?xml version="1.0" encoding="utf-8"?>
+<p:sld xmlns:a="http://schemas.openxmlformats.org/drawingml/2006/main" xmlns:r="http://schemas.openxmlformats.org/officeDocument/2006/relationships" xmlns:p="http://schemas.openxmlformats.org/presentationml/2006/main">
+  <p:cSld>
+    <p:spTree>
+      <p:nvGrpSpPr>
+        <p:cNvPr id="1" name="Shape 95">
+          <a:extLst>
+            <a:ext uri="{FF2B5EF4-FFF2-40B4-BE49-F238E27FC236}">
+              <a16:creationId xmlns:a16="http://schemas.microsoft.com/office/drawing/2014/main" id="{0F1CA930-D835-832F-65F1-1E2C178D85CB}"/>
+            </a:ext>
+          </a:extLst>
+        </p:cNvPr>
+        <p:cNvGrpSpPr/>
+        <p:nvPr/>
+      </p:nvGrpSpPr>
+      <p:grpSpPr>
+        <a:xfrm>
+          <a:off x="0" y="0"/>
+          <a:ext cx="0" cy="0"/>
+          <a:chOff x="0" y="0"/>
+          <a:chExt cx="0" cy="0"/>
+        </a:xfrm>
+      </p:grpSpPr>
+      <p:sp>
+        <p:nvSpPr>
+          <p:cNvPr id="96" name="Google Shape;96;p2">
+            <a:extLst>
+              <a:ext uri="{FF2B5EF4-FFF2-40B4-BE49-F238E27FC236}">
+                <a16:creationId xmlns:a16="http://schemas.microsoft.com/office/drawing/2014/main" id="{95563690-368D-A2A9-9C0E-6746031B6067}"/>
+              </a:ext>
+            </a:extLst>
+          </p:cNvPr>
+          <p:cNvSpPr txBox="1">
+            <a:spLocks noGrp="1"/>
+          </p:cNvSpPr>
+          <p:nvPr>
+            <p:ph type="title"/>
+          </p:nvPr>
+        </p:nvSpPr>
+        <p:spPr>
+          <a:xfrm>
+            <a:off x="170268" y="190105"/>
+            <a:ext cx="10329566" cy="768438"/>
+          </a:xfrm>
+          <a:prstGeom prst="rect">
+            <a:avLst/>
+          </a:prstGeom>
+          <a:noFill/>
+          <a:ln>
+            <a:noFill/>
+          </a:ln>
+        </p:spPr>
+        <p:txBody>
+          <a:bodyPr spcFirstLastPara="1" wrap="square" lIns="91425" tIns="45700" rIns="91425" bIns="45700" anchor="ctr" anchorCtr="0">
+            <a:noAutofit/>
+          </a:bodyPr>
+          <a:lstStyle/>
+          <a:p>
+            <a:pPr lvl="0">
+              <a:buSzPts val="4400"/>
+            </a:pPr>
+            <a:r>
+              <a:rPr lang="pt-BR" sz="2800" b="1" dirty="0">
+                <a:latin typeface="+mj-lt"/>
+              </a:rPr>
+              <a:t>Referências</a:t>
+            </a:r>
+            <a:endParaRPr sz="2800" b="1" dirty="0">
+              <a:latin typeface="+mj-lt"/>
+            </a:endParaRPr>
+          </a:p>
+        </p:txBody>
+      </p:sp>
+      <p:pic>
+        <p:nvPicPr>
+          <p:cNvPr id="98" name="Google Shape;98;p2" descr="Universidade Federal da Fronteira Sul – Wikipédia, a enciclopédia livre">
+            <a:extLst>
+              <a:ext uri="{FF2B5EF4-FFF2-40B4-BE49-F238E27FC236}">
+                <a16:creationId xmlns:a16="http://schemas.microsoft.com/office/drawing/2014/main" id="{1D23F5DB-1861-DC34-793B-7D0043DA6D3E}"/>
+              </a:ext>
+            </a:extLst>
+          </p:cNvPr>
+          <p:cNvPicPr preferRelativeResize="0"/>
+          <p:nvPr/>
+        </p:nvPicPr>
+        <p:blipFill rotWithShape="1">
+          <a:blip r:embed="rId3">
+            <a:alphaModFix/>
+          </a:blip>
+          <a:srcRect/>
+          <a:stretch/>
+        </p:blipFill>
+        <p:spPr>
+          <a:xfrm>
+            <a:off x="10978329" y="18255"/>
+            <a:ext cx="975614" cy="1325563"/>
+          </a:xfrm>
+          <a:prstGeom prst="rect">
+            <a:avLst/>
+          </a:prstGeom>
+          <a:noFill/>
+          <a:ln>
+            <a:noFill/>
+          </a:ln>
+        </p:spPr>
+      </p:pic>
+      <p:sp>
+        <p:nvSpPr>
+          <p:cNvPr id="99" name="Google Shape;99;p2">
+            <a:extLst>
+              <a:ext uri="{FF2B5EF4-FFF2-40B4-BE49-F238E27FC236}">
+                <a16:creationId xmlns:a16="http://schemas.microsoft.com/office/drawing/2014/main" id="{44904156-2707-B48A-7ACC-C95ECA2A692B}"/>
+              </a:ext>
+            </a:extLst>
+          </p:cNvPr>
+          <p:cNvSpPr/>
+          <p:nvPr/>
+        </p:nvSpPr>
+        <p:spPr>
+          <a:xfrm>
+            <a:off x="170268" y="958543"/>
+            <a:ext cx="10515600" cy="63062"/>
+          </a:xfrm>
+          <a:prstGeom prst="rect">
+            <a:avLst/>
+          </a:prstGeom>
+          <a:solidFill>
+            <a:srgbClr val="548135"/>
+          </a:solidFill>
+          <a:ln w="12700" cap="flat" cmpd="sng">
+            <a:solidFill>
+              <a:srgbClr val="1C3052"/>
+            </a:solidFill>
+            <a:prstDash val="solid"/>
+            <a:miter lim="800000"/>
+            <a:headEnd type="none" w="sm" len="sm"/>
+            <a:tailEnd type="none" w="sm" len="sm"/>
+          </a:ln>
+        </p:spPr>
+        <p:txBody>
+          <a:bodyPr spcFirstLastPara="1" wrap="square" lIns="91425" tIns="45700" rIns="91425" bIns="45700" anchor="ctr" anchorCtr="0">
+            <a:noAutofit/>
+          </a:bodyPr>
+          <a:lstStyle/>
+          <a:p>
+            <a:pPr marL="0" marR="0" lvl="0" indent="0" algn="ctr" rtl="0">
+              <a:spcBef>
+                <a:spcPts val="0"/>
+              </a:spcBef>
+              <a:spcAft>
+                <a:spcPts val="0"/>
+              </a:spcAft>
+              <a:buNone/>
+            </a:pPr>
+            <a:endParaRPr sz="1800">
+              <a:solidFill>
+                <a:schemeClr val="lt1"/>
+              </a:solidFill>
+              <a:latin typeface="Calibri"/>
+              <a:ea typeface="Calibri"/>
+              <a:cs typeface="Calibri"/>
+              <a:sym typeface="Calibri"/>
+            </a:endParaRPr>
+          </a:p>
+        </p:txBody>
+      </p:sp>
+      <p:sp>
+        <p:nvSpPr>
+          <p:cNvPr id="100" name="Google Shape;100;p2">
+            <a:extLst>
+              <a:ext uri="{FF2B5EF4-FFF2-40B4-BE49-F238E27FC236}">
+                <a16:creationId xmlns:a16="http://schemas.microsoft.com/office/drawing/2014/main" id="{09E09FD0-3045-3A25-5A99-31CDC0527284}"/>
+              </a:ext>
+            </a:extLst>
+          </p:cNvPr>
+          <p:cNvSpPr txBox="1">
+            <a:spLocks noGrp="1"/>
+          </p:cNvSpPr>
+          <p:nvPr>
+            <p:ph type="sldNum" idx="12"/>
+          </p:nvPr>
+        </p:nvSpPr>
+        <p:spPr>
+          <a:xfrm>
+            <a:off x="9440152" y="6492875"/>
+            <a:ext cx="2743200" cy="365125"/>
+          </a:xfrm>
+          <a:prstGeom prst="rect">
+            <a:avLst/>
+          </a:prstGeom>
+          <a:noFill/>
+          <a:ln>
+            <a:noFill/>
+          </a:ln>
+        </p:spPr>
+        <p:txBody>
+          <a:bodyPr spcFirstLastPara="1" wrap="square" lIns="91425" tIns="45700" rIns="91425" bIns="45700" anchor="ctr" anchorCtr="0">
+            <a:noAutofit/>
+          </a:bodyPr>
+          <a:lstStyle/>
+          <a:p>
+            <a:pPr marL="0" lvl="0" indent="0" algn="r" rtl="0">
+              <a:spcBef>
+                <a:spcPts val="0"/>
+              </a:spcBef>
+              <a:spcAft>
+                <a:spcPts val="0"/>
+              </a:spcAft>
+              <a:buNone/>
+            </a:pPr>
+            <a:fld id="{00000000-1234-1234-1234-123412341234}" type="slidenum">
+              <a:rPr lang="pt-BR" sz="1800"/>
+              <a:t>23</a:t>
+            </a:fld>
+            <a:endParaRPr sz="1800" dirty="0"/>
+          </a:p>
+        </p:txBody>
+      </p:sp>
+      <p:sp>
+        <p:nvSpPr>
+          <p:cNvPr id="3" name="Rectangle 1">
+            <a:extLst>
+              <a:ext uri="{FF2B5EF4-FFF2-40B4-BE49-F238E27FC236}">
+                <a16:creationId xmlns:a16="http://schemas.microsoft.com/office/drawing/2014/main" id="{5A991CD8-5CDF-ECB4-A9C2-227F767F3C26}"/>
+              </a:ext>
+            </a:extLst>
+          </p:cNvPr>
+          <p:cNvSpPr>
+            <a:spLocks noChangeArrowheads="1"/>
+          </p:cNvSpPr>
+          <p:nvPr/>
+        </p:nvSpPr>
+        <p:spPr bwMode="auto">
+          <a:xfrm>
+            <a:off x="170268" y="1343818"/>
+            <a:ext cx="11715886" cy="3323987"/>
+          </a:xfrm>
+          <a:prstGeom prst="rect">
+            <a:avLst/>
+          </a:prstGeom>
+          <a:noFill/>
+          <a:ln>
+            <a:noFill/>
+          </a:ln>
+          <a:effectLst/>
+          <a:extLst>
+            <a:ext uri="{909E8E84-426E-40DD-AFC4-6F175D3DCCD1}">
+              <a14:hiddenFill xmlns:a14="http://schemas.microsoft.com/office/drawing/2010/main">
+                <a:solidFill>
+                  <a:schemeClr val="accent1"/>
+                </a:solidFill>
+              </a14:hiddenFill>
+            </a:ext>
+            <a:ext uri="{91240B29-F687-4F45-9708-019B960494DF}">
+              <a14:hiddenLine xmlns:a14="http://schemas.microsoft.com/office/drawing/2010/main" w="9525">
+                <a:solidFill>
+                  <a:schemeClr val="tx1"/>
+                </a:solidFill>
+                <a:miter lim="800000"/>
+                <a:headEnd/>
+                <a:tailEnd/>
+              </a14:hiddenLine>
+            </a:ext>
+            <a:ext uri="{AF507438-7753-43E0-B8FC-AC1667EBCBE1}">
+              <a14:hiddenEffects xmlns:a14="http://schemas.microsoft.com/office/drawing/2010/main">
+                <a:effectLst>
+                  <a:outerShdw dist="35921" dir="2700000" algn="ctr" rotWithShape="0">
+                    <a:schemeClr val="bg2"/>
+                  </a:outerShdw>
+                </a:effectLst>
+              </a14:hiddenEffects>
+            </a:ext>
+          </a:extLst>
+        </p:spPr>
+        <p:txBody>
+          <a:bodyPr vert="horz" wrap="square" lIns="91440" tIns="45720" rIns="91440" bIns="45720" numCol="1" anchor="ctr" anchorCtr="0" compatLnSpc="1">
+            <a:prstTxWarp prst="textNoShape">
+              <a:avLst/>
+            </a:prstTxWarp>
+            <a:spAutoFit/>
+          </a:bodyPr>
+          <a:lstStyle/>
+          <a:p>
+            <a:pPr lvl="0" eaLnBrk="0" fontAlgn="base" hangingPunct="0">
+              <a:spcBef>
+                <a:spcPct val="0"/>
+              </a:spcBef>
+              <a:spcAft>
+                <a:spcPct val="0"/>
+              </a:spcAft>
+              <a:buClrTx/>
+            </a:pPr>
+            <a:r>
+              <a:rPr lang="pt-BR" dirty="0"/>
+              <a:t>RUMELHART, D. E.; HINTON, G. E.; WILLIAMS, R. J. Learning Representations by Back-Propagating Errors. Nature, v. 323, n. 6088, p. 533–536, 1986.</a:t>
+            </a:r>
+          </a:p>
+          <a:p>
+            <a:pPr lvl="0" eaLnBrk="0" fontAlgn="base" hangingPunct="0">
+              <a:spcBef>
+                <a:spcPct val="0"/>
+              </a:spcBef>
+              <a:spcAft>
+                <a:spcPct val="0"/>
+              </a:spcAft>
+              <a:buClrTx/>
+            </a:pPr>
+            <a:r>
+              <a:rPr lang="pt-BR" dirty="0"/>
+              <a:t>SANTANA, A. A.; SILVA, C. R. da; TIMOTEO, L. C. da S.; OLIVEIRA, R. M. de; NARCISO, R. Aprimorando a tomada de decisões empresariais: o papel dos dados, análises de negócios e novas tecnologias. Revista Ilustração, v. 4, n. 2, p. 75–83, 2023.</a:t>
+            </a:r>
+          </a:p>
+          <a:p>
+            <a:pPr lvl="0" eaLnBrk="0" fontAlgn="base" hangingPunct="0">
+              <a:spcBef>
+                <a:spcPct val="0"/>
+              </a:spcBef>
+              <a:spcAft>
+                <a:spcPct val="0"/>
+              </a:spcAft>
+              <a:buClrTx/>
+            </a:pPr>
+            <a:r>
+              <a:rPr lang="pt-BR" dirty="0"/>
+              <a:t>SANTOS, F.; NOLAU, I. Previsão de inflação: análise preliminar de desempenho de técnicas de machine learning. [S. l.], 2022.</a:t>
+            </a:r>
+          </a:p>
+          <a:p>
+            <a:pPr lvl="0" eaLnBrk="0" fontAlgn="base" hangingPunct="0">
+              <a:spcBef>
+                <a:spcPct val="0"/>
+              </a:spcBef>
+              <a:spcAft>
+                <a:spcPct val="0"/>
+              </a:spcAft>
+              <a:buClrTx/>
+            </a:pPr>
+            <a:r>
+              <a:rPr lang="pt-BR" dirty="0"/>
+              <a:t>SERRANO, F. M. Impacto regional da política monetária no Brasil: uma abordagem bayesiana. Dissertação (Mestrado em Teoria Econômica) – Universidade de São Paulo, 2014. Disponível em: https://doi.org/10.11606/D.12.2014.tde-16032015-132813.</a:t>
+            </a:r>
+          </a:p>
+          <a:p>
+            <a:pPr lvl="0" eaLnBrk="0" fontAlgn="base" hangingPunct="0">
+              <a:spcBef>
+                <a:spcPct val="0"/>
+              </a:spcBef>
+              <a:spcAft>
+                <a:spcPct val="0"/>
+              </a:spcAft>
+              <a:buClrTx/>
+            </a:pPr>
+            <a:r>
+              <a:rPr lang="pt-BR" dirty="0"/>
+              <a:t>SILVA, P. N.; SILVA, G. V. P. d. Dados abertos do IBGE: recuperação na API de dados agregados. Encontros Bibli, v. 29, p. e96185, 2024.</a:t>
+            </a:r>
+          </a:p>
+          <a:p>
+            <a:pPr lvl="0" eaLnBrk="0" fontAlgn="base" hangingPunct="0">
+              <a:spcBef>
+                <a:spcPct val="0"/>
+              </a:spcBef>
+              <a:spcAft>
+                <a:spcPct val="0"/>
+              </a:spcAft>
+              <a:buClrTx/>
+            </a:pPr>
+            <a:r>
+              <a:rPr lang="pt-BR" dirty="0"/>
+              <a:t>SILVA, T. R. d.; CLERICUZI, A. Z.; CARVALHO, J. N. d. Modelagem de séries temporais utilizando ARIMA: previsão futura do PIB brasileiro. International Contemporary Management Review, v. 6, n. 2, p. e385, 2025.</a:t>
+            </a:r>
+          </a:p>
+          <a:p>
+            <a:pPr lvl="0" eaLnBrk="0" fontAlgn="base" hangingPunct="0">
+              <a:spcBef>
+                <a:spcPct val="0"/>
+              </a:spcBef>
+              <a:spcAft>
+                <a:spcPct val="0"/>
+              </a:spcAft>
+              <a:buClrTx/>
+            </a:pPr>
+            <a:r>
+              <a:rPr lang="pt-BR" dirty="0"/>
+              <a:t>SIMS, C. A. Macroeconomics and Reality. Econometrica, p. 1–48, 1980.</a:t>
+            </a:r>
+          </a:p>
+          <a:p>
+            <a:pPr lvl="0" eaLnBrk="0" fontAlgn="base" hangingPunct="0">
+              <a:spcBef>
+                <a:spcPct val="0"/>
+              </a:spcBef>
+              <a:spcAft>
+                <a:spcPct val="0"/>
+              </a:spcAft>
+              <a:buClrTx/>
+            </a:pPr>
+            <a:r>
+              <a:rPr lang="pt-BR" dirty="0"/>
+              <a:t>U.S. Bureau of Economic Analysis. Gross Domestic Product. 2026. Disponível em: https://www.bea.gov/data/gdp/gross-domestic-product.</a:t>
+            </a:r>
+          </a:p>
+          <a:p>
+            <a:pPr lvl="0" eaLnBrk="0" fontAlgn="base" hangingPunct="0">
+              <a:spcBef>
+                <a:spcPct val="0"/>
+              </a:spcBef>
+              <a:spcAft>
+                <a:spcPct val="0"/>
+              </a:spcAft>
+              <a:buClrTx/>
+            </a:pPr>
+            <a:r>
+              <a:rPr lang="pt-BR" dirty="0"/>
+              <a:t>VASCONCELOS, B. F. B. de. Poder preditivo de métodos de Machine Learning com processos de seleção de variáveis: uma aplicação às projeções de produto de países. Tese (Doutorado) – Universidade de Brasília, 2017. Disponível em: http://dx.doi.org/10.26512/2017.03.D.23995.</a:t>
+            </a:r>
+          </a:p>
+          <a:p>
+            <a:pPr lvl="0" eaLnBrk="0" fontAlgn="base" hangingPunct="0">
+              <a:spcBef>
+                <a:spcPct val="0"/>
+              </a:spcBef>
+              <a:spcAft>
+                <a:spcPct val="0"/>
+              </a:spcAft>
+              <a:buClrTx/>
+            </a:pPr>
+            <a:r>
+              <a:rPr lang="pt-BR" dirty="0"/>
+              <a:t>VASCONCELOS, M. Atlas de Economia. 2. ed. São Paulo: Atlas, 2020.</a:t>
+            </a:r>
+          </a:p>
+        </p:txBody>
+      </p:sp>
+    </p:spTree>
+    <p:extLst>
+      <p:ext uri="{BB962C8B-B14F-4D97-AF65-F5344CB8AC3E}">
+        <p14:creationId xmlns:p14="http://schemas.microsoft.com/office/powerpoint/2010/main" val="3790380238"/>
+      </p:ext>
+    </p:extLst>
   </p:cSld>
   <p:clrMapOvr>
     <a:masterClrMapping/>
@@ -15925,29 +22748,7 @@
               <a:rPr lang="pt-BR" sz="2400" dirty="0">
                 <a:latin typeface="+mn-lt"/>
               </a:rPr>
-              <a:t>Desenvolver um modelo preditivo baseado em IA para efetivamente estimar o PIB</a:t>
-            </a:r>
-          </a:p>
-          <a:p>
-            <a:pPr marL="0" indent="-457200">
-              <a:buNone/>
-            </a:pPr>
-            <a:r>
-              <a:rPr lang="pt-BR" sz="2400" dirty="0">
-                <a:latin typeface="+mn-lt"/>
-              </a:rPr>
-              <a:t>brasileiro, considerando as diferenças e semelhanças significativas entre os modelos tradicionais</a:t>
-            </a:r>
-          </a:p>
-          <a:p>
-            <a:pPr marL="0" indent="-457200">
-              <a:buNone/>
-            </a:pPr>
-            <a:r>
-              <a:rPr lang="pt-BR" sz="2400" dirty="0">
-                <a:latin typeface="+mn-lt"/>
-              </a:rPr>
-              <a:t>VAR, ARIMA, DFM e MIDAS.</a:t>
+              <a:t>Desenvolver um modelo preditivo baseado em IA para efetivamente estimar o PIB brasileiro, considerando as diferenças e semelhanças significativas entre os modelos tradicionais VAR, ARIMA, DFM e MIDAS.</a:t>
             </a:r>
           </a:p>
           <a:p>
@@ -16465,7 +23266,9 @@
               <a:buFont typeface="Arial" panose="020B0604020202020204" pitchFamily="34" charset="0"/>
               <a:buChar char="•"/>
             </a:pPr>
-            <a:endParaRPr lang="pt-BR" sz="2200" dirty="0"/>
+            <a:endParaRPr lang="pt-BR" sz="2200" dirty="0">
+              <a:latin typeface="+mn-lt"/>
+            </a:endParaRPr>
           </a:p>
           <a:p>
             <a:pPr>
@@ -16473,15 +23276,21 @@
               <a:buChar char="•"/>
             </a:pPr>
             <a:r>
-              <a:rPr lang="pt-BR" sz="2200" dirty="0"/>
+              <a:rPr lang="pt-BR" sz="2200" dirty="0">
+                <a:latin typeface="+mn-lt"/>
+              </a:rPr>
               <a:t>Predição econômica: O PIB – Frisch (1929); </a:t>
             </a:r>
             <a:r>
-              <a:rPr lang="it-IT" sz="2200" dirty="0"/>
+              <a:rPr lang="it-IT" sz="2200" dirty="0">
+                <a:latin typeface="+mn-lt"/>
+              </a:rPr>
               <a:t>Laudon e Laudon (2022)  e</a:t>
             </a:r>
             <a:r>
-              <a:rPr lang="pt-BR" sz="2200" dirty="0"/>
+              <a:rPr lang="pt-BR" sz="2200" dirty="0">
+                <a:latin typeface="+mn-lt"/>
+              </a:rPr>
               <a:t> IBGE (2026).</a:t>
             </a:r>
           </a:p>
@@ -16491,7 +23300,9 @@
               <a:buChar char="•"/>
             </a:pPr>
             <a:r>
-              <a:rPr lang="pt-BR" sz="2200" dirty="0"/>
+              <a:rPr lang="pt-BR" sz="2200" dirty="0">
+                <a:latin typeface="+mn-lt"/>
+              </a:rPr>
               <a:t>Modelos tradicionais: Braga (2025); Rebelo (2022).</a:t>
             </a:r>
           </a:p>
@@ -16501,15 +23312,21 @@
               <a:buChar char="•"/>
             </a:pPr>
             <a:r>
-              <a:rPr lang="pt-BR" sz="2200" dirty="0"/>
+              <a:rPr lang="pt-BR" sz="2200" dirty="0">
+                <a:latin typeface="+mn-lt"/>
+              </a:rPr>
               <a:t>ARIMA: Box e Jenkins (1970); Silva </a:t>
             </a:r>
             <a:r>
-              <a:rPr lang="pt-BR" sz="2200" i="1" dirty="0"/>
+              <a:rPr lang="pt-BR" sz="2200" i="1" dirty="0">
+                <a:latin typeface="+mn-lt"/>
+              </a:rPr>
               <a:t>et al </a:t>
             </a:r>
             <a:r>
-              <a:rPr lang="pt-BR" sz="2200" dirty="0"/>
+              <a:rPr lang="pt-BR" sz="2200" dirty="0">
+                <a:latin typeface="+mn-lt"/>
+              </a:rPr>
               <a:t>(2025); Li (2024).</a:t>
             </a:r>
           </a:p>
@@ -16519,39 +23336,57 @@
               <a:buChar char="•"/>
             </a:pPr>
             <a:r>
-              <a:rPr lang="pt-BR" sz="2200" dirty="0"/>
+              <a:rPr lang="pt-BR" sz="2200" dirty="0">
+                <a:latin typeface="+mn-lt"/>
+              </a:rPr>
               <a:t>VAR: </a:t>
             </a:r>
             <a:r>
-              <a:rPr lang="pt-BR" sz="2200" dirty="0" err="1"/>
+              <a:rPr lang="pt-BR" sz="2200" dirty="0" err="1">
+                <a:latin typeface="+mn-lt"/>
+              </a:rPr>
               <a:t>Sims</a:t>
             </a:r>
             <a:r>
-              <a:rPr lang="pt-BR" sz="2200" dirty="0"/>
+              <a:rPr lang="pt-BR" sz="2200" dirty="0">
+                <a:latin typeface="+mn-lt"/>
+              </a:rPr>
               <a:t> (1980); Fialho </a:t>
             </a:r>
             <a:r>
-              <a:rPr lang="pt-BR" sz="2200" i="1" dirty="0"/>
+              <a:rPr lang="pt-BR" sz="2200" i="1" dirty="0">
+                <a:latin typeface="+mn-lt"/>
+              </a:rPr>
               <a:t>et al</a:t>
             </a:r>
             <a:r>
-              <a:rPr lang="pt-BR" sz="2200" dirty="0"/>
+              <a:rPr lang="pt-BR" sz="2200" dirty="0">
+                <a:latin typeface="+mn-lt"/>
+              </a:rPr>
               <a:t>. (2024); Oliveira e Junior (2024); </a:t>
             </a:r>
             <a:r>
-              <a:rPr lang="pt-BR" sz="2200" dirty="0" err="1"/>
+              <a:rPr lang="pt-BR" sz="2200" dirty="0" err="1">
+                <a:latin typeface="+mn-lt"/>
+              </a:rPr>
               <a:t>Koop</a:t>
             </a:r>
             <a:r>
-              <a:rPr lang="pt-BR" sz="2200" dirty="0"/>
+              <a:rPr lang="pt-BR" sz="2200" dirty="0">
+                <a:latin typeface="+mn-lt"/>
+              </a:rPr>
               <a:t> </a:t>
             </a:r>
             <a:r>
-              <a:rPr lang="pt-BR" sz="2200" i="1" dirty="0"/>
+              <a:rPr lang="pt-BR" sz="2200" i="1" dirty="0">
+                <a:latin typeface="+mn-lt"/>
+              </a:rPr>
               <a:t>et al</a:t>
             </a:r>
             <a:r>
-              <a:rPr lang="pt-BR" sz="2200" dirty="0"/>
+              <a:rPr lang="pt-BR" sz="2200" dirty="0">
+                <a:latin typeface="+mn-lt"/>
+              </a:rPr>
               <a:t>. (2025).</a:t>
             </a:r>
           </a:p>
@@ -16561,8 +23396,10 @@
               <a:buChar char="•"/>
             </a:pPr>
             <a:r>
-              <a:rPr lang="pt-BR" sz="2200" dirty="0"/>
-              <a:t>MIDAS: Em progresso</a:t>
+              <a:rPr lang="pt-BR" sz="2200" dirty="0">
+                <a:latin typeface="+mn-lt"/>
+              </a:rPr>
+              <a:t>MIDAS: Ghysels et al. (2004); Castelli (2022); Micheletti (2024).</a:t>
             </a:r>
           </a:p>
           <a:p>
@@ -16571,8 +23408,10 @@
               <a:buChar char="•"/>
             </a:pPr>
             <a:r>
-              <a:rPr lang="pt-BR" sz="2200" dirty="0"/>
-              <a:t>DFM: Em progresso</a:t>
+              <a:rPr lang="pt-BR" sz="2200" dirty="0">
+                <a:latin typeface="+mn-lt"/>
+              </a:rPr>
+              <a:t>DFM: Geweke (1977); Doz e Fuleky (2019); Alves (2009); Moura et al. (2020).</a:t>
             </a:r>
           </a:p>
           <a:p>
@@ -16581,8 +23420,19 @@
               <a:buChar char="•"/>
             </a:pPr>
             <a:r>
-              <a:rPr lang="pt-BR" sz="2200" dirty="0"/>
-              <a:t>Modelos de IA: em progresso</a:t>
+              <a:rPr lang="pt-BR" sz="2200" dirty="0">
+                <a:latin typeface="+mn-lt"/>
+              </a:rPr>
+              <a:t>Modelos de IA: </a:t>
+            </a:r>
+            <a:r>
+              <a:rPr lang="pt-BR" sz="2200" dirty="0">
+                <a:solidFill>
+                  <a:schemeClr val="tx1"/>
+                </a:solidFill>
+                <a:latin typeface="+mn-lt"/>
+              </a:rPr>
+              <a:t>Carmo e Lopacinski (2023); Vasconcelos (2017) </a:t>
             </a:r>
           </a:p>
           <a:p>
@@ -16591,8 +23441,10 @@
               <a:buChar char="•"/>
             </a:pPr>
             <a:r>
-              <a:rPr lang="pt-BR" sz="2200" dirty="0"/>
-              <a:t>Redes Neurais</a:t>
+              <a:rPr lang="pt-BR" sz="2200" dirty="0">
+                <a:latin typeface="+mn-lt"/>
+              </a:rPr>
+              <a:t>Redes Neurais: Rosenblatt (1958); Rumelhart et al. (1986); Ghosh e Ranjan (2023); Kava (2022); Ekman (2021); Carmo e Lopacinski (2023); Amaral et al. (2023).</a:t>
             </a:r>
           </a:p>
           <a:p>
@@ -16601,36 +23453,10 @@
               <a:buChar char="•"/>
             </a:pPr>
             <a:r>
-              <a:rPr lang="pt-BR" sz="2200" dirty="0"/>
-              <a:t>Florestas Aleatórias</a:t>
-            </a:r>
-          </a:p>
-          <a:p>
-            <a:pPr>
-              <a:buFont typeface="Arial" panose="020B0604020202020204" pitchFamily="34" charset="0"/>
-              <a:buChar char="•"/>
-            </a:pPr>
-            <a:r>
-              <a:rPr lang="pt-BR" sz="2200" dirty="0"/>
-              <a:t>Testes comprovar e comparar modelos</a:t>
-            </a:r>
-          </a:p>
-          <a:p>
-            <a:pPr>
-              <a:buFont typeface="Arial" panose="020B0604020202020204" pitchFamily="34" charset="0"/>
-              <a:buChar char="•"/>
-            </a:pPr>
-            <a:r>
-              <a:rPr lang="pt-BR" sz="2200" dirty="0"/>
-              <a:t>IA </a:t>
-            </a:r>
-            <a:r>
-              <a:rPr lang="pt-BR" sz="2200" dirty="0" err="1"/>
-              <a:t>vs</a:t>
-            </a:r>
-            <a:r>
-              <a:rPr lang="pt-BR" sz="2200" dirty="0"/>
-              <a:t> Tradicional</a:t>
+              <a:rPr lang="pt-BR" sz="2200" dirty="0">
+                <a:latin typeface="+mn-lt"/>
+              </a:rPr>
+              <a:t>Florestas Aleatórias: Breiman (2001); Landowska et al. (2025); Lemos e Souza (2025).</a:t>
             </a:r>
           </a:p>
         </p:txBody>
@@ -16801,7 +23627,7 @@
         <p:cNvPr id="1" name="Shape 95">
           <a:extLst>
             <a:ext uri="{FF2B5EF4-FFF2-40B4-BE49-F238E27FC236}">
-              <a16:creationId xmlns:a16="http://schemas.microsoft.com/office/drawing/2014/main" id="{831B1A78-1ABC-F342-EDA6-AFE1EC65AD38}"/>
+              <a16:creationId xmlns:a16="http://schemas.microsoft.com/office/drawing/2014/main" id="{082FCE3D-C8E4-D641-0E59-757A55B023E5}"/>
             </a:ext>
           </a:extLst>
         </p:cNvPr>
@@ -16821,7 +23647,7 @@
           <p:cNvPr id="96" name="Google Shape;96;p2">
             <a:extLst>
               <a:ext uri="{FF2B5EF4-FFF2-40B4-BE49-F238E27FC236}">
-                <a16:creationId xmlns:a16="http://schemas.microsoft.com/office/drawing/2014/main" id="{B83C26C9-EA22-BCD5-E445-35737ED45C44}"/>
+                <a16:creationId xmlns:a16="http://schemas.microsoft.com/office/drawing/2014/main" id="{9642474F-AAFD-3D56-D2A5-8D01A8A4F1A8}"/>
               </a:ext>
             </a:extLst>
           </p:cNvPr>
@@ -16858,11 +23684,255 @@
               <a:rPr lang="pt-BR" sz="3200" b="1" dirty="0">
                 <a:latin typeface="+mj-lt"/>
               </a:rPr>
-              <a:t>Metodologia</a:t>
+              <a:t>Revisão</a:t>
+            </a:r>
+            <a:r>
+              <a:rPr lang="pt-BR" sz="3200" dirty="0"/>
+              <a:t> </a:t>
+            </a:r>
+            <a:r>
+              <a:rPr lang="pt-BR" sz="3200" b="1" dirty="0">
+                <a:latin typeface="+mj-lt"/>
+              </a:rPr>
+              <a:t>de literatura</a:t>
             </a:r>
             <a:endParaRPr sz="3200" b="1" dirty="0">
               <a:latin typeface="+mj-lt"/>
             </a:endParaRPr>
+          </a:p>
+        </p:txBody>
+      </p:sp>
+      <p:sp>
+        <p:nvSpPr>
+          <p:cNvPr id="97" name="Google Shape;97;p2">
+            <a:extLst>
+              <a:ext uri="{FF2B5EF4-FFF2-40B4-BE49-F238E27FC236}">
+                <a16:creationId xmlns:a16="http://schemas.microsoft.com/office/drawing/2014/main" id="{A5778268-0C1C-7264-4EBC-88757EC986B1}"/>
+              </a:ext>
+            </a:extLst>
+          </p:cNvPr>
+          <p:cNvSpPr txBox="1">
+            <a:spLocks noGrp="1"/>
+          </p:cNvSpPr>
+          <p:nvPr>
+            <p:ph type="body" idx="1"/>
+          </p:nvPr>
+        </p:nvSpPr>
+        <p:spPr>
+          <a:xfrm>
+            <a:off x="170268" y="1125342"/>
+            <a:ext cx="11855669" cy="5732658"/>
+          </a:xfrm>
+          <a:prstGeom prst="rect">
+            <a:avLst/>
+          </a:prstGeom>
+          <a:noFill/>
+          <a:ln>
+            <a:noFill/>
+          </a:ln>
+        </p:spPr>
+        <p:txBody>
+          <a:bodyPr spcFirstLastPara="1" wrap="square" lIns="91425" tIns="45700" rIns="91425" bIns="45700" anchor="t" anchorCtr="0">
+            <a:noAutofit/>
+          </a:bodyPr>
+          <a:lstStyle/>
+          <a:p>
+            <a:pPr>
+              <a:buFont typeface="Arial" panose="020B0604020202020204" pitchFamily="34" charset="0"/>
+              <a:buChar char="•"/>
+            </a:pPr>
+            <a:endParaRPr lang="pt-BR" sz="2200" dirty="0">
+              <a:latin typeface="+mn-lt"/>
+            </a:endParaRPr>
+          </a:p>
+          <a:p>
+            <a:pPr>
+              <a:buFont typeface="Arial" panose="020B0604020202020204" pitchFamily="34" charset="0"/>
+              <a:buChar char="•"/>
+            </a:pPr>
+            <a:r>
+              <a:rPr lang="pt-BR" sz="2200" b="1" dirty="0">
+                <a:latin typeface="+mn-lt"/>
+              </a:rPr>
+              <a:t>Predição econômica: O PIB – Frisch (1929); </a:t>
+            </a:r>
+            <a:r>
+              <a:rPr lang="it-IT" sz="2200" b="1" dirty="0">
+                <a:latin typeface="+mn-lt"/>
+              </a:rPr>
+              <a:t>Laudon e Laudon (2022)  e</a:t>
+            </a:r>
+            <a:r>
+              <a:rPr lang="pt-BR" sz="2200" b="1" dirty="0">
+                <a:latin typeface="+mn-lt"/>
+              </a:rPr>
+              <a:t> IBGE (2026).</a:t>
+            </a:r>
+          </a:p>
+          <a:p>
+            <a:pPr>
+              <a:buFont typeface="Arial" panose="020B0604020202020204" pitchFamily="34" charset="0"/>
+              <a:buChar char="•"/>
+            </a:pPr>
+            <a:r>
+              <a:rPr lang="pt-BR" sz="2200" dirty="0">
+                <a:latin typeface="+mn-lt"/>
+              </a:rPr>
+              <a:t>Modelos tradicionais: Braga (2025); Rebelo (2022).</a:t>
+            </a:r>
+          </a:p>
+          <a:p>
+            <a:pPr>
+              <a:buFont typeface="Arial" panose="020B0604020202020204" pitchFamily="34" charset="0"/>
+              <a:buChar char="•"/>
+            </a:pPr>
+            <a:r>
+              <a:rPr lang="pt-BR" sz="2200" dirty="0">
+                <a:latin typeface="+mn-lt"/>
+              </a:rPr>
+              <a:t>ARIMA: Box e Jenkins (1970); Silva </a:t>
+            </a:r>
+            <a:r>
+              <a:rPr lang="pt-BR" sz="2200" i="1" dirty="0">
+                <a:latin typeface="+mn-lt"/>
+              </a:rPr>
+              <a:t>et al </a:t>
+            </a:r>
+            <a:r>
+              <a:rPr lang="pt-BR" sz="2200" dirty="0">
+                <a:latin typeface="+mn-lt"/>
+              </a:rPr>
+              <a:t>(2025); Li (2024).</a:t>
+            </a:r>
+          </a:p>
+          <a:p>
+            <a:pPr>
+              <a:buFont typeface="Arial" panose="020B0604020202020204" pitchFamily="34" charset="0"/>
+              <a:buChar char="•"/>
+            </a:pPr>
+            <a:r>
+              <a:rPr lang="pt-BR" sz="2200" dirty="0">
+                <a:latin typeface="+mn-lt"/>
+              </a:rPr>
+              <a:t>VAR: </a:t>
+            </a:r>
+            <a:r>
+              <a:rPr lang="pt-BR" sz="2200" dirty="0" err="1">
+                <a:latin typeface="+mn-lt"/>
+              </a:rPr>
+              <a:t>Sims</a:t>
+            </a:r>
+            <a:r>
+              <a:rPr lang="pt-BR" sz="2200" dirty="0">
+                <a:latin typeface="+mn-lt"/>
+              </a:rPr>
+              <a:t> (1980); Fialho </a:t>
+            </a:r>
+            <a:r>
+              <a:rPr lang="pt-BR" sz="2200" i="1" dirty="0">
+                <a:latin typeface="+mn-lt"/>
+              </a:rPr>
+              <a:t>et al</a:t>
+            </a:r>
+            <a:r>
+              <a:rPr lang="pt-BR" sz="2200" dirty="0">
+                <a:latin typeface="+mn-lt"/>
+              </a:rPr>
+              <a:t>. (2024); Oliveira e Junior (2024); </a:t>
+            </a:r>
+            <a:r>
+              <a:rPr lang="pt-BR" sz="2200" dirty="0" err="1">
+                <a:latin typeface="+mn-lt"/>
+              </a:rPr>
+              <a:t>Koop</a:t>
+            </a:r>
+            <a:r>
+              <a:rPr lang="pt-BR" sz="2200" dirty="0">
+                <a:latin typeface="+mn-lt"/>
+              </a:rPr>
+              <a:t> </a:t>
+            </a:r>
+            <a:r>
+              <a:rPr lang="pt-BR" sz="2200" i="1" dirty="0">
+                <a:latin typeface="+mn-lt"/>
+              </a:rPr>
+              <a:t>et al</a:t>
+            </a:r>
+            <a:r>
+              <a:rPr lang="pt-BR" sz="2200" dirty="0">
+                <a:latin typeface="+mn-lt"/>
+              </a:rPr>
+              <a:t>. (2025).</a:t>
+            </a:r>
+          </a:p>
+          <a:p>
+            <a:pPr>
+              <a:buFont typeface="Arial" panose="020B0604020202020204" pitchFamily="34" charset="0"/>
+              <a:buChar char="•"/>
+            </a:pPr>
+            <a:r>
+              <a:rPr lang="pt-BR" sz="2200" dirty="0">
+                <a:latin typeface="+mn-lt"/>
+              </a:rPr>
+              <a:t>MIDAS: Ghysels et al. (2004); Castelli (2022); Micheletti (2024).</a:t>
+            </a:r>
+          </a:p>
+          <a:p>
+            <a:pPr>
+              <a:buFont typeface="Arial" panose="020B0604020202020204" pitchFamily="34" charset="0"/>
+              <a:buChar char="•"/>
+            </a:pPr>
+            <a:r>
+              <a:rPr lang="pt-BR" sz="2200" dirty="0">
+                <a:latin typeface="+mn-lt"/>
+              </a:rPr>
+              <a:t>DFM: Geweke (1977); Doz e Fuleky (2019); Alves (2009); Moura et al. (2020).</a:t>
+            </a:r>
+          </a:p>
+          <a:p>
+            <a:pPr>
+              <a:buFont typeface="Arial" panose="020B0604020202020204" pitchFamily="34" charset="0"/>
+              <a:buChar char="•"/>
+            </a:pPr>
+            <a:r>
+              <a:rPr lang="pt-BR" sz="2200" dirty="0">
+                <a:latin typeface="+mn-lt"/>
+              </a:rPr>
+              <a:t>Modelos de IA: </a:t>
+            </a:r>
+            <a:r>
+              <a:rPr lang="pt-BR" sz="2200" dirty="0">
+                <a:solidFill>
+                  <a:schemeClr val="tx1"/>
+                </a:solidFill>
+                <a:latin typeface="+mn-lt"/>
+              </a:rPr>
+              <a:t>Carmo e Lopacinski (2023); Vasconcelos (2017) </a:t>
+            </a:r>
+          </a:p>
+          <a:p>
+            <a:pPr>
+              <a:buFont typeface="Arial" panose="020B0604020202020204" pitchFamily="34" charset="0"/>
+              <a:buChar char="•"/>
+            </a:pPr>
+            <a:r>
+              <a:rPr lang="pt-BR" sz="2200" dirty="0">
+                <a:latin typeface="+mn-lt"/>
+              </a:rPr>
+              <a:t>Redes Neurais: Rosenblatt (1958); Rumelhart et al. (1986); Ghosh e Ranjan (2023); Kava (2022); Ekman (2021); Carmo e Lopacinski (2023); Amaral et al. (2023).</a:t>
+            </a:r>
+          </a:p>
+          <a:p>
+            <a:pPr>
+              <a:buFont typeface="Arial" panose="020B0604020202020204" pitchFamily="34" charset="0"/>
+              <a:buChar char="•"/>
+            </a:pPr>
+            <a:r>
+              <a:rPr lang="pt-BR" sz="2200" dirty="0">
+                <a:latin typeface="+mn-lt"/>
+              </a:rPr>
+              <a:t>Florestas Aleatórias: Breiman (2001); Landowska et al. (2025); Lemos e Souza (2025).</a:t>
+            </a:r>
           </a:p>
         </p:txBody>
       </p:sp>
@@ -16871,7 +23941,7 @@
           <p:cNvPr id="98" name="Google Shape;98;p2" descr="Universidade Federal da Fronteira Sul – Wikipédia, a enciclopédia livre">
             <a:extLst>
               <a:ext uri="{FF2B5EF4-FFF2-40B4-BE49-F238E27FC236}">
-                <a16:creationId xmlns:a16="http://schemas.microsoft.com/office/drawing/2014/main" id="{DECB0394-41DE-FEB0-693A-900E53FBD800}"/>
+                <a16:creationId xmlns:a16="http://schemas.microsoft.com/office/drawing/2014/main" id="{F3D5547A-DBD1-E76A-49E9-452D410DFD4F}"/>
               </a:ext>
             </a:extLst>
           </p:cNvPr>
@@ -16904,7 +23974,7 @@
           <p:cNvPr id="99" name="Google Shape;99;p2">
             <a:extLst>
               <a:ext uri="{FF2B5EF4-FFF2-40B4-BE49-F238E27FC236}">
-                <a16:creationId xmlns:a16="http://schemas.microsoft.com/office/drawing/2014/main" id="{69B1ED4B-0635-F42A-A86E-C08A222F9900}"/>
+                <a16:creationId xmlns:a16="http://schemas.microsoft.com/office/drawing/2014/main" id="{38C04DD0-282E-6744-6A2C-D07A9D616792}"/>
               </a:ext>
             </a:extLst>
           </p:cNvPr>
@@ -16964,7 +24034,7 @@
           <p:cNvPr id="100" name="Google Shape;100;p2">
             <a:extLst>
               <a:ext uri="{FF2B5EF4-FFF2-40B4-BE49-F238E27FC236}">
-                <a16:creationId xmlns:a16="http://schemas.microsoft.com/office/drawing/2014/main" id="{ECEBEDFF-90B6-71CC-164E-FF31B6A06AD5}"/>
+                <a16:creationId xmlns:a16="http://schemas.microsoft.com/office/drawing/2014/main" id="{3C5C31B2-78C9-68EB-6D16-073B8478F7C9}"/>
               </a:ext>
             </a:extLst>
           </p:cNvPr>
@@ -17011,87 +24081,10 @@
           </a:p>
         </p:txBody>
       </p:sp>
-      <p:sp>
-        <p:nvSpPr>
-          <p:cNvPr id="9" name="Google Shape;97;p2">
-            <a:extLst>
-              <a:ext uri="{FF2B5EF4-FFF2-40B4-BE49-F238E27FC236}">
-                <a16:creationId xmlns:a16="http://schemas.microsoft.com/office/drawing/2014/main" id="{7B5CC5E3-01C0-451C-80DD-E8813F8132AD}"/>
-              </a:ext>
-            </a:extLst>
-          </p:cNvPr>
-          <p:cNvSpPr txBox="1">
-            <a:spLocks noGrp="1"/>
-          </p:cNvSpPr>
-          <p:nvPr>
-            <p:ph type="body" idx="1"/>
-          </p:nvPr>
-        </p:nvSpPr>
-        <p:spPr>
-          <a:xfrm>
-            <a:off x="170268" y="1092372"/>
-            <a:ext cx="11855669" cy="5732658"/>
-          </a:xfrm>
-          <a:prstGeom prst="rect">
-            <a:avLst/>
-          </a:prstGeom>
-          <a:noFill/>
-          <a:ln>
-            <a:noFill/>
-          </a:ln>
-        </p:spPr>
-        <p:txBody>
-          <a:bodyPr spcFirstLastPara="1" wrap="square" lIns="91425" tIns="45700" rIns="91425" bIns="45700" anchor="t" anchorCtr="0">
-            <a:noAutofit/>
-          </a:bodyPr>
-          <a:lstStyle/>
-          <a:p>
-            <a:pPr marL="0" indent="-457200">
-              <a:buNone/>
-            </a:pPr>
-            <a:r>
-              <a:rPr lang="pt-BR" sz="2300" dirty="0">
-                <a:latin typeface="+mn-lt"/>
-              </a:rPr>
-              <a:t>Com base nos objetivos da presente pesquisa, a mesma se classifica como explicativa. Esse tipo de pesquisa "têm como preocupação central identificar os fatores que determinam ou que contribuem para a ocorrência dos fenômenos."(Gil, 2002, p. 87).</a:t>
-            </a:r>
-          </a:p>
-          <a:p>
-            <a:pPr marL="0" indent="-457200">
-              <a:buNone/>
-            </a:pPr>
-            <a:r>
-              <a:rPr lang="pt-BR" sz="2300" dirty="0">
-                <a:latin typeface="+mn-lt"/>
-              </a:rPr>
-              <a:t>Sobre os procedimentos de coleta de dados, a presente pesquisa se enquadra como documental, por utilizar-se de dados que não receberam um tratamento e estão dispostos em repositórios digitais de dados. Segundo Gil (2002) a pesquisa documental apropria-se de diversas fontes, não somente material impresso em bibliotecas, onde os documentos utilizados podem ter um tratamento analítico ou não.</a:t>
-            </a:r>
-          </a:p>
-          <a:p>
-            <a:pPr marL="0" indent="-457200">
-              <a:buNone/>
-            </a:pPr>
-            <a:r>
-              <a:rPr lang="pt-BR" sz="2300" dirty="0">
-                <a:latin typeface="+mn-lt"/>
-              </a:rPr>
-              <a:t>Por fim, ao se tratar de uma pesquisa que compara diferentes modelos econométricos, assim como avalia o desempenho dos mesmos, seguindo o rigor matemático e estatístico, ela se enquadra como uma pesquisa predominantemente quantitativa onde apropria-se do método comparativo e estatístico. Para Lakatos e Marconi (2003) o método estatístico trata-se da redução dos fenômenos a termos quantitativos e a manipulação estatística, onde possibilita a generalizações sobre sua natureza, ocorrência ou significado. Já "o método comparativo é usado tanto para comparações de grupos."(Lakatos e Marconi, 2003, p. 107, 108).</a:t>
-            </a:r>
-          </a:p>
-          <a:p>
-            <a:pPr marL="0" indent="-457200">
-              <a:buNone/>
-            </a:pPr>
-            <a:endParaRPr lang="pt-BR" sz="2400" dirty="0">
-              <a:latin typeface="+mn-lt"/>
-            </a:endParaRPr>
-          </a:p>
-        </p:txBody>
-      </p:sp>
     </p:spTree>
     <p:extLst>
       <p:ext uri="{BB962C8B-B14F-4D97-AF65-F5344CB8AC3E}">
-        <p14:creationId xmlns:p14="http://schemas.microsoft.com/office/powerpoint/2010/main" val="4018365337"/>
+        <p14:creationId xmlns:p14="http://schemas.microsoft.com/office/powerpoint/2010/main" val="759259240"/>
       </p:ext>
     </p:extLst>
   </p:cSld>
